--- a/Curso Gas B/04 - ITC-ICG 07 - Instalaciones receptoras de combustibles gaseosos/04 - ITC-ICG 07 - Instalaciones receptoras de combustibles gaseosos - Vídeo 1.pptx
+++ b/Curso Gas B/04 - ITC-ICG 07 - Instalaciones receptoras de combustibles gaseosos/04 - ITC-ICG 07 - Instalaciones receptoras de combustibles gaseosos - Vídeo 1.pptx
@@ -18,6 +18,9 @@
     <p:sldId id="266" r:id="rId18"/>
     <p:sldId id="267" r:id="rId19"/>
     <p:sldId id="268" r:id="rId20"/>
+    <p:sldId id="269" r:id="rId21"/>
+    <p:sldId id="270" r:id="rId22"/>
+    <p:sldId id="271" r:id="rId23"/>
   </p:sldIdLst>
   <p:sldSz cx="12191695" cy="6858000" type="screen4x3"/>
   <p:notesSz cx="6858000" cy="9144000"/>
@@ -514,12 +517,12 @@
           <a:lstStyle/>
           <a:p>
             <a:r>
-              <a:t>N1: ¿Por qué decimos que aquí empieza de verdad el Gas B?</a:t>
-            </a:r>
-          </a:p>
-          <a:p>
-            <a:r>
-              <a:t>N2: Porque la ITC-ICG cero siete es la instrucción que regula la instalación receptora: todo lo que montas tú desde que el gas entra en el edificio hasta la llave del último aparato. En este primer vídeo vemos para qué sirve, a qué se aplica y, lo más técnico, cómo se diseña y se ejecuta: por dónde salen los humos, qué chimenea toca, cómo son los patios de ventilación, cuándo hace falta sala de máquinas y qué norma mandas según la presión. Son datos que en el examen caen sí o sí, así que aquí no sobra nada.</a:t>
+              <a:t>N1: ¿Por qué se dice que aquí empieza de verdad el Gas B?</a:t>
+            </a:r>
+          </a:p>
+          <a:p>
+            <a:r>
+              <a:t>N2: Mira, hasta ahora hemos visto el marco general, el reglamento y sus definiciones. Pero la instrucción que de verdad regula lo que tú montas con tus manos es esta, la ITC-ICG cero siete. Se ocupa de la instalación receptora, es decir, de todo el recorrido del gas desde que entra en el edificio hasta la llave del último aparato. En este primer vídeo vemos para qué sirve, a qué se aplica y, lo más técnico, cómo se diseña y se ejecuta: por dónde salen los humos, cómo son las chimeneas, los patios de ventilación, las salas de calderas y qué norma mandas según la presión. Son datos que caen sí o sí en el examen, así que aquí no sobra nada.</a:t>
             </a:r>
           </a:p>
         </p:txBody>
@@ -589,12 +592,12 @@
           <a:lstStyle/>
           <a:p>
             <a:r>
-              <a:t>N1: Esta es de las preguntas más repetidas de todo Gas B. ¿La tienes clavada?</a:t>
-            </a:r>
-          </a:p>
-          <a:p>
-            <a:r>
-              <a:t>N2: Hasta cinco bar sigues la UNE sesenta mil seiscientos setenta, la norma de toda la vida para instalaciones receptoras normales; por encima de cinco bar sigues la sesenta mil seiscientos veinte, la de alta presión. Como instalador de categoría B trabajarás casi siempre con la sesenta mil seiscientos setenta. Esa presión que decide es la máxima de operación, que en la normativa verás como MOP: la presión más alta a la que la instalación puede trabajar de forma continua en condiciones normales. No la confundas con la presión de prueba ni con la de diseño; la que decide la norma es la de funcionamiento diario.</a:t>
+              <a:t>N1: ¿Qué tamaño tiene que tener el patio de ventilación?</a:t>
+            </a:r>
+          </a:p>
+          <a:p>
+            <a:r>
+              <a:t>N2: Depende de si el edificio es de siempre o de obra nueva, y son dos fórmulas que no debes mezclar. En un edificio ya existente, la superficie en planta del patio tiene que ser al menos cero coma cinco por ene te, y nunca menos de cuatro metros cuadrados. En obra nueva se exige el doble, uno por ene te, y siempre más de seis metros cuadrados. ¿Qué es ese ene te? Simplemente el número de locales o viviendas que tiran sus humos a ese patio; cuantos más aparatos desembocan, más grande tiene que ser. La idea de fondo: en obra nueva, como se diseña desde cero, se pide más holgura. Un patio corto se convierte en una trampa de gases donde los aparatos no tiran y se acaban apagando.</a:t>
             </a:r>
           </a:p>
         </p:txBody>
@@ -664,12 +667,12 @@
           <a:lstStyle/>
           <a:p>
             <a:r>
-              <a:t>N1: Un aparato de circuito abierto conducido respira del propio cuarto. ¿Dónde lo puedes poner?</a:t>
-            </a:r>
-          </a:p>
-          <a:p>
-            <a:r>
-              <a:t>N2: Ese aparato coge el aire de la habitación para quemar y echa los humos por un conducto, por eso es abierto al ambiente y conducido para los humos. Como respira del cuarto, el reglamento no quiere que lo pongas en cualquier sitio: sí en galería, terraza, recinto exclusivo, lavadero o garaje individual. En la cocina solo se permite si evitas que el extractor mecánico le robe el tiro a los humos del aparato; esa interacción provoca inversión de humos y monóxido en el ambiente, con el aparato apagándose. Y la excepción que preguntan: si el aparato es solo para agua caliente sanitaria, un calentador clásico, estas limitaciones no le aplican.</a:t>
+              <a:t>N1: ¿Y si el patio está tapado por arriba?</a:t>
+            </a:r>
+          </a:p>
+          <a:p>
+            <a:r>
+              <a:t>N2: Entonces hay que dejar un hueco permanente al aire libre. Concretamente, el techado debe dejar libre una abertura de comunicación con el exterior de al menos el veinticinco por ciento de la sección en planta del patio, con un mínimo de cuatro metros cuadrados. Es puro sentido común: si tapas el patio y lo sellas del todo, los humos no tienen por dónde salir y se acumulan; sería una trampa de gases. Fíjate en la palabra permanente: no vale una ventana o una compuerta que alguien pueda cerrar un día de frío, tiene que estar siempre abierta. Una cuarta parte del patio abierta al cielo, como mínimo.</a:t>
             </a:r>
           </a:p>
         </p:txBody>
@@ -739,12 +742,12 @@
           <a:lstStyle/>
           <a:p>
             <a:r>
-              <a:t>N1: Cuando la tubería va bajo tierra, ¿siguen valiendo las reglas del tubo visto?</a:t>
-            </a:r>
-          </a:p>
-          <a:p>
-            <a:r>
-              <a:t>N2: No. En cuanto entierras un tramo se aplican las normas de acometidas, la UNE sesenta mil trescientos diez y la sesenta mil trescientos once. Truco: enterrado igual a trescientos diez y trescientos once. Y el detalle práctico que cae en examen y que te salva en obra: antes de diseñar una acometida interior enterrada tienes que pedir al distribuidor de qué material es su red, porque debes ser compatible con ella. No se pueden unir bajo tierra cualquier material con cualquier otro sin garantías. Nunca improvises el material enterrado sin ese dato: enterrar algo incompatible es garantía de uniones defectuosas, corrosión y fugas que no verás hasta que huelan.</a:t>
+              <a:t>N1: ¿Qué pasa cuando la caldera es muy grande?</a:t>
+            </a:r>
+          </a:p>
+          <a:p>
+            <a:r>
+              <a:t>N2: Ata este cabo, que el número mágico son setenta kilovatios. Por encima de setenta, una caldera de calefacción o de agua caliente ya no es un aparato doméstico cualquiera: es maquinaria seria que tiene que ir en una sala de máquinas con las condiciones de la UNE sesenta mil seiscientos uno. Lo mismo vale para los equipos de llama directa de refrigeración por absorción y para los de generación eléctrica o cogeneración, si juntos pasan de setenta. Y ojo a la palabra conjunta: las potencias se suman. Tres equipos de treinta kilovatios trabajando juntos son noventa, así que pasan de setenta y toca sala de máquinas. Truco: sesenta mil seiscientos uno igual a salas de calderas. Por debajo de setenta, la norma general es la sesenta mil seiscientos setenta, que vemos ahora.</a:t>
             </a:r>
           </a:p>
         </p:txBody>
@@ -814,12 +817,247 @@
           <a:lstStyle/>
           <a:p>
             <a:r>
-              <a:t>N1: Si te quedas con tres cosas de este vídeo, que sean estas.</a:t>
-            </a:r>
-          </a:p>
-          <a:p>
-            <a:r>
-              <a:t>N2: Primera, la ITC-ICG cero siete es tu manual de cabecera: manda en el diseño, la ejecución y la utilización, e incluye los locales y los aparatos. Segunda, los humos son seguridad, no un trámite: salen por cubierta salvo excepción, y las dos cifras estrella para salir por fachada son setenta kilovatios en estancos o tiro forzado y veinticuatro coma cuatro en tiro natural de solo agua caliente; sacar humos donde no toca es tiro insuficiente, condensaciones y, en lo grave, monóxido dentro de casa. Y tercera, la norma la elige la presión: hasta cinco bar la sesenta mil seiscientos setenta, por encima la sesenta mil seiscientos veinte; y los equipos de más de setenta kilovatios van a sala de máquinas con la sesenta mil seiscientos uno. Con eso tienes el corazón del diseño de una receptora.</a:t>
+              <a:t>N1: ¿Cómo sé qué norma técnica tengo que seguir?</a:t>
+            </a:r>
+          </a:p>
+          <a:p>
+            <a:r>
+              <a:t>N2: Lo decide la presión máxima de operación, y esta es de las preguntas más repetidas de todo el Gas B. Chuleta: hasta cinco bar, sigues la UNE sesenta mil seiscientos setenta, la de toda la vida para instalaciones receptoras normales; por encima de cinco bar, la UNE sesenta mil seiscientos veinte, la de alta presión. Como instalador de categoría be trabajarás casi siempre con la seiscientos setenta. Esa presión máxima de operación la verás escrita como eme o pe, del inglés, y es la presión más alta a la que la instalación trabaja de forma normal y continua; no la confundas con la de prueba ni con la de diseño. Memoriza el par: seiscientos setenta es baja presión hasta cinco bar; seiscientos veinte es alta presión por encima de cinco.</a:t>
+            </a:r>
+          </a:p>
+        </p:txBody>
+      </p:sp>
+      <p:sp>
+        <p:nvSpPr>
+          <p:cNvPr id="4" name="Slide Number Placeholder 3"/>
+          <p:cNvSpPr>
+            <a:spLocks noGrp="1"/>
+          </p:cNvSpPr>
+          <p:nvPr>
+            <p:ph type="sldNum" idx="5" sz="quarter"/>
+          </p:nvPr>
+        </p:nvSpPr>
+        <p:spPr/>
+      </p:sp>
+    </p:spTree>
+  </p:cSld>
+  <p:clrMapOvr>
+    <a:masterClrMapping/>
+  </p:clrMapOvr>
+</p:notes>
+</file>
+
+<file path=ppt/notesSlides/notesSlide14.xml><?xml version="1.0" encoding="utf-8"?>
+<p:notes xmlns:a="http://schemas.openxmlformats.org/drawingml/2006/main" xmlns:p="http://schemas.openxmlformats.org/presentationml/2006/main" xmlns:r="http://schemas.openxmlformats.org/officeDocument/2006/relationships">
+  <p:cSld>
+    <p:spTree>
+      <p:nvGrpSpPr>
+        <p:cNvPr id="1" name=""/>
+        <p:cNvGrpSpPr/>
+        <p:nvPr/>
+      </p:nvGrpSpPr>
+      <p:grpSpPr>
+        <a:xfrm>
+          <a:off x="0" y="0"/>
+          <a:ext cx="0" cy="0"/>
+          <a:chOff x="0" y="0"/>
+          <a:chExt cx="0" cy="0"/>
+        </a:xfrm>
+      </p:grpSpPr>
+      <p:sp>
+        <p:nvSpPr>
+          <p:cNvPr id="2" name="Slide Image Placeholder 1"/>
+          <p:cNvSpPr>
+            <a:spLocks noGrp="1"/>
+          </p:cNvSpPr>
+          <p:nvPr>
+            <p:ph type="sldImg" idx="2"/>
+          </p:nvPr>
+        </p:nvSpPr>
+        <p:spPr/>
+      </p:sp>
+      <p:sp>
+        <p:nvSpPr>
+          <p:cNvPr id="3" name="Notes Placeholder 2"/>
+          <p:cNvSpPr>
+            <a:spLocks noGrp="1"/>
+          </p:cNvSpPr>
+          <p:nvPr>
+            <p:ph type="body" idx="3" sz="quarter"/>
+          </p:nvPr>
+        </p:nvSpPr>
+        <p:spPr/>
+        <p:txBody>
+          <a:bodyPr/>
+          <a:lstStyle/>
+          <a:p>
+            <a:r>
+              <a:t>N1: ¿Qué es un aparato de circuito abierto conducido y por qué no puedo ponerlo donde quiera?</a:t>
+            </a:r>
+          </a:p>
+          <a:p>
+            <a:r>
+              <a:t>N2: Vamos con calma. Circuito abierto quiere decir que el aparato coge el aire para quemar de la propia habitación; conducido quiere decir que los humos sí salen por un conducto. O sea, respira del cuarto pero echa el humo fuera. Como respira del cuarto, el reglamento no quiere que lo pongas en cualquier sitio: sí en galerías, terrazas, recintos o locales exclusivos para estos aparatos, y en locales de uso restringido como lavaderos o garajes individuales. En la cocina se puede, pero con una condición importante: que el extractor mecánico de la cocina no le robe el tiro al aparato, porque si el extractor tira más fuerte, invierte los humos y mete monóxido en la casa. Y la excepción que se pregunta: si el aparato es solo para agua caliente sanitaria, un calentador de toda la vida, estas limitaciones no le aplican.</a:t>
+            </a:r>
+          </a:p>
+        </p:txBody>
+      </p:sp>
+      <p:sp>
+        <p:nvSpPr>
+          <p:cNvPr id="4" name="Slide Number Placeholder 3"/>
+          <p:cNvSpPr>
+            <a:spLocks noGrp="1"/>
+          </p:cNvSpPr>
+          <p:nvPr>
+            <p:ph type="sldNum" idx="5" sz="quarter"/>
+          </p:nvPr>
+        </p:nvSpPr>
+        <p:spPr/>
+      </p:sp>
+    </p:spTree>
+  </p:cSld>
+  <p:clrMapOvr>
+    <a:masterClrMapping/>
+  </p:clrMapOvr>
+</p:notes>
+</file>
+
+<file path=ppt/notesSlides/notesSlide15.xml><?xml version="1.0" encoding="utf-8"?>
+<p:notes xmlns:a="http://schemas.openxmlformats.org/drawingml/2006/main" xmlns:p="http://schemas.openxmlformats.org/presentationml/2006/main" xmlns:r="http://schemas.openxmlformats.org/officeDocument/2006/relationships">
+  <p:cSld>
+    <p:spTree>
+      <p:nvGrpSpPr>
+        <p:cNvPr id="1" name=""/>
+        <p:cNvGrpSpPr/>
+        <p:nvPr/>
+      </p:nvGrpSpPr>
+      <p:grpSpPr>
+        <a:xfrm>
+          <a:off x="0" y="0"/>
+          <a:ext cx="0" cy="0"/>
+          <a:chOff x="0" y="0"/>
+          <a:chExt cx="0" cy="0"/>
+        </a:xfrm>
+      </p:grpSpPr>
+      <p:sp>
+        <p:nvSpPr>
+          <p:cNvPr id="2" name="Slide Image Placeholder 1"/>
+          <p:cNvSpPr>
+            <a:spLocks noGrp="1"/>
+          </p:cNvSpPr>
+          <p:nvPr>
+            <p:ph type="sldImg" idx="2"/>
+          </p:nvPr>
+        </p:nvSpPr>
+        <p:spPr/>
+      </p:sp>
+      <p:sp>
+        <p:nvSpPr>
+          <p:cNvPr id="3" name="Notes Placeholder 2"/>
+          <p:cNvSpPr>
+            <a:spLocks noGrp="1"/>
+          </p:cNvSpPr>
+          <p:nvPr>
+            <p:ph type="body" idx="3" sz="quarter"/>
+          </p:nvPr>
+        </p:nvSpPr>
+        <p:spPr/>
+        <p:txBody>
+          <a:bodyPr/>
+          <a:lstStyle/>
+          <a:p>
+            <a:r>
+              <a:t>N1: ¿Y si la tubería va enterrada, cambia algo?</a:t>
+            </a:r>
+          </a:p>
+          <a:p>
+            <a:r>
+              <a:t>N2: Cambia bastante. Cuando la tubería va bajo tierra ya no valen las reglas de la tubería vista; se aplican las normas de acometidas, la UNE sesenta mil trescientos diez y la sesenta mil trescientos once. Truco corto: enterrado igual a trescientos diez y trescientos once. Y aquí un detalle práctico que cae en examen: antes de diseñar una acometida interior enterrada, tienes que preguntar al distribuidor de qué material es su red, porque tu tubería tiene que ser compatible con ella. No puedes unir bajo tierra cualquier material con cualquier otro, porque una unión mal casada se corroe y acaba en una fuga que no ves hasta que huele. Nunca improvises el material enterrado sin ese dato.</a:t>
+            </a:r>
+          </a:p>
+        </p:txBody>
+      </p:sp>
+      <p:sp>
+        <p:nvSpPr>
+          <p:cNvPr id="4" name="Slide Number Placeholder 3"/>
+          <p:cNvSpPr>
+            <a:spLocks noGrp="1"/>
+          </p:cNvSpPr>
+          <p:nvPr>
+            <p:ph type="sldNum" idx="5" sz="quarter"/>
+          </p:nvPr>
+        </p:nvSpPr>
+        <p:spPr/>
+      </p:sp>
+    </p:spTree>
+  </p:cSld>
+  <p:clrMapOvr>
+    <a:masterClrMapping/>
+  </p:clrMapOvr>
+</p:notes>
+</file>
+
+<file path=ppt/notesSlides/notesSlide16.xml><?xml version="1.0" encoding="utf-8"?>
+<p:notes xmlns:a="http://schemas.openxmlformats.org/drawingml/2006/main" xmlns:p="http://schemas.openxmlformats.org/presentationml/2006/main" xmlns:r="http://schemas.openxmlformats.org/officeDocument/2006/relationships">
+  <p:cSld>
+    <p:spTree>
+      <p:nvGrpSpPr>
+        <p:cNvPr id="1" name=""/>
+        <p:cNvGrpSpPr/>
+        <p:nvPr/>
+      </p:nvGrpSpPr>
+      <p:grpSpPr>
+        <a:xfrm>
+          <a:off x="0" y="0"/>
+          <a:ext cx="0" cy="0"/>
+          <a:chOff x="0" y="0"/>
+          <a:chExt cx="0" cy="0"/>
+        </a:xfrm>
+      </p:grpSpPr>
+      <p:sp>
+        <p:nvSpPr>
+          <p:cNvPr id="2" name="Slide Image Placeholder 1"/>
+          <p:cNvSpPr>
+            <a:spLocks noGrp="1"/>
+          </p:cNvSpPr>
+          <p:nvPr>
+            <p:ph type="sldImg" idx="2"/>
+          </p:nvPr>
+        </p:nvSpPr>
+        <p:spPr/>
+      </p:sp>
+      <p:sp>
+        <p:nvSpPr>
+          <p:cNvPr id="3" name="Notes Placeholder 2"/>
+          <p:cNvSpPr>
+            <a:spLocks noGrp="1"/>
+          </p:cNvSpPr>
+          <p:nvPr>
+            <p:ph type="body" idx="3" sz="quarter"/>
+          </p:nvPr>
+        </p:nvSpPr>
+        <p:spPr/>
+        <p:txBody>
+          <a:bodyPr/>
+          <a:lstStyle/>
+          <a:p>
+            <a:r>
+              <a:t>N1: Cerramos fuerte. ¿Qué me tengo que llevar de este vídeo?</a:t>
+            </a:r>
+          </a:p>
+          <a:p>
+            <a:r>
+              <a:t>N2: Reconstruyamos el hilo. Primero, la ITC-ICG cero siete es tu manual de la instalación receptora: manda en el diseño, la ejecución y la utilización, e incluye los locales y los aparatos, no solo los tubos. Segundo, los humos son seguridad: salen por cubierta, y solo por fachada en casos pequeños, estancos o tiro forzado hasta setenta kilovatios y tiro natural de solo agua caliente hasta veinticuatro con cuatro. Tercero, la presión elige la norma: hasta cinco bar la sesenta mil seiscientos setenta, por encima la seiscientos veinte. Y cuarto, lo enterrado va por las normas de acometidas y lo gordo, por encima de setenta, a sala de máquinas con la sesenta mil seiscientos uno.</a:t>
+            </a:r>
+          </a:p>
+          <a:p>
+            <a:r>
+              <a:t>N1: ¿Y cómo cae esto en el examen?</a:t>
+            </a:r>
+          </a:p>
+          <a:p>
+            <a:r>
+              <a:t>N2: Te lo preguntan cruzado, con las cifras: te dan una potencia y un tipo de aparato y quieren saber si puede salir por fachada; o te dan una presión y quieren la norma. En la obra decide cosas muy reales: si dimensionas mal una chimenea o sacas humos por donde no toca, te tumban la puesta en servicio y le creas un problema de monóxido al vecino. Hoy ya eres más gasista que ayer: sabes por dónde tienen que salir los humos y con qué norma se monta cada cosa. En el siguiente vídeo damos el salto a los papeles: cuándo hace falta proyecto, qué pruebas se hacen y cómo una instalación pasa de estar montada a tener gas. Te espero allí.</a:t>
             </a:r>
           </a:p>
         </p:txBody>
@@ -889,12 +1127,12 @@
           <a:lstStyle/>
           <a:p>
             <a:r>
-              <a:t>N1: Quédate con tres números antes de entrar en materia.</a:t>
-            </a:r>
-          </a:p>
-          <a:p>
-            <a:r>
-              <a:t>N2: El primero, cinco bar: es la frontera que decide la norma que sigues, por debajo la UNE sesenta mil seiscientos setenta y por encima la sesenta mil seiscientos veinte. El segundo, setenta kilovatios: a partir de ahí una caldera deja de ser un aparato doméstico y necesita sala de máquinas con la UNE sesenta mil seiscientos uno. Y el tercero, veinticuatro coma cuatro kilovatios: es el tope de un aparato de tiro natural de solo agua caliente para poder sacar los humos por fachada. Con estos tres números ya tienes el esqueleto del vídeo.</a:t>
+              <a:t>N1: ¿Y estos tres números por qué son tan importantes?</a:t>
+            </a:r>
+          </a:p>
+          <a:p>
+            <a:r>
+              <a:t>N2: Porque son las tres fronteras que más se preguntan de este vídeo. Setenta kilovatios es el tope de potencia para poder sacar los humos por la fachada en un aparato estanco o de tiro forzado. Cinco bar es la raya que decide qué norma técnica sigues: por debajo una, por encima otra. Y veinticuatro con cuatro kilovatios es el límite del aparato de tiro natural que solo hace agua caliente para poder salir también por fachada. Si te quedas con estas tres cifras, ya llevas medio vídeo ganado.</a:t>
             </a:r>
           </a:p>
         </p:txBody>
@@ -964,12 +1202,12 @@
           <a:lstStyle/>
           <a:p>
             <a:r>
-              <a:t>N1: Fíjate en tres palabras: diseño, ejecución y utilización. ¿Qué esconden?</a:t>
-            </a:r>
-          </a:p>
-          <a:p>
-            <a:r>
-              <a:t>N2: Que la ITC no solo dice cómo se monta la instalación, sino también cómo se proyecta antes y cómo se usa y se mantiene después. Es el manual completo de la receptora, de la cuna a la sepultura. Y ojo a un detalle que preguntan: no regula solo las tuberías, también los locales donde va todo, la cocina, el cuarto del contador, la sala de calderas, y los aparatos conectados. Cuando en obra te pregunten dónde está escrito que una caldera mural tiene que ir con tal ventilación, la respuesta empieza casi siempre en esta instrucción.</a:t>
+              <a:t>N1: ¿Esto es solo para las tuberías?</a:t>
+            </a:r>
+          </a:p>
+          <a:p>
+            <a:r>
+              <a:t>N2: Buena pregunta, y la respuesta es que no, va mucho más allá. Fíjate en tres palabras que aparecen juntas: diseño, ejecución y utilización. Eso significa que la instrucción no solo dice cómo se monta la instalación, sino también cómo se proyecta antes y cómo se usa y se mantiene después. Es el manual completo, de la cuna a la sepultura. Y ahora el detalle que se pregunta: además de las tuberías, regula los locales donde va todo, la cocina, el cuarto del contador, la sala de calderas, y también los aparatos que enchufas al final. Ejemplo de obra: si la caldera está bien montada pero la cocina no ventila como toca, la instalación no cumple, porque el local también entra en la norma.</a:t>
             </a:r>
           </a:p>
         </p:txBody>
@@ -1039,12 +1277,12 @@
           <a:lstStyle/>
           <a:p>
             <a:r>
-              <a:t>N1: ¿Te acuerdas de dónde empieza y dónde acaba la receptora?</a:t>
-            </a:r>
-          </a:p>
-          <a:p>
-            <a:r>
-              <a:t>N2: Es el conjunto de tuberías y accesorios entre la llave de acometida, que queda excluida, y las llaves de conexión de los aparatos, que sí entran. En su caso más general tiene tres tramos encajados: acometida interior, instalación común e instalación individual. La ITC-ICG cero siete es la que pone las reglas a ese conjunto. Si esto no lo tienes fresco, para un momento y repasa el Tema cero cero, porque todo lo que viene ahora se cuelga de estos tramos.</a:t>
+              <a:t>N1: ¿Y qué es exactamente la instalación receptora?</a:t>
+            </a:r>
+          </a:p>
+          <a:p>
+            <a:r>
+              <a:t>N2: Recupéralo del tema del reglamento: es todo el conjunto de tuberías y accesorios que va desde la llave de acometida, que se queda fuera y no cuenta, hasta las llaves de conexión de cada aparato, que sí cuentan. En el caso más completo tiene tres tramos metidos uno dentro de otro: primero la acometida interior, que entra de la calle al edificio; luego la instalación común, el montante que sube por el edificio; y por último la instalación individual, la de dentro de cada vivienda. La ITC-ICG cero siete es la que pone las reglas a todo ese conjunto. Si no tienes claros los tres tramos, párate un momento y repásalos, porque los vamos a usar todo el rato.</a:t>
             </a:r>
           </a:p>
         </p:txBody>
@@ -1114,12 +1352,12 @@
           <a:lstStyle/>
           <a:p>
             <a:r>
-              <a:t>N1: No te pido calcular una chimenea, pero sí saber quién manda en cada cosa. ¿Sabes separarlo?</a:t>
-            </a:r>
-          </a:p>
-          <a:p>
-            <a:r>
-              <a:t>N2: Regla de bolsillo: para diseñar y calcular la chimenea mandan la UNE ciento veintitrés mil uno y las dos partes de la UNE-EN trece mil trescientos ochenta y cuatro. Para el material, si la chimenea es metálica va la UNE-EN mil ochocientos cincuenta y seis, y si no es metálica la NTE-ISH setenta y cuatro. Truco para acordarte: mil ochocientos cincuenta y seis es la de metal, porque esas chimeneas metálicas son de acero inoxidable. Esto aplica en edificios de nueva construcción y en rehabilitados, y son cuatro o cinco referencias que gusta preguntar.</a:t>
+              <a:t>N1: ¿Tengo que aprenderme a calcular esas normas?</a:t>
+            </a:r>
+          </a:p>
+          <a:p>
+            <a:r>
+              <a:t>N2: Tranquilo, no. Nadie te va a pedir que calcules una chimenea de memoria. Lo que sí tienes que saber es quién manda en cada cosa. Para diseñar y calcular la chimenea de un edificio nuevo o rehabilitado, mandan tres normas: la UNE ciento veintitrés mil uno, y las dos UNE-EN trece mil trescientos ochenta y cuatro, la uno y la dos. Piensa que es como el plano de cálculo: te dice qué diámetro y qué tiro necesita la chimenea para que los humos salgan bien y no se te devuelvan a la vivienda. En el examen te preguntan la referencia de la norma, no el número final del cálculo.</a:t>
             </a:r>
           </a:p>
         </p:txBody>
@@ -1189,12 +1427,12 @@
           <a:lstStyle/>
           <a:p>
             <a:r>
-              <a:t>N1: ¿Por dónde tienen que salir los humos por defecto?</a:t>
-            </a:r>
-          </a:p>
-          <a:p>
-            <a:r>
-              <a:t>N2: Por cubierta, es decir, por el tejado. Esa es la norma. Solo de forma excepcional se permite la salida directa al exterior, por fachada o por un patio, y en casos concretos que vemos ahora. Y una coletilla que confunde: sin perjuicio del RITE. Significa que aunque el reglamento de gas te deje sacar por fachada, el reglamento de instalaciones térmicas puede añadir sus propias condiciones. No se contradicen, se suman: en calefacción y agua caliente mandan dos reglamentos a la vez.</a:t>
+              <a:t>N1: ¿Y cómo distingo qué norma es para el material?</a:t>
+            </a:r>
+          </a:p>
+          <a:p>
+            <a:r>
+              <a:t>N2: Aquí hay solo dos opciones y un truco. Si la chimenea es metálica, normalmente de acero inoxidable, el material lo manda la UNE-EN mil ochocientos cincuenta y seis guion uno. Si no es metálica, por ejemplo de obra o cerámica, entonces la ene te e, ese hache, setenta y cuatro. El truco para no fallar: mil ochocientos cincuenta y seis es de metal. Repítelo un par de veces y ya no se te olvida. Por qué importa: una chimenea de un material que no aguanta la temperatura o los ácidos de la condensación se degrada, y una chimenea rota deja escapar humos con monóxido dentro del edificio.</a:t>
             </a:r>
           </a:p>
         </p:txBody>
@@ -1264,12 +1502,12 @@
           <a:lstStyle/>
           <a:p>
             <a:r>
-              <a:t>N1: ¿Por qué el tiro natural aguanta menos que un estanco para salir por fachada?</a:t>
-            </a:r>
-          </a:p>
-          <a:p>
-            <a:r>
-              <a:t>N2: Porque cuanto más control tienes sobre los humos, más margen te da el reglamento. Un aparato estanco coge el aire de fuera y echa los humos fuera por un conducto cerrado, sin tocar el aire del cuarto; el de tiro forzado empuja los humos con un ventilador. Esos, al ser más seguros, pueden salir por fachada hasta setenta kilovatios. El de tiro natural deja subir los humos solos por estar calientes, es el más primitivo, y solo se libra si es exclusivo de agua caliente sanitaria y muy pequeño, hasta veinticuatro coma cuatro kilovatios. Además, si reformas una vivienda que ya tiene un conducto de evacuación adecuado al nuevo aparato, se aprovecha el conducto existente.</a:t>
+              <a:t>N1: ¿Por dónde salen los humos normalmente?</a:t>
+            </a:r>
+          </a:p>
+          <a:p>
+            <a:r>
+              <a:t>N2: La regla general es fácil y conviene grabarla: los productos de la combustión salen por cubierta, es decir, por el tejado. Esa es la forma segura, porque arriba se dispersan y no molestan a nadie. Hay una excepción práctica para reformas: si el edificio ya tiene un conducto de evacuación que sirve para el nuevo aparato y cumple la reglamentación de hoy, aprovechas ese conducto que ya existe en lugar de abrir uno nuevo. Ejemplo de obra: cambias una caldera vieja por una nueva compatible y el humero de siempre vale, pues se reutiliza. Ahora bien, hay casos en que se permite sacar por fachada, y eso lo vemos en la siguiente.</a:t>
             </a:r>
           </a:p>
         </p:txBody>
@@ -1339,12 +1577,12 @@
           <a:lstStyle/>
           <a:p>
             <a:r>
-              <a:t>N1: Dos fórmulas, y no las puedes mezclar. ¿Sabes cuál va con cada patio?</a:t>
-            </a:r>
-          </a:p>
-          <a:p>
-            <a:r>
-              <a:t>N2: En un patio de edificio existente la superficie en planta mínima es la mitad del número de locales, y nunca menos de cuatro metros cuadrados. En obra nueva se exige el doble, uno por el número de locales, y siempre más de seis metros cuadrados; se pide más holgura porque se diseña desde cero. Ese número de locales, la ene te, es simplemente cuántas viviendas o locales tiran sus humos a ese patio: cuantos más, mayor el patio. Y si el patio está tapado por arriba con un techado, tiene que dejar una abertura permanente al exterior de al menos la cuarta parte de su sección, con mínimo de cuatro metros cuadrados. Un patio cubierto y sellado sería una trampa de gases: los aparatos no tiran, se apagan y acumulan monóxido.</a:t>
+              <a:t>N1: ¿Cuándo puedo sacar los humos por la pared en vez de por el tejado?</a:t>
+            </a:r>
+          </a:p>
+          <a:p>
+            <a:r>
+              <a:t>N2: Solo en dos casos pequeños y seguros, y estas dos cifras son de las estrella. Uno: aparatos estancos o de tiro forzado con potencia igual o menor de setenta kilovatios. Dos: aparatos de tiro natural que sirvan únicamente para agua caliente sanitaria, con potencia igual o menor de veinticuatro con cuatro kilovatios. Fíjate en la lógica: al tiro natural, que es el más primitivo, solo se le deja si es exclusivo de agua caliente y muy pequeño; a los estancos y de tiro forzado, que controlan mejor los humos, se les deja hasta setenta. Y una coletilla que se repite: sin perjuicio del RITE, que significa que aunque el gas te lo permita, el reglamento de calefacción puede poner condiciones extra. No se contradicen, se suman.</a:t>
             </a:r>
           </a:p>
         </p:txBody>
@@ -1414,12 +1652,12 @@
           <a:lstStyle/>
           <a:p>
             <a:r>
-              <a:t>N1: ¿Cuándo una caldera deja de ser un aparato y pasa a ser maquinaria seria?</a:t>
-            </a:r>
-          </a:p>
-          <a:p>
-            <a:r>
-              <a:t>N2: Por encima de setenta kilovatios. A partir de ahí, la caldera de calefacción o agua caliente, el equipo de absorción para refrigeración o el de cogeneración eléctrica ya no van en cualquier cuarto: exigen sala de máquinas con las condiciones de la UNE sesenta mil seiscientos uno. El truco es asociar esa norma a salas de calderas de más de setenta kilovatios. Y cuidado con la palabra conjunta: las potencias se suman. Tres equipos de treinta kilovatios cada uno son noventa conjuntos, pasas de setenta y ya toca sala de máquinas. No mires cada máquina por separado si trabajan juntas.</a:t>
+              <a:t>N1: ¿Y qué diferencia hay entre esos tres tipos?</a:t>
+            </a:r>
+          </a:p>
+          <a:p>
+            <a:r>
+              <a:t>N2: Vamos de lo más seguro a lo menos. Un aparato estanco coge el aire de fuera y echa los humos fuera por un conducto cerrado; no toca en ningún momento el aire de la habitación, por eso es el más seguro. Uno de tiro forzado lleva un ventilador que empuja los humos hacia afuera; ayuda a que salgan aunque el conducto sea largo. Y uno de tiro natural deja que los humos suban solos, simplemente porque están calientes y pesan menos, como el humo de una hoguera. Entiende esto y entiendes las cifras de antes: cuanto más control tiene el aparato sobre sus humos, más margen te da el reglamento para sacarlos por fachada. Por eso los estancos y de tiro forzado llegan a setenta y el tiro natural se queda en veinticuatro con cuatro y solo para agua caliente.</a:t>
             </a:r>
           </a:p>
         </p:txBody>
@@ -4674,7 +4912,7 @@
                 </a:solidFill>
                 <a:latin typeface="Montserrat"/>
               </a:rPr>
-              <a:t>010 / 013</a:t>
+              <a:t>010 / 016</a:t>
             </a:r>
           </a:p>
         </p:txBody>
@@ -4742,7 +4980,7 @@
                 </a:solidFill>
                 <a:latin typeface="Montserrat"/>
               </a:rPr>
-              <a:t>APARTADO 2.5 · NORMA Y PRESIÓN</a:t>
+              <a:t>APARTADO 2 · PATIOS DE VENTILACIÓN</a:t>
             </a:r>
           </a:p>
         </p:txBody>
@@ -4776,7 +5014,7 @@
                 </a:solidFill>
                 <a:latin typeface="Montserrat"/>
               </a:rPr>
-              <a:t>La frontera de los 5 bar</a:t>
+              <a:t>Patios para aparatos conducidos</a:t>
             </a:r>
           </a:p>
         </p:txBody>
@@ -4824,7 +5062,7 @@
                 </a:solidFill>
                 <a:latin typeface="Montserrat"/>
               </a:rPr>
-              <a:t>Hasta 5 bar → UNE 60670</a:t>
+              <a:t>Edificio existente: 0,5 × NT (mín. 4 m²)</a:t>
             </a:r>
           </a:p>
           <a:p>
@@ -4849,7 +5087,7 @@
                 </a:solidFill>
                 <a:latin typeface="Montserrat"/>
               </a:rPr>
-              <a:t>Más de 5 bar → UNE 60620</a:t>
+              <a:t>Obra nueva: 1 × NT (más de 6 m²)</a:t>
             </a:r>
           </a:p>
           <a:p>
@@ -4874,14 +5112,14 @@
                 </a:solidFill>
                 <a:latin typeface="Montserrat"/>
               </a:rPr>
-              <a:t>MOP = presión máxima de operación</a:t>
-            </a:r>
-          </a:p>
-        </p:txBody>
-      </p:sp>
-      <p:sp>
-        <p:nvSpPr>
-          <p:cNvPr id="8" name="imgph" descr="IMGQ:gas pressure regulator gauge pipe"/>
+              <a:t>NT = locales que tiran al patio</a:t>
+            </a:r>
+          </a:p>
+        </p:txBody>
+      </p:sp>
+      <p:sp>
+        <p:nvSpPr>
+          <p:cNvPr id="8" name="imgph" descr="IMGQ:interior ventilation courtyard of apartment building"/>
           <p:cNvSpPr/>
           <p:nvPr/>
         </p:nvSpPr>
@@ -4967,7 +5205,7 @@
                 </a:solidFill>
                 <a:latin typeface="Montserrat"/>
               </a:rPr>
-              <a:t>gas pressure regulator gauge pipe</a:t>
+              <a:t>interior ventilation courtyard of apartment building</a:t>
             </a:r>
           </a:p>
         </p:txBody>
@@ -5064,7 +5302,7 @@
                 </a:solidFill>
                 <a:latin typeface="Montserrat"/>
               </a:rPr>
-              <a:t>011 / 013</a:t>
+              <a:t>011 / 016</a:t>
             </a:r>
           </a:p>
         </p:txBody>
@@ -5132,7 +5370,7 @@
                 </a:solidFill>
                 <a:latin typeface="Montserrat"/>
               </a:rPr>
-              <a:t>APARTADO 2.5 · UBICACIÓN</a:t>
+              <a:t>APARTADO 2 · PATIOS DE VENTILACIÓN</a:t>
             </a:r>
           </a:p>
         </p:txBody>
@@ -5166,7 +5404,7 @@
                 </a:solidFill>
                 <a:latin typeface="Montserrat"/>
               </a:rPr>
-              <a:t>Dónde van los aparatos conducidos</a:t>
+              <a:t>Si el patio está techado</a:t>
             </a:r>
           </a:p>
         </p:txBody>
@@ -5214,7 +5452,7 @@
                 </a:solidFill>
                 <a:latin typeface="Montserrat"/>
               </a:rPr>
-              <a:t>Galerías, terrazas, locales exclusivos</a:t>
+              <a:t>Abertura permanente al exterior</a:t>
             </a:r>
           </a:p>
           <a:p>
@@ -5239,7 +5477,7 @@
                 </a:solidFill>
                 <a:latin typeface="Montserrat"/>
               </a:rPr>
-              <a:t>También lavaderos, garaje individual</a:t>
+              <a:t>25 % de la sección en planta</a:t>
             </a:r>
           </a:p>
           <a:p>
@@ -5264,39 +5502,14 @@
                 </a:solidFill>
                 <a:latin typeface="Montserrat"/>
               </a:rPr>
-              <a:t>Cocina: sin robar el tiro al extractor</a:t>
-            </a:r>
-          </a:p>
-          <a:p>
-            <a:pPr>
-              <a:spcAft>
-                <a:spcPts val="1000"/>
-              </a:spcAft>
-            </a:pPr>
-            <a:r>
-              <a:rPr sz="1600" b="1" i="0">
-                <a:solidFill>
-                  <a:srgbClr val="2E3A80"/>
-                </a:solidFill>
-                <a:latin typeface="Montserrat"/>
-              </a:rPr>
-              <a:t>•  </a:t>
-            </a:r>
-            <a:r>
-              <a:rPr sz="1600" b="0" i="0">
-                <a:solidFill>
-                  <a:srgbClr val="1B2330"/>
-                </a:solidFill>
-                <a:latin typeface="Montserrat"/>
-              </a:rPr>
-              <a:t>Excepción: solo ACS, sin límites</a:t>
-            </a:r>
-          </a:p>
-        </p:txBody>
-      </p:sp>
-      <p:sp>
-        <p:nvSpPr>
-          <p:cNvPr id="8" name="imgph" descr="IMGQ:gas water heater on wall laundry"/>
+              <a:t>Mínimo 4 m²</a:t>
+            </a:r>
+          </a:p>
+        </p:txBody>
+      </p:sp>
+      <p:sp>
+        <p:nvSpPr>
+          <p:cNvPr id="8" name="imgph" descr="IMGQ:covered courtyard with open ventilation grille at top"/>
           <p:cNvSpPr/>
           <p:nvPr/>
         </p:nvSpPr>
@@ -5382,7 +5595,7 @@
                 </a:solidFill>
                 <a:latin typeface="Montserrat"/>
               </a:rPr>
-              <a:t>gas water heater on wall laundry</a:t>
+              <a:t>covered courtyard with open ventilation grille at top</a:t>
             </a:r>
           </a:p>
         </p:txBody>
@@ -5479,7 +5692,7 @@
                 </a:solidFill>
                 <a:latin typeface="Montserrat"/>
               </a:rPr>
-              <a:t>012 / 013</a:t>
+              <a:t>012 / 016</a:t>
             </a:r>
           </a:p>
         </p:txBody>
@@ -5547,7 +5760,7 @@
                 </a:solidFill>
                 <a:latin typeface="Montserrat"/>
               </a:rPr>
-              <a:t>APARTADO 2.6 · ENTERRADO</a:t>
+              <a:t>APARTADO 2 · GRANDES POTENCIAS</a:t>
             </a:r>
           </a:p>
         </p:txBody>
@@ -5581,7 +5794,7 @@
                 </a:solidFill>
                 <a:latin typeface="Montserrat"/>
               </a:rPr>
-              <a:t>Tramos enterrados</a:t>
+              <a:t>Más de 70 kW: sala de máquinas</a:t>
             </a:r>
           </a:p>
         </p:txBody>
@@ -5629,7 +5842,7 @@
                 </a:solidFill>
                 <a:latin typeface="Montserrat"/>
               </a:rPr>
-              <a:t>Enterrado → UNE 60310 y 60311</a:t>
+              <a:t>Calderas &gt; 70 kW → UNE 60601</a:t>
             </a:r>
           </a:p>
           <a:p>
@@ -5654,7 +5867,7 @@
                 </a:solidFill>
                 <a:latin typeface="Montserrat"/>
               </a:rPr>
-              <a:t>Reglas de acometidas, no de tubo visto</a:t>
+              <a:t>También absorción y cogeneración</a:t>
             </a:r>
           </a:p>
           <a:p>
@@ -5679,14 +5892,14 @@
                 </a:solidFill>
                 <a:latin typeface="Montserrat"/>
               </a:rPr>
-              <a:t>Pregunta el material al distribuidor</a:t>
-            </a:r>
-          </a:p>
-        </p:txBody>
-      </p:sp>
-      <p:sp>
-        <p:nvSpPr>
-          <p:cNvPr id="8" name="imgph" descr="IMGQ:underground gas pipe trench"/>
+              <a:t>Potencia conjunta: se suma</a:t>
+            </a:r>
+          </a:p>
+        </p:txBody>
+      </p:sp>
+      <p:sp>
+        <p:nvSpPr>
+          <p:cNvPr id="8" name="imgph" descr="IMGQ:industrial gas boiler room"/>
           <p:cNvSpPr/>
           <p:nvPr/>
         </p:nvSpPr>
@@ -5772,7 +5985,7 @@
                 </a:solidFill>
                 <a:latin typeface="Montserrat"/>
               </a:rPr>
-              <a:t>underground gas pipe trench</a:t>
+              <a:t>industrial gas boiler room</a:t>
             </a:r>
           </a:p>
         </p:txBody>
@@ -5869,7 +6082,7 @@
                 </a:solidFill>
                 <a:latin typeface="Montserrat"/>
               </a:rPr>
-              <a:t>013 / 013</a:t>
+              <a:t>013 / 016</a:t>
             </a:r>
           </a:p>
         </p:txBody>
@@ -5916,8 +6129,8 @@
         </p:nvSpPr>
         <p:spPr>
           <a:xfrm>
-            <a:off x="822960" y="640080"/>
-            <a:ext cx="10058400" cy="914400"/>
+            <a:off x="822960" y="457200"/>
+            <a:ext cx="8229600" cy="365760"/>
           </a:xfrm>
           <a:prstGeom prst="rect">
             <a:avLst/>
@@ -5931,13 +6144,13 @@
           <a:lstStyle/>
           <a:p>
             <a:r>
-              <a:rPr sz="3000" b="1" i="0">
-                <a:solidFill>
-                  <a:srgbClr val="1E2761"/>
-                </a:solidFill>
-                <a:latin typeface="Montserrat"/>
-              </a:rPr>
-              <a:t>Qué me llevo</a:t>
+              <a:rPr sz="1200" b="1" i="0">
+                <a:solidFill>
+                  <a:srgbClr val="64748B"/>
+                </a:solidFill>
+                <a:latin typeface="Montserrat"/>
+              </a:rPr>
+              <a:t>APARTADO 2 · NORMA SEGÚN PRESIÓN</a:t>
             </a:r>
           </a:p>
         </p:txBody>
@@ -5950,8 +6163,8 @@
         </p:nvSpPr>
         <p:spPr>
           <a:xfrm>
-            <a:off x="822960" y="2011680"/>
-            <a:ext cx="10058400" cy="3657600"/>
+            <a:off x="822960" y="868680"/>
+            <a:ext cx="10515600" cy="914400"/>
           </a:xfrm>
           <a:prstGeom prst="rect">
             <a:avLst/>
@@ -5964,78 +6177,1341 @@
           </a:bodyPr>
           <a:lstStyle/>
           <a:p>
+            <a:r>
+              <a:rPr sz="2700" b="1" i="0">
+                <a:solidFill>
+                  <a:srgbClr val="1E2761"/>
+                </a:solidFill>
+                <a:latin typeface="Montserrat"/>
+              </a:rPr>
+              <a:t>La frontera de los 5 bar</a:t>
+            </a:r>
+          </a:p>
+        </p:txBody>
+      </p:sp>
+      <p:sp>
+        <p:nvSpPr>
+          <p:cNvPr id="7" name="TextBox 6"/>
+          <p:cNvSpPr txBox="1"/>
+          <p:nvPr/>
+        </p:nvSpPr>
+        <p:spPr>
+          <a:xfrm>
+            <a:off x="822960" y="1920240"/>
+            <a:ext cx="4983480" cy="4206240"/>
+          </a:xfrm>
+          <a:prstGeom prst="rect">
+            <a:avLst/>
+          </a:prstGeom>
+          <a:noFill/>
+        </p:spPr>
+        <p:txBody>
+          <a:bodyPr wrap="square">
+            <a:spAutoFit/>
+          </a:bodyPr>
+          <a:lstStyle/>
+          <a:p>
             <a:pPr>
               <a:spcAft>
-                <a:spcPts val="1400"/>
+                <a:spcPts val="1000"/>
               </a:spcAft>
             </a:pPr>
             <a:r>
-              <a:rPr sz="2000" b="1" i="0">
+              <a:rPr sz="1600" b="1" i="0">
                 <a:solidFill>
                   <a:srgbClr val="2E3A80"/>
                 </a:solidFill>
                 <a:latin typeface="Montserrat"/>
               </a:rPr>
-              <a:t>✓  </a:t>
-            </a:r>
-            <a:r>
-              <a:rPr sz="2000" b="0" i="0">
+              <a:t>•  </a:t>
+            </a:r>
+            <a:r>
+              <a:rPr sz="1600" b="0" i="0">
                 <a:solidFill>
                   <a:srgbClr val="1B2330"/>
                 </a:solidFill>
                 <a:latin typeface="Montserrat"/>
               </a:rPr>
-              <a:t>ITC-ICG 07: diseño, ejecución y uso</a:t>
+              <a:t>Hasta 5 bar → UNE 60670</a:t>
             </a:r>
           </a:p>
           <a:p>
             <a:pPr>
               <a:spcAft>
-                <a:spcPts val="1400"/>
+                <a:spcPts val="1000"/>
               </a:spcAft>
             </a:pPr>
             <a:r>
-              <a:rPr sz="2000" b="1" i="0">
+              <a:rPr sz="1600" b="1" i="0">
                 <a:solidFill>
                   <a:srgbClr val="2E3A80"/>
                 </a:solidFill>
                 <a:latin typeface="Montserrat"/>
               </a:rPr>
-              <a:t>✓  </a:t>
-            </a:r>
-            <a:r>
-              <a:rPr sz="2000" b="0" i="0">
+              <a:t>•  </a:t>
+            </a:r>
+            <a:r>
+              <a:rPr sz="1600" b="0" i="0">
                 <a:solidFill>
                   <a:srgbClr val="1B2330"/>
                 </a:solidFill>
                 <a:latin typeface="Montserrat"/>
               </a:rPr>
-              <a:t>Humos por cubierta; 70 y 24,4 kW la excepción</a:t>
+              <a:t>Más de 5 bar → UNE 60620</a:t>
             </a:r>
           </a:p>
           <a:p>
             <a:pPr>
               <a:spcAft>
-                <a:spcPts val="1400"/>
+                <a:spcPts val="1000"/>
               </a:spcAft>
             </a:pPr>
             <a:r>
+              <a:rPr sz="1600" b="1" i="0">
+                <a:solidFill>
+                  <a:srgbClr val="2E3A80"/>
+                </a:solidFill>
+                <a:latin typeface="Montserrat"/>
+              </a:rPr>
+              <a:t>•  </a:t>
+            </a:r>
+            <a:r>
+              <a:rPr sz="1600" b="0" i="0">
+                <a:solidFill>
+                  <a:srgbClr val="1B2330"/>
+                </a:solidFill>
+                <a:latin typeface="Montserrat"/>
+              </a:rPr>
+              <a:t>MOP: presión máxima de operación</a:t>
+            </a:r>
+          </a:p>
+        </p:txBody>
+      </p:sp>
+      <p:sp>
+        <p:nvSpPr>
+          <p:cNvPr id="8" name="imgph" descr="IMGQ:gas pressure regulator and gauge"/>
+          <p:cNvSpPr/>
+          <p:nvPr/>
+        </p:nvSpPr>
+        <p:spPr>
+          <a:xfrm>
+            <a:off x="5806440" y="1051560"/>
+            <a:ext cx="5298947" cy="4629150"/>
+          </a:xfrm>
+          <a:prstGeom prst="roundRect">
+            <a:avLst/>
+          </a:prstGeom>
+          <a:solidFill>
+            <a:srgbClr val="F3F6FB"/>
+          </a:solidFill>
+          <a:ln w="12700">
+            <a:solidFill>
+              <a:srgbClr val="C7D2E6"/>
+            </a:solidFill>
+          </a:ln>
+          <a:effectLst/>
+        </p:spPr>
+        <p:style>
+          <a:lnRef idx="1">
+            <a:schemeClr val="accent1"/>
+          </a:lnRef>
+          <a:fillRef idx="3">
+            <a:schemeClr val="accent1"/>
+          </a:fillRef>
+          <a:effectRef idx="2">
+            <a:schemeClr val="accent1"/>
+          </a:effectRef>
+          <a:fontRef idx="minor">
+            <a:schemeClr val="lt1"/>
+          </a:fontRef>
+        </p:style>
+        <p:txBody>
+          <a:bodyPr rtlCol="0" anchor="ctr"/>
+          <a:lstStyle/>
+          <a:p>
+            <a:pPr algn="ctr"/>
+          </a:p>
+        </p:txBody>
+      </p:sp>
+      <p:sp>
+        <p:nvSpPr>
+          <p:cNvPr id="9" name="TextBox 8"/>
+          <p:cNvSpPr txBox="1"/>
+          <p:nvPr/>
+        </p:nvSpPr>
+        <p:spPr>
+          <a:xfrm>
+            <a:off x="6080760" y="2726055"/>
+            <a:ext cx="4750307" cy="1280160"/>
+          </a:xfrm>
+          <a:prstGeom prst="rect">
+            <a:avLst/>
+          </a:prstGeom>
+          <a:noFill/>
+        </p:spPr>
+        <p:txBody>
+          <a:bodyPr wrap="square">
+            <a:spAutoFit/>
+          </a:bodyPr>
+          <a:lstStyle/>
+          <a:p>
+            <a:pPr algn="ctr"/>
+            <a:r>
+              <a:rPr sz="1400" b="1" i="0">
+                <a:solidFill>
+                  <a:srgbClr val="64748B"/>
+                </a:solidFill>
+                <a:latin typeface="Montserrat"/>
+              </a:rPr>
+              <a:t>IMAGEN REALISTA</a:t>
+            </a:r>
+          </a:p>
+          <a:p>
+            <a:pPr algn="ctr"/>
+            <a:r>
+              <a:rPr sz="1100" b="0" i="1">
+                <a:solidFill>
+                  <a:srgbClr val="64748B"/>
+                </a:solidFill>
+                <a:latin typeface="Montserrat"/>
+              </a:rPr>
+              <a:t>gas pressure regulator and gauge</a:t>
+            </a:r>
+          </a:p>
+        </p:txBody>
+      </p:sp>
+    </p:spTree>
+  </p:cSld>
+  <p:clrMapOvr>
+    <a:masterClrMapping/>
+  </p:clrMapOvr>
+</p:sld>
+</file>
+
+<file path=ppt/slides/slide14.xml><?xml version="1.0" encoding="utf-8"?>
+<p:sld xmlns:a="http://schemas.openxmlformats.org/drawingml/2006/main" xmlns:p="http://schemas.openxmlformats.org/presentationml/2006/main" xmlns:r="http://schemas.openxmlformats.org/officeDocument/2006/relationships">
+  <p:cSld>
+    <p:spTree>
+      <p:nvGrpSpPr>
+        <p:cNvPr id="1" name=""/>
+        <p:cNvGrpSpPr/>
+        <p:nvPr/>
+      </p:nvGrpSpPr>
+      <p:grpSpPr/>
+      <p:sp>
+        <p:nvSpPr>
+          <p:cNvPr id="2" name="Rectangle 1"/>
+          <p:cNvSpPr/>
+          <p:nvPr/>
+        </p:nvSpPr>
+        <p:spPr>
+          <a:xfrm>
+            <a:off x="0" y="0"/>
+            <a:ext cx="12191695" cy="6858000"/>
+          </a:xfrm>
+          <a:prstGeom prst="rect">
+            <a:avLst/>
+          </a:prstGeom>
+          <a:solidFill>
+            <a:srgbClr val="FFFFFF"/>
+          </a:solidFill>
+          <a:ln>
+            <a:noFill/>
+          </a:ln>
+          <a:effectLst/>
+        </p:spPr>
+        <p:style>
+          <a:lnRef idx="1">
+            <a:schemeClr val="accent1"/>
+          </a:lnRef>
+          <a:fillRef idx="3">
+            <a:schemeClr val="accent1"/>
+          </a:fillRef>
+          <a:effectRef idx="2">
+            <a:schemeClr val="accent1"/>
+          </a:effectRef>
+          <a:fontRef idx="minor">
+            <a:schemeClr val="lt1"/>
+          </a:fontRef>
+        </p:style>
+        <p:txBody>
+          <a:bodyPr rtlCol="0" anchor="ctr"/>
+          <a:lstStyle/>
+          <a:p>
+            <a:pPr algn="ctr"/>
+          </a:p>
+        </p:txBody>
+      </p:sp>
+      <p:sp>
+        <p:nvSpPr>
+          <p:cNvPr id="3" name="TextBox 2"/>
+          <p:cNvSpPr txBox="1"/>
+          <p:nvPr/>
+        </p:nvSpPr>
+        <p:spPr>
+          <a:xfrm>
+            <a:off x="10607040" y="320040"/>
+            <a:ext cx="1371600" cy="365760"/>
+          </a:xfrm>
+          <a:prstGeom prst="rect">
+            <a:avLst/>
+          </a:prstGeom>
+          <a:noFill/>
+        </p:spPr>
+        <p:txBody>
+          <a:bodyPr wrap="square">
+            <a:spAutoFit/>
+          </a:bodyPr>
+          <a:lstStyle/>
+          <a:p>
+            <a:pPr algn="r"/>
+            <a:r>
+              <a:rPr sz="1000" b="1" i="0">
+                <a:solidFill>
+                  <a:srgbClr val="64748B"/>
+                </a:solidFill>
+                <a:latin typeface="Montserrat"/>
+              </a:rPr>
+              <a:t>014 / 016</a:t>
+            </a:r>
+          </a:p>
+        </p:txBody>
+      </p:sp>
+      <p:sp>
+        <p:nvSpPr>
+          <p:cNvPr id="4" name="TextBox 3"/>
+          <p:cNvSpPr txBox="1"/>
+          <p:nvPr/>
+        </p:nvSpPr>
+        <p:spPr>
+          <a:xfrm>
+            <a:off x="457200" y="6419088"/>
+            <a:ext cx="8229600" cy="365760"/>
+          </a:xfrm>
+          <a:prstGeom prst="rect">
+            <a:avLst/>
+          </a:prstGeom>
+          <a:noFill/>
+        </p:spPr>
+        <p:txBody>
+          <a:bodyPr wrap="square">
+            <a:spAutoFit/>
+          </a:bodyPr>
+          <a:lstStyle/>
+          <a:p>
+            <a:r>
+              <a:rPr sz="900" b="0" i="0">
+                <a:solidFill>
+                  <a:srgbClr val="64748B"/>
+                </a:solidFill>
+                <a:latin typeface="Montserrat"/>
+              </a:rPr>
+              <a:t>Curso Gas B · Tema 04 · ITC-ICG 07 · Diseño y ejecución</a:t>
+            </a:r>
+          </a:p>
+        </p:txBody>
+      </p:sp>
+      <p:sp>
+        <p:nvSpPr>
+          <p:cNvPr id="5" name="TextBox 4"/>
+          <p:cNvSpPr txBox="1"/>
+          <p:nvPr/>
+        </p:nvSpPr>
+        <p:spPr>
+          <a:xfrm>
+            <a:off x="822960" y="457200"/>
+            <a:ext cx="8229600" cy="365760"/>
+          </a:xfrm>
+          <a:prstGeom prst="rect">
+            <a:avLst/>
+          </a:prstGeom>
+          <a:noFill/>
+        </p:spPr>
+        <p:txBody>
+          <a:bodyPr wrap="square">
+            <a:spAutoFit/>
+          </a:bodyPr>
+          <a:lstStyle/>
+          <a:p>
+            <a:r>
+              <a:rPr sz="1200" b="1" i="0">
+                <a:solidFill>
+                  <a:srgbClr val="64748B"/>
+                </a:solidFill>
+                <a:latin typeface="Montserrat"/>
+              </a:rPr>
+              <a:t>APARTADO 2 · UBICACIÓN DE APARATOS</a:t>
+            </a:r>
+          </a:p>
+        </p:txBody>
+      </p:sp>
+      <p:sp>
+        <p:nvSpPr>
+          <p:cNvPr id="6" name="TextBox 5"/>
+          <p:cNvSpPr txBox="1"/>
+          <p:nvPr/>
+        </p:nvSpPr>
+        <p:spPr>
+          <a:xfrm>
+            <a:off x="822960" y="868680"/>
+            <a:ext cx="10515600" cy="914400"/>
+          </a:xfrm>
+          <a:prstGeom prst="rect">
+            <a:avLst/>
+          </a:prstGeom>
+          <a:noFill/>
+        </p:spPr>
+        <p:txBody>
+          <a:bodyPr wrap="square">
+            <a:spAutoFit/>
+          </a:bodyPr>
+          <a:lstStyle/>
+          <a:p>
+            <a:r>
+              <a:rPr sz="2700" b="1" i="0">
+                <a:solidFill>
+                  <a:srgbClr val="1E2761"/>
+                </a:solidFill>
+                <a:latin typeface="Montserrat"/>
+              </a:rPr>
+              <a:t>Circuito abierto conducido: dónde</a:t>
+            </a:r>
+          </a:p>
+        </p:txBody>
+      </p:sp>
+      <p:sp>
+        <p:nvSpPr>
+          <p:cNvPr id="7" name="TextBox 6"/>
+          <p:cNvSpPr txBox="1"/>
+          <p:nvPr/>
+        </p:nvSpPr>
+        <p:spPr>
+          <a:xfrm>
+            <a:off x="822960" y="1920240"/>
+            <a:ext cx="4983480" cy="4206240"/>
+          </a:xfrm>
+          <a:prstGeom prst="rect">
+            <a:avLst/>
+          </a:prstGeom>
+          <a:noFill/>
+        </p:spPr>
+        <p:txBody>
+          <a:bodyPr wrap="square">
+            <a:spAutoFit/>
+          </a:bodyPr>
+          <a:lstStyle/>
+          <a:p>
+            <a:pPr>
+              <a:spcAft>
+                <a:spcPts val="1000"/>
+              </a:spcAft>
+            </a:pPr>
+            <a:r>
+              <a:rPr sz="1600" b="1" i="0">
+                <a:solidFill>
+                  <a:srgbClr val="2E3A80"/>
+                </a:solidFill>
+                <a:latin typeface="Montserrat"/>
+              </a:rPr>
+              <a:t>•  </a:t>
+            </a:r>
+            <a:r>
+              <a:rPr sz="1600" b="0" i="0">
+                <a:solidFill>
+                  <a:srgbClr val="1B2330"/>
+                </a:solidFill>
+                <a:latin typeface="Montserrat"/>
+              </a:rPr>
+              <a:t>Galerías, terrazas, locales exclusivos</a:t>
+            </a:r>
+          </a:p>
+          <a:p>
+            <a:pPr>
+              <a:spcAft>
+                <a:spcPts val="1000"/>
+              </a:spcAft>
+            </a:pPr>
+            <a:r>
+              <a:rPr sz="1600" b="1" i="0">
+                <a:solidFill>
+                  <a:srgbClr val="2E3A80"/>
+                </a:solidFill>
+                <a:latin typeface="Montserrat"/>
+              </a:rPr>
+              <a:t>•  </a:t>
+            </a:r>
+            <a:r>
+              <a:rPr sz="1600" b="0" i="0">
+                <a:solidFill>
+                  <a:srgbClr val="1B2330"/>
+                </a:solidFill>
+                <a:latin typeface="Montserrat"/>
+              </a:rPr>
+              <a:t>Lavaderos, garajes individuales</a:t>
+            </a:r>
+          </a:p>
+          <a:p>
+            <a:pPr>
+              <a:spcAft>
+                <a:spcPts val="1000"/>
+              </a:spcAft>
+            </a:pPr>
+            <a:r>
+              <a:rPr sz="1600" b="1" i="0">
+                <a:solidFill>
+                  <a:srgbClr val="2E3A80"/>
+                </a:solidFill>
+                <a:latin typeface="Montserrat"/>
+              </a:rPr>
+              <a:t>•  </a:t>
+            </a:r>
+            <a:r>
+              <a:rPr sz="1600" b="0" i="0">
+                <a:solidFill>
+                  <a:srgbClr val="1B2330"/>
+                </a:solidFill>
+                <a:latin typeface="Montserrat"/>
+              </a:rPr>
+              <a:t>En cocina: sin robar el tiro al extractor</a:t>
+            </a:r>
+          </a:p>
+          <a:p>
+            <a:pPr>
+              <a:spcAft>
+                <a:spcPts val="1000"/>
+              </a:spcAft>
+            </a:pPr>
+            <a:r>
+              <a:rPr sz="1600" b="1" i="0">
+                <a:solidFill>
+                  <a:srgbClr val="2E3A80"/>
+                </a:solidFill>
+                <a:latin typeface="Montserrat"/>
+              </a:rPr>
+              <a:t>•  </a:t>
+            </a:r>
+            <a:r>
+              <a:rPr sz="1600" b="0" i="0">
+                <a:solidFill>
+                  <a:srgbClr val="1B2330"/>
+                </a:solidFill>
+                <a:latin typeface="Montserrat"/>
+              </a:rPr>
+              <a:t>Solo ACS: sin estas limitaciones</a:t>
+            </a:r>
+          </a:p>
+        </p:txBody>
+      </p:sp>
+      <p:sp>
+        <p:nvSpPr>
+          <p:cNvPr id="8" name="imgph" descr="IMGQ:wall mounted gas water heater in laundry room"/>
+          <p:cNvSpPr/>
+          <p:nvPr/>
+        </p:nvSpPr>
+        <p:spPr>
+          <a:xfrm>
+            <a:off x="5806440" y="1051560"/>
+            <a:ext cx="5298947" cy="4629150"/>
+          </a:xfrm>
+          <a:prstGeom prst="roundRect">
+            <a:avLst/>
+          </a:prstGeom>
+          <a:solidFill>
+            <a:srgbClr val="F3F6FB"/>
+          </a:solidFill>
+          <a:ln w="12700">
+            <a:solidFill>
+              <a:srgbClr val="C7D2E6"/>
+            </a:solidFill>
+          </a:ln>
+          <a:effectLst/>
+        </p:spPr>
+        <p:style>
+          <a:lnRef idx="1">
+            <a:schemeClr val="accent1"/>
+          </a:lnRef>
+          <a:fillRef idx="3">
+            <a:schemeClr val="accent1"/>
+          </a:fillRef>
+          <a:effectRef idx="2">
+            <a:schemeClr val="accent1"/>
+          </a:effectRef>
+          <a:fontRef idx="minor">
+            <a:schemeClr val="lt1"/>
+          </a:fontRef>
+        </p:style>
+        <p:txBody>
+          <a:bodyPr rtlCol="0" anchor="ctr"/>
+          <a:lstStyle/>
+          <a:p>
+            <a:pPr algn="ctr"/>
+          </a:p>
+        </p:txBody>
+      </p:sp>
+      <p:sp>
+        <p:nvSpPr>
+          <p:cNvPr id="9" name="TextBox 8"/>
+          <p:cNvSpPr txBox="1"/>
+          <p:nvPr/>
+        </p:nvSpPr>
+        <p:spPr>
+          <a:xfrm>
+            <a:off x="6080760" y="2726055"/>
+            <a:ext cx="4750307" cy="1280160"/>
+          </a:xfrm>
+          <a:prstGeom prst="rect">
+            <a:avLst/>
+          </a:prstGeom>
+          <a:noFill/>
+        </p:spPr>
+        <p:txBody>
+          <a:bodyPr wrap="square">
+            <a:spAutoFit/>
+          </a:bodyPr>
+          <a:lstStyle/>
+          <a:p>
+            <a:pPr algn="ctr"/>
+            <a:r>
+              <a:rPr sz="1400" b="1" i="0">
+                <a:solidFill>
+                  <a:srgbClr val="64748B"/>
+                </a:solidFill>
+                <a:latin typeface="Montserrat"/>
+              </a:rPr>
+              <a:t>IMAGEN REALISTA</a:t>
+            </a:r>
+          </a:p>
+          <a:p>
+            <a:pPr algn="ctr"/>
+            <a:r>
+              <a:rPr sz="1100" b="0" i="1">
+                <a:solidFill>
+                  <a:srgbClr val="64748B"/>
+                </a:solidFill>
+                <a:latin typeface="Montserrat"/>
+              </a:rPr>
+              <a:t>wall mounted gas water heater in laundry room</a:t>
+            </a:r>
+          </a:p>
+        </p:txBody>
+      </p:sp>
+    </p:spTree>
+  </p:cSld>
+  <p:clrMapOvr>
+    <a:masterClrMapping/>
+  </p:clrMapOvr>
+</p:sld>
+</file>
+
+<file path=ppt/slides/slide15.xml><?xml version="1.0" encoding="utf-8"?>
+<p:sld xmlns:a="http://schemas.openxmlformats.org/drawingml/2006/main" xmlns:p="http://schemas.openxmlformats.org/presentationml/2006/main" xmlns:r="http://schemas.openxmlformats.org/officeDocument/2006/relationships">
+  <p:cSld>
+    <p:spTree>
+      <p:nvGrpSpPr>
+        <p:cNvPr id="1" name=""/>
+        <p:cNvGrpSpPr/>
+        <p:nvPr/>
+      </p:nvGrpSpPr>
+      <p:grpSpPr/>
+      <p:sp>
+        <p:nvSpPr>
+          <p:cNvPr id="2" name="Rectangle 1"/>
+          <p:cNvSpPr/>
+          <p:nvPr/>
+        </p:nvSpPr>
+        <p:spPr>
+          <a:xfrm>
+            <a:off x="0" y="0"/>
+            <a:ext cx="12191695" cy="6858000"/>
+          </a:xfrm>
+          <a:prstGeom prst="rect">
+            <a:avLst/>
+          </a:prstGeom>
+          <a:solidFill>
+            <a:srgbClr val="FFFFFF"/>
+          </a:solidFill>
+          <a:ln>
+            <a:noFill/>
+          </a:ln>
+          <a:effectLst/>
+        </p:spPr>
+        <p:style>
+          <a:lnRef idx="1">
+            <a:schemeClr val="accent1"/>
+          </a:lnRef>
+          <a:fillRef idx="3">
+            <a:schemeClr val="accent1"/>
+          </a:fillRef>
+          <a:effectRef idx="2">
+            <a:schemeClr val="accent1"/>
+          </a:effectRef>
+          <a:fontRef idx="minor">
+            <a:schemeClr val="lt1"/>
+          </a:fontRef>
+        </p:style>
+        <p:txBody>
+          <a:bodyPr rtlCol="0" anchor="ctr"/>
+          <a:lstStyle/>
+          <a:p>
+            <a:pPr algn="ctr"/>
+          </a:p>
+        </p:txBody>
+      </p:sp>
+      <p:sp>
+        <p:nvSpPr>
+          <p:cNvPr id="3" name="TextBox 2"/>
+          <p:cNvSpPr txBox="1"/>
+          <p:nvPr/>
+        </p:nvSpPr>
+        <p:spPr>
+          <a:xfrm>
+            <a:off x="10607040" y="320040"/>
+            <a:ext cx="1371600" cy="365760"/>
+          </a:xfrm>
+          <a:prstGeom prst="rect">
+            <a:avLst/>
+          </a:prstGeom>
+          <a:noFill/>
+        </p:spPr>
+        <p:txBody>
+          <a:bodyPr wrap="square">
+            <a:spAutoFit/>
+          </a:bodyPr>
+          <a:lstStyle/>
+          <a:p>
+            <a:pPr algn="r"/>
+            <a:r>
+              <a:rPr sz="1000" b="1" i="0">
+                <a:solidFill>
+                  <a:srgbClr val="64748B"/>
+                </a:solidFill>
+                <a:latin typeface="Montserrat"/>
+              </a:rPr>
+              <a:t>015 / 016</a:t>
+            </a:r>
+          </a:p>
+        </p:txBody>
+      </p:sp>
+      <p:sp>
+        <p:nvSpPr>
+          <p:cNvPr id="4" name="TextBox 3"/>
+          <p:cNvSpPr txBox="1"/>
+          <p:nvPr/>
+        </p:nvSpPr>
+        <p:spPr>
+          <a:xfrm>
+            <a:off x="457200" y="6419088"/>
+            <a:ext cx="8229600" cy="365760"/>
+          </a:xfrm>
+          <a:prstGeom prst="rect">
+            <a:avLst/>
+          </a:prstGeom>
+          <a:noFill/>
+        </p:spPr>
+        <p:txBody>
+          <a:bodyPr wrap="square">
+            <a:spAutoFit/>
+          </a:bodyPr>
+          <a:lstStyle/>
+          <a:p>
+            <a:r>
+              <a:rPr sz="900" b="0" i="0">
+                <a:solidFill>
+                  <a:srgbClr val="64748B"/>
+                </a:solidFill>
+                <a:latin typeface="Montserrat"/>
+              </a:rPr>
+              <a:t>Curso Gas B · Tema 04 · ITC-ICG 07 · Diseño y ejecución</a:t>
+            </a:r>
+          </a:p>
+        </p:txBody>
+      </p:sp>
+      <p:sp>
+        <p:nvSpPr>
+          <p:cNvPr id="5" name="TextBox 4"/>
+          <p:cNvSpPr txBox="1"/>
+          <p:nvPr/>
+        </p:nvSpPr>
+        <p:spPr>
+          <a:xfrm>
+            <a:off x="822960" y="457200"/>
+            <a:ext cx="8229600" cy="365760"/>
+          </a:xfrm>
+          <a:prstGeom prst="rect">
+            <a:avLst/>
+          </a:prstGeom>
+          <a:noFill/>
+        </p:spPr>
+        <p:txBody>
+          <a:bodyPr wrap="square">
+            <a:spAutoFit/>
+          </a:bodyPr>
+          <a:lstStyle/>
+          <a:p>
+            <a:r>
+              <a:rPr sz="1200" b="1" i="0">
+                <a:solidFill>
+                  <a:srgbClr val="64748B"/>
+                </a:solidFill>
+                <a:latin typeface="Montserrat"/>
+              </a:rPr>
+              <a:t>APARTADO 2 · TRAMOS ENTERRADOS</a:t>
+            </a:r>
+          </a:p>
+        </p:txBody>
+      </p:sp>
+      <p:sp>
+        <p:nvSpPr>
+          <p:cNvPr id="6" name="TextBox 5"/>
+          <p:cNvSpPr txBox="1"/>
+          <p:nvPr/>
+        </p:nvSpPr>
+        <p:spPr>
+          <a:xfrm>
+            <a:off x="822960" y="868680"/>
+            <a:ext cx="10515600" cy="914400"/>
+          </a:xfrm>
+          <a:prstGeom prst="rect">
+            <a:avLst/>
+          </a:prstGeom>
+          <a:noFill/>
+        </p:spPr>
+        <p:txBody>
+          <a:bodyPr wrap="square">
+            <a:spAutoFit/>
+          </a:bodyPr>
+          <a:lstStyle/>
+          <a:p>
+            <a:r>
+              <a:rPr sz="2700" b="1" i="0">
+                <a:solidFill>
+                  <a:srgbClr val="1E2761"/>
+                </a:solidFill>
+                <a:latin typeface="Montserrat"/>
+              </a:rPr>
+              <a:t>Tubería bajo tierra</a:t>
+            </a:r>
+          </a:p>
+        </p:txBody>
+      </p:sp>
+      <p:sp>
+        <p:nvSpPr>
+          <p:cNvPr id="7" name="TextBox 6"/>
+          <p:cNvSpPr txBox="1"/>
+          <p:nvPr/>
+        </p:nvSpPr>
+        <p:spPr>
+          <a:xfrm>
+            <a:off x="822960" y="1920240"/>
+            <a:ext cx="4983480" cy="4206240"/>
+          </a:xfrm>
+          <a:prstGeom prst="rect">
+            <a:avLst/>
+          </a:prstGeom>
+          <a:noFill/>
+        </p:spPr>
+        <p:txBody>
+          <a:bodyPr wrap="square">
+            <a:spAutoFit/>
+          </a:bodyPr>
+          <a:lstStyle/>
+          <a:p>
+            <a:pPr>
+              <a:spcAft>
+                <a:spcPts val="1000"/>
+              </a:spcAft>
+            </a:pPr>
+            <a:r>
+              <a:rPr sz="1600" b="1" i="0">
+                <a:solidFill>
+                  <a:srgbClr val="2E3A80"/>
+                </a:solidFill>
+                <a:latin typeface="Montserrat"/>
+              </a:rPr>
+              <a:t>•  </a:t>
+            </a:r>
+            <a:r>
+              <a:rPr sz="1600" b="0" i="0">
+                <a:solidFill>
+                  <a:srgbClr val="1B2330"/>
+                </a:solidFill>
+                <a:latin typeface="Montserrat"/>
+              </a:rPr>
+              <a:t>Enterrado → UNE 60310 y 60311</a:t>
+            </a:r>
+          </a:p>
+          <a:p>
+            <a:pPr>
+              <a:spcAft>
+                <a:spcPts val="1000"/>
+              </a:spcAft>
+            </a:pPr>
+            <a:r>
+              <a:rPr sz="1600" b="1" i="0">
+                <a:solidFill>
+                  <a:srgbClr val="2E3A80"/>
+                </a:solidFill>
+                <a:latin typeface="Montserrat"/>
+              </a:rPr>
+              <a:t>•  </a:t>
+            </a:r>
+            <a:r>
+              <a:rPr sz="1600" b="0" i="0">
+                <a:solidFill>
+                  <a:srgbClr val="1B2330"/>
+                </a:solidFill>
+                <a:latin typeface="Montserrat"/>
+              </a:rPr>
+              <a:t>Consulta el material al distribuidor</a:t>
+            </a:r>
+          </a:p>
+          <a:p>
+            <a:pPr>
+              <a:spcAft>
+                <a:spcPts val="1000"/>
+              </a:spcAft>
+            </a:pPr>
+            <a:r>
+              <a:rPr sz="1600" b="1" i="0">
+                <a:solidFill>
+                  <a:srgbClr val="2E3A80"/>
+                </a:solidFill>
+                <a:latin typeface="Montserrat"/>
+              </a:rPr>
+              <a:t>•  </a:t>
+            </a:r>
+            <a:r>
+              <a:rPr sz="1600" b="0" i="0">
+                <a:solidFill>
+                  <a:srgbClr val="1B2330"/>
+                </a:solidFill>
+                <a:latin typeface="Montserrat"/>
+              </a:rPr>
+              <a:t>Debe ser compatible con la red</a:t>
+            </a:r>
+          </a:p>
+        </p:txBody>
+      </p:sp>
+      <p:sp>
+        <p:nvSpPr>
+          <p:cNvPr id="8" name="imgph" descr="IMGQ:buried yellow gas pipe in trench"/>
+          <p:cNvSpPr/>
+          <p:nvPr/>
+        </p:nvSpPr>
+        <p:spPr>
+          <a:xfrm>
+            <a:off x="5806440" y="1051560"/>
+            <a:ext cx="5298947" cy="4629150"/>
+          </a:xfrm>
+          <a:prstGeom prst="roundRect">
+            <a:avLst/>
+          </a:prstGeom>
+          <a:solidFill>
+            <a:srgbClr val="F3F6FB"/>
+          </a:solidFill>
+          <a:ln w="12700">
+            <a:solidFill>
+              <a:srgbClr val="C7D2E6"/>
+            </a:solidFill>
+          </a:ln>
+          <a:effectLst/>
+        </p:spPr>
+        <p:style>
+          <a:lnRef idx="1">
+            <a:schemeClr val="accent1"/>
+          </a:lnRef>
+          <a:fillRef idx="3">
+            <a:schemeClr val="accent1"/>
+          </a:fillRef>
+          <a:effectRef idx="2">
+            <a:schemeClr val="accent1"/>
+          </a:effectRef>
+          <a:fontRef idx="minor">
+            <a:schemeClr val="lt1"/>
+          </a:fontRef>
+        </p:style>
+        <p:txBody>
+          <a:bodyPr rtlCol="0" anchor="ctr"/>
+          <a:lstStyle/>
+          <a:p>
+            <a:pPr algn="ctr"/>
+          </a:p>
+        </p:txBody>
+      </p:sp>
+      <p:sp>
+        <p:nvSpPr>
+          <p:cNvPr id="9" name="TextBox 8"/>
+          <p:cNvSpPr txBox="1"/>
+          <p:nvPr/>
+        </p:nvSpPr>
+        <p:spPr>
+          <a:xfrm>
+            <a:off x="6080760" y="2726055"/>
+            <a:ext cx="4750307" cy="1280160"/>
+          </a:xfrm>
+          <a:prstGeom prst="rect">
+            <a:avLst/>
+          </a:prstGeom>
+          <a:noFill/>
+        </p:spPr>
+        <p:txBody>
+          <a:bodyPr wrap="square">
+            <a:spAutoFit/>
+          </a:bodyPr>
+          <a:lstStyle/>
+          <a:p>
+            <a:pPr algn="ctr"/>
+            <a:r>
+              <a:rPr sz="1400" b="1" i="0">
+                <a:solidFill>
+                  <a:srgbClr val="64748B"/>
+                </a:solidFill>
+                <a:latin typeface="Montserrat"/>
+              </a:rPr>
+              <a:t>IMAGEN REALISTA</a:t>
+            </a:r>
+          </a:p>
+          <a:p>
+            <a:pPr algn="ctr"/>
+            <a:r>
+              <a:rPr sz="1100" b="0" i="1">
+                <a:solidFill>
+                  <a:srgbClr val="64748B"/>
+                </a:solidFill>
+                <a:latin typeface="Montserrat"/>
+              </a:rPr>
+              <a:t>buried yellow gas pipe in trench</a:t>
+            </a:r>
+          </a:p>
+        </p:txBody>
+      </p:sp>
+    </p:spTree>
+  </p:cSld>
+  <p:clrMapOvr>
+    <a:masterClrMapping/>
+  </p:clrMapOvr>
+</p:sld>
+</file>
+
+<file path=ppt/slides/slide16.xml><?xml version="1.0" encoding="utf-8"?>
+<p:sld xmlns:a="http://schemas.openxmlformats.org/drawingml/2006/main" xmlns:p="http://schemas.openxmlformats.org/presentationml/2006/main" xmlns:r="http://schemas.openxmlformats.org/officeDocument/2006/relationships">
+  <p:cSld>
+    <p:spTree>
+      <p:nvGrpSpPr>
+        <p:cNvPr id="1" name=""/>
+        <p:cNvGrpSpPr/>
+        <p:nvPr/>
+      </p:nvGrpSpPr>
+      <p:grpSpPr/>
+      <p:sp>
+        <p:nvSpPr>
+          <p:cNvPr id="2" name="Rectangle 1"/>
+          <p:cNvSpPr/>
+          <p:nvPr/>
+        </p:nvSpPr>
+        <p:spPr>
+          <a:xfrm>
+            <a:off x="0" y="0"/>
+            <a:ext cx="12191695" cy="6858000"/>
+          </a:xfrm>
+          <a:prstGeom prst="rect">
+            <a:avLst/>
+          </a:prstGeom>
+          <a:solidFill>
+            <a:srgbClr val="1E2761"/>
+          </a:solidFill>
+          <a:ln>
+            <a:noFill/>
+          </a:ln>
+          <a:effectLst/>
+        </p:spPr>
+        <p:style>
+          <a:lnRef idx="1">
+            <a:schemeClr val="accent1"/>
+          </a:lnRef>
+          <a:fillRef idx="3">
+            <a:schemeClr val="accent1"/>
+          </a:fillRef>
+          <a:effectRef idx="2">
+            <a:schemeClr val="accent1"/>
+          </a:effectRef>
+          <a:fontRef idx="minor">
+            <a:schemeClr val="lt1"/>
+          </a:fontRef>
+        </p:style>
+        <p:txBody>
+          <a:bodyPr rtlCol="0" anchor="ctr"/>
+          <a:lstStyle/>
+          <a:p>
+            <a:pPr algn="ctr"/>
+          </a:p>
+        </p:txBody>
+      </p:sp>
+      <p:sp>
+        <p:nvSpPr>
+          <p:cNvPr id="3" name="TextBox 2"/>
+          <p:cNvSpPr txBox="1"/>
+          <p:nvPr/>
+        </p:nvSpPr>
+        <p:spPr>
+          <a:xfrm>
+            <a:off x="822960" y="640080"/>
+            <a:ext cx="10515600" cy="457200"/>
+          </a:xfrm>
+          <a:prstGeom prst="rect">
+            <a:avLst/>
+          </a:prstGeom>
+          <a:noFill/>
+        </p:spPr>
+        <p:txBody>
+          <a:bodyPr wrap="square">
+            <a:spAutoFit/>
+          </a:bodyPr>
+          <a:lstStyle/>
+          <a:p>
+            <a:r>
+              <a:rPr sz="1400" b="1" i="0">
+                <a:solidFill>
+                  <a:srgbClr val="CADCFC"/>
+                </a:solidFill>
+                <a:latin typeface="Montserrat"/>
+              </a:rPr>
+              <a:t>LO QUE YA DOMINAS</a:t>
+            </a:r>
+          </a:p>
+        </p:txBody>
+      </p:sp>
+      <p:sp>
+        <p:nvSpPr>
+          <p:cNvPr id="4" name="TextBox 3"/>
+          <p:cNvSpPr txBox="1"/>
+          <p:nvPr/>
+        </p:nvSpPr>
+        <p:spPr>
+          <a:xfrm>
+            <a:off x="822960" y="1143000"/>
+            <a:ext cx="10515600" cy="1097280"/>
+          </a:xfrm>
+          <a:prstGeom prst="rect">
+            <a:avLst/>
+          </a:prstGeom>
+          <a:noFill/>
+        </p:spPr>
+        <p:txBody>
+          <a:bodyPr wrap="square">
+            <a:spAutoFit/>
+          </a:bodyPr>
+          <a:lstStyle/>
+          <a:p>
+            <a:r>
+              <a:rPr sz="3400" b="1" i="0">
+                <a:solidFill>
+                  <a:srgbClr val="FFFFFF"/>
+                </a:solidFill>
+                <a:latin typeface="Montserrat"/>
+              </a:rPr>
+              <a:t>Ya sabes diseñar la salida de humos</a:t>
+            </a:r>
+          </a:p>
+        </p:txBody>
+      </p:sp>
+      <p:sp>
+        <p:nvSpPr>
+          <p:cNvPr id="5" name="TextBox 4"/>
+          <p:cNvSpPr txBox="1"/>
+          <p:nvPr/>
+        </p:nvSpPr>
+        <p:spPr>
+          <a:xfrm>
+            <a:off x="822960" y="2514600"/>
+            <a:ext cx="10515600" cy="2834640"/>
+          </a:xfrm>
+          <a:prstGeom prst="rect">
+            <a:avLst/>
+          </a:prstGeom>
+          <a:noFill/>
+        </p:spPr>
+        <p:txBody>
+          <a:bodyPr wrap="square">
+            <a:spAutoFit/>
+          </a:bodyPr>
+          <a:lstStyle/>
+          <a:p>
+            <a:pPr>
+              <a:spcAft>
+                <a:spcPts val="1200"/>
+              </a:spcAft>
+            </a:pPr>
+            <a:r>
               <a:rPr sz="2000" b="1" i="0">
                 <a:solidFill>
-                  <a:srgbClr val="2E3A80"/>
+                  <a:srgbClr val="CADCFC"/>
                 </a:solidFill>
                 <a:latin typeface="Montserrat"/>
               </a:rPr>
               <a:t>✓  </a:t>
             </a:r>
             <a:r>
-              <a:rPr sz="2000" b="0" i="0">
-                <a:solidFill>
-                  <a:srgbClr val="1B2330"/>
-                </a:solidFill>
-                <a:latin typeface="Montserrat"/>
-              </a:rPr>
-              <a:t>Hasta 5 bar la 60670; por encima la 60620</a:t>
+              <a:rPr sz="1900" b="0" i="0">
+                <a:solidFill>
+                  <a:srgbClr val="FFFFFF"/>
+                </a:solidFill>
+                <a:latin typeface="Montserrat"/>
+              </a:rPr>
+              <a:t>ITC-ICG 07 manda: diseño, ejecución y uso</a:t>
+            </a:r>
+          </a:p>
+          <a:p>
+            <a:pPr>
+              <a:spcAft>
+                <a:spcPts val="1200"/>
+              </a:spcAft>
+            </a:pPr>
+            <a:r>
+              <a:rPr sz="2000" b="1" i="0">
+                <a:solidFill>
+                  <a:srgbClr val="CADCFC"/>
+                </a:solidFill>
+                <a:latin typeface="Montserrat"/>
+              </a:rPr>
+              <a:t>✓  </a:t>
+            </a:r>
+            <a:r>
+              <a:rPr sz="1900" b="0" i="0">
+                <a:solidFill>
+                  <a:srgbClr val="FFFFFF"/>
+                </a:solidFill>
+                <a:latin typeface="Montserrat"/>
+              </a:rPr>
+              <a:t>Humos por cubierta; fachada solo ≤ 70 y 24,4 kW</a:t>
+            </a:r>
+          </a:p>
+          <a:p>
+            <a:pPr>
+              <a:spcAft>
+                <a:spcPts val="1200"/>
+              </a:spcAft>
+            </a:pPr>
+            <a:r>
+              <a:rPr sz="2000" b="1" i="0">
+                <a:solidFill>
+                  <a:srgbClr val="CADCFC"/>
+                </a:solidFill>
+                <a:latin typeface="Montserrat"/>
+              </a:rPr>
+              <a:t>✓  </a:t>
+            </a:r>
+            <a:r>
+              <a:rPr sz="1900" b="0" i="0">
+                <a:solidFill>
+                  <a:srgbClr val="FFFFFF"/>
+                </a:solidFill>
+                <a:latin typeface="Montserrat"/>
+              </a:rPr>
+              <a:t>La presión decide la norma: 5 bar, la raya</a:t>
+            </a:r>
+          </a:p>
+          <a:p>
+            <a:pPr>
+              <a:spcAft>
+                <a:spcPts val="1200"/>
+              </a:spcAft>
+            </a:pPr>
+            <a:r>
+              <a:rPr sz="2000" b="1" i="0">
+                <a:solidFill>
+                  <a:srgbClr val="CADCFC"/>
+                </a:solidFill>
+                <a:latin typeface="Montserrat"/>
+              </a:rPr>
+              <a:t>✓  </a:t>
+            </a:r>
+            <a:r>
+              <a:rPr sz="1900" b="0" i="0">
+                <a:solidFill>
+                  <a:srgbClr val="FFFFFF"/>
+                </a:solidFill>
+                <a:latin typeface="Montserrat"/>
+              </a:rPr>
+              <a:t>Enterrado y grandes potencias, reglas propias</a:t>
+            </a:r>
+          </a:p>
+        </p:txBody>
+      </p:sp>
+      <p:sp>
+        <p:nvSpPr>
+          <p:cNvPr id="6" name="Rounded Rectangle 5"/>
+          <p:cNvSpPr/>
+          <p:nvPr/>
+        </p:nvSpPr>
+        <p:spPr>
+          <a:xfrm>
+            <a:off x="822960" y="5532120"/>
+            <a:ext cx="10515600" cy="777240"/>
+          </a:xfrm>
+          <a:prstGeom prst="roundRect">
+            <a:avLst/>
+          </a:prstGeom>
+          <a:solidFill>
+            <a:srgbClr val="2E3A80"/>
+          </a:solidFill>
+          <a:ln>
+            <a:noFill/>
+          </a:ln>
+          <a:effectLst/>
+        </p:spPr>
+        <p:style>
+          <a:lnRef idx="1">
+            <a:schemeClr val="accent1"/>
+          </a:lnRef>
+          <a:fillRef idx="3">
+            <a:schemeClr val="accent1"/>
+          </a:fillRef>
+          <a:effectRef idx="2">
+            <a:schemeClr val="accent1"/>
+          </a:effectRef>
+          <a:fontRef idx="minor">
+            <a:schemeClr val="lt1"/>
+          </a:fontRef>
+        </p:style>
+        <p:txBody>
+          <a:bodyPr rtlCol="0" anchor="ctr"/>
+          <a:lstStyle/>
+          <a:p>
+            <a:pPr algn="ctr"/>
+          </a:p>
+        </p:txBody>
+      </p:sp>
+      <p:sp>
+        <p:nvSpPr>
+          <p:cNvPr id="7" name="TextBox 6"/>
+          <p:cNvSpPr txBox="1"/>
+          <p:nvPr/>
+        </p:nvSpPr>
+        <p:spPr>
+          <a:xfrm>
+            <a:off x="1051560" y="5605272"/>
+            <a:ext cx="10058400" cy="640080"/>
+          </a:xfrm>
+          <a:prstGeom prst="rect">
+            <a:avLst/>
+          </a:prstGeom>
+          <a:noFill/>
+        </p:spPr>
+        <p:txBody>
+          <a:bodyPr wrap="square">
+            <a:spAutoFit/>
+          </a:bodyPr>
+          <a:lstStyle/>
+          <a:p>
+            <a:r>
+              <a:rPr sz="1500" b="1" i="1">
+                <a:solidFill>
+                  <a:srgbClr val="CADCFC"/>
+                </a:solidFill>
+                <a:latin typeface="Montserrat"/>
+              </a:rPr>
+              <a:t>Con esto ya colocas cada norma en su sitio. Vamos a por los papeles y la puesta en servicio.</a:t>
             </a:r>
           </a:p>
         </p:txBody>
@@ -6132,7 +7608,7 @@
                 </a:solidFill>
                 <a:latin typeface="Montserrat"/>
               </a:rPr>
-              <a:t>002 / 013</a:t>
+              <a:t>002 / 016</a:t>
             </a:r>
           </a:p>
         </p:txBody>
@@ -6281,7 +7757,7 @@
                 </a:solidFill>
                 <a:latin typeface="Montserrat"/>
               </a:rPr>
-              <a:t>5 bar</a:t>
+              <a:t>70</a:t>
             </a:r>
           </a:p>
         </p:txBody>
@@ -6316,7 +7792,7 @@
                 </a:solidFill>
                 <a:latin typeface="Montserrat"/>
               </a:rPr>
-              <a:t>frontera entre las dos normas</a:t>
+              <a:t>kW: tope para salir a fachada</a:t>
             </a:r>
           </a:p>
         </p:txBody>
@@ -6397,7 +7873,7 @@
                 </a:solidFill>
                 <a:latin typeface="Montserrat"/>
               </a:rPr>
-              <a:t>70 kW</a:t>
+              <a:t>5</a:t>
             </a:r>
           </a:p>
         </p:txBody>
@@ -6432,7 +7908,7 @@
                 </a:solidFill>
                 <a:latin typeface="Montserrat"/>
               </a:rPr>
-              <a:t>umbral de sala de máquinas</a:t>
+              <a:t>bar: frontera de norma UNE</a:t>
             </a:r>
           </a:p>
         </p:txBody>
@@ -6513,7 +7989,7 @@
                 </a:solidFill>
                 <a:latin typeface="Montserrat"/>
               </a:rPr>
-              <a:t>24,4 kW</a:t>
+              <a:t>24,4</a:t>
             </a:r>
           </a:p>
         </p:txBody>
@@ -6548,7 +8024,7 @@
                 </a:solidFill>
                 <a:latin typeface="Montserrat"/>
               </a:rPr>
-              <a:t>tope de tiro natural a fachada</a:t>
+              <a:t>kW: tiro natural solo para ACS</a:t>
             </a:r>
           </a:p>
         </p:txBody>
@@ -6645,7 +8121,7 @@
                 </a:solidFill>
                 <a:latin typeface="Montserrat"/>
               </a:rPr>
-              <a:t>003 / 013</a:t>
+              <a:t>003 / 016</a:t>
             </a:r>
           </a:p>
         </p:txBody>
@@ -6747,7 +8223,7 @@
                 </a:solidFill>
                 <a:latin typeface="Montserrat"/>
               </a:rPr>
-              <a:t>Para qué sirve la ITC-ICG 07</a:t>
+              <a:t>¿Qué regula la ITC-ICG 07?</a:t>
             </a:r>
           </a:p>
         </p:txBody>
@@ -6820,7 +8296,7 @@
                 </a:solidFill>
                 <a:latin typeface="Montserrat"/>
               </a:rPr>
-              <a:t>Instalaciones receptoras del artículo 2</a:t>
+              <a:t>Instalaciones receptoras de gas</a:t>
             </a:r>
           </a:p>
           <a:p>
@@ -6845,7 +8321,7 @@
                 </a:solidFill>
                 <a:latin typeface="Montserrat"/>
               </a:rPr>
-              <a:t>Incluye los locales que las contienen</a:t>
+              <a:t>También los locales y los aparatos</a:t>
             </a:r>
           </a:p>
           <a:p>
@@ -6870,14 +8346,14 @@
                 </a:solidFill>
                 <a:latin typeface="Montserrat"/>
               </a:rPr>
-              <a:t>También instala y revisa aparatos</a:t>
-            </a:r>
-          </a:p>
-        </p:txBody>
-      </p:sp>
-      <p:sp>
-        <p:nvSpPr>
-          <p:cNvPr id="8" name="imgph" descr="IMGQ:gas boiler installation kitchen"/>
+              <a:t>Fin: seguridad de personas y bienes</a:t>
+            </a:r>
+          </a:p>
+        </p:txBody>
+      </p:sp>
+      <p:sp>
+        <p:nvSpPr>
+          <p:cNvPr id="8" name="imgph" descr="IMGQ:gas boiler installation in kitchen"/>
           <p:cNvSpPr/>
           <p:nvPr/>
         </p:nvSpPr>
@@ -6963,7 +8439,7 @@
                 </a:solidFill>
                 <a:latin typeface="Montserrat"/>
               </a:rPr>
-              <a:t>gas boiler installation kitchen</a:t>
+              <a:t>gas boiler installation in kitchen</a:t>
             </a:r>
           </a:p>
         </p:txBody>
@@ -7060,7 +8536,7 @@
                 </a:solidFill>
                 <a:latin typeface="Montserrat"/>
               </a:rPr>
-              <a:t>004 / 013</a:t>
+              <a:t>004 / 016</a:t>
             </a:r>
           </a:p>
         </p:txBody>
@@ -7128,7 +8604,7 @@
                 </a:solidFill>
                 <a:latin typeface="Montserrat"/>
               </a:rPr>
-              <a:t>RECORDATORIO · TEMA 00</a:t>
+              <a:t>APARTADO 1 · CAMPO DE APLICACIÓN</a:t>
             </a:r>
           </a:p>
         </p:txBody>
@@ -7162,7 +8638,7 @@
                 </a:solidFill>
                 <a:latin typeface="Montserrat"/>
               </a:rPr>
-              <a:t>Qué es una instalación receptora</a:t>
+              <a:t>La instalación receptora</a:t>
             </a:r>
           </a:p>
         </p:txBody>
@@ -7210,7 +8686,7 @@
                 </a:solidFill>
                 <a:latin typeface="Montserrat"/>
               </a:rPr>
-              <a:t>De la acometida a la llave de aparato</a:t>
+              <a:t>De la llave de acometida (fuera)</a:t>
             </a:r>
           </a:p>
           <a:p>
@@ -7235,7 +8711,7 @@
                 </a:solidFill>
                 <a:latin typeface="Montserrat"/>
               </a:rPr>
-              <a:t>Acometida interior, común e individual</a:t>
+              <a:t>A la llave del aparato (dentro)</a:t>
             </a:r>
           </a:p>
           <a:p>
@@ -7260,7 +8736,7 @@
                 </a:solidFill>
                 <a:latin typeface="Montserrat"/>
               </a:rPr>
-              <a:t>Llave de acometida excluida</a:t>
+              <a:t>Tres tramos encajados</a:t>
             </a:r>
           </a:p>
           <a:p>
@@ -7285,14 +8761,14 @@
                 </a:solidFill>
                 <a:latin typeface="Montserrat"/>
               </a:rPr>
-              <a:t>Llaves de aparato incluidas</a:t>
-            </a:r>
-          </a:p>
-        </p:txBody>
-      </p:sp>
-      <p:sp>
-        <p:nvSpPr>
-          <p:cNvPr id="8" name="imgph" descr="IMGQ:gas meter cabinet building"/>
+              <a:t>Acometida interior, común, individual</a:t>
+            </a:r>
+          </a:p>
+        </p:txBody>
+      </p:sp>
+      <p:sp>
+        <p:nvSpPr>
+          <p:cNvPr id="8" name="imgph" descr="IMGQ:gas meter cabinet in building wall"/>
           <p:cNvSpPr/>
           <p:nvPr/>
         </p:nvSpPr>
@@ -7378,7 +8854,7 @@
                 </a:solidFill>
                 <a:latin typeface="Montserrat"/>
               </a:rPr>
-              <a:t>gas meter cabinet building</a:t>
+              <a:t>gas meter cabinet in building wall</a:t>
             </a:r>
           </a:p>
         </p:txBody>
@@ -7475,7 +8951,7 @@
                 </a:solidFill>
                 <a:latin typeface="Montserrat"/>
               </a:rPr>
-              <a:t>005 / 013</a:t>
+              <a:t>005 / 016</a:t>
             </a:r>
           </a:p>
         </p:txBody>
@@ -7543,7 +9019,7 @@
                 </a:solidFill>
                 <a:latin typeface="Montserrat"/>
               </a:rPr>
-              <a:t>APARTADO 2.1 · CHIMENEAS</a:t>
+              <a:t>APARTADO 2 · EVACUACIÓN DE HUMOS</a:t>
             </a:r>
           </a:p>
         </p:txBody>
@@ -7577,7 +9053,7 @@
                 </a:solidFill>
                 <a:latin typeface="Montserrat"/>
               </a:rPr>
-              <a:t>Diseño y material de chimeneas</a:t>
+              <a:t>Chimeneas: diseño y cálculo</a:t>
             </a:r>
           </a:p>
         </p:txBody>
@@ -7625,7 +9101,7 @@
                 </a:solidFill>
                 <a:latin typeface="Montserrat"/>
               </a:rPr>
-              <a:t>Diseño: UNE 123001 y EN 13384-1/-2</a:t>
+              <a:t>Obra nueva y rehabilitación</a:t>
             </a:r>
           </a:p>
           <a:p>
@@ -7650,7 +9126,7 @@
                 </a:solidFill>
                 <a:latin typeface="Montserrat"/>
               </a:rPr>
-              <a:t>Metálica: UNE-EN 1856-1</a:t>
+              <a:t>UNE 123001</a:t>
             </a:r>
           </a:p>
           <a:p>
@@ -7675,39 +9151,14 @@
                 </a:solidFill>
                 <a:latin typeface="Montserrat"/>
               </a:rPr>
-              <a:t>No metálica: NTE-ISH-74</a:t>
-            </a:r>
-          </a:p>
-          <a:p>
-            <a:pPr>
-              <a:spcAft>
-                <a:spcPts val="1000"/>
-              </a:spcAft>
-            </a:pPr>
-            <a:r>
-              <a:rPr sz="1600" b="1" i="0">
-                <a:solidFill>
-                  <a:srgbClr val="2E3A80"/>
-                </a:solidFill>
-                <a:latin typeface="Montserrat"/>
-              </a:rPr>
-              <a:t>•  </a:t>
-            </a:r>
-            <a:r>
-              <a:rPr sz="1600" b="0" i="0">
-                <a:solidFill>
-                  <a:srgbClr val="1B2330"/>
-                </a:solidFill>
-                <a:latin typeface="Montserrat"/>
-              </a:rPr>
-              <a:t>Obra nueva y rehabilitación</a:t>
-            </a:r>
-          </a:p>
-        </p:txBody>
-      </p:sp>
-      <p:sp>
-        <p:nvSpPr>
-          <p:cNvPr id="8" name="imgph" descr="IMGQ:stainless steel chimney flue roof"/>
+              <a:t>UNE-EN 13384-1 y 13384-2</a:t>
+            </a:r>
+          </a:p>
+        </p:txBody>
+      </p:sp>
+      <p:sp>
+        <p:nvSpPr>
+          <p:cNvPr id="8" name="imgph" descr="IMGQ:metal chimney flue on building roof"/>
           <p:cNvSpPr/>
           <p:nvPr/>
         </p:nvSpPr>
@@ -7793,7 +9244,7 @@
                 </a:solidFill>
                 <a:latin typeface="Montserrat"/>
               </a:rPr>
-              <a:t>stainless steel chimney flue roof</a:t>
+              <a:t>metal chimney flue on building roof</a:t>
             </a:r>
           </a:p>
         </p:txBody>
@@ -7890,7 +9341,7 @@
                 </a:solidFill>
                 <a:latin typeface="Montserrat"/>
               </a:rPr>
-              <a:t>006 / 013</a:t>
+              <a:t>006 / 016</a:t>
             </a:r>
           </a:p>
         </p:txBody>
@@ -7958,7 +9409,7 @@
                 </a:solidFill>
                 <a:latin typeface="Montserrat"/>
               </a:rPr>
-              <a:t>APARTADO 2.2 · EVACUACIÓN</a:t>
+              <a:t>APARTADO 2 · EVACUACIÓN DE HUMOS</a:t>
             </a:r>
           </a:p>
         </p:txBody>
@@ -7992,7 +9443,7 @@
                 </a:solidFill>
                 <a:latin typeface="Montserrat"/>
               </a:rPr>
-              <a:t>La regla: humos por cubierta</a:t>
+              <a:t>Chimeneas: materiales</a:t>
             </a:r>
           </a:p>
         </p:txBody>
@@ -8040,7 +9491,7 @@
                 </a:solidFill>
                 <a:latin typeface="Montserrat"/>
               </a:rPr>
-              <a:t>Regla general: salida por el tejado</a:t>
+              <a:t>Metálicas: UNE-EN 1856-1</a:t>
             </a:r>
           </a:p>
           <a:p>
@@ -8065,7 +9516,7 @@
                 </a:solidFill>
                 <a:latin typeface="Montserrat"/>
               </a:rPr>
-              <a:t>Excepción: fachada o patio</a:t>
+              <a:t>No metálicas: NTE-ISH-74</a:t>
             </a:r>
           </a:p>
           <a:p>
@@ -8090,14 +9541,14 @@
                 </a:solidFill>
                 <a:latin typeface="Montserrat"/>
               </a:rPr>
-              <a:t>Sin perjuicio del RITE</a:t>
-            </a:r>
-          </a:p>
-        </p:txBody>
-      </p:sp>
-      <p:sp>
-        <p:nvSpPr>
-          <p:cNvPr id="8" name="imgph" descr="IMGQ:chimney on house rooftop"/>
+              <a:t>Truco: 1856 es de metal</a:t>
+            </a:r>
+          </a:p>
+        </p:txBody>
+      </p:sp>
+      <p:sp>
+        <p:nvSpPr>
+          <p:cNvPr id="8" name="imgph" descr="IMGQ:stainless steel flue pipe section"/>
           <p:cNvSpPr/>
           <p:nvPr/>
         </p:nvSpPr>
@@ -8183,7 +9634,7 @@
                 </a:solidFill>
                 <a:latin typeface="Montserrat"/>
               </a:rPr>
-              <a:t>chimney on house rooftop</a:t>
+              <a:t>stainless steel flue pipe section</a:t>
             </a:r>
           </a:p>
         </p:txBody>
@@ -8280,7 +9731,7 @@
                 </a:solidFill>
                 <a:latin typeface="Montserrat"/>
               </a:rPr>
-              <a:t>007 / 013</a:t>
+              <a:t>007 / 016</a:t>
             </a:r>
           </a:p>
         </p:txBody>
@@ -8348,7 +9799,7 @@
                 </a:solidFill>
                 <a:latin typeface="Montserrat"/>
               </a:rPr>
-              <a:t>APARTADO 2.2 · EXCEPCIONES</a:t>
+              <a:t>APARTADO 2 · EVACUACIÓN DE HUMOS</a:t>
             </a:r>
           </a:p>
         </p:txBody>
@@ -8382,7 +9833,7 @@
                 </a:solidFill>
                 <a:latin typeface="Montserrat"/>
               </a:rPr>
-              <a:t>Cuándo se sale por fachada</a:t>
+              <a:t>La regla: por cubierta</a:t>
             </a:r>
           </a:p>
         </p:txBody>
@@ -8430,7 +9881,7 @@
                 </a:solidFill>
                 <a:latin typeface="Montserrat"/>
               </a:rPr>
-              <a:t>Estancos o tiro forzado ≤ 70 kW</a:t>
+              <a:t>Norma general: humos por el tejado</a:t>
             </a:r>
           </a:p>
           <a:p>
@@ -8455,7 +9906,7 @@
                 </a:solidFill>
                 <a:latin typeface="Montserrat"/>
               </a:rPr>
-              <a:t>Tiro natural solo ACS ≤ 24,4 kW</a:t>
+              <a:t>Reformas: si hay conducto adecuado</a:t>
             </a:r>
           </a:p>
           <a:p>
@@ -8480,14 +9931,14 @@
                 </a:solidFill>
                 <a:latin typeface="Montserrat"/>
               </a:rPr>
-              <a:t>Reforma: usa el conducto existente</a:t>
-            </a:r>
-          </a:p>
-        </p:txBody>
-      </p:sp>
-      <p:sp>
-        <p:nvSpPr>
-          <p:cNvPr id="8" name="imgph" descr="IMGQ:gas flue outlet on facade wall"/>
+              <a:t>se usa el conducto existente</a:t>
+            </a:r>
+          </a:p>
+        </p:txBody>
+      </p:sp>
+      <p:sp>
+        <p:nvSpPr>
+          <p:cNvPr id="8" name="imgph" descr="IMGQ:chimney outlets on rooftop"/>
           <p:cNvSpPr/>
           <p:nvPr/>
         </p:nvSpPr>
@@ -8573,7 +10024,7 @@
                 </a:solidFill>
                 <a:latin typeface="Montserrat"/>
               </a:rPr>
-              <a:t>gas flue outlet on facade wall</a:t>
+              <a:t>chimney outlets on rooftop</a:t>
             </a:r>
           </a:p>
         </p:txBody>
@@ -8670,7 +10121,7 @@
                 </a:solidFill>
                 <a:latin typeface="Montserrat"/>
               </a:rPr>
-              <a:t>008 / 013</a:t>
+              <a:t>008 / 016</a:t>
             </a:r>
           </a:p>
         </p:txBody>
@@ -8738,7 +10189,7 @@
                 </a:solidFill>
                 <a:latin typeface="Montserrat"/>
               </a:rPr>
-              <a:t>APARTADO 2.3 · PATIOS</a:t>
+              <a:t>APARTADO 2 · SALIDA A FACHADA</a:t>
             </a:r>
           </a:p>
         </p:txBody>
@@ -8772,7 +10223,7 @@
                 </a:solidFill>
                 <a:latin typeface="Montserrat"/>
               </a:rPr>
-              <a:t>Patios para aparatos conducidos</a:t>
+              <a:t>Excepción: salida al exterior</a:t>
             </a:r>
           </a:p>
         </p:txBody>
@@ -8820,7 +10271,7 @@
                 </a:solidFill>
                 <a:latin typeface="Montserrat"/>
               </a:rPr>
-              <a:t>Existente: 0,5 × NT, mín. 4 m²</a:t>
+              <a:t>Estancos o tiro forzado ≤ 70 kW</a:t>
             </a:r>
           </a:p>
           <a:p>
@@ -8845,7 +10296,7 @@
                 </a:solidFill>
                 <a:latin typeface="Montserrat"/>
               </a:rPr>
-              <a:t>Obra nueva: 1 × NT, más de 6 m²</a:t>
+              <a:t>Tiro natural solo ACS ≤ 24,4 kW</a:t>
             </a:r>
           </a:p>
           <a:p>
@@ -8870,39 +10321,14 @@
                 </a:solidFill>
                 <a:latin typeface="Montserrat"/>
               </a:rPr>
-              <a:t>Techado: abertura 25 %, mín. 4 m²</a:t>
-            </a:r>
-          </a:p>
-          <a:p>
-            <a:pPr>
-              <a:spcAft>
-                <a:spcPts val="1000"/>
-              </a:spcAft>
-            </a:pPr>
-            <a:r>
-              <a:rPr sz="1600" b="1" i="0">
-                <a:solidFill>
-                  <a:srgbClr val="2E3A80"/>
-                </a:solidFill>
-                <a:latin typeface="Montserrat"/>
-              </a:rPr>
-              <a:t>•  </a:t>
-            </a:r>
-            <a:r>
-              <a:rPr sz="1600" b="0" i="0">
-                <a:solidFill>
-                  <a:srgbClr val="1B2330"/>
-                </a:solidFill>
-                <a:latin typeface="Montserrat"/>
-              </a:rPr>
-              <a:t>NT = locales que dan al patio</a:t>
-            </a:r>
-          </a:p>
-        </p:txBody>
-      </p:sp>
-      <p:sp>
-        <p:nvSpPr>
-          <p:cNvPr id="8" name="imgph" descr="IMGQ:interior building ventilation courtyard"/>
+              <a:t>Sin perjuicio del RITE</a:t>
+            </a:r>
+          </a:p>
+        </p:txBody>
+      </p:sp>
+      <p:sp>
+        <p:nvSpPr>
+          <p:cNvPr id="8" name="imgph" descr="IMGQ:gas boiler flue outlet on facade wall"/>
           <p:cNvSpPr/>
           <p:nvPr/>
         </p:nvSpPr>
@@ -8988,7 +10414,7 @@
                 </a:solidFill>
                 <a:latin typeface="Montserrat"/>
               </a:rPr>
-              <a:t>interior building ventilation courtyard</a:t>
+              <a:t>gas boiler flue outlet on facade wall</a:t>
             </a:r>
           </a:p>
         </p:txBody>
@@ -9085,7 +10511,7 @@
                 </a:solidFill>
                 <a:latin typeface="Montserrat"/>
               </a:rPr>
-              <a:t>009 / 013</a:t>
+              <a:t>009 / 016</a:t>
             </a:r>
           </a:p>
         </p:txBody>
@@ -9153,7 +10579,7 @@
                 </a:solidFill>
                 <a:latin typeface="Montserrat"/>
               </a:rPr>
-              <a:t>APARTADO 2.4 · SALAS DE MÁQUINAS</a:t>
+              <a:t>APARTADO 2 · TIPOS DE APARATO</a:t>
             </a:r>
           </a:p>
         </p:txBody>
@@ -9187,7 +10613,7 @@
                 </a:solidFill>
                 <a:latin typeface="Montserrat"/>
               </a:rPr>
-              <a:t>Equipos de más de 70 kW</a:t>
+              <a:t>Estanco, tiro forzado, tiro natural</a:t>
             </a:r>
           </a:p>
         </p:txBody>
@@ -9235,7 +10661,7 @@
                 </a:solidFill>
                 <a:latin typeface="Montserrat"/>
               </a:rPr>
-              <a:t>&gt; 70 kW → sala de máquinas</a:t>
+              <a:t>Estanco: aire de fuera, humos fuera</a:t>
             </a:r>
           </a:p>
           <a:p>
@@ -9260,7 +10686,7 @@
                 </a:solidFill>
                 <a:latin typeface="Montserrat"/>
               </a:rPr>
-              <a:t>Norma UNE 60601</a:t>
+              <a:t>Tiro forzado: un ventilador empuja</a:t>
             </a:r>
           </a:p>
           <a:p>
@@ -9285,39 +10711,14 @@
                 </a:solidFill>
                 <a:latin typeface="Montserrat"/>
               </a:rPr>
-              <a:t>Absorción y cogeneración incluidas</a:t>
-            </a:r>
-          </a:p>
-          <a:p>
-            <a:pPr>
-              <a:spcAft>
-                <a:spcPts val="1000"/>
-              </a:spcAft>
-            </a:pPr>
-            <a:r>
-              <a:rPr sz="1600" b="1" i="0">
-                <a:solidFill>
-                  <a:srgbClr val="2E3A80"/>
-                </a:solidFill>
-                <a:latin typeface="Montserrat"/>
-              </a:rPr>
-              <a:t>•  </a:t>
-            </a:r>
-            <a:r>
-              <a:rPr sz="1600" b="0" i="0">
-                <a:solidFill>
-                  <a:srgbClr val="1B2330"/>
-                </a:solidFill>
-                <a:latin typeface="Montserrat"/>
-              </a:rPr>
-              <a:t>Potencia conjunta: se suma</a:t>
-            </a:r>
-          </a:p>
-        </p:txBody>
-      </p:sp>
-      <p:sp>
-        <p:nvSpPr>
-          <p:cNvPr id="8" name="imgph" descr="IMGQ:industrial gas boiler room"/>
+              <a:t>Tiro natural: suben solos por calor</a:t>
+            </a:r>
+          </a:p>
+        </p:txBody>
+      </p:sp>
+      <p:sp>
+        <p:nvSpPr>
+          <p:cNvPr id="8" name="imgph" descr="IMGQ:sealed combustion gas boiler with concentric flue"/>
           <p:cNvSpPr/>
           <p:nvPr/>
         </p:nvSpPr>
@@ -9403,7 +10804,7 @@
                 </a:solidFill>
                 <a:latin typeface="Montserrat"/>
               </a:rPr>
-              <a:t>industrial gas boiler room</a:t>
+              <a:t>sealed combustion gas boiler with concentric flue</a:t>
             </a:r>
           </a:p>
         </p:txBody>

--- a/Curso Gas B/04 - ITC-ICG 07 - Instalaciones receptoras de combustibles gaseosos/04 - ITC-ICG 07 - Instalaciones receptoras de combustibles gaseosos - Vídeo 1.pptx
+++ b/Curso Gas B/04 - ITC-ICG 07 - Instalaciones receptoras de combustibles gaseosos/04 - ITC-ICG 07 - Instalaciones receptoras de combustibles gaseosos - Vídeo 1.pptx
@@ -21,6 +21,7 @@
     <p:sldId id="269" r:id="rId21"/>
     <p:sldId id="270" r:id="rId22"/>
     <p:sldId id="271" r:id="rId23"/>
+    <p:sldId id="272" r:id="rId24"/>
   </p:sldIdLst>
   <p:sldSz cx="12191695" cy="6858000" type="screen4x3"/>
   <p:notesSz cx="6858000" cy="9144000"/>
@@ -592,12 +593,12 @@
           <a:lstStyle/>
           <a:p>
             <a:r>
-              <a:t>N1: ¿Qué tamaño tiene que tener el patio de ventilación?</a:t>
-            </a:r>
-          </a:p>
-          <a:p>
-            <a:r>
-              <a:t>N2: Depende de si el edificio es de siempre o de obra nueva, y son dos fórmulas que no debes mezclar. En un edificio ya existente, la superficie en planta del patio tiene que ser al menos cero coma cinco por ene te, y nunca menos de cuatro metros cuadrados. En obra nueva se exige el doble, uno por ene te, y siempre más de seis metros cuadrados. ¿Qué es ese ene te? Simplemente el número de locales o viviendas que tiran sus humos a ese patio; cuantos más aparatos desembocan, más grande tiene que ser. La idea de fondo: en obra nueva, como se diseña desde cero, se pide más holgura. Un patio corto se convierte en una trampa de gases donde los aparatos no tiran y se acaban apagando.</a:t>
+              <a:t>N1: ¿Y qué diferencia hay entre esos tres tipos?</a:t>
+            </a:r>
+          </a:p>
+          <a:p>
+            <a:r>
+              <a:t>N2: Vamos de lo más seguro a lo menos. Un aparato estanco coge el aire de fuera y echa los humos fuera por un conducto cerrado; no toca en ningún momento el aire de la habitación, por eso es el más seguro. Uno de tiro forzado lleva un ventilador que empuja los humos hacia afuera; ayuda a que salgan aunque el conducto sea largo. Y uno de tiro natural deja que los humos suban solos, simplemente porque están calientes y pesan menos, como el humo de una hoguera. Entiende esto y entiendes las cifras de antes: cuanto más control tiene el aparato sobre sus humos, más margen te da el reglamento para sacarlos por fachada. Por eso los estancos y de tiro forzado llegan a setenta y el tiro natural se queda en veinticuatro con cuatro y solo para agua caliente.</a:t>
             </a:r>
           </a:p>
         </p:txBody>
@@ -667,12 +668,12 @@
           <a:lstStyle/>
           <a:p>
             <a:r>
-              <a:t>N1: ¿Y si el patio está tapado por arriba?</a:t>
-            </a:r>
-          </a:p>
-          <a:p>
-            <a:r>
-              <a:t>N2: Entonces hay que dejar un hueco permanente al aire libre. Concretamente, el techado debe dejar libre una abertura de comunicación con el exterior de al menos el veinticinco por ciento de la sección en planta del patio, con un mínimo de cuatro metros cuadrados. Es puro sentido común: si tapas el patio y lo sellas del todo, los humos no tienen por dónde salir y se acumulan; sería una trampa de gases. Fíjate en la palabra permanente: no vale una ventana o una compuerta que alguien pueda cerrar un día de frío, tiene que estar siempre abierta. Una cuarta parte del patio abierta al cielo, como mínimo.</a:t>
+              <a:t>N1: ¿Qué tamaño tiene que tener el patio de ventilación?</a:t>
+            </a:r>
+          </a:p>
+          <a:p>
+            <a:r>
+              <a:t>N2: Depende de si el edificio es de siempre o de obra nueva, y son dos fórmulas que no debes mezclar. En un edificio ya existente, la superficie en planta del patio tiene que ser al menos cero coma cinco por ene te, y nunca menos de cuatro metros cuadrados. En obra nueva se exige el doble, uno por ene te, y siempre más de seis metros cuadrados. ¿Qué es ese ene te? Simplemente el número de locales o viviendas que tiran sus humos a ese patio; cuantos más aparatos desembocan, más grande tiene que ser. La idea de fondo: en obra nueva, como se diseña desde cero, se pide más holgura. Un patio corto se convierte en una trampa de gases donde los aparatos no tiran y se acaban apagando.</a:t>
             </a:r>
           </a:p>
         </p:txBody>
@@ -742,12 +743,12 @@
           <a:lstStyle/>
           <a:p>
             <a:r>
-              <a:t>N1: ¿Qué pasa cuando la caldera es muy grande?</a:t>
-            </a:r>
-          </a:p>
-          <a:p>
-            <a:r>
-              <a:t>N2: Ata este cabo, que el número mágico son setenta kilovatios. Por encima de setenta, una caldera de calefacción o de agua caliente ya no es un aparato doméstico cualquiera: es maquinaria seria que tiene que ir en una sala de máquinas con las condiciones de la UNE sesenta mil seiscientos uno. Lo mismo vale para los equipos de llama directa de refrigeración por absorción y para los de generación eléctrica o cogeneración, si juntos pasan de setenta. Y ojo a la palabra conjunta: las potencias se suman. Tres equipos de treinta kilovatios trabajando juntos son noventa, así que pasan de setenta y toca sala de máquinas. Truco: sesenta mil seiscientos uno igual a salas de calderas. Por debajo de setenta, la norma general es la sesenta mil seiscientos setenta, que vemos ahora.</a:t>
+              <a:t>N1: ¿Y si el patio está tapado por arriba?</a:t>
+            </a:r>
+          </a:p>
+          <a:p>
+            <a:r>
+              <a:t>N2: Entonces hay que dejar un hueco permanente al aire libre. Concretamente, el techado debe dejar libre una abertura de comunicación con el exterior de al menos el veinticinco por ciento de la sección en planta del patio, con un mínimo de cuatro metros cuadrados. Es puro sentido común: si tapas el patio y lo sellas del todo, los humos no tienen por dónde salir y se acumulan; sería una trampa de gases. Fíjate en la palabra permanente: no vale una ventana o una compuerta que alguien pueda cerrar un día de frío, tiene que estar siempre abierta. Una cuarta parte del patio abierta al cielo, como mínimo.</a:t>
             </a:r>
           </a:p>
         </p:txBody>
@@ -817,12 +818,12 @@
           <a:lstStyle/>
           <a:p>
             <a:r>
-              <a:t>N1: ¿Cómo sé qué norma técnica tengo que seguir?</a:t>
-            </a:r>
-          </a:p>
-          <a:p>
-            <a:r>
-              <a:t>N2: Lo decide la presión máxima de operación, y esta es de las preguntas más repetidas de todo el Gas B. Chuleta: hasta cinco bar, sigues la UNE sesenta mil seiscientos setenta, la de toda la vida para instalaciones receptoras normales; por encima de cinco bar, la UNE sesenta mil seiscientos veinte, la de alta presión. Como instalador de categoría be trabajarás casi siempre con la seiscientos setenta. Esa presión máxima de operación la verás escrita como eme o pe, del inglés, y es la presión más alta a la que la instalación trabaja de forma normal y continua; no la confundas con la de prueba ni con la de diseño. Memoriza el par: seiscientos setenta es baja presión hasta cinco bar; seiscientos veinte es alta presión por encima de cinco.</a:t>
+              <a:t>N1: ¿Qué pasa cuando la caldera es muy grande?</a:t>
+            </a:r>
+          </a:p>
+          <a:p>
+            <a:r>
+              <a:t>N2: Ata este cabo, que el número mágico son setenta kilovatios. Por encima de setenta, una caldera de calefacción o de agua caliente ya no es un aparato doméstico cualquiera: es maquinaria seria que tiene que ir en una sala de máquinas con las condiciones de la UNE sesenta mil seiscientos uno. Lo mismo vale para los equipos de llama directa de refrigeración por absorción y para los de generación eléctrica o cogeneración, si juntos pasan de setenta. Y ojo a la palabra conjunta: las potencias se suman. Tres equipos de treinta kilovatios trabajando juntos son noventa, así que pasan de setenta y toca sala de máquinas. Truco: sesenta mil seiscientos uno igual a salas de calderas. Por debajo de setenta, la norma general es la sesenta mil seiscientos setenta, que vemos ahora.</a:t>
             </a:r>
           </a:p>
         </p:txBody>
@@ -892,12 +893,12 @@
           <a:lstStyle/>
           <a:p>
             <a:r>
-              <a:t>N1: ¿Qué es un aparato de circuito abierto conducido y por qué no puedo ponerlo donde quiera?</a:t>
-            </a:r>
-          </a:p>
-          <a:p>
-            <a:r>
-              <a:t>N2: Vamos con calma. Circuito abierto quiere decir que el aparato coge el aire para quemar de la propia habitación; conducido quiere decir que los humos sí salen por un conducto. O sea, respira del cuarto pero echa el humo fuera. Como respira del cuarto, el reglamento no quiere que lo pongas en cualquier sitio: sí en galerías, terrazas, recintos o locales exclusivos para estos aparatos, y en locales de uso restringido como lavaderos o garajes individuales. En la cocina se puede, pero con una condición importante: que el extractor mecánico de la cocina no le robe el tiro al aparato, porque si el extractor tira más fuerte, invierte los humos y mete monóxido en la casa. Y la excepción que se pregunta: si el aparato es solo para agua caliente sanitaria, un calentador de toda la vida, estas limitaciones no le aplican.</a:t>
+              <a:t>N1: ¿Cómo sé qué norma técnica tengo que seguir?</a:t>
+            </a:r>
+          </a:p>
+          <a:p>
+            <a:r>
+              <a:t>N2: Lo decide la presión máxima de operación, y esta es de las preguntas más repetidas de todo el Gas B. Chuleta: hasta cinco bar, sigues la UNE sesenta mil seiscientos setenta, la de toda la vida para instalaciones receptoras normales; por encima de cinco bar, la UNE sesenta mil seiscientos veinte, la de alta presión. Como instalador de categoría be trabajarás casi siempre con la seiscientos setenta. Esa presión máxima de operación la verás escrita como eme o pe, del inglés, y es la presión más alta a la que la instalación trabaja de forma normal y continua; no la confundas con la de prueba ni con la de diseño. Memoriza el par: seiscientos setenta es baja presión hasta cinco bar; seiscientos veinte es alta presión por encima de cinco.</a:t>
             </a:r>
           </a:p>
         </p:txBody>
@@ -967,12 +968,12 @@
           <a:lstStyle/>
           <a:p>
             <a:r>
-              <a:t>N1: ¿Y si la tubería va enterrada, cambia algo?</a:t>
-            </a:r>
-          </a:p>
-          <a:p>
-            <a:r>
-              <a:t>N2: Cambia bastante. Cuando la tubería va bajo tierra ya no valen las reglas de la tubería vista; se aplican las normas de acometidas, la UNE sesenta mil trescientos diez y la sesenta mil trescientos once. Truco corto: enterrado igual a trescientos diez y trescientos once. Y aquí un detalle práctico que cae en examen: antes de diseñar una acometida interior enterrada, tienes que preguntar al distribuidor de qué material es su red, porque tu tubería tiene que ser compatible con ella. No puedes unir bajo tierra cualquier material con cualquier otro, porque una unión mal casada se corroe y acaba en una fuga que no ves hasta que huele. Nunca improvises el material enterrado sin ese dato.</a:t>
+              <a:t>N1: ¿Qué es un aparato de circuito abierto conducido y por qué no puedo ponerlo donde quiera?</a:t>
+            </a:r>
+          </a:p>
+          <a:p>
+            <a:r>
+              <a:t>N2: Vamos con calma. Circuito abierto quiere decir que el aparato coge el aire para quemar de la propia habitación; conducido quiere decir que los humos sí salen por un conducto. O sea, respira del cuarto pero echa el humo fuera. Como respira del cuarto, el reglamento no quiere que lo pongas en cualquier sitio: sí en galerías, terrazas, recintos o locales exclusivos para estos aparatos, y en locales de uso restringido como lavaderos o garajes individuales. En la cocina se puede, pero con una condición importante: que el extractor mecánico de la cocina no le robe el tiro al aparato, porque si el extractor tira más fuerte, invierte los humos y mete monóxido en la casa. Y la excepción que se pregunta: si el aparato es solo para agua caliente sanitaria, un calentador de toda la vida, estas limitaciones no le aplican.</a:t>
             </a:r>
           </a:p>
         </p:txBody>
@@ -1042,6 +1043,81 @@
           <a:lstStyle/>
           <a:p>
             <a:r>
+              <a:t>N1: ¿Y si la tubería va enterrada, cambia algo?</a:t>
+            </a:r>
+          </a:p>
+          <a:p>
+            <a:r>
+              <a:t>N2: Cambia bastante. Cuando la tubería va bajo tierra ya no valen las reglas de la tubería vista; se aplican las normas de acometidas, la UNE sesenta mil trescientos diez y la sesenta mil trescientos once. Truco corto: enterrado igual a trescientos diez y trescientos once. Y aquí un detalle práctico que cae en examen: antes de diseñar una acometida interior enterrada, tienes que preguntar al distribuidor de qué material es su red, porque tu tubería tiene que ser compatible con ella. No puedes unir bajo tierra cualquier material con cualquier otro, porque una unión mal casada se corroe y acaba en una fuga que no ves hasta que huele. Nunca improvises el material enterrado sin ese dato.</a:t>
+            </a:r>
+          </a:p>
+        </p:txBody>
+      </p:sp>
+      <p:sp>
+        <p:nvSpPr>
+          <p:cNvPr id="4" name="Slide Number Placeholder 3"/>
+          <p:cNvSpPr>
+            <a:spLocks noGrp="1"/>
+          </p:cNvSpPr>
+          <p:nvPr>
+            <p:ph type="sldNum" idx="5" sz="quarter"/>
+          </p:nvPr>
+        </p:nvSpPr>
+        <p:spPr/>
+      </p:sp>
+    </p:spTree>
+  </p:cSld>
+  <p:clrMapOvr>
+    <a:masterClrMapping/>
+  </p:clrMapOvr>
+</p:notes>
+</file>
+
+<file path=ppt/notesSlides/notesSlide17.xml><?xml version="1.0" encoding="utf-8"?>
+<p:notes xmlns:a="http://schemas.openxmlformats.org/drawingml/2006/main" xmlns:p="http://schemas.openxmlformats.org/presentationml/2006/main" xmlns:r="http://schemas.openxmlformats.org/officeDocument/2006/relationships">
+  <p:cSld>
+    <p:spTree>
+      <p:nvGrpSpPr>
+        <p:cNvPr id="1" name=""/>
+        <p:cNvGrpSpPr/>
+        <p:nvPr/>
+      </p:nvGrpSpPr>
+      <p:grpSpPr>
+        <a:xfrm>
+          <a:off x="0" y="0"/>
+          <a:ext cx="0" cy="0"/>
+          <a:chOff x="0" y="0"/>
+          <a:chExt cx="0" cy="0"/>
+        </a:xfrm>
+      </p:grpSpPr>
+      <p:sp>
+        <p:nvSpPr>
+          <p:cNvPr id="2" name="Slide Image Placeholder 1"/>
+          <p:cNvSpPr>
+            <a:spLocks noGrp="1"/>
+          </p:cNvSpPr>
+          <p:nvPr>
+            <p:ph type="sldImg" idx="2"/>
+          </p:nvPr>
+        </p:nvSpPr>
+        <p:spPr/>
+      </p:sp>
+      <p:sp>
+        <p:nvSpPr>
+          <p:cNvPr id="3" name="Notes Placeholder 2"/>
+          <p:cNvSpPr>
+            <a:spLocks noGrp="1"/>
+          </p:cNvSpPr>
+          <p:nvPr>
+            <p:ph type="body" idx="3" sz="quarter"/>
+          </p:nvPr>
+        </p:nvSpPr>
+        <p:spPr/>
+        <p:txBody>
+          <a:bodyPr/>
+          <a:lstStyle/>
+          <a:p>
+            <a:r>
               <a:t>N1: Cerramos fuerte. ¿Qué me tengo que llevar de este vídeo?</a:t>
             </a:r>
           </a:p>
@@ -1200,16 +1276,7 @@
         <p:txBody>
           <a:bodyPr/>
           <a:lstStyle/>
-          <a:p>
-            <a:r>
-              <a:t>N1: ¿Esto es solo para las tuberías?</a:t>
-            </a:r>
-          </a:p>
-          <a:p>
-            <a:r>
-              <a:t>N2: Buena pregunta, y la respuesta es que no, va mucho más allá. Fíjate en tres palabras que aparecen juntas: diseño, ejecución y utilización. Eso significa que la instrucción no solo dice cómo se monta la instalación, sino también cómo se proyecta antes y cómo se usa y se mantiene después. Es el manual completo, de la cuna a la sepultura. Y ahora el detalle que se pregunta: además de las tuberías, regula los locales donde va todo, la cocina, el cuarto del contador, la sala de calderas, y también los aparatos que enchufas al final. Ejemplo de obra: si la caldera está bien montada pero la cocina no ventila como toca, la instalación no cumple, porque el local también entra en la norma.</a:t>
-            </a:r>
-          </a:p>
+          <a:p/>
         </p:txBody>
       </p:sp>
       <p:sp>
@@ -1277,12 +1344,12 @@
           <a:lstStyle/>
           <a:p>
             <a:r>
-              <a:t>N1: ¿Y qué es exactamente la instalación receptora?</a:t>
-            </a:r>
-          </a:p>
-          <a:p>
-            <a:r>
-              <a:t>N2: Recupéralo del tema del reglamento: es todo el conjunto de tuberías y accesorios que va desde la llave de acometida, que se queda fuera y no cuenta, hasta las llaves de conexión de cada aparato, que sí cuentan. En el caso más completo tiene tres tramos metidos uno dentro de otro: primero la acometida interior, que entra de la calle al edificio; luego la instalación común, el montante que sube por el edificio; y por último la instalación individual, la de dentro de cada vivienda. La ITC-ICG cero siete es la que pone las reglas a todo ese conjunto. Si no tienes claros los tres tramos, párate un momento y repásalos, porque los vamos a usar todo el rato.</a:t>
+              <a:t>N1: ¿Esto es solo para las tuberías?</a:t>
+            </a:r>
+          </a:p>
+          <a:p>
+            <a:r>
+              <a:t>N2: Buena pregunta, y la respuesta es que no, va mucho más allá. Fíjate en tres palabras que aparecen juntas: diseño, ejecución y utilización. Eso significa que la instrucción no solo dice cómo se monta la instalación, sino también cómo se proyecta antes y cómo se usa y se mantiene después. Es el manual completo, de la cuna a la sepultura. Y ahora el detalle que se pregunta: además de las tuberías, regula los locales donde va todo, la cocina, el cuarto del contador, la sala de calderas, y también los aparatos que enchufas al final. Ejemplo de obra: si la caldera está bien montada pero la cocina no ventila como toca, la instalación no cumple, porque el local también entra en la norma.</a:t>
             </a:r>
           </a:p>
         </p:txBody>
@@ -1352,12 +1419,12 @@
           <a:lstStyle/>
           <a:p>
             <a:r>
-              <a:t>N1: ¿Tengo que aprenderme a calcular esas normas?</a:t>
-            </a:r>
-          </a:p>
-          <a:p>
-            <a:r>
-              <a:t>N2: Tranquilo, no. Nadie te va a pedir que calcules una chimenea de memoria. Lo que sí tienes que saber es quién manda en cada cosa. Para diseñar y calcular la chimenea de un edificio nuevo o rehabilitado, mandan tres normas: la UNE ciento veintitrés mil uno, y las dos UNE-EN trece mil trescientos ochenta y cuatro, la uno y la dos. Piensa que es como el plano de cálculo: te dice qué diámetro y qué tiro necesita la chimenea para que los humos salgan bien y no se te devuelvan a la vivienda. En el examen te preguntan la referencia de la norma, no el número final del cálculo.</a:t>
+              <a:t>N1: ¿Y qué es exactamente la instalación receptora?</a:t>
+            </a:r>
+          </a:p>
+          <a:p>
+            <a:r>
+              <a:t>N2: Recupéralo del tema del reglamento: es todo el conjunto de tuberías y accesorios que va desde la llave de acometida, que se queda fuera y no cuenta, hasta las llaves de conexión de cada aparato, que sí cuentan. En el caso más completo tiene tres tramos metidos uno dentro de otro: primero la acometida interior, que entra de la calle al edificio; luego la instalación común, el montante que sube por el edificio; y por último la instalación individual, la de dentro de cada vivienda. La ITC-ICG cero siete es la que pone las reglas a todo ese conjunto. Si no tienes claros los tres tramos, párate un momento y repásalos, porque los vamos a usar todo el rato.</a:t>
             </a:r>
           </a:p>
         </p:txBody>
@@ -1427,12 +1494,12 @@
           <a:lstStyle/>
           <a:p>
             <a:r>
-              <a:t>N1: ¿Y cómo distingo qué norma es para el material?</a:t>
-            </a:r>
-          </a:p>
-          <a:p>
-            <a:r>
-              <a:t>N2: Aquí hay solo dos opciones y un truco. Si la chimenea es metálica, normalmente de acero inoxidable, el material lo manda la UNE-EN mil ochocientos cincuenta y seis guion uno. Si no es metálica, por ejemplo de obra o cerámica, entonces la ene te e, ese hache, setenta y cuatro. El truco para no fallar: mil ochocientos cincuenta y seis es de metal. Repítelo un par de veces y ya no se te olvida. Por qué importa: una chimenea de un material que no aguanta la temperatura o los ácidos de la condensación se degrada, y una chimenea rota deja escapar humos con monóxido dentro del edificio.</a:t>
+              <a:t>N1: ¿Tengo que aprenderme a calcular esas normas?</a:t>
+            </a:r>
+          </a:p>
+          <a:p>
+            <a:r>
+              <a:t>N2: Tranquilo, no. Nadie te va a pedir que calcules una chimenea de memoria. Lo que sí tienes que saber es quién manda en cada cosa. Para diseñar y calcular la chimenea de un edificio nuevo o rehabilitado, mandan tres normas: la UNE ciento veintitrés mil uno, y las dos UNE-EN trece mil trescientos ochenta y cuatro, la uno y la dos. Piensa que es como el plano de cálculo: te dice qué diámetro y qué tiro necesita la chimenea para que los humos salgan bien y no se te devuelvan a la vivienda. En el examen te preguntan la referencia de la norma, no el número final del cálculo.</a:t>
             </a:r>
           </a:p>
         </p:txBody>
@@ -1502,12 +1569,12 @@
           <a:lstStyle/>
           <a:p>
             <a:r>
-              <a:t>N1: ¿Por dónde salen los humos normalmente?</a:t>
-            </a:r>
-          </a:p>
-          <a:p>
-            <a:r>
-              <a:t>N2: La regla general es fácil y conviene grabarla: los productos de la combustión salen por cubierta, es decir, por el tejado. Esa es la forma segura, porque arriba se dispersan y no molestan a nadie. Hay una excepción práctica para reformas: si el edificio ya tiene un conducto de evacuación que sirve para el nuevo aparato y cumple la reglamentación de hoy, aprovechas ese conducto que ya existe en lugar de abrir uno nuevo. Ejemplo de obra: cambias una caldera vieja por una nueva compatible y el humero de siempre vale, pues se reutiliza. Ahora bien, hay casos en que se permite sacar por fachada, y eso lo vemos en la siguiente.</a:t>
+              <a:t>N1: ¿Y cómo distingo qué norma es para el material?</a:t>
+            </a:r>
+          </a:p>
+          <a:p>
+            <a:r>
+              <a:t>N2: Aquí hay solo dos opciones y un truco. Si la chimenea es metálica, normalmente de acero inoxidable, el material lo manda la UNE-EN mil ochocientos cincuenta y seis guion uno. Si no es metálica, por ejemplo de obra o cerámica, entonces la ene te e, ese hache, setenta y cuatro. El truco para no fallar: mil ochocientos cincuenta y seis es de metal. Repítelo un par de veces y ya no se te olvida. Por qué importa: una chimenea de un material que no aguanta la temperatura o los ácidos de la condensación se degrada, y una chimenea rota deja escapar humos con monóxido dentro del edificio.</a:t>
             </a:r>
           </a:p>
         </p:txBody>
@@ -1577,12 +1644,12 @@
           <a:lstStyle/>
           <a:p>
             <a:r>
-              <a:t>N1: ¿Cuándo puedo sacar los humos por la pared en vez de por el tejado?</a:t>
-            </a:r>
-          </a:p>
-          <a:p>
-            <a:r>
-              <a:t>N2: Solo en dos casos pequeños y seguros, y estas dos cifras son de las estrella. Uno: aparatos estancos o de tiro forzado con potencia igual o menor de setenta kilovatios. Dos: aparatos de tiro natural que sirvan únicamente para agua caliente sanitaria, con potencia igual o menor de veinticuatro con cuatro kilovatios. Fíjate en la lógica: al tiro natural, que es el más primitivo, solo se le deja si es exclusivo de agua caliente y muy pequeño; a los estancos y de tiro forzado, que controlan mejor los humos, se les deja hasta setenta. Y una coletilla que se repite: sin perjuicio del RITE, que significa que aunque el gas te lo permita, el reglamento de calefacción puede poner condiciones extra. No se contradicen, se suman.</a:t>
+              <a:t>N1: ¿Por dónde salen los humos normalmente?</a:t>
+            </a:r>
+          </a:p>
+          <a:p>
+            <a:r>
+              <a:t>N2: La regla general es fácil y conviene grabarla: los productos de la combustión salen por cubierta, es decir, por el tejado. Esa es la forma segura, porque arriba se dispersan y no molestan a nadie. Hay una excepción práctica para reformas: si el edificio ya tiene un conducto de evacuación que sirve para el nuevo aparato y cumple la reglamentación de hoy, aprovechas ese conducto que ya existe en lugar de abrir uno nuevo. Ejemplo de obra: cambias una caldera vieja por una nueva compatible y el humero de siempre vale, pues se reutiliza. Ahora bien, hay casos en que se permite sacar por fachada, y eso lo vemos en la siguiente.</a:t>
             </a:r>
           </a:p>
         </p:txBody>
@@ -1652,12 +1719,12 @@
           <a:lstStyle/>
           <a:p>
             <a:r>
-              <a:t>N1: ¿Y qué diferencia hay entre esos tres tipos?</a:t>
-            </a:r>
-          </a:p>
-          <a:p>
-            <a:r>
-              <a:t>N2: Vamos de lo más seguro a lo menos. Un aparato estanco coge el aire de fuera y echa los humos fuera por un conducto cerrado; no toca en ningún momento el aire de la habitación, por eso es el más seguro. Uno de tiro forzado lleva un ventilador que empuja los humos hacia afuera; ayuda a que salgan aunque el conducto sea largo. Y uno de tiro natural deja que los humos suban solos, simplemente porque están calientes y pesan menos, como el humo de una hoguera. Entiende esto y entiendes las cifras de antes: cuanto más control tiene el aparato sobre sus humos, más margen te da el reglamento para sacarlos por fachada. Por eso los estancos y de tiro forzado llegan a setenta y el tiro natural se queda en veinticuatro con cuatro y solo para agua caliente.</a:t>
+              <a:t>N1: ¿Cuándo puedo sacar los humos por la pared en vez de por el tejado?</a:t>
+            </a:r>
+          </a:p>
+          <a:p>
+            <a:r>
+              <a:t>N2: Solo en dos casos pequeños y seguros, y estas dos cifras son de las estrella. Uno: aparatos estancos o de tiro forzado con potencia igual o menor de setenta kilovatios. Dos: aparatos de tiro natural que sirvan únicamente para agua caliente sanitaria, con potencia igual o menor de veinticuatro con cuatro kilovatios. Fíjate en la lógica: al tiro natural, que es el más primitivo, solo se le deja si es exclusivo de agua caliente y muy pequeño; a los estancos y de tiro forzado, que controlan mejor los humos, se les deja hasta setenta. Y una coletilla que se repite: sin perjuicio del RITE, que significa que aunque el gas te lo permita, el reglamento de calefacción puede poner condiciones extra. No se contradicen, se suman.</a:t>
             </a:r>
           </a:p>
         </p:txBody>
@@ -4732,7 +4799,7 @@
             <a:r>
               <a:rPr sz="1400" b="1" i="0">
                 <a:solidFill>
-                  <a:srgbClr val="CADCFC"/>
+                  <a:srgbClr val="F4A24C"/>
                 </a:solidFill>
                 <a:latin typeface="Montserrat"/>
               </a:rPr>
@@ -4743,13 +4810,57 @@
       </p:sp>
       <p:sp>
         <p:nvSpPr>
-          <p:cNvPr id="4" name="TextBox 3"/>
+          <p:cNvPr id="4" name="Rounded Rectangle 3"/>
+          <p:cNvSpPr/>
+          <p:nvPr/>
+        </p:nvSpPr>
+        <p:spPr>
+          <a:xfrm>
+            <a:off x="868680" y="2057400"/>
+            <a:ext cx="1463040" cy="82296"/>
+          </a:xfrm>
+          <a:prstGeom prst="roundRect">
+            <a:avLst/>
+          </a:prstGeom>
+          <a:solidFill>
+            <a:srgbClr val="E8801A"/>
+          </a:solidFill>
+          <a:ln>
+            <a:noFill/>
+          </a:ln>
+          <a:effectLst/>
+        </p:spPr>
+        <p:style>
+          <a:lnRef idx="1">
+            <a:schemeClr val="accent1"/>
+          </a:lnRef>
+          <a:fillRef idx="3">
+            <a:schemeClr val="accent1"/>
+          </a:fillRef>
+          <a:effectRef idx="2">
+            <a:schemeClr val="accent1"/>
+          </a:effectRef>
+          <a:fontRef idx="minor">
+            <a:schemeClr val="lt1"/>
+          </a:fontRef>
+        </p:style>
+        <p:txBody>
+          <a:bodyPr rtlCol="0" anchor="ctr"/>
+          <a:lstStyle/>
+          <a:p>
+            <a:pPr algn="ctr"/>
+          </a:p>
+        </p:txBody>
+      </p:sp>
+      <p:sp>
+        <p:nvSpPr>
+          <p:cNvPr id="5" name="TextBox 4"/>
           <p:cNvSpPr txBox="1"/>
           <p:nvPr/>
         </p:nvSpPr>
         <p:spPr>
           <a:xfrm>
-            <a:off x="822960" y="2194560"/>
+            <a:off x="822960" y="2286000"/>
             <a:ext cx="10515600" cy="2011680"/>
           </a:xfrm>
           <a:prstGeom prst="rect">
@@ -4788,7 +4899,7 @@
       </p:sp>
       <p:sp>
         <p:nvSpPr>
-          <p:cNvPr id="5" name="TextBox 4"/>
+          <p:cNvPr id="6" name="TextBox 5"/>
           <p:cNvSpPr txBox="1"/>
           <p:nvPr/>
         </p:nvSpPr>
@@ -4912,7 +5023,7 @@
                 </a:solidFill>
                 <a:latin typeface="Montserrat"/>
               </a:rPr>
-              <a:t>010 / 016</a:t>
+              <a:t>010 / 017</a:t>
             </a:r>
           </a:p>
         </p:txBody>
@@ -4960,7 +5071,7 @@
         <p:spPr>
           <a:xfrm>
             <a:off x="822960" y="457200"/>
-            <a:ext cx="8229600" cy="365760"/>
+            <a:ext cx="10058400" cy="365760"/>
           </a:xfrm>
           <a:prstGeom prst="rect">
             <a:avLst/>
@@ -4974,13 +5085,13 @@
           <a:lstStyle/>
           <a:p>
             <a:r>
-              <a:rPr sz="1200" b="1" i="0">
-                <a:solidFill>
-                  <a:srgbClr val="64748B"/>
-                </a:solidFill>
-                <a:latin typeface="Montserrat"/>
-              </a:rPr>
-              <a:t>APARTADO 2 · PATIOS DE VENTILACIÓN</a:t>
+              <a:rPr sz="1300" b="1" i="0">
+                <a:solidFill>
+                  <a:srgbClr val="E8801A"/>
+                </a:solidFill>
+                <a:latin typeface="Montserrat"/>
+              </a:rPr>
+              <a:t>APARTADO 2 · TIPOS DE APARATO</a:t>
             </a:r>
           </a:p>
         </p:txBody>
@@ -5008,26 +5119,70 @@
           <a:lstStyle/>
           <a:p>
             <a:r>
-              <a:rPr sz="2700" b="1" i="0">
+              <a:rPr sz="2800" b="1" i="0">
                 <a:solidFill>
                   <a:srgbClr val="1E2761"/>
                 </a:solidFill>
                 <a:latin typeface="Montserrat"/>
               </a:rPr>
-              <a:t>Patios para aparatos conducidos</a:t>
-            </a:r>
-          </a:p>
-        </p:txBody>
-      </p:sp>
-      <p:sp>
-        <p:nvSpPr>
-          <p:cNvPr id="7" name="TextBox 6"/>
+              <a:t>Estanco, tiro forzado, tiro natural</a:t>
+            </a:r>
+          </a:p>
+        </p:txBody>
+      </p:sp>
+      <p:sp>
+        <p:nvSpPr>
+          <p:cNvPr id="7" name="Rounded Rectangle 6"/>
+          <p:cNvSpPr/>
+          <p:nvPr/>
+        </p:nvSpPr>
+        <p:spPr>
+          <a:xfrm>
+            <a:off x="868680" y="1627632"/>
+            <a:ext cx="2011680" cy="73152"/>
+          </a:xfrm>
+          <a:prstGeom prst="roundRect">
+            <a:avLst/>
+          </a:prstGeom>
+          <a:solidFill>
+            <a:srgbClr val="E8801A"/>
+          </a:solidFill>
+          <a:ln>
+            <a:noFill/>
+          </a:ln>
+          <a:effectLst/>
+        </p:spPr>
+        <p:style>
+          <a:lnRef idx="1">
+            <a:schemeClr val="accent1"/>
+          </a:lnRef>
+          <a:fillRef idx="3">
+            <a:schemeClr val="accent1"/>
+          </a:fillRef>
+          <a:effectRef idx="2">
+            <a:schemeClr val="accent1"/>
+          </a:effectRef>
+          <a:fontRef idx="minor">
+            <a:schemeClr val="lt1"/>
+          </a:fontRef>
+        </p:style>
+        <p:txBody>
+          <a:bodyPr rtlCol="0" anchor="ctr"/>
+          <a:lstStyle/>
+          <a:p>
+            <a:pPr algn="ctr"/>
+          </a:p>
+        </p:txBody>
+      </p:sp>
+      <p:sp>
+        <p:nvSpPr>
+          <p:cNvPr id="8" name="TextBox 7"/>
           <p:cNvSpPr txBox="1"/>
           <p:nvPr/>
         </p:nvSpPr>
         <p:spPr>
           <a:xfrm>
-            <a:off x="822960" y="1920240"/>
+            <a:off x="822960" y="1965960"/>
             <a:ext cx="4983480" cy="4206240"/>
           </a:xfrm>
           <a:prstGeom prst="rect">
@@ -5043,17 +5198,17 @@
           <a:p>
             <a:pPr>
               <a:spcAft>
-                <a:spcPts val="1000"/>
+                <a:spcPts val="1100"/>
               </a:spcAft>
             </a:pPr>
             <a:r>
               <a:rPr sz="1600" b="1" i="0">
                 <a:solidFill>
-                  <a:srgbClr val="2E3A80"/>
-                </a:solidFill>
-                <a:latin typeface="Montserrat"/>
-              </a:rPr>
-              <a:t>•  </a:t>
+                  <a:srgbClr val="E8801A"/>
+                </a:solidFill>
+                <a:latin typeface="Montserrat"/>
+              </a:rPr>
+              <a:t>▸  </a:t>
             </a:r>
             <a:r>
               <a:rPr sz="1600" b="0" i="0">
@@ -5062,23 +5217,23 @@
                 </a:solidFill>
                 <a:latin typeface="Montserrat"/>
               </a:rPr>
-              <a:t>Edificio existente: 0,5 × NT (mín. 4 m²)</a:t>
+              <a:t>Estanco: aire de fuera, humos fuera</a:t>
             </a:r>
           </a:p>
           <a:p>
             <a:pPr>
               <a:spcAft>
-                <a:spcPts val="1000"/>
+                <a:spcPts val="1100"/>
               </a:spcAft>
             </a:pPr>
             <a:r>
               <a:rPr sz="1600" b="1" i="0">
                 <a:solidFill>
-                  <a:srgbClr val="2E3A80"/>
-                </a:solidFill>
-                <a:latin typeface="Montserrat"/>
-              </a:rPr>
-              <a:t>•  </a:t>
+                  <a:srgbClr val="E8801A"/>
+                </a:solidFill>
+                <a:latin typeface="Montserrat"/>
+              </a:rPr>
+              <a:t>▸  </a:t>
             </a:r>
             <a:r>
               <a:rPr sz="1600" b="0" i="0">
@@ -5087,23 +5242,23 @@
                 </a:solidFill>
                 <a:latin typeface="Montserrat"/>
               </a:rPr>
-              <a:t>Obra nueva: 1 × NT (más de 6 m²)</a:t>
+              <a:t>Tiro forzado: un ventilador empuja</a:t>
             </a:r>
           </a:p>
           <a:p>
             <a:pPr>
               <a:spcAft>
-                <a:spcPts val="1000"/>
+                <a:spcPts val="1100"/>
               </a:spcAft>
             </a:pPr>
             <a:r>
               <a:rPr sz="1600" b="1" i="0">
                 <a:solidFill>
-                  <a:srgbClr val="2E3A80"/>
-                </a:solidFill>
-                <a:latin typeface="Montserrat"/>
-              </a:rPr>
-              <a:t>•  </a:t>
+                  <a:srgbClr val="E8801A"/>
+                </a:solidFill>
+                <a:latin typeface="Montserrat"/>
+              </a:rPr>
+              <a:t>▸  </a:t>
             </a:r>
             <a:r>
               <a:rPr sz="1600" b="0" i="0">
@@ -5112,14 +5267,14 @@
                 </a:solidFill>
                 <a:latin typeface="Montserrat"/>
               </a:rPr>
-              <a:t>NT = locales que tiran al patio</a:t>
-            </a:r>
-          </a:p>
-        </p:txBody>
-      </p:sp>
-      <p:sp>
-        <p:nvSpPr>
-          <p:cNvPr id="8" name="imgph" descr="IMGQ:interior ventilation courtyard of apartment building"/>
+              <a:t>Tiro natural: suben solos por calor</a:t>
+            </a:r>
+          </a:p>
+        </p:txBody>
+      </p:sp>
+      <p:sp>
+        <p:nvSpPr>
+          <p:cNvPr id="9" name="imgph" descr="IMGQ:sealed combustion gas boiler with concentric flue"/>
           <p:cNvSpPr/>
           <p:nvPr/>
         </p:nvSpPr>
@@ -5165,7 +5320,7 @@
       </p:sp>
       <p:sp>
         <p:nvSpPr>
-          <p:cNvPr id="9" name="TextBox 8"/>
+          <p:cNvPr id="10" name="TextBox 9"/>
           <p:cNvSpPr txBox="1"/>
           <p:nvPr/>
         </p:nvSpPr>
@@ -5205,7 +5360,7 @@
                 </a:solidFill>
                 <a:latin typeface="Montserrat"/>
               </a:rPr>
-              <a:t>interior ventilation courtyard of apartment building</a:t>
+              <a:t>sealed combustion gas boiler with concentric flue</a:t>
             </a:r>
           </a:p>
         </p:txBody>
@@ -5302,7 +5457,7 @@
                 </a:solidFill>
                 <a:latin typeface="Montserrat"/>
               </a:rPr>
-              <a:t>011 / 016</a:t>
+              <a:t>011 / 017</a:t>
             </a:r>
           </a:p>
         </p:txBody>
@@ -5350,7 +5505,7 @@
         <p:spPr>
           <a:xfrm>
             <a:off x="822960" y="457200"/>
-            <a:ext cx="8229600" cy="365760"/>
+            <a:ext cx="10058400" cy="365760"/>
           </a:xfrm>
           <a:prstGeom prst="rect">
             <a:avLst/>
@@ -5364,9 +5519,9 @@
           <a:lstStyle/>
           <a:p>
             <a:r>
-              <a:rPr sz="1200" b="1" i="0">
-                <a:solidFill>
-                  <a:srgbClr val="64748B"/>
+              <a:rPr sz="1300" b="1" i="0">
+                <a:solidFill>
+                  <a:srgbClr val="E8801A"/>
                 </a:solidFill>
                 <a:latin typeface="Montserrat"/>
               </a:rPr>
@@ -5398,26 +5553,70 @@
           <a:lstStyle/>
           <a:p>
             <a:r>
-              <a:rPr sz="2700" b="1" i="0">
+              <a:rPr sz="2800" b="1" i="0">
                 <a:solidFill>
                   <a:srgbClr val="1E2761"/>
                 </a:solidFill>
                 <a:latin typeface="Montserrat"/>
               </a:rPr>
-              <a:t>Si el patio está techado</a:t>
-            </a:r>
-          </a:p>
-        </p:txBody>
-      </p:sp>
-      <p:sp>
-        <p:nvSpPr>
-          <p:cNvPr id="7" name="TextBox 6"/>
+              <a:t>Patios para aparatos conducidos</a:t>
+            </a:r>
+          </a:p>
+        </p:txBody>
+      </p:sp>
+      <p:sp>
+        <p:nvSpPr>
+          <p:cNvPr id="7" name="Rounded Rectangle 6"/>
+          <p:cNvSpPr/>
+          <p:nvPr/>
+        </p:nvSpPr>
+        <p:spPr>
+          <a:xfrm>
+            <a:off x="868680" y="1627632"/>
+            <a:ext cx="2011680" cy="73152"/>
+          </a:xfrm>
+          <a:prstGeom prst="roundRect">
+            <a:avLst/>
+          </a:prstGeom>
+          <a:solidFill>
+            <a:srgbClr val="E8801A"/>
+          </a:solidFill>
+          <a:ln>
+            <a:noFill/>
+          </a:ln>
+          <a:effectLst/>
+        </p:spPr>
+        <p:style>
+          <a:lnRef idx="1">
+            <a:schemeClr val="accent1"/>
+          </a:lnRef>
+          <a:fillRef idx="3">
+            <a:schemeClr val="accent1"/>
+          </a:fillRef>
+          <a:effectRef idx="2">
+            <a:schemeClr val="accent1"/>
+          </a:effectRef>
+          <a:fontRef idx="minor">
+            <a:schemeClr val="lt1"/>
+          </a:fontRef>
+        </p:style>
+        <p:txBody>
+          <a:bodyPr rtlCol="0" anchor="ctr"/>
+          <a:lstStyle/>
+          <a:p>
+            <a:pPr algn="ctr"/>
+          </a:p>
+        </p:txBody>
+      </p:sp>
+      <p:sp>
+        <p:nvSpPr>
+          <p:cNvPr id="8" name="TextBox 7"/>
           <p:cNvSpPr txBox="1"/>
           <p:nvPr/>
         </p:nvSpPr>
         <p:spPr>
           <a:xfrm>
-            <a:off x="822960" y="1920240"/>
+            <a:off x="822960" y="1965960"/>
             <a:ext cx="4983480" cy="4206240"/>
           </a:xfrm>
           <a:prstGeom prst="rect">
@@ -5433,17 +5632,17 @@
           <a:p>
             <a:pPr>
               <a:spcAft>
-                <a:spcPts val="1000"/>
+                <a:spcPts val="1100"/>
               </a:spcAft>
             </a:pPr>
             <a:r>
               <a:rPr sz="1600" b="1" i="0">
                 <a:solidFill>
-                  <a:srgbClr val="2E3A80"/>
-                </a:solidFill>
-                <a:latin typeface="Montserrat"/>
-              </a:rPr>
-              <a:t>•  </a:t>
+                  <a:srgbClr val="E8801A"/>
+                </a:solidFill>
+                <a:latin typeface="Montserrat"/>
+              </a:rPr>
+              <a:t>▸  </a:t>
             </a:r>
             <a:r>
               <a:rPr sz="1600" b="0" i="0">
@@ -5452,23 +5651,23 @@
                 </a:solidFill>
                 <a:latin typeface="Montserrat"/>
               </a:rPr>
-              <a:t>Abertura permanente al exterior</a:t>
+              <a:t>Edificio existente: 0,5 × NT (mín. 4 m²)</a:t>
             </a:r>
           </a:p>
           <a:p>
             <a:pPr>
               <a:spcAft>
-                <a:spcPts val="1000"/>
+                <a:spcPts val="1100"/>
               </a:spcAft>
             </a:pPr>
             <a:r>
               <a:rPr sz="1600" b="1" i="0">
                 <a:solidFill>
-                  <a:srgbClr val="2E3A80"/>
-                </a:solidFill>
-                <a:latin typeface="Montserrat"/>
-              </a:rPr>
-              <a:t>•  </a:t>
+                  <a:srgbClr val="E8801A"/>
+                </a:solidFill>
+                <a:latin typeface="Montserrat"/>
+              </a:rPr>
+              <a:t>▸  </a:t>
             </a:r>
             <a:r>
               <a:rPr sz="1600" b="0" i="0">
@@ -5477,23 +5676,23 @@
                 </a:solidFill>
                 <a:latin typeface="Montserrat"/>
               </a:rPr>
-              <a:t>25 % de la sección en planta</a:t>
+              <a:t>Obra nueva: 1 × NT (más de 6 m²)</a:t>
             </a:r>
           </a:p>
           <a:p>
             <a:pPr>
               <a:spcAft>
-                <a:spcPts val="1000"/>
+                <a:spcPts val="1100"/>
               </a:spcAft>
             </a:pPr>
             <a:r>
               <a:rPr sz="1600" b="1" i="0">
                 <a:solidFill>
-                  <a:srgbClr val="2E3A80"/>
-                </a:solidFill>
-                <a:latin typeface="Montserrat"/>
-              </a:rPr>
-              <a:t>•  </a:t>
+                  <a:srgbClr val="E8801A"/>
+                </a:solidFill>
+                <a:latin typeface="Montserrat"/>
+              </a:rPr>
+              <a:t>▸  </a:t>
             </a:r>
             <a:r>
               <a:rPr sz="1600" b="0" i="0">
@@ -5502,14 +5701,14 @@
                 </a:solidFill>
                 <a:latin typeface="Montserrat"/>
               </a:rPr>
-              <a:t>Mínimo 4 m²</a:t>
-            </a:r>
-          </a:p>
-        </p:txBody>
-      </p:sp>
-      <p:sp>
-        <p:nvSpPr>
-          <p:cNvPr id="8" name="imgph" descr="IMGQ:covered courtyard with open ventilation grille at top"/>
+              <a:t>NT = locales que tiran al patio</a:t>
+            </a:r>
+          </a:p>
+        </p:txBody>
+      </p:sp>
+      <p:sp>
+        <p:nvSpPr>
+          <p:cNvPr id="9" name="imgph" descr="IMGQ:interior ventilation courtyard of apartment building"/>
           <p:cNvSpPr/>
           <p:nvPr/>
         </p:nvSpPr>
@@ -5555,7 +5754,7 @@
       </p:sp>
       <p:sp>
         <p:nvSpPr>
-          <p:cNvPr id="9" name="TextBox 8"/>
+          <p:cNvPr id="10" name="TextBox 9"/>
           <p:cNvSpPr txBox="1"/>
           <p:nvPr/>
         </p:nvSpPr>
@@ -5595,7 +5794,7 @@
                 </a:solidFill>
                 <a:latin typeface="Montserrat"/>
               </a:rPr>
-              <a:t>covered courtyard with open ventilation grille at top</a:t>
+              <a:t>interior ventilation courtyard of apartment building</a:t>
             </a:r>
           </a:p>
         </p:txBody>
@@ -5692,7 +5891,7 @@
                 </a:solidFill>
                 <a:latin typeface="Montserrat"/>
               </a:rPr>
-              <a:t>012 / 016</a:t>
+              <a:t>012 / 017</a:t>
             </a:r>
           </a:p>
         </p:txBody>
@@ -5740,7 +5939,7 @@
         <p:spPr>
           <a:xfrm>
             <a:off x="822960" y="457200"/>
-            <a:ext cx="8229600" cy="365760"/>
+            <a:ext cx="10058400" cy="365760"/>
           </a:xfrm>
           <a:prstGeom prst="rect">
             <a:avLst/>
@@ -5754,13 +5953,13 @@
           <a:lstStyle/>
           <a:p>
             <a:r>
-              <a:rPr sz="1200" b="1" i="0">
-                <a:solidFill>
-                  <a:srgbClr val="64748B"/>
-                </a:solidFill>
-                <a:latin typeface="Montserrat"/>
-              </a:rPr>
-              <a:t>APARTADO 2 · GRANDES POTENCIAS</a:t>
+              <a:rPr sz="1300" b="1" i="0">
+                <a:solidFill>
+                  <a:srgbClr val="E8801A"/>
+                </a:solidFill>
+                <a:latin typeface="Montserrat"/>
+              </a:rPr>
+              <a:t>APARTADO 2 · PATIOS DE VENTILACIÓN</a:t>
             </a:r>
           </a:p>
         </p:txBody>
@@ -5788,26 +5987,70 @@
           <a:lstStyle/>
           <a:p>
             <a:r>
-              <a:rPr sz="2700" b="1" i="0">
+              <a:rPr sz="2800" b="1" i="0">
                 <a:solidFill>
                   <a:srgbClr val="1E2761"/>
                 </a:solidFill>
                 <a:latin typeface="Montserrat"/>
               </a:rPr>
-              <a:t>Más de 70 kW: sala de máquinas</a:t>
-            </a:r>
-          </a:p>
-        </p:txBody>
-      </p:sp>
-      <p:sp>
-        <p:nvSpPr>
-          <p:cNvPr id="7" name="TextBox 6"/>
+              <a:t>Si el patio está techado</a:t>
+            </a:r>
+          </a:p>
+        </p:txBody>
+      </p:sp>
+      <p:sp>
+        <p:nvSpPr>
+          <p:cNvPr id="7" name="Rounded Rectangle 6"/>
+          <p:cNvSpPr/>
+          <p:nvPr/>
+        </p:nvSpPr>
+        <p:spPr>
+          <a:xfrm>
+            <a:off x="868680" y="1627632"/>
+            <a:ext cx="2011680" cy="73152"/>
+          </a:xfrm>
+          <a:prstGeom prst="roundRect">
+            <a:avLst/>
+          </a:prstGeom>
+          <a:solidFill>
+            <a:srgbClr val="E8801A"/>
+          </a:solidFill>
+          <a:ln>
+            <a:noFill/>
+          </a:ln>
+          <a:effectLst/>
+        </p:spPr>
+        <p:style>
+          <a:lnRef idx="1">
+            <a:schemeClr val="accent1"/>
+          </a:lnRef>
+          <a:fillRef idx="3">
+            <a:schemeClr val="accent1"/>
+          </a:fillRef>
+          <a:effectRef idx="2">
+            <a:schemeClr val="accent1"/>
+          </a:effectRef>
+          <a:fontRef idx="minor">
+            <a:schemeClr val="lt1"/>
+          </a:fontRef>
+        </p:style>
+        <p:txBody>
+          <a:bodyPr rtlCol="0" anchor="ctr"/>
+          <a:lstStyle/>
+          <a:p>
+            <a:pPr algn="ctr"/>
+          </a:p>
+        </p:txBody>
+      </p:sp>
+      <p:sp>
+        <p:nvSpPr>
+          <p:cNvPr id="8" name="TextBox 7"/>
           <p:cNvSpPr txBox="1"/>
           <p:nvPr/>
         </p:nvSpPr>
         <p:spPr>
           <a:xfrm>
-            <a:off x="822960" y="1920240"/>
+            <a:off x="822960" y="1965960"/>
             <a:ext cx="4983480" cy="4206240"/>
           </a:xfrm>
           <a:prstGeom prst="rect">
@@ -5823,17 +6066,17 @@
           <a:p>
             <a:pPr>
               <a:spcAft>
-                <a:spcPts val="1000"/>
+                <a:spcPts val="1100"/>
               </a:spcAft>
             </a:pPr>
             <a:r>
               <a:rPr sz="1600" b="1" i="0">
                 <a:solidFill>
-                  <a:srgbClr val="2E3A80"/>
-                </a:solidFill>
-                <a:latin typeface="Montserrat"/>
-              </a:rPr>
-              <a:t>•  </a:t>
+                  <a:srgbClr val="E8801A"/>
+                </a:solidFill>
+                <a:latin typeface="Montserrat"/>
+              </a:rPr>
+              <a:t>▸  </a:t>
             </a:r>
             <a:r>
               <a:rPr sz="1600" b="0" i="0">
@@ -5842,23 +6085,23 @@
                 </a:solidFill>
                 <a:latin typeface="Montserrat"/>
               </a:rPr>
-              <a:t>Calderas &gt; 70 kW → UNE 60601</a:t>
+              <a:t>Abertura permanente al exterior</a:t>
             </a:r>
           </a:p>
           <a:p>
             <a:pPr>
               <a:spcAft>
-                <a:spcPts val="1000"/>
+                <a:spcPts val="1100"/>
               </a:spcAft>
             </a:pPr>
             <a:r>
               <a:rPr sz="1600" b="1" i="0">
                 <a:solidFill>
-                  <a:srgbClr val="2E3A80"/>
-                </a:solidFill>
-                <a:latin typeface="Montserrat"/>
-              </a:rPr>
-              <a:t>•  </a:t>
+                  <a:srgbClr val="E8801A"/>
+                </a:solidFill>
+                <a:latin typeface="Montserrat"/>
+              </a:rPr>
+              <a:t>▸  </a:t>
             </a:r>
             <a:r>
               <a:rPr sz="1600" b="0" i="0">
@@ -5867,23 +6110,23 @@
                 </a:solidFill>
                 <a:latin typeface="Montserrat"/>
               </a:rPr>
-              <a:t>También absorción y cogeneración</a:t>
+              <a:t>25 % de la sección en planta</a:t>
             </a:r>
           </a:p>
           <a:p>
             <a:pPr>
               <a:spcAft>
-                <a:spcPts val="1000"/>
+                <a:spcPts val="1100"/>
               </a:spcAft>
             </a:pPr>
             <a:r>
               <a:rPr sz="1600" b="1" i="0">
                 <a:solidFill>
-                  <a:srgbClr val="2E3A80"/>
-                </a:solidFill>
-                <a:latin typeface="Montserrat"/>
-              </a:rPr>
-              <a:t>•  </a:t>
+                  <a:srgbClr val="E8801A"/>
+                </a:solidFill>
+                <a:latin typeface="Montserrat"/>
+              </a:rPr>
+              <a:t>▸  </a:t>
             </a:r>
             <a:r>
               <a:rPr sz="1600" b="0" i="0">
@@ -5892,14 +6135,14 @@
                 </a:solidFill>
                 <a:latin typeface="Montserrat"/>
               </a:rPr>
-              <a:t>Potencia conjunta: se suma</a:t>
-            </a:r>
-          </a:p>
-        </p:txBody>
-      </p:sp>
-      <p:sp>
-        <p:nvSpPr>
-          <p:cNvPr id="8" name="imgph" descr="IMGQ:industrial gas boiler room"/>
+              <a:t>Mínimo 4 m²</a:t>
+            </a:r>
+          </a:p>
+        </p:txBody>
+      </p:sp>
+      <p:sp>
+        <p:nvSpPr>
+          <p:cNvPr id="9" name="imgph" descr="IMGQ:covered courtyard with open ventilation grille at top"/>
           <p:cNvSpPr/>
           <p:nvPr/>
         </p:nvSpPr>
@@ -5945,7 +6188,7 @@
       </p:sp>
       <p:sp>
         <p:nvSpPr>
-          <p:cNvPr id="9" name="TextBox 8"/>
+          <p:cNvPr id="10" name="TextBox 9"/>
           <p:cNvSpPr txBox="1"/>
           <p:nvPr/>
         </p:nvSpPr>
@@ -5985,7 +6228,7 @@
                 </a:solidFill>
                 <a:latin typeface="Montserrat"/>
               </a:rPr>
-              <a:t>industrial gas boiler room</a:t>
+              <a:t>covered courtyard with open ventilation grille at top</a:t>
             </a:r>
           </a:p>
         </p:txBody>
@@ -6082,7 +6325,7 @@
                 </a:solidFill>
                 <a:latin typeface="Montserrat"/>
               </a:rPr>
-              <a:t>013 / 016</a:t>
+              <a:t>013 / 017</a:t>
             </a:r>
           </a:p>
         </p:txBody>
@@ -6130,7 +6373,7 @@
         <p:spPr>
           <a:xfrm>
             <a:off x="822960" y="457200"/>
-            <a:ext cx="8229600" cy="365760"/>
+            <a:ext cx="10058400" cy="365760"/>
           </a:xfrm>
           <a:prstGeom prst="rect">
             <a:avLst/>
@@ -6144,13 +6387,13 @@
           <a:lstStyle/>
           <a:p>
             <a:r>
-              <a:rPr sz="1200" b="1" i="0">
-                <a:solidFill>
-                  <a:srgbClr val="64748B"/>
-                </a:solidFill>
-                <a:latin typeface="Montserrat"/>
-              </a:rPr>
-              <a:t>APARTADO 2 · NORMA SEGÚN PRESIÓN</a:t>
+              <a:rPr sz="1300" b="1" i="0">
+                <a:solidFill>
+                  <a:srgbClr val="E8801A"/>
+                </a:solidFill>
+                <a:latin typeface="Montserrat"/>
+              </a:rPr>
+              <a:t>APARTADO 2 · GRANDES POTENCIAS</a:t>
             </a:r>
           </a:p>
         </p:txBody>
@@ -6178,26 +6421,70 @@
           <a:lstStyle/>
           <a:p>
             <a:r>
-              <a:rPr sz="2700" b="1" i="0">
+              <a:rPr sz="2800" b="1" i="0">
                 <a:solidFill>
                   <a:srgbClr val="1E2761"/>
                 </a:solidFill>
                 <a:latin typeface="Montserrat"/>
               </a:rPr>
-              <a:t>La frontera de los 5 bar</a:t>
-            </a:r>
-          </a:p>
-        </p:txBody>
-      </p:sp>
-      <p:sp>
-        <p:nvSpPr>
-          <p:cNvPr id="7" name="TextBox 6"/>
+              <a:t>Más de 70 kW: sala de máquinas</a:t>
+            </a:r>
+          </a:p>
+        </p:txBody>
+      </p:sp>
+      <p:sp>
+        <p:nvSpPr>
+          <p:cNvPr id="7" name="Rounded Rectangle 6"/>
+          <p:cNvSpPr/>
+          <p:nvPr/>
+        </p:nvSpPr>
+        <p:spPr>
+          <a:xfrm>
+            <a:off x="868680" y="1627632"/>
+            <a:ext cx="2011680" cy="73152"/>
+          </a:xfrm>
+          <a:prstGeom prst="roundRect">
+            <a:avLst/>
+          </a:prstGeom>
+          <a:solidFill>
+            <a:srgbClr val="E8801A"/>
+          </a:solidFill>
+          <a:ln>
+            <a:noFill/>
+          </a:ln>
+          <a:effectLst/>
+        </p:spPr>
+        <p:style>
+          <a:lnRef idx="1">
+            <a:schemeClr val="accent1"/>
+          </a:lnRef>
+          <a:fillRef idx="3">
+            <a:schemeClr val="accent1"/>
+          </a:fillRef>
+          <a:effectRef idx="2">
+            <a:schemeClr val="accent1"/>
+          </a:effectRef>
+          <a:fontRef idx="minor">
+            <a:schemeClr val="lt1"/>
+          </a:fontRef>
+        </p:style>
+        <p:txBody>
+          <a:bodyPr rtlCol="0" anchor="ctr"/>
+          <a:lstStyle/>
+          <a:p>
+            <a:pPr algn="ctr"/>
+          </a:p>
+        </p:txBody>
+      </p:sp>
+      <p:sp>
+        <p:nvSpPr>
+          <p:cNvPr id="8" name="TextBox 7"/>
           <p:cNvSpPr txBox="1"/>
           <p:nvPr/>
         </p:nvSpPr>
         <p:spPr>
           <a:xfrm>
-            <a:off x="822960" y="1920240"/>
+            <a:off x="822960" y="1965960"/>
             <a:ext cx="4983480" cy="4206240"/>
           </a:xfrm>
           <a:prstGeom prst="rect">
@@ -6213,17 +6500,17 @@
           <a:p>
             <a:pPr>
               <a:spcAft>
-                <a:spcPts val="1000"/>
+                <a:spcPts val="1100"/>
               </a:spcAft>
             </a:pPr>
             <a:r>
               <a:rPr sz="1600" b="1" i="0">
                 <a:solidFill>
-                  <a:srgbClr val="2E3A80"/>
-                </a:solidFill>
-                <a:latin typeface="Montserrat"/>
-              </a:rPr>
-              <a:t>•  </a:t>
+                  <a:srgbClr val="E8801A"/>
+                </a:solidFill>
+                <a:latin typeface="Montserrat"/>
+              </a:rPr>
+              <a:t>▸  </a:t>
             </a:r>
             <a:r>
               <a:rPr sz="1600" b="0" i="0">
@@ -6232,23 +6519,23 @@
                 </a:solidFill>
                 <a:latin typeface="Montserrat"/>
               </a:rPr>
-              <a:t>Hasta 5 bar → UNE 60670</a:t>
+              <a:t>Calderas &gt; 70 kW → UNE 60601</a:t>
             </a:r>
           </a:p>
           <a:p>
             <a:pPr>
               <a:spcAft>
-                <a:spcPts val="1000"/>
+                <a:spcPts val="1100"/>
               </a:spcAft>
             </a:pPr>
             <a:r>
               <a:rPr sz="1600" b="1" i="0">
                 <a:solidFill>
-                  <a:srgbClr val="2E3A80"/>
-                </a:solidFill>
-                <a:latin typeface="Montserrat"/>
-              </a:rPr>
-              <a:t>•  </a:t>
+                  <a:srgbClr val="E8801A"/>
+                </a:solidFill>
+                <a:latin typeface="Montserrat"/>
+              </a:rPr>
+              <a:t>▸  </a:t>
             </a:r>
             <a:r>
               <a:rPr sz="1600" b="0" i="0">
@@ -6257,23 +6544,23 @@
                 </a:solidFill>
                 <a:latin typeface="Montserrat"/>
               </a:rPr>
-              <a:t>Más de 5 bar → UNE 60620</a:t>
+              <a:t>También absorción y cogeneración</a:t>
             </a:r>
           </a:p>
           <a:p>
             <a:pPr>
               <a:spcAft>
-                <a:spcPts val="1000"/>
+                <a:spcPts val="1100"/>
               </a:spcAft>
             </a:pPr>
             <a:r>
               <a:rPr sz="1600" b="1" i="0">
                 <a:solidFill>
-                  <a:srgbClr val="2E3A80"/>
-                </a:solidFill>
-                <a:latin typeface="Montserrat"/>
-              </a:rPr>
-              <a:t>•  </a:t>
+                  <a:srgbClr val="E8801A"/>
+                </a:solidFill>
+                <a:latin typeface="Montserrat"/>
+              </a:rPr>
+              <a:t>▸  </a:t>
             </a:r>
             <a:r>
               <a:rPr sz="1600" b="0" i="0">
@@ -6282,14 +6569,14 @@
                 </a:solidFill>
                 <a:latin typeface="Montserrat"/>
               </a:rPr>
-              <a:t>MOP: presión máxima de operación</a:t>
-            </a:r>
-          </a:p>
-        </p:txBody>
-      </p:sp>
-      <p:sp>
-        <p:nvSpPr>
-          <p:cNvPr id="8" name="imgph" descr="IMGQ:gas pressure regulator and gauge"/>
+              <a:t>Potencia conjunta: se suma</a:t>
+            </a:r>
+          </a:p>
+        </p:txBody>
+      </p:sp>
+      <p:sp>
+        <p:nvSpPr>
+          <p:cNvPr id="9" name="imgph" descr="IMGQ:industrial gas boiler room"/>
           <p:cNvSpPr/>
           <p:nvPr/>
         </p:nvSpPr>
@@ -6335,7 +6622,7 @@
       </p:sp>
       <p:sp>
         <p:nvSpPr>
-          <p:cNvPr id="9" name="TextBox 8"/>
+          <p:cNvPr id="10" name="TextBox 9"/>
           <p:cNvSpPr txBox="1"/>
           <p:nvPr/>
         </p:nvSpPr>
@@ -6375,7 +6662,7 @@
                 </a:solidFill>
                 <a:latin typeface="Montserrat"/>
               </a:rPr>
-              <a:t>gas pressure regulator and gauge</a:t>
+              <a:t>industrial gas boiler room</a:t>
             </a:r>
           </a:p>
         </p:txBody>
@@ -6472,7 +6759,7 @@
                 </a:solidFill>
                 <a:latin typeface="Montserrat"/>
               </a:rPr>
-              <a:t>014 / 016</a:t>
+              <a:t>014 / 017</a:t>
             </a:r>
           </a:p>
         </p:txBody>
@@ -6520,7 +6807,7 @@
         <p:spPr>
           <a:xfrm>
             <a:off x="822960" y="457200"/>
-            <a:ext cx="8229600" cy="365760"/>
+            <a:ext cx="10058400" cy="365760"/>
           </a:xfrm>
           <a:prstGeom prst="rect">
             <a:avLst/>
@@ -6534,13 +6821,13 @@
           <a:lstStyle/>
           <a:p>
             <a:r>
-              <a:rPr sz="1200" b="1" i="0">
-                <a:solidFill>
-                  <a:srgbClr val="64748B"/>
-                </a:solidFill>
-                <a:latin typeface="Montserrat"/>
-              </a:rPr>
-              <a:t>APARTADO 2 · UBICACIÓN DE APARATOS</a:t>
+              <a:rPr sz="1300" b="1" i="0">
+                <a:solidFill>
+                  <a:srgbClr val="E8801A"/>
+                </a:solidFill>
+                <a:latin typeface="Montserrat"/>
+              </a:rPr>
+              <a:t>APARTADO 2 · NORMA SEGÚN PRESIÓN</a:t>
             </a:r>
           </a:p>
         </p:txBody>
@@ -6568,26 +6855,70 @@
           <a:lstStyle/>
           <a:p>
             <a:r>
-              <a:rPr sz="2700" b="1" i="0">
+              <a:rPr sz="2800" b="1" i="0">
                 <a:solidFill>
                   <a:srgbClr val="1E2761"/>
                 </a:solidFill>
                 <a:latin typeface="Montserrat"/>
               </a:rPr>
-              <a:t>Circuito abierto conducido: dónde</a:t>
-            </a:r>
-          </a:p>
-        </p:txBody>
-      </p:sp>
-      <p:sp>
-        <p:nvSpPr>
-          <p:cNvPr id="7" name="TextBox 6"/>
+              <a:t>La frontera de los 5 bar</a:t>
+            </a:r>
+          </a:p>
+        </p:txBody>
+      </p:sp>
+      <p:sp>
+        <p:nvSpPr>
+          <p:cNvPr id="7" name="Rounded Rectangle 6"/>
+          <p:cNvSpPr/>
+          <p:nvPr/>
+        </p:nvSpPr>
+        <p:spPr>
+          <a:xfrm>
+            <a:off x="868680" y="1627632"/>
+            <a:ext cx="2011680" cy="73152"/>
+          </a:xfrm>
+          <a:prstGeom prst="roundRect">
+            <a:avLst/>
+          </a:prstGeom>
+          <a:solidFill>
+            <a:srgbClr val="E8801A"/>
+          </a:solidFill>
+          <a:ln>
+            <a:noFill/>
+          </a:ln>
+          <a:effectLst/>
+        </p:spPr>
+        <p:style>
+          <a:lnRef idx="1">
+            <a:schemeClr val="accent1"/>
+          </a:lnRef>
+          <a:fillRef idx="3">
+            <a:schemeClr val="accent1"/>
+          </a:fillRef>
+          <a:effectRef idx="2">
+            <a:schemeClr val="accent1"/>
+          </a:effectRef>
+          <a:fontRef idx="minor">
+            <a:schemeClr val="lt1"/>
+          </a:fontRef>
+        </p:style>
+        <p:txBody>
+          <a:bodyPr rtlCol="0" anchor="ctr"/>
+          <a:lstStyle/>
+          <a:p>
+            <a:pPr algn="ctr"/>
+          </a:p>
+        </p:txBody>
+      </p:sp>
+      <p:sp>
+        <p:nvSpPr>
+          <p:cNvPr id="8" name="TextBox 7"/>
           <p:cNvSpPr txBox="1"/>
           <p:nvPr/>
         </p:nvSpPr>
         <p:spPr>
           <a:xfrm>
-            <a:off x="822960" y="1920240"/>
+            <a:off x="822960" y="1965960"/>
             <a:ext cx="4983480" cy="4206240"/>
           </a:xfrm>
           <a:prstGeom prst="rect">
@@ -6603,17 +6934,17 @@
           <a:p>
             <a:pPr>
               <a:spcAft>
-                <a:spcPts val="1000"/>
+                <a:spcPts val="1100"/>
               </a:spcAft>
             </a:pPr>
             <a:r>
               <a:rPr sz="1600" b="1" i="0">
                 <a:solidFill>
-                  <a:srgbClr val="2E3A80"/>
-                </a:solidFill>
-                <a:latin typeface="Montserrat"/>
-              </a:rPr>
-              <a:t>•  </a:t>
+                  <a:srgbClr val="E8801A"/>
+                </a:solidFill>
+                <a:latin typeface="Montserrat"/>
+              </a:rPr>
+              <a:t>▸  </a:t>
             </a:r>
             <a:r>
               <a:rPr sz="1600" b="0" i="0">
@@ -6622,23 +6953,23 @@
                 </a:solidFill>
                 <a:latin typeface="Montserrat"/>
               </a:rPr>
-              <a:t>Galerías, terrazas, locales exclusivos</a:t>
+              <a:t>Hasta 5 bar → UNE 60670</a:t>
             </a:r>
           </a:p>
           <a:p>
             <a:pPr>
               <a:spcAft>
-                <a:spcPts val="1000"/>
+                <a:spcPts val="1100"/>
               </a:spcAft>
             </a:pPr>
             <a:r>
               <a:rPr sz="1600" b="1" i="0">
                 <a:solidFill>
-                  <a:srgbClr val="2E3A80"/>
-                </a:solidFill>
-                <a:latin typeface="Montserrat"/>
-              </a:rPr>
-              <a:t>•  </a:t>
+                  <a:srgbClr val="E8801A"/>
+                </a:solidFill>
+                <a:latin typeface="Montserrat"/>
+              </a:rPr>
+              <a:t>▸  </a:t>
             </a:r>
             <a:r>
               <a:rPr sz="1600" b="0" i="0">
@@ -6647,23 +6978,23 @@
                 </a:solidFill>
                 <a:latin typeface="Montserrat"/>
               </a:rPr>
-              <a:t>Lavaderos, garajes individuales</a:t>
+              <a:t>Más de 5 bar → UNE 60620</a:t>
             </a:r>
           </a:p>
           <a:p>
             <a:pPr>
               <a:spcAft>
-                <a:spcPts val="1000"/>
+                <a:spcPts val="1100"/>
               </a:spcAft>
             </a:pPr>
             <a:r>
               <a:rPr sz="1600" b="1" i="0">
                 <a:solidFill>
-                  <a:srgbClr val="2E3A80"/>
-                </a:solidFill>
-                <a:latin typeface="Montserrat"/>
-              </a:rPr>
-              <a:t>•  </a:t>
+                  <a:srgbClr val="E8801A"/>
+                </a:solidFill>
+                <a:latin typeface="Montserrat"/>
+              </a:rPr>
+              <a:t>▸  </a:t>
             </a:r>
             <a:r>
               <a:rPr sz="1600" b="0" i="0">
@@ -6672,39 +7003,14 @@
                 </a:solidFill>
                 <a:latin typeface="Montserrat"/>
               </a:rPr>
-              <a:t>En cocina: sin robar el tiro al extractor</a:t>
-            </a:r>
-          </a:p>
-          <a:p>
-            <a:pPr>
-              <a:spcAft>
-                <a:spcPts val="1000"/>
-              </a:spcAft>
-            </a:pPr>
-            <a:r>
-              <a:rPr sz="1600" b="1" i="0">
-                <a:solidFill>
-                  <a:srgbClr val="2E3A80"/>
-                </a:solidFill>
-                <a:latin typeface="Montserrat"/>
-              </a:rPr>
-              <a:t>•  </a:t>
-            </a:r>
-            <a:r>
-              <a:rPr sz="1600" b="0" i="0">
-                <a:solidFill>
-                  <a:srgbClr val="1B2330"/>
-                </a:solidFill>
-                <a:latin typeface="Montserrat"/>
-              </a:rPr>
-              <a:t>Solo ACS: sin estas limitaciones</a:t>
-            </a:r>
-          </a:p>
-        </p:txBody>
-      </p:sp>
-      <p:sp>
-        <p:nvSpPr>
-          <p:cNvPr id="8" name="imgph" descr="IMGQ:wall mounted gas water heater in laundry room"/>
+              <a:t>MOP: presión máxima de operación</a:t>
+            </a:r>
+          </a:p>
+        </p:txBody>
+      </p:sp>
+      <p:sp>
+        <p:nvSpPr>
+          <p:cNvPr id="9" name="imgph" descr="IMGQ:gas pressure regulator and gauge"/>
           <p:cNvSpPr/>
           <p:nvPr/>
         </p:nvSpPr>
@@ -6750,7 +7056,7 @@
       </p:sp>
       <p:sp>
         <p:nvSpPr>
-          <p:cNvPr id="9" name="TextBox 8"/>
+          <p:cNvPr id="10" name="TextBox 9"/>
           <p:cNvSpPr txBox="1"/>
           <p:nvPr/>
         </p:nvSpPr>
@@ -6790,7 +7096,7 @@
                 </a:solidFill>
                 <a:latin typeface="Montserrat"/>
               </a:rPr>
-              <a:t>wall mounted gas water heater in laundry room</a:t>
+              <a:t>gas pressure regulator and gauge</a:t>
             </a:r>
           </a:p>
         </p:txBody>
@@ -6887,7 +7193,7 @@
                 </a:solidFill>
                 <a:latin typeface="Montserrat"/>
               </a:rPr>
-              <a:t>015 / 016</a:t>
+              <a:t>015 / 017</a:t>
             </a:r>
           </a:p>
         </p:txBody>
@@ -6935,7 +7241,7 @@
         <p:spPr>
           <a:xfrm>
             <a:off x="822960" y="457200"/>
-            <a:ext cx="8229600" cy="365760"/>
+            <a:ext cx="10058400" cy="365760"/>
           </a:xfrm>
           <a:prstGeom prst="rect">
             <a:avLst/>
@@ -6949,13 +7255,13 @@
           <a:lstStyle/>
           <a:p>
             <a:r>
-              <a:rPr sz="1200" b="1" i="0">
-                <a:solidFill>
-                  <a:srgbClr val="64748B"/>
-                </a:solidFill>
-                <a:latin typeface="Montserrat"/>
-              </a:rPr>
-              <a:t>APARTADO 2 · TRAMOS ENTERRADOS</a:t>
+              <a:rPr sz="1300" b="1" i="0">
+                <a:solidFill>
+                  <a:srgbClr val="E8801A"/>
+                </a:solidFill>
+                <a:latin typeface="Montserrat"/>
+              </a:rPr>
+              <a:t>APARTADO 2 · UBICACIÓN DE APARATOS</a:t>
             </a:r>
           </a:p>
         </p:txBody>
@@ -6983,26 +7289,70 @@
           <a:lstStyle/>
           <a:p>
             <a:r>
-              <a:rPr sz="2700" b="1" i="0">
+              <a:rPr sz="2800" b="1" i="0">
                 <a:solidFill>
                   <a:srgbClr val="1E2761"/>
                 </a:solidFill>
                 <a:latin typeface="Montserrat"/>
               </a:rPr>
-              <a:t>Tubería bajo tierra</a:t>
-            </a:r>
-          </a:p>
-        </p:txBody>
-      </p:sp>
-      <p:sp>
-        <p:nvSpPr>
-          <p:cNvPr id="7" name="TextBox 6"/>
+              <a:t>Circuito abierto conducido: dónde</a:t>
+            </a:r>
+          </a:p>
+        </p:txBody>
+      </p:sp>
+      <p:sp>
+        <p:nvSpPr>
+          <p:cNvPr id="7" name="Rounded Rectangle 6"/>
+          <p:cNvSpPr/>
+          <p:nvPr/>
+        </p:nvSpPr>
+        <p:spPr>
+          <a:xfrm>
+            <a:off x="868680" y="1627632"/>
+            <a:ext cx="2011680" cy="73152"/>
+          </a:xfrm>
+          <a:prstGeom prst="roundRect">
+            <a:avLst/>
+          </a:prstGeom>
+          <a:solidFill>
+            <a:srgbClr val="E8801A"/>
+          </a:solidFill>
+          <a:ln>
+            <a:noFill/>
+          </a:ln>
+          <a:effectLst/>
+        </p:spPr>
+        <p:style>
+          <a:lnRef idx="1">
+            <a:schemeClr val="accent1"/>
+          </a:lnRef>
+          <a:fillRef idx="3">
+            <a:schemeClr val="accent1"/>
+          </a:fillRef>
+          <a:effectRef idx="2">
+            <a:schemeClr val="accent1"/>
+          </a:effectRef>
+          <a:fontRef idx="minor">
+            <a:schemeClr val="lt1"/>
+          </a:fontRef>
+        </p:style>
+        <p:txBody>
+          <a:bodyPr rtlCol="0" anchor="ctr"/>
+          <a:lstStyle/>
+          <a:p>
+            <a:pPr algn="ctr"/>
+          </a:p>
+        </p:txBody>
+      </p:sp>
+      <p:sp>
+        <p:nvSpPr>
+          <p:cNvPr id="8" name="TextBox 7"/>
           <p:cNvSpPr txBox="1"/>
           <p:nvPr/>
         </p:nvSpPr>
         <p:spPr>
           <a:xfrm>
-            <a:off x="822960" y="1920240"/>
+            <a:off x="822960" y="1965960"/>
             <a:ext cx="4983480" cy="4206240"/>
           </a:xfrm>
           <a:prstGeom prst="rect">
@@ -7018,17 +7368,17 @@
           <a:p>
             <a:pPr>
               <a:spcAft>
-                <a:spcPts val="1000"/>
+                <a:spcPts val="1100"/>
               </a:spcAft>
             </a:pPr>
             <a:r>
               <a:rPr sz="1600" b="1" i="0">
                 <a:solidFill>
-                  <a:srgbClr val="2E3A80"/>
-                </a:solidFill>
-                <a:latin typeface="Montserrat"/>
-              </a:rPr>
-              <a:t>•  </a:t>
+                  <a:srgbClr val="E8801A"/>
+                </a:solidFill>
+                <a:latin typeface="Montserrat"/>
+              </a:rPr>
+              <a:t>▸  </a:t>
             </a:r>
             <a:r>
               <a:rPr sz="1600" b="0" i="0">
@@ -7037,23 +7387,23 @@
                 </a:solidFill>
                 <a:latin typeface="Montserrat"/>
               </a:rPr>
-              <a:t>Enterrado → UNE 60310 y 60311</a:t>
+              <a:t>Galerías, terrazas, locales exclusivos</a:t>
             </a:r>
           </a:p>
           <a:p>
             <a:pPr>
               <a:spcAft>
-                <a:spcPts val="1000"/>
+                <a:spcPts val="1100"/>
               </a:spcAft>
             </a:pPr>
             <a:r>
               <a:rPr sz="1600" b="1" i="0">
                 <a:solidFill>
-                  <a:srgbClr val="2E3A80"/>
-                </a:solidFill>
-                <a:latin typeface="Montserrat"/>
-              </a:rPr>
-              <a:t>•  </a:t>
+                  <a:srgbClr val="E8801A"/>
+                </a:solidFill>
+                <a:latin typeface="Montserrat"/>
+              </a:rPr>
+              <a:t>▸  </a:t>
             </a:r>
             <a:r>
               <a:rPr sz="1600" b="0" i="0">
@@ -7062,23 +7412,23 @@
                 </a:solidFill>
                 <a:latin typeface="Montserrat"/>
               </a:rPr>
-              <a:t>Consulta el material al distribuidor</a:t>
+              <a:t>Lavaderos, garajes individuales</a:t>
             </a:r>
           </a:p>
           <a:p>
             <a:pPr>
               <a:spcAft>
-                <a:spcPts val="1000"/>
+                <a:spcPts val="1100"/>
               </a:spcAft>
             </a:pPr>
             <a:r>
               <a:rPr sz="1600" b="1" i="0">
                 <a:solidFill>
-                  <a:srgbClr val="2E3A80"/>
-                </a:solidFill>
-                <a:latin typeface="Montserrat"/>
-              </a:rPr>
-              <a:t>•  </a:t>
+                  <a:srgbClr val="E8801A"/>
+                </a:solidFill>
+                <a:latin typeface="Montserrat"/>
+              </a:rPr>
+              <a:t>▸  </a:t>
             </a:r>
             <a:r>
               <a:rPr sz="1600" b="0" i="0">
@@ -7087,14 +7437,39 @@
                 </a:solidFill>
                 <a:latin typeface="Montserrat"/>
               </a:rPr>
-              <a:t>Debe ser compatible con la red</a:t>
-            </a:r>
-          </a:p>
-        </p:txBody>
-      </p:sp>
-      <p:sp>
-        <p:nvSpPr>
-          <p:cNvPr id="8" name="imgph" descr="IMGQ:buried yellow gas pipe in trench"/>
+              <a:t>En cocina: sin robar el tiro al extractor</a:t>
+            </a:r>
+          </a:p>
+          <a:p>
+            <a:pPr>
+              <a:spcAft>
+                <a:spcPts val="1100"/>
+              </a:spcAft>
+            </a:pPr>
+            <a:r>
+              <a:rPr sz="1600" b="1" i="0">
+                <a:solidFill>
+                  <a:srgbClr val="E8801A"/>
+                </a:solidFill>
+                <a:latin typeface="Montserrat"/>
+              </a:rPr>
+              <a:t>▸  </a:t>
+            </a:r>
+            <a:r>
+              <a:rPr sz="1600" b="0" i="0">
+                <a:solidFill>
+                  <a:srgbClr val="1B2330"/>
+                </a:solidFill>
+                <a:latin typeface="Montserrat"/>
+              </a:rPr>
+              <a:t>Solo ACS: sin estas limitaciones</a:t>
+            </a:r>
+          </a:p>
+        </p:txBody>
+      </p:sp>
+      <p:sp>
+        <p:nvSpPr>
+          <p:cNvPr id="9" name="imgph" descr="IMGQ:wall mounted gas water heater in laundry room"/>
           <p:cNvSpPr/>
           <p:nvPr/>
         </p:nvSpPr>
@@ -7140,7 +7515,7 @@
       </p:sp>
       <p:sp>
         <p:nvSpPr>
-          <p:cNvPr id="9" name="TextBox 8"/>
+          <p:cNvPr id="10" name="TextBox 9"/>
           <p:cNvSpPr txBox="1"/>
           <p:nvPr/>
         </p:nvSpPr>
@@ -7180,7 +7555,7 @@
                 </a:solidFill>
                 <a:latin typeface="Montserrat"/>
               </a:rPr>
-              <a:t>buried yellow gas pipe in trench</a:t>
+              <a:t>wall mounted gas water heater in laundry room</a:t>
             </a:r>
           </a:p>
         </p:txBody>
@@ -7218,6 +7593,440 @@
             <a:avLst/>
           </a:prstGeom>
           <a:solidFill>
+            <a:srgbClr val="FFFFFF"/>
+          </a:solidFill>
+          <a:ln>
+            <a:noFill/>
+          </a:ln>
+          <a:effectLst/>
+        </p:spPr>
+        <p:style>
+          <a:lnRef idx="1">
+            <a:schemeClr val="accent1"/>
+          </a:lnRef>
+          <a:fillRef idx="3">
+            <a:schemeClr val="accent1"/>
+          </a:fillRef>
+          <a:effectRef idx="2">
+            <a:schemeClr val="accent1"/>
+          </a:effectRef>
+          <a:fontRef idx="minor">
+            <a:schemeClr val="lt1"/>
+          </a:fontRef>
+        </p:style>
+        <p:txBody>
+          <a:bodyPr rtlCol="0" anchor="ctr"/>
+          <a:lstStyle/>
+          <a:p>
+            <a:pPr algn="ctr"/>
+          </a:p>
+        </p:txBody>
+      </p:sp>
+      <p:sp>
+        <p:nvSpPr>
+          <p:cNvPr id="3" name="TextBox 2"/>
+          <p:cNvSpPr txBox="1"/>
+          <p:nvPr/>
+        </p:nvSpPr>
+        <p:spPr>
+          <a:xfrm>
+            <a:off x="10607040" y="320040"/>
+            <a:ext cx="1371600" cy="365760"/>
+          </a:xfrm>
+          <a:prstGeom prst="rect">
+            <a:avLst/>
+          </a:prstGeom>
+          <a:noFill/>
+        </p:spPr>
+        <p:txBody>
+          <a:bodyPr wrap="square">
+            <a:spAutoFit/>
+          </a:bodyPr>
+          <a:lstStyle/>
+          <a:p>
+            <a:pPr algn="r"/>
+            <a:r>
+              <a:rPr sz="1000" b="1" i="0">
+                <a:solidFill>
+                  <a:srgbClr val="64748B"/>
+                </a:solidFill>
+                <a:latin typeface="Montserrat"/>
+              </a:rPr>
+              <a:t>016 / 017</a:t>
+            </a:r>
+          </a:p>
+        </p:txBody>
+      </p:sp>
+      <p:sp>
+        <p:nvSpPr>
+          <p:cNvPr id="4" name="TextBox 3"/>
+          <p:cNvSpPr txBox="1"/>
+          <p:nvPr/>
+        </p:nvSpPr>
+        <p:spPr>
+          <a:xfrm>
+            <a:off x="457200" y="6419088"/>
+            <a:ext cx="8229600" cy="365760"/>
+          </a:xfrm>
+          <a:prstGeom prst="rect">
+            <a:avLst/>
+          </a:prstGeom>
+          <a:noFill/>
+        </p:spPr>
+        <p:txBody>
+          <a:bodyPr wrap="square">
+            <a:spAutoFit/>
+          </a:bodyPr>
+          <a:lstStyle/>
+          <a:p>
+            <a:r>
+              <a:rPr sz="900" b="0" i="0">
+                <a:solidFill>
+                  <a:srgbClr val="64748B"/>
+                </a:solidFill>
+                <a:latin typeface="Montserrat"/>
+              </a:rPr>
+              <a:t>Curso Gas B · Tema 04 · ITC-ICG 07 · Diseño y ejecución</a:t>
+            </a:r>
+          </a:p>
+        </p:txBody>
+      </p:sp>
+      <p:sp>
+        <p:nvSpPr>
+          <p:cNvPr id="5" name="TextBox 4"/>
+          <p:cNvSpPr txBox="1"/>
+          <p:nvPr/>
+        </p:nvSpPr>
+        <p:spPr>
+          <a:xfrm>
+            <a:off x="822960" y="457200"/>
+            <a:ext cx="10058400" cy="365760"/>
+          </a:xfrm>
+          <a:prstGeom prst="rect">
+            <a:avLst/>
+          </a:prstGeom>
+          <a:noFill/>
+        </p:spPr>
+        <p:txBody>
+          <a:bodyPr wrap="square">
+            <a:spAutoFit/>
+          </a:bodyPr>
+          <a:lstStyle/>
+          <a:p>
+            <a:r>
+              <a:rPr sz="1300" b="1" i="0">
+                <a:solidFill>
+                  <a:srgbClr val="E8801A"/>
+                </a:solidFill>
+                <a:latin typeface="Montserrat"/>
+              </a:rPr>
+              <a:t>APARTADO 2 · TRAMOS ENTERRADOS</a:t>
+            </a:r>
+          </a:p>
+        </p:txBody>
+      </p:sp>
+      <p:sp>
+        <p:nvSpPr>
+          <p:cNvPr id="6" name="TextBox 5"/>
+          <p:cNvSpPr txBox="1"/>
+          <p:nvPr/>
+        </p:nvSpPr>
+        <p:spPr>
+          <a:xfrm>
+            <a:off x="822960" y="868680"/>
+            <a:ext cx="10515600" cy="914400"/>
+          </a:xfrm>
+          <a:prstGeom prst="rect">
+            <a:avLst/>
+          </a:prstGeom>
+          <a:noFill/>
+        </p:spPr>
+        <p:txBody>
+          <a:bodyPr wrap="square">
+            <a:spAutoFit/>
+          </a:bodyPr>
+          <a:lstStyle/>
+          <a:p>
+            <a:r>
+              <a:rPr sz="2800" b="1" i="0">
+                <a:solidFill>
+                  <a:srgbClr val="1E2761"/>
+                </a:solidFill>
+                <a:latin typeface="Montserrat"/>
+              </a:rPr>
+              <a:t>Tubería bajo tierra</a:t>
+            </a:r>
+          </a:p>
+        </p:txBody>
+      </p:sp>
+      <p:sp>
+        <p:nvSpPr>
+          <p:cNvPr id="7" name="Rounded Rectangle 6"/>
+          <p:cNvSpPr/>
+          <p:nvPr/>
+        </p:nvSpPr>
+        <p:spPr>
+          <a:xfrm>
+            <a:off x="868680" y="1627632"/>
+            <a:ext cx="2011680" cy="73152"/>
+          </a:xfrm>
+          <a:prstGeom prst="roundRect">
+            <a:avLst/>
+          </a:prstGeom>
+          <a:solidFill>
+            <a:srgbClr val="E8801A"/>
+          </a:solidFill>
+          <a:ln>
+            <a:noFill/>
+          </a:ln>
+          <a:effectLst/>
+        </p:spPr>
+        <p:style>
+          <a:lnRef idx="1">
+            <a:schemeClr val="accent1"/>
+          </a:lnRef>
+          <a:fillRef idx="3">
+            <a:schemeClr val="accent1"/>
+          </a:fillRef>
+          <a:effectRef idx="2">
+            <a:schemeClr val="accent1"/>
+          </a:effectRef>
+          <a:fontRef idx="minor">
+            <a:schemeClr val="lt1"/>
+          </a:fontRef>
+        </p:style>
+        <p:txBody>
+          <a:bodyPr rtlCol="0" anchor="ctr"/>
+          <a:lstStyle/>
+          <a:p>
+            <a:pPr algn="ctr"/>
+          </a:p>
+        </p:txBody>
+      </p:sp>
+      <p:sp>
+        <p:nvSpPr>
+          <p:cNvPr id="8" name="TextBox 7"/>
+          <p:cNvSpPr txBox="1"/>
+          <p:nvPr/>
+        </p:nvSpPr>
+        <p:spPr>
+          <a:xfrm>
+            <a:off x="822960" y="1965960"/>
+            <a:ext cx="4983480" cy="4206240"/>
+          </a:xfrm>
+          <a:prstGeom prst="rect">
+            <a:avLst/>
+          </a:prstGeom>
+          <a:noFill/>
+        </p:spPr>
+        <p:txBody>
+          <a:bodyPr wrap="square">
+            <a:spAutoFit/>
+          </a:bodyPr>
+          <a:lstStyle/>
+          <a:p>
+            <a:pPr>
+              <a:spcAft>
+                <a:spcPts val="1100"/>
+              </a:spcAft>
+            </a:pPr>
+            <a:r>
+              <a:rPr sz="1600" b="1" i="0">
+                <a:solidFill>
+                  <a:srgbClr val="E8801A"/>
+                </a:solidFill>
+                <a:latin typeface="Montserrat"/>
+              </a:rPr>
+              <a:t>▸  </a:t>
+            </a:r>
+            <a:r>
+              <a:rPr sz="1600" b="0" i="0">
+                <a:solidFill>
+                  <a:srgbClr val="1B2330"/>
+                </a:solidFill>
+                <a:latin typeface="Montserrat"/>
+              </a:rPr>
+              <a:t>Enterrado → UNE 60310 y 60311</a:t>
+            </a:r>
+          </a:p>
+          <a:p>
+            <a:pPr>
+              <a:spcAft>
+                <a:spcPts val="1100"/>
+              </a:spcAft>
+            </a:pPr>
+            <a:r>
+              <a:rPr sz="1600" b="1" i="0">
+                <a:solidFill>
+                  <a:srgbClr val="E8801A"/>
+                </a:solidFill>
+                <a:latin typeface="Montserrat"/>
+              </a:rPr>
+              <a:t>▸  </a:t>
+            </a:r>
+            <a:r>
+              <a:rPr sz="1600" b="0" i="0">
+                <a:solidFill>
+                  <a:srgbClr val="1B2330"/>
+                </a:solidFill>
+                <a:latin typeface="Montserrat"/>
+              </a:rPr>
+              <a:t>Consulta el material al distribuidor</a:t>
+            </a:r>
+          </a:p>
+          <a:p>
+            <a:pPr>
+              <a:spcAft>
+                <a:spcPts val="1100"/>
+              </a:spcAft>
+            </a:pPr>
+            <a:r>
+              <a:rPr sz="1600" b="1" i="0">
+                <a:solidFill>
+                  <a:srgbClr val="E8801A"/>
+                </a:solidFill>
+                <a:latin typeface="Montserrat"/>
+              </a:rPr>
+              <a:t>▸  </a:t>
+            </a:r>
+            <a:r>
+              <a:rPr sz="1600" b="0" i="0">
+                <a:solidFill>
+                  <a:srgbClr val="1B2330"/>
+                </a:solidFill>
+                <a:latin typeface="Montserrat"/>
+              </a:rPr>
+              <a:t>Debe ser compatible con la red</a:t>
+            </a:r>
+          </a:p>
+        </p:txBody>
+      </p:sp>
+      <p:sp>
+        <p:nvSpPr>
+          <p:cNvPr id="9" name="imgph" descr="IMGQ:buried yellow gas pipe in trench"/>
+          <p:cNvSpPr/>
+          <p:nvPr/>
+        </p:nvSpPr>
+        <p:spPr>
+          <a:xfrm>
+            <a:off x="5806440" y="1051560"/>
+            <a:ext cx="5298947" cy="4629150"/>
+          </a:xfrm>
+          <a:prstGeom prst="roundRect">
+            <a:avLst/>
+          </a:prstGeom>
+          <a:solidFill>
+            <a:srgbClr val="F3F6FB"/>
+          </a:solidFill>
+          <a:ln w="12700">
+            <a:solidFill>
+              <a:srgbClr val="C7D2E6"/>
+            </a:solidFill>
+          </a:ln>
+          <a:effectLst/>
+        </p:spPr>
+        <p:style>
+          <a:lnRef idx="1">
+            <a:schemeClr val="accent1"/>
+          </a:lnRef>
+          <a:fillRef idx="3">
+            <a:schemeClr val="accent1"/>
+          </a:fillRef>
+          <a:effectRef idx="2">
+            <a:schemeClr val="accent1"/>
+          </a:effectRef>
+          <a:fontRef idx="minor">
+            <a:schemeClr val="lt1"/>
+          </a:fontRef>
+        </p:style>
+        <p:txBody>
+          <a:bodyPr rtlCol="0" anchor="ctr"/>
+          <a:lstStyle/>
+          <a:p>
+            <a:pPr algn="ctr"/>
+          </a:p>
+        </p:txBody>
+      </p:sp>
+      <p:sp>
+        <p:nvSpPr>
+          <p:cNvPr id="10" name="TextBox 9"/>
+          <p:cNvSpPr txBox="1"/>
+          <p:nvPr/>
+        </p:nvSpPr>
+        <p:spPr>
+          <a:xfrm>
+            <a:off x="6080760" y="2726055"/>
+            <a:ext cx="4750307" cy="1280160"/>
+          </a:xfrm>
+          <a:prstGeom prst="rect">
+            <a:avLst/>
+          </a:prstGeom>
+          <a:noFill/>
+        </p:spPr>
+        <p:txBody>
+          <a:bodyPr wrap="square">
+            <a:spAutoFit/>
+          </a:bodyPr>
+          <a:lstStyle/>
+          <a:p>
+            <a:pPr algn="ctr"/>
+            <a:r>
+              <a:rPr sz="1400" b="1" i="0">
+                <a:solidFill>
+                  <a:srgbClr val="64748B"/>
+                </a:solidFill>
+                <a:latin typeface="Montserrat"/>
+              </a:rPr>
+              <a:t>IMAGEN REALISTA</a:t>
+            </a:r>
+          </a:p>
+          <a:p>
+            <a:pPr algn="ctr"/>
+            <a:r>
+              <a:rPr sz="1100" b="0" i="1">
+                <a:solidFill>
+                  <a:srgbClr val="64748B"/>
+                </a:solidFill>
+                <a:latin typeface="Montserrat"/>
+              </a:rPr>
+              <a:t>buried yellow gas pipe in trench</a:t>
+            </a:r>
+          </a:p>
+        </p:txBody>
+      </p:sp>
+    </p:spTree>
+  </p:cSld>
+  <p:clrMapOvr>
+    <a:masterClrMapping/>
+  </p:clrMapOvr>
+</p:sld>
+</file>
+
+<file path=ppt/slides/slide17.xml><?xml version="1.0" encoding="utf-8"?>
+<p:sld xmlns:a="http://schemas.openxmlformats.org/drawingml/2006/main" xmlns:p="http://schemas.openxmlformats.org/presentationml/2006/main" xmlns:r="http://schemas.openxmlformats.org/officeDocument/2006/relationships">
+  <p:cSld>
+    <p:spTree>
+      <p:nvGrpSpPr>
+        <p:cNvPr id="1" name=""/>
+        <p:cNvGrpSpPr/>
+        <p:nvPr/>
+      </p:nvGrpSpPr>
+      <p:grpSpPr/>
+      <p:sp>
+        <p:nvSpPr>
+          <p:cNvPr id="2" name="Rectangle 1"/>
+          <p:cNvSpPr/>
+          <p:nvPr/>
+        </p:nvSpPr>
+        <p:spPr>
+          <a:xfrm>
+            <a:off x="0" y="0"/>
+            <a:ext cx="12191695" cy="6858000"/>
+          </a:xfrm>
+          <a:prstGeom prst="rect">
+            <a:avLst/>
+          </a:prstGeom>
+          <a:solidFill>
             <a:srgbClr val="1E2761"/>
           </a:solidFill>
           <a:ln>
@@ -7272,7 +8081,7 @@
             <a:r>
               <a:rPr sz="1400" b="1" i="0">
                 <a:solidFill>
-                  <a:srgbClr val="CADCFC"/>
+                  <a:srgbClr val="F4A24C"/>
                 </a:solidFill>
                 <a:latin typeface="Montserrat"/>
               </a:rPr>
@@ -7283,13 +8092,57 @@
       </p:sp>
       <p:sp>
         <p:nvSpPr>
-          <p:cNvPr id="4" name="TextBox 3"/>
+          <p:cNvPr id="4" name="Rounded Rectangle 3"/>
+          <p:cNvSpPr/>
+          <p:nvPr/>
+        </p:nvSpPr>
+        <p:spPr>
+          <a:xfrm>
+            <a:off x="868680" y="1051560"/>
+            <a:ext cx="1463040" cy="82296"/>
+          </a:xfrm>
+          <a:prstGeom prst="roundRect">
+            <a:avLst/>
+          </a:prstGeom>
+          <a:solidFill>
+            <a:srgbClr val="E8801A"/>
+          </a:solidFill>
+          <a:ln>
+            <a:noFill/>
+          </a:ln>
+          <a:effectLst/>
+        </p:spPr>
+        <p:style>
+          <a:lnRef idx="1">
+            <a:schemeClr val="accent1"/>
+          </a:lnRef>
+          <a:fillRef idx="3">
+            <a:schemeClr val="accent1"/>
+          </a:fillRef>
+          <a:effectRef idx="2">
+            <a:schemeClr val="accent1"/>
+          </a:effectRef>
+          <a:fontRef idx="minor">
+            <a:schemeClr val="lt1"/>
+          </a:fontRef>
+        </p:style>
+        <p:txBody>
+          <a:bodyPr rtlCol="0" anchor="ctr"/>
+          <a:lstStyle/>
+          <a:p>
+            <a:pPr algn="ctr"/>
+          </a:p>
+        </p:txBody>
+      </p:sp>
+      <p:sp>
+        <p:nvSpPr>
+          <p:cNvPr id="5" name="TextBox 4"/>
           <p:cNvSpPr txBox="1"/>
           <p:nvPr/>
         </p:nvSpPr>
         <p:spPr>
           <a:xfrm>
-            <a:off x="822960" y="1143000"/>
+            <a:off x="822960" y="1234440"/>
             <a:ext cx="10515600" cy="1097280"/>
           </a:xfrm>
           <a:prstGeom prst="rect">
@@ -7317,14 +8170,14 @@
       </p:sp>
       <p:sp>
         <p:nvSpPr>
-          <p:cNvPr id="5" name="TextBox 4"/>
+          <p:cNvPr id="6" name="TextBox 5"/>
           <p:cNvSpPr txBox="1"/>
           <p:nvPr/>
         </p:nvSpPr>
         <p:spPr>
           <a:xfrm>
-            <a:off x="822960" y="2514600"/>
-            <a:ext cx="10515600" cy="2834640"/>
+            <a:off x="822960" y="2606040"/>
+            <a:ext cx="10515600" cy="2743200"/>
           </a:xfrm>
           <a:prstGeom prst="rect">
             <a:avLst/>
@@ -7345,7 +8198,7 @@
             <a:r>
               <a:rPr sz="2000" b="1" i="0">
                 <a:solidFill>
-                  <a:srgbClr val="CADCFC"/>
+                  <a:srgbClr val="F4A24C"/>
                 </a:solidFill>
                 <a:latin typeface="Montserrat"/>
               </a:rPr>
@@ -7370,7 +8223,7 @@
             <a:r>
               <a:rPr sz="2000" b="1" i="0">
                 <a:solidFill>
-                  <a:srgbClr val="CADCFC"/>
+                  <a:srgbClr val="F4A24C"/>
                 </a:solidFill>
                 <a:latin typeface="Montserrat"/>
               </a:rPr>
@@ -7395,7 +8248,7 @@
             <a:r>
               <a:rPr sz="2000" b="1" i="0">
                 <a:solidFill>
-                  <a:srgbClr val="CADCFC"/>
+                  <a:srgbClr val="F4A24C"/>
                 </a:solidFill>
                 <a:latin typeface="Montserrat"/>
               </a:rPr>
@@ -7420,7 +8273,7 @@
             <a:r>
               <a:rPr sz="2000" b="1" i="0">
                 <a:solidFill>
-                  <a:srgbClr val="CADCFC"/>
+                  <a:srgbClr val="F4A24C"/>
                 </a:solidFill>
                 <a:latin typeface="Montserrat"/>
               </a:rPr>
@@ -7440,20 +8293,20 @@
       </p:sp>
       <p:sp>
         <p:nvSpPr>
-          <p:cNvPr id="6" name="Rounded Rectangle 5"/>
+          <p:cNvPr id="7" name="Rounded Rectangle 6"/>
           <p:cNvSpPr/>
           <p:nvPr/>
         </p:nvSpPr>
         <p:spPr>
           <a:xfrm>
             <a:off x="822960" y="5532120"/>
-            <a:ext cx="10515600" cy="777240"/>
+            <a:ext cx="10515600" cy="822960"/>
           </a:xfrm>
           <a:prstGeom prst="roundRect">
             <a:avLst/>
           </a:prstGeom>
           <a:solidFill>
-            <a:srgbClr val="2E3A80"/>
+            <a:srgbClr val="E8801A"/>
           </a:solidFill>
           <a:ln>
             <a:noFill/>
@@ -7484,13 +8337,13 @@
       </p:sp>
       <p:sp>
         <p:nvSpPr>
-          <p:cNvPr id="7" name="TextBox 6"/>
+          <p:cNvPr id="8" name="TextBox 7"/>
           <p:cNvSpPr txBox="1"/>
           <p:nvPr/>
         </p:nvSpPr>
         <p:spPr>
           <a:xfrm>
-            <a:off x="1051560" y="5605272"/>
+            <a:off x="1051560" y="5623560"/>
             <a:ext cx="10058400" cy="640080"/>
           </a:xfrm>
           <a:prstGeom prst="rect">
@@ -7507,7 +8360,7 @@
             <a:r>
               <a:rPr sz="1500" b="1" i="1">
                 <a:solidFill>
-                  <a:srgbClr val="CADCFC"/>
+                  <a:srgbClr val="1E2761"/>
                 </a:solidFill>
                 <a:latin typeface="Montserrat"/>
               </a:rPr>
@@ -7608,7 +8461,7 @@
                 </a:solidFill>
                 <a:latin typeface="Montserrat"/>
               </a:rPr>
-              <a:t>002 / 016</a:t>
+              <a:t>002 / 017</a:t>
             </a:r>
           </a:p>
         </p:txBody>
@@ -7672,7 +8525,7 @@
             <a:r>
               <a:rPr sz="2700" b="1" i="0">
                 <a:solidFill>
-                  <a:srgbClr val="1E2761"/>
+                  <a:srgbClr val="E8801A"/>
                 </a:solidFill>
                 <a:latin typeface="Montserrat"/>
               </a:rPr>
@@ -7684,6 +8537,50 @@
       <p:sp>
         <p:nvSpPr>
           <p:cNvPr id="6" name="Rounded Rectangle 5"/>
+          <p:cNvSpPr/>
+          <p:nvPr/>
+        </p:nvSpPr>
+        <p:spPr>
+          <a:xfrm>
+            <a:off x="868680" y="1234440"/>
+            <a:ext cx="1463040" cy="73152"/>
+          </a:xfrm>
+          <a:prstGeom prst="roundRect">
+            <a:avLst/>
+          </a:prstGeom>
+          <a:solidFill>
+            <a:srgbClr val="1E2761"/>
+          </a:solidFill>
+          <a:ln>
+            <a:noFill/>
+          </a:ln>
+          <a:effectLst/>
+        </p:spPr>
+        <p:style>
+          <a:lnRef idx="1">
+            <a:schemeClr val="accent1"/>
+          </a:lnRef>
+          <a:fillRef idx="3">
+            <a:schemeClr val="accent1"/>
+          </a:fillRef>
+          <a:effectRef idx="2">
+            <a:schemeClr val="accent1"/>
+          </a:effectRef>
+          <a:fontRef idx="minor">
+            <a:schemeClr val="lt1"/>
+          </a:fontRef>
+        </p:style>
+        <p:txBody>
+          <a:bodyPr rtlCol="0" anchor="ctr"/>
+          <a:lstStyle/>
+          <a:p>
+            <a:pPr algn="ctr"/>
+          </a:p>
+        </p:txBody>
+      </p:sp>
+      <p:sp>
+        <p:nvSpPr>
+          <p:cNvPr id="7" name="Rounded Rectangle 6"/>
           <p:cNvSpPr/>
           <p:nvPr/>
         </p:nvSpPr>
@@ -7729,7 +8626,7 @@
       </p:sp>
       <p:sp>
         <p:nvSpPr>
-          <p:cNvPr id="7" name="TextBox 6"/>
+          <p:cNvPr id="8" name="TextBox 7"/>
           <p:cNvSpPr txBox="1"/>
           <p:nvPr/>
         </p:nvSpPr>
@@ -7764,7 +8661,7 @@
       </p:sp>
       <p:sp>
         <p:nvSpPr>
-          <p:cNvPr id="8" name="TextBox 7"/>
+          <p:cNvPr id="9" name="TextBox 8"/>
           <p:cNvSpPr txBox="1"/>
           <p:nvPr/>
         </p:nvSpPr>
@@ -7799,7 +8696,7 @@
       </p:sp>
       <p:sp>
         <p:nvSpPr>
-          <p:cNvPr id="9" name="Rounded Rectangle 8"/>
+          <p:cNvPr id="10" name="Rounded Rectangle 9"/>
           <p:cNvSpPr/>
           <p:nvPr/>
         </p:nvSpPr>
@@ -7845,7 +8742,7 @@
       </p:sp>
       <p:sp>
         <p:nvSpPr>
-          <p:cNvPr id="10" name="TextBox 9"/>
+          <p:cNvPr id="11" name="TextBox 10"/>
           <p:cNvSpPr txBox="1"/>
           <p:nvPr/>
         </p:nvSpPr>
@@ -7880,7 +8777,7 @@
       </p:sp>
       <p:sp>
         <p:nvSpPr>
-          <p:cNvPr id="11" name="TextBox 10"/>
+          <p:cNvPr id="12" name="TextBox 11"/>
           <p:cNvSpPr txBox="1"/>
           <p:nvPr/>
         </p:nvSpPr>
@@ -7915,7 +8812,7 @@
       </p:sp>
       <p:sp>
         <p:nvSpPr>
-          <p:cNvPr id="12" name="Rounded Rectangle 11"/>
+          <p:cNvPr id="13" name="Rounded Rectangle 12"/>
           <p:cNvSpPr/>
           <p:nvPr/>
         </p:nvSpPr>
@@ -7961,7 +8858,7 @@
       </p:sp>
       <p:sp>
         <p:nvSpPr>
-          <p:cNvPr id="13" name="TextBox 12"/>
+          <p:cNvPr id="14" name="TextBox 13"/>
           <p:cNvSpPr txBox="1"/>
           <p:nvPr/>
         </p:nvSpPr>
@@ -7996,7 +8893,7 @@
       </p:sp>
       <p:sp>
         <p:nvSpPr>
-          <p:cNvPr id="14" name="TextBox 13"/>
+          <p:cNvPr id="15" name="TextBox 14"/>
           <p:cNvSpPr txBox="1"/>
           <p:nvPr/>
         </p:nvSpPr>
@@ -8121,7 +9018,7 @@
                 </a:solidFill>
                 <a:latin typeface="Montserrat"/>
               </a:rPr>
-              <a:t>003 / 016</a:t>
+              <a:t>003 / 017</a:t>
             </a:r>
           </a:p>
         </p:txBody>
@@ -8168,7 +9065,7 @@
         </p:nvSpPr>
         <p:spPr>
           <a:xfrm>
-            <a:off x="822960" y="457200"/>
+            <a:off x="822960" y="502920"/>
             <a:ext cx="8229600" cy="365760"/>
           </a:xfrm>
           <a:prstGeom prst="rect">
@@ -8183,13 +9080,13 @@
           <a:lstStyle/>
           <a:p>
             <a:r>
-              <a:rPr sz="1200" b="1" i="0">
-                <a:solidFill>
-                  <a:srgbClr val="64748B"/>
-                </a:solidFill>
-                <a:latin typeface="Montserrat"/>
-              </a:rPr>
-              <a:t>APARTADO 1 · OBJETO</a:t>
+              <a:rPr sz="1300" b="1" i="0">
+                <a:solidFill>
+                  <a:srgbClr val="E8801A"/>
+                </a:solidFill>
+                <a:latin typeface="Montserrat"/>
+              </a:rPr>
+              <a:t>PARTES DE ESTE VÍDEO</a:t>
             </a:r>
           </a:p>
         </p:txBody>
@@ -8202,7 +9099,7 @@
         </p:nvSpPr>
         <p:spPr>
           <a:xfrm>
-            <a:off x="822960" y="868680"/>
+            <a:off x="822960" y="914400"/>
             <a:ext cx="10515600" cy="914400"/>
           </a:xfrm>
           <a:prstGeom prst="rect">
@@ -8223,155 +9120,30 @@
                 </a:solidFill>
                 <a:latin typeface="Montserrat"/>
               </a:rPr>
-              <a:t>¿Qué regula la ITC-ICG 07?</a:t>
-            </a:r>
-          </a:p>
-        </p:txBody>
-      </p:sp>
-      <p:sp>
-        <p:nvSpPr>
-          <p:cNvPr id="7" name="TextBox 6"/>
-          <p:cNvSpPr txBox="1"/>
-          <p:nvPr/>
-        </p:nvSpPr>
-        <p:spPr>
-          <a:xfrm>
-            <a:off x="822960" y="1920240"/>
-            <a:ext cx="4983480" cy="4206240"/>
-          </a:xfrm>
-          <a:prstGeom prst="rect">
-            <a:avLst/>
-          </a:prstGeom>
-          <a:noFill/>
-        </p:spPr>
-        <p:txBody>
-          <a:bodyPr wrap="square">
-            <a:spAutoFit/>
-          </a:bodyPr>
-          <a:lstStyle/>
-          <a:p>
-            <a:pPr>
-              <a:spcAft>
-                <a:spcPts val="1000"/>
-              </a:spcAft>
-            </a:pPr>
-            <a:r>
-              <a:rPr sz="1600" b="1" i="0">
-                <a:solidFill>
-                  <a:srgbClr val="2E3A80"/>
-                </a:solidFill>
-                <a:latin typeface="Montserrat"/>
-              </a:rPr>
-              <a:t>•  </a:t>
-            </a:r>
-            <a:r>
-              <a:rPr sz="1600" b="0" i="0">
-                <a:solidFill>
-                  <a:srgbClr val="1B2330"/>
-                </a:solidFill>
-                <a:latin typeface="Montserrat"/>
-              </a:rPr>
-              <a:t>Diseño, ejecución y utilización</a:t>
-            </a:r>
-          </a:p>
-          <a:p>
-            <a:pPr>
-              <a:spcAft>
-                <a:spcPts val="1000"/>
-              </a:spcAft>
-            </a:pPr>
-            <a:r>
-              <a:rPr sz="1600" b="1" i="0">
-                <a:solidFill>
-                  <a:srgbClr val="2E3A80"/>
-                </a:solidFill>
-                <a:latin typeface="Montserrat"/>
-              </a:rPr>
-              <a:t>•  </a:t>
-            </a:r>
-            <a:r>
-              <a:rPr sz="1600" b="0" i="0">
-                <a:solidFill>
-                  <a:srgbClr val="1B2330"/>
-                </a:solidFill>
-                <a:latin typeface="Montserrat"/>
-              </a:rPr>
-              <a:t>Instalaciones receptoras de gas</a:t>
-            </a:r>
-          </a:p>
-          <a:p>
-            <a:pPr>
-              <a:spcAft>
-                <a:spcPts val="1000"/>
-              </a:spcAft>
-            </a:pPr>
-            <a:r>
-              <a:rPr sz="1600" b="1" i="0">
-                <a:solidFill>
-                  <a:srgbClr val="2E3A80"/>
-                </a:solidFill>
-                <a:latin typeface="Montserrat"/>
-              </a:rPr>
-              <a:t>•  </a:t>
-            </a:r>
-            <a:r>
-              <a:rPr sz="1600" b="0" i="0">
-                <a:solidFill>
-                  <a:srgbClr val="1B2330"/>
-                </a:solidFill>
-                <a:latin typeface="Montserrat"/>
-              </a:rPr>
-              <a:t>También los locales y los aparatos</a:t>
-            </a:r>
-          </a:p>
-          <a:p>
-            <a:pPr>
-              <a:spcAft>
-                <a:spcPts val="1000"/>
-              </a:spcAft>
-            </a:pPr>
-            <a:r>
-              <a:rPr sz="1600" b="1" i="0">
-                <a:solidFill>
-                  <a:srgbClr val="2E3A80"/>
-                </a:solidFill>
-                <a:latin typeface="Montserrat"/>
-              </a:rPr>
-              <a:t>•  </a:t>
-            </a:r>
-            <a:r>
-              <a:rPr sz="1600" b="0" i="0">
-                <a:solidFill>
-                  <a:srgbClr val="1B2330"/>
-                </a:solidFill>
-                <a:latin typeface="Montserrat"/>
-              </a:rPr>
-              <a:t>Fin: seguridad de personas y bienes</a:t>
-            </a:r>
-          </a:p>
-        </p:txBody>
-      </p:sp>
-      <p:sp>
-        <p:nvSpPr>
-          <p:cNvPr id="8" name="imgph" descr="IMGQ:gas boiler installation in kitchen"/>
+              <a:t>En este vídeo</a:t>
+            </a:r>
+          </a:p>
+        </p:txBody>
+      </p:sp>
+      <p:sp>
+        <p:nvSpPr>
+          <p:cNvPr id="7" name="Rounded Rectangle 6"/>
           <p:cNvSpPr/>
           <p:nvPr/>
         </p:nvSpPr>
         <p:spPr>
           <a:xfrm>
-            <a:off x="5806440" y="1051560"/>
-            <a:ext cx="5298947" cy="4629150"/>
+            <a:off x="868680" y="1673352"/>
+            <a:ext cx="2011680" cy="73152"/>
           </a:xfrm>
           <a:prstGeom prst="roundRect">
             <a:avLst/>
           </a:prstGeom>
           <a:solidFill>
-            <a:srgbClr val="F3F6FB"/>
+            <a:srgbClr val="E8801A"/>
           </a:solidFill>
-          <a:ln w="12700">
-            <a:solidFill>
-              <a:srgbClr val="C7D2E6"/>
-            </a:solidFill>
+          <a:ln>
+            <a:noFill/>
           </a:ln>
           <a:effectLst/>
         </p:spPr>
@@ -8399,14 +9171,14 @@
       </p:sp>
       <p:sp>
         <p:nvSpPr>
-          <p:cNvPr id="9" name="TextBox 8"/>
+          <p:cNvPr id="8" name="TextBox 7"/>
           <p:cNvSpPr txBox="1"/>
           <p:nvPr/>
         </p:nvSpPr>
         <p:spPr>
           <a:xfrm>
-            <a:off x="6080760" y="2726055"/>
-            <a:ext cx="4750307" cy="1280160"/>
+            <a:off x="822960" y="2103120"/>
+            <a:ext cx="10515600" cy="4023360"/>
           </a:xfrm>
           <a:prstGeom prst="rect">
             <a:avLst/>
@@ -8419,27 +9191,53 @@
           </a:bodyPr>
           <a:lstStyle/>
           <a:p>
-            <a:pPr algn="ctr"/>
-            <a:r>
-              <a:rPr sz="1400" b="1" i="0">
-                <a:solidFill>
-                  <a:srgbClr val="64748B"/>
-                </a:solidFill>
-                <a:latin typeface="Montserrat"/>
-              </a:rPr>
-              <a:t>IMAGEN REALISTA</a:t>
-            </a:r>
-          </a:p>
-          <a:p>
-            <a:pPr algn="ctr"/>
-            <a:r>
-              <a:rPr sz="1100" b="0" i="1">
-                <a:solidFill>
-                  <a:srgbClr val="64748B"/>
-                </a:solidFill>
-                <a:latin typeface="Montserrat"/>
-              </a:rPr>
-              <a:t>gas boiler installation in kitchen</a:t>
+            <a:pPr>
+              <a:spcAft>
+                <a:spcPts val="900"/>
+              </a:spcAft>
+            </a:pPr>
+            <a:r>
+              <a:rPr sz="1800" b="1" i="0">
+                <a:solidFill>
+                  <a:srgbClr val="E8801A"/>
+                </a:solidFill>
+                <a:latin typeface="Montserrat"/>
+              </a:rPr>
+              <a:t>01   </a:t>
+            </a:r>
+            <a:r>
+              <a:rPr sz="1700" b="0" i="0">
+                <a:solidFill>
+                  <a:srgbClr val="1B2330"/>
+                </a:solidFill>
+                <a:latin typeface="Montserrat"/>
+              </a:rPr>
+              <a:t>Apartado 1</a:t>
+            </a:r>
+          </a:p>
+          <a:p>
+            <a:pPr>
+              <a:spcAft>
+                <a:spcPts val="900"/>
+              </a:spcAft>
+            </a:pPr>
+            <a:r>
+              <a:rPr sz="1800" b="1" i="0">
+                <a:solidFill>
+                  <a:srgbClr val="E8801A"/>
+                </a:solidFill>
+                <a:latin typeface="Montserrat"/>
+              </a:rPr>
+              <a:t>02   </a:t>
+            </a:r>
+            <a:r>
+              <a:rPr sz="1700" b="0" i="0">
+                <a:solidFill>
+                  <a:srgbClr val="1B2330"/>
+                </a:solidFill>
+                <a:latin typeface="Montserrat"/>
+              </a:rPr>
+              <a:t>Apartado 2</a:t>
             </a:r>
           </a:p>
         </p:txBody>
@@ -8536,7 +9334,7 @@
                 </a:solidFill>
                 <a:latin typeface="Montserrat"/>
               </a:rPr>
-              <a:t>004 / 016</a:t>
+              <a:t>004 / 017</a:t>
             </a:r>
           </a:p>
         </p:txBody>
@@ -8584,7 +9382,7 @@
         <p:spPr>
           <a:xfrm>
             <a:off x="822960" y="457200"/>
-            <a:ext cx="8229600" cy="365760"/>
+            <a:ext cx="10058400" cy="365760"/>
           </a:xfrm>
           <a:prstGeom prst="rect">
             <a:avLst/>
@@ -8598,13 +9396,13 @@
           <a:lstStyle/>
           <a:p>
             <a:r>
-              <a:rPr sz="1200" b="1" i="0">
-                <a:solidFill>
-                  <a:srgbClr val="64748B"/>
-                </a:solidFill>
-                <a:latin typeface="Montserrat"/>
-              </a:rPr>
-              <a:t>APARTADO 1 · CAMPO DE APLICACIÓN</a:t>
+              <a:rPr sz="1300" b="1" i="0">
+                <a:solidFill>
+                  <a:srgbClr val="E8801A"/>
+                </a:solidFill>
+                <a:latin typeface="Montserrat"/>
+              </a:rPr>
+              <a:t>APARTADO 1 · OBJETO</a:t>
             </a:r>
           </a:p>
         </p:txBody>
@@ -8632,26 +9430,70 @@
           <a:lstStyle/>
           <a:p>
             <a:r>
-              <a:rPr sz="2700" b="1" i="0">
+              <a:rPr sz="2800" b="1" i="0">
                 <a:solidFill>
                   <a:srgbClr val="1E2761"/>
                 </a:solidFill>
                 <a:latin typeface="Montserrat"/>
               </a:rPr>
-              <a:t>La instalación receptora</a:t>
-            </a:r>
-          </a:p>
-        </p:txBody>
-      </p:sp>
-      <p:sp>
-        <p:nvSpPr>
-          <p:cNvPr id="7" name="TextBox 6"/>
+              <a:t>¿Qué regula la ITC-ICG 07?</a:t>
+            </a:r>
+          </a:p>
+        </p:txBody>
+      </p:sp>
+      <p:sp>
+        <p:nvSpPr>
+          <p:cNvPr id="7" name="Rounded Rectangle 6"/>
+          <p:cNvSpPr/>
+          <p:nvPr/>
+        </p:nvSpPr>
+        <p:spPr>
+          <a:xfrm>
+            <a:off x="868680" y="1627632"/>
+            <a:ext cx="2011680" cy="73152"/>
+          </a:xfrm>
+          <a:prstGeom prst="roundRect">
+            <a:avLst/>
+          </a:prstGeom>
+          <a:solidFill>
+            <a:srgbClr val="E8801A"/>
+          </a:solidFill>
+          <a:ln>
+            <a:noFill/>
+          </a:ln>
+          <a:effectLst/>
+        </p:spPr>
+        <p:style>
+          <a:lnRef idx="1">
+            <a:schemeClr val="accent1"/>
+          </a:lnRef>
+          <a:fillRef idx="3">
+            <a:schemeClr val="accent1"/>
+          </a:fillRef>
+          <a:effectRef idx="2">
+            <a:schemeClr val="accent1"/>
+          </a:effectRef>
+          <a:fontRef idx="minor">
+            <a:schemeClr val="lt1"/>
+          </a:fontRef>
+        </p:style>
+        <p:txBody>
+          <a:bodyPr rtlCol="0" anchor="ctr"/>
+          <a:lstStyle/>
+          <a:p>
+            <a:pPr algn="ctr"/>
+          </a:p>
+        </p:txBody>
+      </p:sp>
+      <p:sp>
+        <p:nvSpPr>
+          <p:cNvPr id="8" name="TextBox 7"/>
           <p:cNvSpPr txBox="1"/>
           <p:nvPr/>
         </p:nvSpPr>
         <p:spPr>
           <a:xfrm>
-            <a:off x="822960" y="1920240"/>
+            <a:off x="822960" y="1965960"/>
             <a:ext cx="4983480" cy="4206240"/>
           </a:xfrm>
           <a:prstGeom prst="rect">
@@ -8667,17 +9509,17 @@
           <a:p>
             <a:pPr>
               <a:spcAft>
-                <a:spcPts val="1000"/>
+                <a:spcPts val="1100"/>
               </a:spcAft>
             </a:pPr>
             <a:r>
               <a:rPr sz="1600" b="1" i="0">
                 <a:solidFill>
-                  <a:srgbClr val="2E3A80"/>
-                </a:solidFill>
-                <a:latin typeface="Montserrat"/>
-              </a:rPr>
-              <a:t>•  </a:t>
+                  <a:srgbClr val="E8801A"/>
+                </a:solidFill>
+                <a:latin typeface="Montserrat"/>
+              </a:rPr>
+              <a:t>▸  </a:t>
             </a:r>
             <a:r>
               <a:rPr sz="1600" b="0" i="0">
@@ -8686,23 +9528,23 @@
                 </a:solidFill>
                 <a:latin typeface="Montserrat"/>
               </a:rPr>
-              <a:t>De la llave de acometida (fuera)</a:t>
+              <a:t>Diseño, ejecución y utilización</a:t>
             </a:r>
           </a:p>
           <a:p>
             <a:pPr>
               <a:spcAft>
-                <a:spcPts val="1000"/>
+                <a:spcPts val="1100"/>
               </a:spcAft>
             </a:pPr>
             <a:r>
               <a:rPr sz="1600" b="1" i="0">
                 <a:solidFill>
-                  <a:srgbClr val="2E3A80"/>
-                </a:solidFill>
-                <a:latin typeface="Montserrat"/>
-              </a:rPr>
-              <a:t>•  </a:t>
+                  <a:srgbClr val="E8801A"/>
+                </a:solidFill>
+                <a:latin typeface="Montserrat"/>
+              </a:rPr>
+              <a:t>▸  </a:t>
             </a:r>
             <a:r>
               <a:rPr sz="1600" b="0" i="0">
@@ -8711,23 +9553,23 @@
                 </a:solidFill>
                 <a:latin typeface="Montserrat"/>
               </a:rPr>
-              <a:t>A la llave del aparato (dentro)</a:t>
+              <a:t>Instalaciones receptoras de gas</a:t>
             </a:r>
           </a:p>
           <a:p>
             <a:pPr>
               <a:spcAft>
-                <a:spcPts val="1000"/>
+                <a:spcPts val="1100"/>
               </a:spcAft>
             </a:pPr>
             <a:r>
               <a:rPr sz="1600" b="1" i="0">
                 <a:solidFill>
-                  <a:srgbClr val="2E3A80"/>
-                </a:solidFill>
-                <a:latin typeface="Montserrat"/>
-              </a:rPr>
-              <a:t>•  </a:t>
+                  <a:srgbClr val="E8801A"/>
+                </a:solidFill>
+                <a:latin typeface="Montserrat"/>
+              </a:rPr>
+              <a:t>▸  </a:t>
             </a:r>
             <a:r>
               <a:rPr sz="1600" b="0" i="0">
@@ -8736,23 +9578,23 @@
                 </a:solidFill>
                 <a:latin typeface="Montserrat"/>
               </a:rPr>
-              <a:t>Tres tramos encajados</a:t>
+              <a:t>También los locales y los aparatos</a:t>
             </a:r>
           </a:p>
           <a:p>
             <a:pPr>
               <a:spcAft>
-                <a:spcPts val="1000"/>
+                <a:spcPts val="1100"/>
               </a:spcAft>
             </a:pPr>
             <a:r>
               <a:rPr sz="1600" b="1" i="0">
                 <a:solidFill>
-                  <a:srgbClr val="2E3A80"/>
-                </a:solidFill>
-                <a:latin typeface="Montserrat"/>
-              </a:rPr>
-              <a:t>•  </a:t>
+                  <a:srgbClr val="E8801A"/>
+                </a:solidFill>
+                <a:latin typeface="Montserrat"/>
+              </a:rPr>
+              <a:t>▸  </a:t>
             </a:r>
             <a:r>
               <a:rPr sz="1600" b="0" i="0">
@@ -8761,14 +9603,14 @@
                 </a:solidFill>
                 <a:latin typeface="Montserrat"/>
               </a:rPr>
-              <a:t>Acometida interior, común, individual</a:t>
-            </a:r>
-          </a:p>
-        </p:txBody>
-      </p:sp>
-      <p:sp>
-        <p:nvSpPr>
-          <p:cNvPr id="8" name="imgph" descr="IMGQ:gas meter cabinet in building wall"/>
+              <a:t>Fin: seguridad de personas y bienes</a:t>
+            </a:r>
+          </a:p>
+        </p:txBody>
+      </p:sp>
+      <p:sp>
+        <p:nvSpPr>
+          <p:cNvPr id="9" name="imgph" descr="IMGQ:gas boiler installation in kitchen"/>
           <p:cNvSpPr/>
           <p:nvPr/>
         </p:nvSpPr>
@@ -8814,7 +9656,7 @@
       </p:sp>
       <p:sp>
         <p:nvSpPr>
-          <p:cNvPr id="9" name="TextBox 8"/>
+          <p:cNvPr id="10" name="TextBox 9"/>
           <p:cNvSpPr txBox="1"/>
           <p:nvPr/>
         </p:nvSpPr>
@@ -8854,7 +9696,7 @@
                 </a:solidFill>
                 <a:latin typeface="Montserrat"/>
               </a:rPr>
-              <a:t>gas meter cabinet in building wall</a:t>
+              <a:t>gas boiler installation in kitchen</a:t>
             </a:r>
           </a:p>
         </p:txBody>
@@ -8951,7 +9793,7 @@
                 </a:solidFill>
                 <a:latin typeface="Montserrat"/>
               </a:rPr>
-              <a:t>005 / 016</a:t>
+              <a:t>005 / 017</a:t>
             </a:r>
           </a:p>
         </p:txBody>
@@ -8999,7 +9841,7 @@
         <p:spPr>
           <a:xfrm>
             <a:off x="822960" y="457200"/>
-            <a:ext cx="8229600" cy="365760"/>
+            <a:ext cx="10058400" cy="365760"/>
           </a:xfrm>
           <a:prstGeom prst="rect">
             <a:avLst/>
@@ -9013,13 +9855,13 @@
           <a:lstStyle/>
           <a:p>
             <a:r>
-              <a:rPr sz="1200" b="1" i="0">
-                <a:solidFill>
-                  <a:srgbClr val="64748B"/>
-                </a:solidFill>
-                <a:latin typeface="Montserrat"/>
-              </a:rPr>
-              <a:t>APARTADO 2 · EVACUACIÓN DE HUMOS</a:t>
+              <a:rPr sz="1300" b="1" i="0">
+                <a:solidFill>
+                  <a:srgbClr val="E8801A"/>
+                </a:solidFill>
+                <a:latin typeface="Montserrat"/>
+              </a:rPr>
+              <a:t>APARTADO 1 · CAMPO DE APLICACIÓN</a:t>
             </a:r>
           </a:p>
         </p:txBody>
@@ -9047,26 +9889,70 @@
           <a:lstStyle/>
           <a:p>
             <a:r>
-              <a:rPr sz="2700" b="1" i="0">
+              <a:rPr sz="2800" b="1" i="0">
                 <a:solidFill>
                   <a:srgbClr val="1E2761"/>
                 </a:solidFill>
                 <a:latin typeface="Montserrat"/>
               </a:rPr>
-              <a:t>Chimeneas: diseño y cálculo</a:t>
-            </a:r>
-          </a:p>
-        </p:txBody>
-      </p:sp>
-      <p:sp>
-        <p:nvSpPr>
-          <p:cNvPr id="7" name="TextBox 6"/>
+              <a:t>La instalación receptora</a:t>
+            </a:r>
+          </a:p>
+        </p:txBody>
+      </p:sp>
+      <p:sp>
+        <p:nvSpPr>
+          <p:cNvPr id="7" name="Rounded Rectangle 6"/>
+          <p:cNvSpPr/>
+          <p:nvPr/>
+        </p:nvSpPr>
+        <p:spPr>
+          <a:xfrm>
+            <a:off x="868680" y="1627632"/>
+            <a:ext cx="2011680" cy="73152"/>
+          </a:xfrm>
+          <a:prstGeom prst="roundRect">
+            <a:avLst/>
+          </a:prstGeom>
+          <a:solidFill>
+            <a:srgbClr val="E8801A"/>
+          </a:solidFill>
+          <a:ln>
+            <a:noFill/>
+          </a:ln>
+          <a:effectLst/>
+        </p:spPr>
+        <p:style>
+          <a:lnRef idx="1">
+            <a:schemeClr val="accent1"/>
+          </a:lnRef>
+          <a:fillRef idx="3">
+            <a:schemeClr val="accent1"/>
+          </a:fillRef>
+          <a:effectRef idx="2">
+            <a:schemeClr val="accent1"/>
+          </a:effectRef>
+          <a:fontRef idx="minor">
+            <a:schemeClr val="lt1"/>
+          </a:fontRef>
+        </p:style>
+        <p:txBody>
+          <a:bodyPr rtlCol="0" anchor="ctr"/>
+          <a:lstStyle/>
+          <a:p>
+            <a:pPr algn="ctr"/>
+          </a:p>
+        </p:txBody>
+      </p:sp>
+      <p:sp>
+        <p:nvSpPr>
+          <p:cNvPr id="8" name="TextBox 7"/>
           <p:cNvSpPr txBox="1"/>
           <p:nvPr/>
         </p:nvSpPr>
         <p:spPr>
           <a:xfrm>
-            <a:off x="822960" y="1920240"/>
+            <a:off x="822960" y="1965960"/>
             <a:ext cx="4983480" cy="4206240"/>
           </a:xfrm>
           <a:prstGeom prst="rect">
@@ -9082,17 +9968,17 @@
           <a:p>
             <a:pPr>
               <a:spcAft>
-                <a:spcPts val="1000"/>
+                <a:spcPts val="1100"/>
               </a:spcAft>
             </a:pPr>
             <a:r>
               <a:rPr sz="1600" b="1" i="0">
                 <a:solidFill>
-                  <a:srgbClr val="2E3A80"/>
-                </a:solidFill>
-                <a:latin typeface="Montserrat"/>
-              </a:rPr>
-              <a:t>•  </a:t>
+                  <a:srgbClr val="E8801A"/>
+                </a:solidFill>
+                <a:latin typeface="Montserrat"/>
+              </a:rPr>
+              <a:t>▸  </a:t>
             </a:r>
             <a:r>
               <a:rPr sz="1600" b="0" i="0">
@@ -9101,23 +9987,23 @@
                 </a:solidFill>
                 <a:latin typeface="Montserrat"/>
               </a:rPr>
-              <a:t>Obra nueva y rehabilitación</a:t>
+              <a:t>De la llave de acometida (fuera)</a:t>
             </a:r>
           </a:p>
           <a:p>
             <a:pPr>
               <a:spcAft>
-                <a:spcPts val="1000"/>
+                <a:spcPts val="1100"/>
               </a:spcAft>
             </a:pPr>
             <a:r>
               <a:rPr sz="1600" b="1" i="0">
                 <a:solidFill>
-                  <a:srgbClr val="2E3A80"/>
-                </a:solidFill>
-                <a:latin typeface="Montserrat"/>
-              </a:rPr>
-              <a:t>•  </a:t>
+                  <a:srgbClr val="E8801A"/>
+                </a:solidFill>
+                <a:latin typeface="Montserrat"/>
+              </a:rPr>
+              <a:t>▸  </a:t>
             </a:r>
             <a:r>
               <a:rPr sz="1600" b="0" i="0">
@@ -9126,23 +10012,23 @@
                 </a:solidFill>
                 <a:latin typeface="Montserrat"/>
               </a:rPr>
-              <a:t>UNE 123001</a:t>
+              <a:t>A la llave del aparato (dentro)</a:t>
             </a:r>
           </a:p>
           <a:p>
             <a:pPr>
               <a:spcAft>
-                <a:spcPts val="1000"/>
+                <a:spcPts val="1100"/>
               </a:spcAft>
             </a:pPr>
             <a:r>
               <a:rPr sz="1600" b="1" i="0">
                 <a:solidFill>
-                  <a:srgbClr val="2E3A80"/>
-                </a:solidFill>
-                <a:latin typeface="Montserrat"/>
-              </a:rPr>
-              <a:t>•  </a:t>
+                  <a:srgbClr val="E8801A"/>
+                </a:solidFill>
+                <a:latin typeface="Montserrat"/>
+              </a:rPr>
+              <a:t>▸  </a:t>
             </a:r>
             <a:r>
               <a:rPr sz="1600" b="0" i="0">
@@ -9151,14 +10037,39 @@
                 </a:solidFill>
                 <a:latin typeface="Montserrat"/>
               </a:rPr>
-              <a:t>UNE-EN 13384-1 y 13384-2</a:t>
-            </a:r>
-          </a:p>
-        </p:txBody>
-      </p:sp>
-      <p:sp>
-        <p:nvSpPr>
-          <p:cNvPr id="8" name="imgph" descr="IMGQ:metal chimney flue on building roof"/>
+              <a:t>Tres tramos encajados</a:t>
+            </a:r>
+          </a:p>
+          <a:p>
+            <a:pPr>
+              <a:spcAft>
+                <a:spcPts val="1100"/>
+              </a:spcAft>
+            </a:pPr>
+            <a:r>
+              <a:rPr sz="1600" b="1" i="0">
+                <a:solidFill>
+                  <a:srgbClr val="E8801A"/>
+                </a:solidFill>
+                <a:latin typeface="Montserrat"/>
+              </a:rPr>
+              <a:t>▸  </a:t>
+            </a:r>
+            <a:r>
+              <a:rPr sz="1600" b="0" i="0">
+                <a:solidFill>
+                  <a:srgbClr val="1B2330"/>
+                </a:solidFill>
+                <a:latin typeface="Montserrat"/>
+              </a:rPr>
+              <a:t>Acometida interior, común, individual</a:t>
+            </a:r>
+          </a:p>
+        </p:txBody>
+      </p:sp>
+      <p:sp>
+        <p:nvSpPr>
+          <p:cNvPr id="9" name="imgph" descr="IMGQ:gas meter cabinet in building wall"/>
           <p:cNvSpPr/>
           <p:nvPr/>
         </p:nvSpPr>
@@ -9204,7 +10115,7 @@
       </p:sp>
       <p:sp>
         <p:nvSpPr>
-          <p:cNvPr id="9" name="TextBox 8"/>
+          <p:cNvPr id="10" name="TextBox 9"/>
           <p:cNvSpPr txBox="1"/>
           <p:nvPr/>
         </p:nvSpPr>
@@ -9244,7 +10155,7 @@
                 </a:solidFill>
                 <a:latin typeface="Montserrat"/>
               </a:rPr>
-              <a:t>metal chimney flue on building roof</a:t>
+              <a:t>gas meter cabinet in building wall</a:t>
             </a:r>
           </a:p>
         </p:txBody>
@@ -9341,7 +10252,7 @@
                 </a:solidFill>
                 <a:latin typeface="Montserrat"/>
               </a:rPr>
-              <a:t>006 / 016</a:t>
+              <a:t>006 / 017</a:t>
             </a:r>
           </a:p>
         </p:txBody>
@@ -9389,7 +10300,7 @@
         <p:spPr>
           <a:xfrm>
             <a:off x="822960" y="457200"/>
-            <a:ext cx="8229600" cy="365760"/>
+            <a:ext cx="10058400" cy="365760"/>
           </a:xfrm>
           <a:prstGeom prst="rect">
             <a:avLst/>
@@ -9403,9 +10314,9 @@
           <a:lstStyle/>
           <a:p>
             <a:r>
-              <a:rPr sz="1200" b="1" i="0">
-                <a:solidFill>
-                  <a:srgbClr val="64748B"/>
+              <a:rPr sz="1300" b="1" i="0">
+                <a:solidFill>
+                  <a:srgbClr val="E8801A"/>
                 </a:solidFill>
                 <a:latin typeface="Montserrat"/>
               </a:rPr>
@@ -9437,26 +10348,70 @@
           <a:lstStyle/>
           <a:p>
             <a:r>
-              <a:rPr sz="2700" b="1" i="0">
+              <a:rPr sz="2800" b="1" i="0">
                 <a:solidFill>
                   <a:srgbClr val="1E2761"/>
                 </a:solidFill>
                 <a:latin typeface="Montserrat"/>
               </a:rPr>
-              <a:t>Chimeneas: materiales</a:t>
-            </a:r>
-          </a:p>
-        </p:txBody>
-      </p:sp>
-      <p:sp>
-        <p:nvSpPr>
-          <p:cNvPr id="7" name="TextBox 6"/>
+              <a:t>Chimeneas: diseño y cálculo</a:t>
+            </a:r>
+          </a:p>
+        </p:txBody>
+      </p:sp>
+      <p:sp>
+        <p:nvSpPr>
+          <p:cNvPr id="7" name="Rounded Rectangle 6"/>
+          <p:cNvSpPr/>
+          <p:nvPr/>
+        </p:nvSpPr>
+        <p:spPr>
+          <a:xfrm>
+            <a:off x="868680" y="1627632"/>
+            <a:ext cx="2011680" cy="73152"/>
+          </a:xfrm>
+          <a:prstGeom prst="roundRect">
+            <a:avLst/>
+          </a:prstGeom>
+          <a:solidFill>
+            <a:srgbClr val="E8801A"/>
+          </a:solidFill>
+          <a:ln>
+            <a:noFill/>
+          </a:ln>
+          <a:effectLst/>
+        </p:spPr>
+        <p:style>
+          <a:lnRef idx="1">
+            <a:schemeClr val="accent1"/>
+          </a:lnRef>
+          <a:fillRef idx="3">
+            <a:schemeClr val="accent1"/>
+          </a:fillRef>
+          <a:effectRef idx="2">
+            <a:schemeClr val="accent1"/>
+          </a:effectRef>
+          <a:fontRef idx="minor">
+            <a:schemeClr val="lt1"/>
+          </a:fontRef>
+        </p:style>
+        <p:txBody>
+          <a:bodyPr rtlCol="0" anchor="ctr"/>
+          <a:lstStyle/>
+          <a:p>
+            <a:pPr algn="ctr"/>
+          </a:p>
+        </p:txBody>
+      </p:sp>
+      <p:sp>
+        <p:nvSpPr>
+          <p:cNvPr id="8" name="TextBox 7"/>
           <p:cNvSpPr txBox="1"/>
           <p:nvPr/>
         </p:nvSpPr>
         <p:spPr>
           <a:xfrm>
-            <a:off x="822960" y="1920240"/>
+            <a:off x="822960" y="1965960"/>
             <a:ext cx="4983480" cy="4206240"/>
           </a:xfrm>
           <a:prstGeom prst="rect">
@@ -9472,17 +10427,17 @@
           <a:p>
             <a:pPr>
               <a:spcAft>
-                <a:spcPts val="1000"/>
+                <a:spcPts val="1100"/>
               </a:spcAft>
             </a:pPr>
             <a:r>
               <a:rPr sz="1600" b="1" i="0">
                 <a:solidFill>
-                  <a:srgbClr val="2E3A80"/>
-                </a:solidFill>
-                <a:latin typeface="Montserrat"/>
-              </a:rPr>
-              <a:t>•  </a:t>
+                  <a:srgbClr val="E8801A"/>
+                </a:solidFill>
+                <a:latin typeface="Montserrat"/>
+              </a:rPr>
+              <a:t>▸  </a:t>
             </a:r>
             <a:r>
               <a:rPr sz="1600" b="0" i="0">
@@ -9491,23 +10446,23 @@
                 </a:solidFill>
                 <a:latin typeface="Montserrat"/>
               </a:rPr>
-              <a:t>Metálicas: UNE-EN 1856-1</a:t>
+              <a:t>Obra nueva y rehabilitación</a:t>
             </a:r>
           </a:p>
           <a:p>
             <a:pPr>
               <a:spcAft>
-                <a:spcPts val="1000"/>
+                <a:spcPts val="1100"/>
               </a:spcAft>
             </a:pPr>
             <a:r>
               <a:rPr sz="1600" b="1" i="0">
                 <a:solidFill>
-                  <a:srgbClr val="2E3A80"/>
-                </a:solidFill>
-                <a:latin typeface="Montserrat"/>
-              </a:rPr>
-              <a:t>•  </a:t>
+                  <a:srgbClr val="E8801A"/>
+                </a:solidFill>
+                <a:latin typeface="Montserrat"/>
+              </a:rPr>
+              <a:t>▸  </a:t>
             </a:r>
             <a:r>
               <a:rPr sz="1600" b="0" i="0">
@@ -9516,23 +10471,23 @@
                 </a:solidFill>
                 <a:latin typeface="Montserrat"/>
               </a:rPr>
-              <a:t>No metálicas: NTE-ISH-74</a:t>
+              <a:t>UNE 123001</a:t>
             </a:r>
           </a:p>
           <a:p>
             <a:pPr>
               <a:spcAft>
-                <a:spcPts val="1000"/>
+                <a:spcPts val="1100"/>
               </a:spcAft>
             </a:pPr>
             <a:r>
               <a:rPr sz="1600" b="1" i="0">
                 <a:solidFill>
-                  <a:srgbClr val="2E3A80"/>
-                </a:solidFill>
-                <a:latin typeface="Montserrat"/>
-              </a:rPr>
-              <a:t>•  </a:t>
+                  <a:srgbClr val="E8801A"/>
+                </a:solidFill>
+                <a:latin typeface="Montserrat"/>
+              </a:rPr>
+              <a:t>▸  </a:t>
             </a:r>
             <a:r>
               <a:rPr sz="1600" b="0" i="0">
@@ -9541,14 +10496,14 @@
                 </a:solidFill>
                 <a:latin typeface="Montserrat"/>
               </a:rPr>
-              <a:t>Truco: 1856 es de metal</a:t>
-            </a:r>
-          </a:p>
-        </p:txBody>
-      </p:sp>
-      <p:sp>
-        <p:nvSpPr>
-          <p:cNvPr id="8" name="imgph" descr="IMGQ:stainless steel flue pipe section"/>
+              <a:t>UNE-EN 13384-1 y 13384-2</a:t>
+            </a:r>
+          </a:p>
+        </p:txBody>
+      </p:sp>
+      <p:sp>
+        <p:nvSpPr>
+          <p:cNvPr id="9" name="imgph" descr="IMGQ:metal chimney flue on building roof"/>
           <p:cNvSpPr/>
           <p:nvPr/>
         </p:nvSpPr>
@@ -9594,7 +10549,7 @@
       </p:sp>
       <p:sp>
         <p:nvSpPr>
-          <p:cNvPr id="9" name="TextBox 8"/>
+          <p:cNvPr id="10" name="TextBox 9"/>
           <p:cNvSpPr txBox="1"/>
           <p:nvPr/>
         </p:nvSpPr>
@@ -9634,7 +10589,7 @@
                 </a:solidFill>
                 <a:latin typeface="Montserrat"/>
               </a:rPr>
-              <a:t>stainless steel flue pipe section</a:t>
+              <a:t>metal chimney flue on building roof</a:t>
             </a:r>
           </a:p>
         </p:txBody>
@@ -9731,7 +10686,7 @@
                 </a:solidFill>
                 <a:latin typeface="Montserrat"/>
               </a:rPr>
-              <a:t>007 / 016</a:t>
+              <a:t>007 / 017</a:t>
             </a:r>
           </a:p>
         </p:txBody>
@@ -9779,7 +10734,7 @@
         <p:spPr>
           <a:xfrm>
             <a:off x="822960" y="457200"/>
-            <a:ext cx="8229600" cy="365760"/>
+            <a:ext cx="10058400" cy="365760"/>
           </a:xfrm>
           <a:prstGeom prst="rect">
             <a:avLst/>
@@ -9793,9 +10748,9 @@
           <a:lstStyle/>
           <a:p>
             <a:r>
-              <a:rPr sz="1200" b="1" i="0">
-                <a:solidFill>
-                  <a:srgbClr val="64748B"/>
+              <a:rPr sz="1300" b="1" i="0">
+                <a:solidFill>
+                  <a:srgbClr val="E8801A"/>
                 </a:solidFill>
                 <a:latin typeface="Montserrat"/>
               </a:rPr>
@@ -9827,26 +10782,70 @@
           <a:lstStyle/>
           <a:p>
             <a:r>
-              <a:rPr sz="2700" b="1" i="0">
+              <a:rPr sz="2800" b="1" i="0">
                 <a:solidFill>
                   <a:srgbClr val="1E2761"/>
                 </a:solidFill>
                 <a:latin typeface="Montserrat"/>
               </a:rPr>
-              <a:t>La regla: por cubierta</a:t>
-            </a:r>
-          </a:p>
-        </p:txBody>
-      </p:sp>
-      <p:sp>
-        <p:nvSpPr>
-          <p:cNvPr id="7" name="TextBox 6"/>
+              <a:t>Chimeneas: materiales</a:t>
+            </a:r>
+          </a:p>
+        </p:txBody>
+      </p:sp>
+      <p:sp>
+        <p:nvSpPr>
+          <p:cNvPr id="7" name="Rounded Rectangle 6"/>
+          <p:cNvSpPr/>
+          <p:nvPr/>
+        </p:nvSpPr>
+        <p:spPr>
+          <a:xfrm>
+            <a:off x="868680" y="1627632"/>
+            <a:ext cx="2011680" cy="73152"/>
+          </a:xfrm>
+          <a:prstGeom prst="roundRect">
+            <a:avLst/>
+          </a:prstGeom>
+          <a:solidFill>
+            <a:srgbClr val="E8801A"/>
+          </a:solidFill>
+          <a:ln>
+            <a:noFill/>
+          </a:ln>
+          <a:effectLst/>
+        </p:spPr>
+        <p:style>
+          <a:lnRef idx="1">
+            <a:schemeClr val="accent1"/>
+          </a:lnRef>
+          <a:fillRef idx="3">
+            <a:schemeClr val="accent1"/>
+          </a:fillRef>
+          <a:effectRef idx="2">
+            <a:schemeClr val="accent1"/>
+          </a:effectRef>
+          <a:fontRef idx="minor">
+            <a:schemeClr val="lt1"/>
+          </a:fontRef>
+        </p:style>
+        <p:txBody>
+          <a:bodyPr rtlCol="0" anchor="ctr"/>
+          <a:lstStyle/>
+          <a:p>
+            <a:pPr algn="ctr"/>
+          </a:p>
+        </p:txBody>
+      </p:sp>
+      <p:sp>
+        <p:nvSpPr>
+          <p:cNvPr id="8" name="TextBox 7"/>
           <p:cNvSpPr txBox="1"/>
           <p:nvPr/>
         </p:nvSpPr>
         <p:spPr>
           <a:xfrm>
-            <a:off x="822960" y="1920240"/>
+            <a:off x="822960" y="1965960"/>
             <a:ext cx="4983480" cy="4206240"/>
           </a:xfrm>
           <a:prstGeom prst="rect">
@@ -9862,17 +10861,17 @@
           <a:p>
             <a:pPr>
               <a:spcAft>
-                <a:spcPts val="1000"/>
+                <a:spcPts val="1100"/>
               </a:spcAft>
             </a:pPr>
             <a:r>
               <a:rPr sz="1600" b="1" i="0">
                 <a:solidFill>
-                  <a:srgbClr val="2E3A80"/>
-                </a:solidFill>
-                <a:latin typeface="Montserrat"/>
-              </a:rPr>
-              <a:t>•  </a:t>
+                  <a:srgbClr val="E8801A"/>
+                </a:solidFill>
+                <a:latin typeface="Montserrat"/>
+              </a:rPr>
+              <a:t>▸  </a:t>
             </a:r>
             <a:r>
               <a:rPr sz="1600" b="0" i="0">
@@ -9881,23 +10880,23 @@
                 </a:solidFill>
                 <a:latin typeface="Montserrat"/>
               </a:rPr>
-              <a:t>Norma general: humos por el tejado</a:t>
+              <a:t>Metálicas: UNE-EN 1856-1</a:t>
             </a:r>
           </a:p>
           <a:p>
             <a:pPr>
               <a:spcAft>
-                <a:spcPts val="1000"/>
+                <a:spcPts val="1100"/>
               </a:spcAft>
             </a:pPr>
             <a:r>
               <a:rPr sz="1600" b="1" i="0">
                 <a:solidFill>
-                  <a:srgbClr val="2E3A80"/>
-                </a:solidFill>
-                <a:latin typeface="Montserrat"/>
-              </a:rPr>
-              <a:t>•  </a:t>
+                  <a:srgbClr val="E8801A"/>
+                </a:solidFill>
+                <a:latin typeface="Montserrat"/>
+              </a:rPr>
+              <a:t>▸  </a:t>
             </a:r>
             <a:r>
               <a:rPr sz="1600" b="0" i="0">
@@ -9906,23 +10905,23 @@
                 </a:solidFill>
                 <a:latin typeface="Montserrat"/>
               </a:rPr>
-              <a:t>Reformas: si hay conducto adecuado</a:t>
+              <a:t>No metálicas: NTE-ISH-74</a:t>
             </a:r>
           </a:p>
           <a:p>
             <a:pPr>
               <a:spcAft>
-                <a:spcPts val="1000"/>
+                <a:spcPts val="1100"/>
               </a:spcAft>
             </a:pPr>
             <a:r>
               <a:rPr sz="1600" b="1" i="0">
                 <a:solidFill>
-                  <a:srgbClr val="2E3A80"/>
-                </a:solidFill>
-                <a:latin typeface="Montserrat"/>
-              </a:rPr>
-              <a:t>•  </a:t>
+                  <a:srgbClr val="E8801A"/>
+                </a:solidFill>
+                <a:latin typeface="Montserrat"/>
+              </a:rPr>
+              <a:t>▸  </a:t>
             </a:r>
             <a:r>
               <a:rPr sz="1600" b="0" i="0">
@@ -9931,14 +10930,14 @@
                 </a:solidFill>
                 <a:latin typeface="Montserrat"/>
               </a:rPr>
-              <a:t>se usa el conducto existente</a:t>
-            </a:r>
-          </a:p>
-        </p:txBody>
-      </p:sp>
-      <p:sp>
-        <p:nvSpPr>
-          <p:cNvPr id="8" name="imgph" descr="IMGQ:chimney outlets on rooftop"/>
+              <a:t>Truco: 1856 es de metal</a:t>
+            </a:r>
+          </a:p>
+        </p:txBody>
+      </p:sp>
+      <p:sp>
+        <p:nvSpPr>
+          <p:cNvPr id="9" name="imgph" descr="IMGQ:stainless steel flue pipe section"/>
           <p:cNvSpPr/>
           <p:nvPr/>
         </p:nvSpPr>
@@ -9984,7 +10983,7 @@
       </p:sp>
       <p:sp>
         <p:nvSpPr>
-          <p:cNvPr id="9" name="TextBox 8"/>
+          <p:cNvPr id="10" name="TextBox 9"/>
           <p:cNvSpPr txBox="1"/>
           <p:nvPr/>
         </p:nvSpPr>
@@ -10024,7 +11023,7 @@
                 </a:solidFill>
                 <a:latin typeface="Montserrat"/>
               </a:rPr>
-              <a:t>chimney outlets on rooftop</a:t>
+              <a:t>stainless steel flue pipe section</a:t>
             </a:r>
           </a:p>
         </p:txBody>
@@ -10121,7 +11120,7 @@
                 </a:solidFill>
                 <a:latin typeface="Montserrat"/>
               </a:rPr>
-              <a:t>008 / 016</a:t>
+              <a:t>008 / 017</a:t>
             </a:r>
           </a:p>
         </p:txBody>
@@ -10169,7 +11168,7 @@
         <p:spPr>
           <a:xfrm>
             <a:off x="822960" y="457200"/>
-            <a:ext cx="8229600" cy="365760"/>
+            <a:ext cx="10058400" cy="365760"/>
           </a:xfrm>
           <a:prstGeom prst="rect">
             <a:avLst/>
@@ -10183,13 +11182,13 @@
           <a:lstStyle/>
           <a:p>
             <a:r>
-              <a:rPr sz="1200" b="1" i="0">
-                <a:solidFill>
-                  <a:srgbClr val="64748B"/>
-                </a:solidFill>
-                <a:latin typeface="Montserrat"/>
-              </a:rPr>
-              <a:t>APARTADO 2 · SALIDA A FACHADA</a:t>
+              <a:rPr sz="1300" b="1" i="0">
+                <a:solidFill>
+                  <a:srgbClr val="E8801A"/>
+                </a:solidFill>
+                <a:latin typeface="Montserrat"/>
+              </a:rPr>
+              <a:t>APARTADO 2 · EVACUACIÓN DE HUMOS</a:t>
             </a:r>
           </a:p>
         </p:txBody>
@@ -10217,26 +11216,70 @@
           <a:lstStyle/>
           <a:p>
             <a:r>
-              <a:rPr sz="2700" b="1" i="0">
+              <a:rPr sz="2800" b="1" i="0">
                 <a:solidFill>
                   <a:srgbClr val="1E2761"/>
                 </a:solidFill>
                 <a:latin typeface="Montserrat"/>
               </a:rPr>
-              <a:t>Excepción: salida al exterior</a:t>
-            </a:r>
-          </a:p>
-        </p:txBody>
-      </p:sp>
-      <p:sp>
-        <p:nvSpPr>
-          <p:cNvPr id="7" name="TextBox 6"/>
+              <a:t>La regla: por cubierta</a:t>
+            </a:r>
+          </a:p>
+        </p:txBody>
+      </p:sp>
+      <p:sp>
+        <p:nvSpPr>
+          <p:cNvPr id="7" name="Rounded Rectangle 6"/>
+          <p:cNvSpPr/>
+          <p:nvPr/>
+        </p:nvSpPr>
+        <p:spPr>
+          <a:xfrm>
+            <a:off x="868680" y="1627632"/>
+            <a:ext cx="2011680" cy="73152"/>
+          </a:xfrm>
+          <a:prstGeom prst="roundRect">
+            <a:avLst/>
+          </a:prstGeom>
+          <a:solidFill>
+            <a:srgbClr val="E8801A"/>
+          </a:solidFill>
+          <a:ln>
+            <a:noFill/>
+          </a:ln>
+          <a:effectLst/>
+        </p:spPr>
+        <p:style>
+          <a:lnRef idx="1">
+            <a:schemeClr val="accent1"/>
+          </a:lnRef>
+          <a:fillRef idx="3">
+            <a:schemeClr val="accent1"/>
+          </a:fillRef>
+          <a:effectRef idx="2">
+            <a:schemeClr val="accent1"/>
+          </a:effectRef>
+          <a:fontRef idx="minor">
+            <a:schemeClr val="lt1"/>
+          </a:fontRef>
+        </p:style>
+        <p:txBody>
+          <a:bodyPr rtlCol="0" anchor="ctr"/>
+          <a:lstStyle/>
+          <a:p>
+            <a:pPr algn="ctr"/>
+          </a:p>
+        </p:txBody>
+      </p:sp>
+      <p:sp>
+        <p:nvSpPr>
+          <p:cNvPr id="8" name="TextBox 7"/>
           <p:cNvSpPr txBox="1"/>
           <p:nvPr/>
         </p:nvSpPr>
         <p:spPr>
           <a:xfrm>
-            <a:off x="822960" y="1920240"/>
+            <a:off x="822960" y="1965960"/>
             <a:ext cx="4983480" cy="4206240"/>
           </a:xfrm>
           <a:prstGeom prst="rect">
@@ -10252,17 +11295,17 @@
           <a:p>
             <a:pPr>
               <a:spcAft>
-                <a:spcPts val="1000"/>
+                <a:spcPts val="1100"/>
               </a:spcAft>
             </a:pPr>
             <a:r>
               <a:rPr sz="1600" b="1" i="0">
                 <a:solidFill>
-                  <a:srgbClr val="2E3A80"/>
-                </a:solidFill>
-                <a:latin typeface="Montserrat"/>
-              </a:rPr>
-              <a:t>•  </a:t>
+                  <a:srgbClr val="E8801A"/>
+                </a:solidFill>
+                <a:latin typeface="Montserrat"/>
+              </a:rPr>
+              <a:t>▸  </a:t>
             </a:r>
             <a:r>
               <a:rPr sz="1600" b="0" i="0">
@@ -10271,23 +11314,23 @@
                 </a:solidFill>
                 <a:latin typeface="Montserrat"/>
               </a:rPr>
-              <a:t>Estancos o tiro forzado ≤ 70 kW</a:t>
+              <a:t>Norma general: humos por el tejado</a:t>
             </a:r>
           </a:p>
           <a:p>
             <a:pPr>
               <a:spcAft>
-                <a:spcPts val="1000"/>
+                <a:spcPts val="1100"/>
               </a:spcAft>
             </a:pPr>
             <a:r>
               <a:rPr sz="1600" b="1" i="0">
                 <a:solidFill>
-                  <a:srgbClr val="2E3A80"/>
-                </a:solidFill>
-                <a:latin typeface="Montserrat"/>
-              </a:rPr>
-              <a:t>•  </a:t>
+                  <a:srgbClr val="E8801A"/>
+                </a:solidFill>
+                <a:latin typeface="Montserrat"/>
+              </a:rPr>
+              <a:t>▸  </a:t>
             </a:r>
             <a:r>
               <a:rPr sz="1600" b="0" i="0">
@@ -10296,23 +11339,23 @@
                 </a:solidFill>
                 <a:latin typeface="Montserrat"/>
               </a:rPr>
-              <a:t>Tiro natural solo ACS ≤ 24,4 kW</a:t>
+              <a:t>Reformas: si hay conducto adecuado</a:t>
             </a:r>
           </a:p>
           <a:p>
             <a:pPr>
               <a:spcAft>
-                <a:spcPts val="1000"/>
+                <a:spcPts val="1100"/>
               </a:spcAft>
             </a:pPr>
             <a:r>
               <a:rPr sz="1600" b="1" i="0">
                 <a:solidFill>
-                  <a:srgbClr val="2E3A80"/>
-                </a:solidFill>
-                <a:latin typeface="Montserrat"/>
-              </a:rPr>
-              <a:t>•  </a:t>
+                  <a:srgbClr val="E8801A"/>
+                </a:solidFill>
+                <a:latin typeface="Montserrat"/>
+              </a:rPr>
+              <a:t>▸  </a:t>
             </a:r>
             <a:r>
               <a:rPr sz="1600" b="0" i="0">
@@ -10321,14 +11364,14 @@
                 </a:solidFill>
                 <a:latin typeface="Montserrat"/>
               </a:rPr>
-              <a:t>Sin perjuicio del RITE</a:t>
-            </a:r>
-          </a:p>
-        </p:txBody>
-      </p:sp>
-      <p:sp>
-        <p:nvSpPr>
-          <p:cNvPr id="8" name="imgph" descr="IMGQ:gas boiler flue outlet on facade wall"/>
+              <a:t>se usa el conducto existente</a:t>
+            </a:r>
+          </a:p>
+        </p:txBody>
+      </p:sp>
+      <p:sp>
+        <p:nvSpPr>
+          <p:cNvPr id="9" name="imgph" descr="IMGQ:chimney outlets on rooftop"/>
           <p:cNvSpPr/>
           <p:nvPr/>
         </p:nvSpPr>
@@ -10374,7 +11417,7 @@
       </p:sp>
       <p:sp>
         <p:nvSpPr>
-          <p:cNvPr id="9" name="TextBox 8"/>
+          <p:cNvPr id="10" name="TextBox 9"/>
           <p:cNvSpPr txBox="1"/>
           <p:nvPr/>
         </p:nvSpPr>
@@ -10414,7 +11457,7 @@
                 </a:solidFill>
                 <a:latin typeface="Montserrat"/>
               </a:rPr>
-              <a:t>gas boiler flue outlet on facade wall</a:t>
+              <a:t>chimney outlets on rooftop</a:t>
             </a:r>
           </a:p>
         </p:txBody>
@@ -10511,7 +11554,7 @@
                 </a:solidFill>
                 <a:latin typeface="Montserrat"/>
               </a:rPr>
-              <a:t>009 / 016</a:t>
+              <a:t>009 / 017</a:t>
             </a:r>
           </a:p>
         </p:txBody>
@@ -10559,7 +11602,7 @@
         <p:spPr>
           <a:xfrm>
             <a:off x="822960" y="457200"/>
-            <a:ext cx="8229600" cy="365760"/>
+            <a:ext cx="10058400" cy="365760"/>
           </a:xfrm>
           <a:prstGeom prst="rect">
             <a:avLst/>
@@ -10573,13 +11616,13 @@
           <a:lstStyle/>
           <a:p>
             <a:r>
-              <a:rPr sz="1200" b="1" i="0">
-                <a:solidFill>
-                  <a:srgbClr val="64748B"/>
-                </a:solidFill>
-                <a:latin typeface="Montserrat"/>
-              </a:rPr>
-              <a:t>APARTADO 2 · TIPOS DE APARATO</a:t>
+              <a:rPr sz="1300" b="1" i="0">
+                <a:solidFill>
+                  <a:srgbClr val="E8801A"/>
+                </a:solidFill>
+                <a:latin typeface="Montserrat"/>
+              </a:rPr>
+              <a:t>APARTADO 2 · SALIDA A FACHADA</a:t>
             </a:r>
           </a:p>
         </p:txBody>
@@ -10607,26 +11650,70 @@
           <a:lstStyle/>
           <a:p>
             <a:r>
-              <a:rPr sz="2700" b="1" i="0">
+              <a:rPr sz="2800" b="1" i="0">
                 <a:solidFill>
                   <a:srgbClr val="1E2761"/>
                 </a:solidFill>
                 <a:latin typeface="Montserrat"/>
               </a:rPr>
-              <a:t>Estanco, tiro forzado, tiro natural</a:t>
-            </a:r>
-          </a:p>
-        </p:txBody>
-      </p:sp>
-      <p:sp>
-        <p:nvSpPr>
-          <p:cNvPr id="7" name="TextBox 6"/>
+              <a:t>Excepción: salida al exterior</a:t>
+            </a:r>
+          </a:p>
+        </p:txBody>
+      </p:sp>
+      <p:sp>
+        <p:nvSpPr>
+          <p:cNvPr id="7" name="Rounded Rectangle 6"/>
+          <p:cNvSpPr/>
+          <p:nvPr/>
+        </p:nvSpPr>
+        <p:spPr>
+          <a:xfrm>
+            <a:off x="868680" y="1627632"/>
+            <a:ext cx="2011680" cy="73152"/>
+          </a:xfrm>
+          <a:prstGeom prst="roundRect">
+            <a:avLst/>
+          </a:prstGeom>
+          <a:solidFill>
+            <a:srgbClr val="E8801A"/>
+          </a:solidFill>
+          <a:ln>
+            <a:noFill/>
+          </a:ln>
+          <a:effectLst/>
+        </p:spPr>
+        <p:style>
+          <a:lnRef idx="1">
+            <a:schemeClr val="accent1"/>
+          </a:lnRef>
+          <a:fillRef idx="3">
+            <a:schemeClr val="accent1"/>
+          </a:fillRef>
+          <a:effectRef idx="2">
+            <a:schemeClr val="accent1"/>
+          </a:effectRef>
+          <a:fontRef idx="minor">
+            <a:schemeClr val="lt1"/>
+          </a:fontRef>
+        </p:style>
+        <p:txBody>
+          <a:bodyPr rtlCol="0" anchor="ctr"/>
+          <a:lstStyle/>
+          <a:p>
+            <a:pPr algn="ctr"/>
+          </a:p>
+        </p:txBody>
+      </p:sp>
+      <p:sp>
+        <p:nvSpPr>
+          <p:cNvPr id="8" name="TextBox 7"/>
           <p:cNvSpPr txBox="1"/>
           <p:nvPr/>
         </p:nvSpPr>
         <p:spPr>
           <a:xfrm>
-            <a:off x="822960" y="1920240"/>
+            <a:off x="822960" y="1965960"/>
             <a:ext cx="4983480" cy="4206240"/>
           </a:xfrm>
           <a:prstGeom prst="rect">
@@ -10642,17 +11729,17 @@
           <a:p>
             <a:pPr>
               <a:spcAft>
-                <a:spcPts val="1000"/>
+                <a:spcPts val="1100"/>
               </a:spcAft>
             </a:pPr>
             <a:r>
               <a:rPr sz="1600" b="1" i="0">
                 <a:solidFill>
-                  <a:srgbClr val="2E3A80"/>
-                </a:solidFill>
-                <a:latin typeface="Montserrat"/>
-              </a:rPr>
-              <a:t>•  </a:t>
+                  <a:srgbClr val="E8801A"/>
+                </a:solidFill>
+                <a:latin typeface="Montserrat"/>
+              </a:rPr>
+              <a:t>▸  </a:t>
             </a:r>
             <a:r>
               <a:rPr sz="1600" b="0" i="0">
@@ -10661,23 +11748,23 @@
                 </a:solidFill>
                 <a:latin typeface="Montserrat"/>
               </a:rPr>
-              <a:t>Estanco: aire de fuera, humos fuera</a:t>
+              <a:t>Estancos o tiro forzado ≤ 70 kW</a:t>
             </a:r>
           </a:p>
           <a:p>
             <a:pPr>
               <a:spcAft>
-                <a:spcPts val="1000"/>
+                <a:spcPts val="1100"/>
               </a:spcAft>
             </a:pPr>
             <a:r>
               <a:rPr sz="1600" b="1" i="0">
                 <a:solidFill>
-                  <a:srgbClr val="2E3A80"/>
-                </a:solidFill>
-                <a:latin typeface="Montserrat"/>
-              </a:rPr>
-              <a:t>•  </a:t>
+                  <a:srgbClr val="E8801A"/>
+                </a:solidFill>
+                <a:latin typeface="Montserrat"/>
+              </a:rPr>
+              <a:t>▸  </a:t>
             </a:r>
             <a:r>
               <a:rPr sz="1600" b="0" i="0">
@@ -10686,23 +11773,23 @@
                 </a:solidFill>
                 <a:latin typeface="Montserrat"/>
               </a:rPr>
-              <a:t>Tiro forzado: un ventilador empuja</a:t>
+              <a:t>Tiro natural solo ACS ≤ 24,4 kW</a:t>
             </a:r>
           </a:p>
           <a:p>
             <a:pPr>
               <a:spcAft>
-                <a:spcPts val="1000"/>
+                <a:spcPts val="1100"/>
               </a:spcAft>
             </a:pPr>
             <a:r>
               <a:rPr sz="1600" b="1" i="0">
                 <a:solidFill>
-                  <a:srgbClr val="2E3A80"/>
-                </a:solidFill>
-                <a:latin typeface="Montserrat"/>
-              </a:rPr>
-              <a:t>•  </a:t>
+                  <a:srgbClr val="E8801A"/>
+                </a:solidFill>
+                <a:latin typeface="Montserrat"/>
+              </a:rPr>
+              <a:t>▸  </a:t>
             </a:r>
             <a:r>
               <a:rPr sz="1600" b="0" i="0">
@@ -10711,14 +11798,14 @@
                 </a:solidFill>
                 <a:latin typeface="Montserrat"/>
               </a:rPr>
-              <a:t>Tiro natural: suben solos por calor</a:t>
-            </a:r>
-          </a:p>
-        </p:txBody>
-      </p:sp>
-      <p:sp>
-        <p:nvSpPr>
-          <p:cNvPr id="8" name="imgph" descr="IMGQ:sealed combustion gas boiler with concentric flue"/>
+              <a:t>Sin perjuicio del RITE</a:t>
+            </a:r>
+          </a:p>
+        </p:txBody>
+      </p:sp>
+      <p:sp>
+        <p:nvSpPr>
+          <p:cNvPr id="9" name="imgph" descr="IMGQ:gas boiler flue outlet on facade wall"/>
           <p:cNvSpPr/>
           <p:nvPr/>
         </p:nvSpPr>
@@ -10764,7 +11851,7 @@
       </p:sp>
       <p:sp>
         <p:nvSpPr>
-          <p:cNvPr id="9" name="TextBox 8"/>
+          <p:cNvPr id="10" name="TextBox 9"/>
           <p:cNvSpPr txBox="1"/>
           <p:nvPr/>
         </p:nvSpPr>
@@ -10804,7 +11891,7 @@
                 </a:solidFill>
                 <a:latin typeface="Montserrat"/>
               </a:rPr>
-              <a:t>sealed combustion gas boiler with concentric flue</a:t>
+              <a:t>gas boiler flue outlet on facade wall</a:t>
             </a:r>
           </a:p>
         </p:txBody>

--- a/Curso Gas B/04 - ITC-ICG 07 - Instalaciones receptoras de combustibles gaseosos/04 - ITC-ICG 07 - Instalaciones receptoras de combustibles gaseosos - Vídeo 1.pptx
+++ b/Curso Gas B/04 - ITC-ICG 07 - Instalaciones receptoras de combustibles gaseosos/04 - ITC-ICG 07 - Instalaciones receptoras de combustibles gaseosos - Vídeo 1.pptx
@@ -22,6 +22,14 @@
     <p:sldId id="270" r:id="rId22"/>
     <p:sldId id="271" r:id="rId23"/>
     <p:sldId id="272" r:id="rId24"/>
+    <p:sldId id="273" r:id="rId25"/>
+    <p:sldId id="274" r:id="rId26"/>
+    <p:sldId id="275" r:id="rId27"/>
+    <p:sldId id="276" r:id="rId28"/>
+    <p:sldId id="277" r:id="rId29"/>
+    <p:sldId id="278" r:id="rId30"/>
+    <p:sldId id="279" r:id="rId31"/>
+    <p:sldId id="280" r:id="rId32"/>
   </p:sldIdLst>
   <p:sldSz cx="12191695" cy="6858000" type="screen4x3"/>
   <p:notesSz cx="6858000" cy="9144000"/>
@@ -593,12 +601,12 @@
           <a:lstStyle/>
           <a:p>
             <a:r>
-              <a:t>N1: ¿Y qué diferencia hay entre esos tres tipos?</a:t>
-            </a:r>
-          </a:p>
-          <a:p>
-            <a:r>
-              <a:t>N2: Vamos de lo más seguro a lo menos. Un aparato estanco coge el aire de fuera y echa los humos fuera por un conducto cerrado; no toca en ningún momento el aire de la habitación, por eso es el más seguro. Uno de tiro forzado lleva un ventilador que empuja los humos hacia afuera; ayuda a que salgan aunque el conducto sea largo. Y uno de tiro natural deja que los humos suban solos, simplemente porque están calientes y pesan menos, como el humo de una hoguera. Entiende esto y entiendes las cifras de antes: cuanto más control tiene el aparato sobre sus humos, más margen te da el reglamento para sacarlos por fachada. Por eso los estancos y de tiro forzado llegan a setenta y el tiro natural se queda en veinticuatro con cuatro y solo para agua caliente.</a:t>
+              <a:t>N1: Aquí va una de las cifras estrella del vídeo. Un aparato estanco o de tiro forzado quiere sacar los humos por la pared en lugar de por el tejado. ¿Hasta qué potencia se lo permiten?</a:t>
+            </a:r>
+          </a:p>
+          <a:p>
+            <a:r>
+              <a:t>N2: Piensa que el estanco y el de tiro forzado son los que mejor controlan sus humos, así que el reglamento les da más margen que al tiro natural. Una de las opciones es la del tiro natural, no la mezcles.</a:t>
             </a:r>
           </a:p>
         </p:txBody>
@@ -668,12 +676,12 @@
           <a:lstStyle/>
           <a:p>
             <a:r>
-              <a:t>N1: ¿Qué tamaño tiene que tener el patio de ventilación?</a:t>
-            </a:r>
-          </a:p>
-          <a:p>
-            <a:r>
-              <a:t>N2: Depende de si el edificio es de siempre o de obra nueva, y son dos fórmulas que no debes mezclar. En un edificio ya existente, la superficie en planta del patio tiene que ser al menos cero coma cinco por ene te, y nunca menos de cuatro metros cuadrados. En obra nueva se exige el doble, uno por ene te, y siempre más de seis metros cuadrados. ¿Qué es ese ene te? Simplemente el número de locales o viviendas que tiran sus humos a ese patio; cuantos más aparatos desembocan, más grande tiene que ser. La idea de fondo: en obra nueva, como se diseña desde cero, se pide más holgura. Un patio corto se convierte en una trampa de gases donde los aparatos no tiran y se acaban apagando.</a:t>
+              <a:t>N1: ¿Por qué setenta y no otra?</a:t>
+            </a:r>
+          </a:p>
+          <a:p>
+            <a:r>
+              <a:t>N2: Porque la salida directa a fachada se reserva a aparatos estancos o de tiro forzado de potencia igual o menor de setenta kilovatios. La cifra de veinticuatro con cuatro es la trampa: esa es solo para el tiro natural que hace únicamente agua caliente. El truco para no fallar: más control sobre los humos, más potencia permitida; setenta para los seguros, veinticuatro con cuatro para el primitivo.</a:t>
             </a:r>
           </a:p>
         </p:txBody>
@@ -743,12 +751,12 @@
           <a:lstStyle/>
           <a:p>
             <a:r>
-              <a:t>N1: ¿Y si el patio está tapado por arriba?</a:t>
-            </a:r>
-          </a:p>
-          <a:p>
-            <a:r>
-              <a:t>N2: Entonces hay que dejar un hueco permanente al aire libre. Concretamente, el techado debe dejar libre una abertura de comunicación con el exterior de al menos el veinticinco por ciento de la sección en planta del patio, con un mínimo de cuatro metros cuadrados. Es puro sentido común: si tapas el patio y lo sellas del todo, los humos no tienen por dónde salir y se acumulan; sería una trampa de gases. Fíjate en la palabra permanente: no vale una ventana o una compuerta que alguien pueda cerrar un día de frío, tiene que estar siempre abierta. Una cuarta parte del patio abierta al cielo, como mínimo.</a:t>
+              <a:t>N1: ¿Y qué diferencia hay entre esos tres tipos?</a:t>
+            </a:r>
+          </a:p>
+          <a:p>
+            <a:r>
+              <a:t>N2: Vamos de lo más seguro a lo menos. Un aparato estanco coge el aire de fuera y echa los humos fuera por un conducto cerrado; no toca en ningún momento el aire de la habitación, por eso es el más seguro. Uno de tiro forzado lleva un ventilador que empuja los humos hacia afuera; ayuda a que salgan aunque el conducto sea largo. Y uno de tiro natural deja que los humos suban solos, simplemente porque están calientes y pesan menos, como el humo de una hoguera. Entiende esto y entiendes las cifras de antes: cuanto más control tiene el aparato sobre sus humos, más margen te da el reglamento para sacarlos por fachada. Por eso los estancos y de tiro forzado llegan a setenta y el tiro natural se queda en veinticuatro con cuatro y solo para agua caliente.</a:t>
             </a:r>
           </a:p>
         </p:txBody>
@@ -818,12 +826,12 @@
           <a:lstStyle/>
           <a:p>
             <a:r>
-              <a:t>N1: ¿Qué pasa cuando la caldera es muy grande?</a:t>
-            </a:r>
-          </a:p>
-          <a:p>
-            <a:r>
-              <a:t>N2: Ata este cabo, que el número mágico son setenta kilovatios. Por encima de setenta, una caldera de calefacción o de agua caliente ya no es un aparato doméstico cualquiera: es maquinaria seria que tiene que ir en una sala de máquinas con las condiciones de la UNE sesenta mil seiscientos uno. Lo mismo vale para los equipos de llama directa de refrigeración por absorción y para los de generación eléctrica o cogeneración, si juntos pasan de setenta. Y ojo a la palabra conjunta: las potencias se suman. Tres equipos de treinta kilovatios trabajando juntos son noventa, así que pasan de setenta y toca sala de máquinas. Truco: sesenta mil seiscientos uno igual a salas de calderas. Por debajo de setenta, la norma general es la sesenta mil seiscientos setenta, que vemos ahora.</a:t>
+              <a:t>N1: ¿Qué tamaño tiene que tener el patio de ventilación?</a:t>
+            </a:r>
+          </a:p>
+          <a:p>
+            <a:r>
+              <a:t>N2: Depende de si el edificio es de siempre o de obra nueva, y son dos fórmulas que no debes mezclar. En un edificio ya existente, la superficie en planta del patio tiene que ser al menos cero coma cinco por ene te, y nunca menos de cuatro metros cuadrados. En obra nueva se exige el doble, uno por ene te, y siempre más de seis metros cuadrados. ¿Qué es ese ene te? Simplemente el número de locales o viviendas que tiran sus humos a ese patio; cuantos más aparatos desembocan, más grande tiene que ser. La idea de fondo: en obra nueva, como se diseña desde cero, se pide más holgura. Un patio corto se convierte en una trampa de gases donde los aparatos no tiran y se acaban apagando.</a:t>
             </a:r>
           </a:p>
         </p:txBody>
@@ -893,12 +901,12 @@
           <a:lstStyle/>
           <a:p>
             <a:r>
-              <a:t>N1: ¿Cómo sé qué norma técnica tengo que seguir?</a:t>
-            </a:r>
-          </a:p>
-          <a:p>
-            <a:r>
-              <a:t>N2: Lo decide la presión máxima de operación, y esta es de las preguntas más repetidas de todo el Gas B. Chuleta: hasta cinco bar, sigues la UNE sesenta mil seiscientos setenta, la de toda la vida para instalaciones receptoras normales; por encima de cinco bar, la UNE sesenta mil seiscientos veinte, la de alta presión. Como instalador de categoría be trabajarás casi siempre con la seiscientos setenta. Esa presión máxima de operación la verás escrita como eme o pe, del inglés, y es la presión más alta a la que la instalación trabaja de forma normal y continua; no la confundas con la de prueba ni con la de diseño. Memoriza el par: seiscientos setenta es baja presión hasta cinco bar; seiscientos veinte es alta presión por encima de cinco.</a:t>
+              <a:t>N1: ¿Qué superficie mínima tiene que tener un patio de ventilación?</a:t>
+            </a:r>
+          </a:p>
+          <a:p>
+            <a:r>
+              <a:t>N2: Esta tabla te da las dos fórmulas que no debes mezclar. En la columna de la izquierda está la situación, en el centro la superficie mínima en planta y a la derecha el mínimo absoluto que nunca puedes bajar. Primera fila, patio de un edificio ya existente: la superficie tiene que ser al menos cero coma cinco por ene te, y nunca menos de cuatro metros cuadrados. Segunda fila, patio de obra nueva: se exige el doble, uno por ene te, y siempre más de seis metros cuadrados. Ese ene te es el número de locales o viviendas que tiran sus humos a ese patio. Ejemplo de obra: si a un patio de un edificio nuevo desembocan ocho viviendas, uno por ocho son ocho metros cuadrados de superficie mínima. La idea de fondo: en obra nueva se pide más holgura porque se diseña desde cero.</a:t>
             </a:r>
           </a:p>
         </p:txBody>
@@ -968,12 +976,12 @@
           <a:lstStyle/>
           <a:p>
             <a:r>
-              <a:t>N1: ¿Qué es un aparato de circuito abierto conducido y por qué no puedo ponerlo donde quiera?</a:t>
-            </a:r>
-          </a:p>
-          <a:p>
-            <a:r>
-              <a:t>N2: Vamos con calma. Circuito abierto quiere decir que el aparato coge el aire para quemar de la propia habitación; conducido quiere decir que los humos sí salen por un conducto. O sea, respira del cuarto pero echa el humo fuera. Como respira del cuarto, el reglamento no quiere que lo pongas en cualquier sitio: sí en galerías, terrazas, recintos o locales exclusivos para estos aparatos, y en locales de uso restringido como lavaderos o garajes individuales. En la cocina se puede, pero con una condición importante: que el extractor mecánico de la cocina no le robe el tiro al aparato, porque si el extractor tira más fuerte, invierte los humos y mete monóxido en la casa. Y la excepción que se pregunta: si el aparato es solo para agua caliente sanitaria, un calentador de toda la vida, estas limitaciones no le aplican.</a:t>
+              <a:t>N1: ¿Y si el patio está tapado por arriba?</a:t>
+            </a:r>
+          </a:p>
+          <a:p>
+            <a:r>
+              <a:t>N2: Entonces hay que dejar un hueco permanente al aire libre. Concretamente, el techado debe dejar libre una abertura de comunicación con el exterior de al menos el veinticinco por ciento de la sección en planta del patio, con un mínimo de cuatro metros cuadrados. Es puro sentido común: si tapas el patio y lo sellas del todo, los humos no tienen por dónde salir y se acumulan; sería una trampa de gases. Fíjate en la palabra permanente: no vale una ventana o una compuerta que alguien pueda cerrar un día de frío, tiene que estar siempre abierta. Una cuarta parte del patio abierta al cielo, como mínimo.</a:t>
             </a:r>
           </a:p>
         </p:txBody>
@@ -1043,12 +1051,12 @@
           <a:lstStyle/>
           <a:p>
             <a:r>
-              <a:t>N1: ¿Y si la tubería va enterrada, cambia algo?</a:t>
-            </a:r>
-          </a:p>
-          <a:p>
-            <a:r>
-              <a:t>N2: Cambia bastante. Cuando la tubería va bajo tierra ya no valen las reglas de la tubería vista; se aplican las normas de acometidas, la UNE sesenta mil trescientos diez y la sesenta mil trescientos once. Truco corto: enterrado igual a trescientos diez y trescientos once. Y aquí un detalle práctico que cae en examen: antes de diseñar una acometida interior enterrada, tienes que preguntar al distribuidor de qué material es su red, porque tu tubería tiene que ser compatible con ella. No puedes unir bajo tierra cualquier material con cualquier otro, porque una unión mal casada se corroe y acaba en una fuga que no ves hasta que huele. Nunca improvises el material enterrado sin ese dato.</a:t>
+              <a:t>N1: ¿Qué pasa cuando la caldera es muy grande?</a:t>
+            </a:r>
+          </a:p>
+          <a:p>
+            <a:r>
+              <a:t>N2: Ata este cabo, que el número mágico son setenta kilovatios. Por encima de setenta, una caldera de calefacción o de agua caliente ya no es un aparato doméstico cualquiera: es maquinaria seria que tiene que ir en una sala de máquinas con las condiciones de la UNE sesenta mil seiscientos uno. Lo mismo vale para los equipos de llama directa de refrigeración por absorción y para los de generación eléctrica o cogeneración, si juntos pasan de setenta. Y ojo a la palabra conjunta: las potencias se suman. Tres equipos de treinta kilovatios trabajando juntos son noventa, así que pasan de setenta y toca sala de máquinas. Truco: sesenta mil seiscientos uno igual a salas de calderas. Por debajo de setenta, la norma general es la sesenta mil seiscientos setenta, que vemos ahora.</a:t>
             </a:r>
           </a:p>
         </p:txBody>
@@ -1118,22 +1126,162 @@
           <a:lstStyle/>
           <a:p>
             <a:r>
-              <a:t>N1: Cerramos fuerte. ¿Qué me tengo que llevar de este vídeo?</a:t>
-            </a:r>
-          </a:p>
-          <a:p>
-            <a:r>
-              <a:t>N2: Reconstruyamos el hilo. Primero, la ITC-ICG cero siete es tu manual de la instalación receptora: manda en el diseño, la ejecución y la utilización, e incluye los locales y los aparatos, no solo los tubos. Segundo, los humos son seguridad: salen por cubierta, y solo por fachada en casos pequeños, estancos o tiro forzado hasta setenta kilovatios y tiro natural de solo agua caliente hasta veinticuatro con cuatro. Tercero, la presión elige la norma: hasta cinco bar la sesenta mil seiscientos setenta, por encima la seiscientos veinte. Y cuarto, lo enterrado va por las normas de acometidas y lo gordo, por encima de setenta, a sala de máquinas con la sesenta mil seiscientos uno.</a:t>
-            </a:r>
-          </a:p>
-          <a:p>
-            <a:r>
-              <a:t>N1: ¿Y cómo cae esto en el examen?</a:t>
-            </a:r>
-          </a:p>
-          <a:p>
-            <a:r>
-              <a:t>N2: Te lo preguntan cruzado, con las cifras: te dan una potencia y un tipo de aparato y quieren saber si puede salir por fachada; o te dan una presión y quieren la norma. En la obra decide cosas muy reales: si dimensionas mal una chimenea o sacas humos por donde no toca, te tumban la puesta en servicio y le creas un problema de monóxido al vecino. Hoy ya eres más gasista que ayer: sabes por dónde tienen que salir los humos y con qué norma se monta cada cosa. En el siguiente vídeo damos el salto a los papeles: cuándo hace falta proyecto, qué pruebas se hacen y cómo una instalación pasa de estar montada a tener gas. Te espero allí.</a:t>
+              <a:t>N1: Tres equipos de treinta kilovatios cada uno, funcionando a la vez. ¿Hay que hacer algo especial?</a:t>
+            </a:r>
+          </a:p>
+          <a:p>
+            <a:r>
+              <a:t>N2: La palabra clave es conjunta. Fíjate en si las potencias se miran por separado o se suman. Ahí está el truco de la pregunta.</a:t>
+            </a:r>
+          </a:p>
+        </p:txBody>
+      </p:sp>
+      <p:sp>
+        <p:nvSpPr>
+          <p:cNvPr id="4" name="Slide Number Placeholder 3"/>
+          <p:cNvSpPr>
+            <a:spLocks noGrp="1"/>
+          </p:cNvSpPr>
+          <p:nvPr>
+            <p:ph type="sldNum" idx="5" sz="quarter"/>
+          </p:nvPr>
+        </p:nvSpPr>
+        <p:spPr/>
+      </p:sp>
+    </p:spTree>
+  </p:cSld>
+  <p:clrMapOvr>
+    <a:masterClrMapping/>
+  </p:clrMapOvr>
+</p:notes>
+</file>
+
+<file path=ppt/notesSlides/notesSlide18.xml><?xml version="1.0" encoding="utf-8"?>
+<p:notes xmlns:a="http://schemas.openxmlformats.org/drawingml/2006/main" xmlns:p="http://schemas.openxmlformats.org/presentationml/2006/main" xmlns:r="http://schemas.openxmlformats.org/officeDocument/2006/relationships">
+  <p:cSld>
+    <p:spTree>
+      <p:nvGrpSpPr>
+        <p:cNvPr id="1" name=""/>
+        <p:cNvGrpSpPr/>
+        <p:nvPr/>
+      </p:nvGrpSpPr>
+      <p:grpSpPr>
+        <a:xfrm>
+          <a:off x="0" y="0"/>
+          <a:ext cx="0" cy="0"/>
+          <a:chOff x="0" y="0"/>
+          <a:chExt cx="0" cy="0"/>
+        </a:xfrm>
+      </p:grpSpPr>
+      <p:sp>
+        <p:nvSpPr>
+          <p:cNvPr id="2" name="Slide Image Placeholder 1"/>
+          <p:cNvSpPr>
+            <a:spLocks noGrp="1"/>
+          </p:cNvSpPr>
+          <p:nvPr>
+            <p:ph type="sldImg" idx="2"/>
+          </p:nvPr>
+        </p:nvSpPr>
+        <p:spPr/>
+      </p:sp>
+      <p:sp>
+        <p:nvSpPr>
+          <p:cNvPr id="3" name="Notes Placeholder 2"/>
+          <p:cNvSpPr>
+            <a:spLocks noGrp="1"/>
+          </p:cNvSpPr>
+          <p:nvPr>
+            <p:ph type="body" idx="3" sz="quarter"/>
+          </p:nvPr>
+        </p:nvSpPr>
+        <p:spPr/>
+        <p:txBody>
+          <a:bodyPr/>
+          <a:lstStyle/>
+          <a:p>
+            <a:r>
+              <a:t>N1: ¿Por qué sala de máquinas?</a:t>
+            </a:r>
+          </a:p>
+          <a:p>
+            <a:r>
+              <a:t>N2: Porque la potencia útil nominal es conjunta, o sea que se suma: treinta más treinta más treinta son noventa kilovatios. Al pasar de setenta, deja de ser cosa doméstica y exige sala de máquinas con la UNE sesenta mil seiscientos uno. La trampa era mirar cada equipo por separado y ver treinta; pero si trabajan juntos, mandan los noventa.</a:t>
+            </a:r>
+          </a:p>
+        </p:txBody>
+      </p:sp>
+      <p:sp>
+        <p:nvSpPr>
+          <p:cNvPr id="4" name="Slide Number Placeholder 3"/>
+          <p:cNvSpPr>
+            <a:spLocks noGrp="1"/>
+          </p:cNvSpPr>
+          <p:nvPr>
+            <p:ph type="sldNum" idx="5" sz="quarter"/>
+          </p:nvPr>
+        </p:nvSpPr>
+        <p:spPr/>
+      </p:sp>
+    </p:spTree>
+  </p:cSld>
+  <p:clrMapOvr>
+    <a:masterClrMapping/>
+  </p:clrMapOvr>
+</p:notes>
+</file>
+
+<file path=ppt/notesSlides/notesSlide19.xml><?xml version="1.0" encoding="utf-8"?>
+<p:notes xmlns:a="http://schemas.openxmlformats.org/drawingml/2006/main" xmlns:p="http://schemas.openxmlformats.org/presentationml/2006/main" xmlns:r="http://schemas.openxmlformats.org/officeDocument/2006/relationships">
+  <p:cSld>
+    <p:spTree>
+      <p:nvGrpSpPr>
+        <p:cNvPr id="1" name=""/>
+        <p:cNvGrpSpPr/>
+        <p:nvPr/>
+      </p:nvGrpSpPr>
+      <p:grpSpPr>
+        <a:xfrm>
+          <a:off x="0" y="0"/>
+          <a:ext cx="0" cy="0"/>
+          <a:chOff x="0" y="0"/>
+          <a:chExt cx="0" cy="0"/>
+        </a:xfrm>
+      </p:grpSpPr>
+      <p:sp>
+        <p:nvSpPr>
+          <p:cNvPr id="2" name="Slide Image Placeholder 1"/>
+          <p:cNvSpPr>
+            <a:spLocks noGrp="1"/>
+          </p:cNvSpPr>
+          <p:nvPr>
+            <p:ph type="sldImg" idx="2"/>
+          </p:nvPr>
+        </p:nvSpPr>
+        <p:spPr/>
+      </p:sp>
+      <p:sp>
+        <p:nvSpPr>
+          <p:cNvPr id="3" name="Notes Placeholder 2"/>
+          <p:cNvSpPr>
+            <a:spLocks noGrp="1"/>
+          </p:cNvSpPr>
+          <p:nvPr>
+            <p:ph type="body" idx="3" sz="quarter"/>
+          </p:nvPr>
+        </p:nvSpPr>
+        <p:spPr/>
+        <p:txBody>
+          <a:bodyPr/>
+          <a:lstStyle/>
+          <a:p>
+            <a:r>
+              <a:t>N1: ¿Cómo sé qué norma técnica tengo que seguir?</a:t>
+            </a:r>
+          </a:p>
+          <a:p>
+            <a:r>
+              <a:t>N2: Lo decide la presión máxima de operación, y esta es de las preguntas más repetidas de todo el Gas B. Chuleta: hasta cinco bar, sigues la UNE sesenta mil seiscientos setenta, la de toda la vida para instalaciones receptoras normales; por encima de cinco bar, la UNE sesenta mil seiscientos veinte, la de alta presión. Como instalador de categoría be trabajarás casi siempre con la seiscientos setenta. Esa presión máxima de operación la verás escrita como eme o pe, del inglés, y es la presión más alta a la que la instalación trabaja de forma normal y continua; no la confundas con la de prueba ni con la de diseño. Memoriza el par: seiscientos setenta es baja presión hasta cinco bar; seiscientos veinte es alta presión por encima de cinco.</a:t>
             </a:r>
           </a:p>
         </p:txBody>
@@ -1209,6 +1357,466 @@
           <a:p>
             <a:r>
               <a:t>N2: Porque son las tres fronteras que más se preguntan de este vídeo. Setenta kilovatios es el tope de potencia para poder sacar los humos por la fachada en un aparato estanco o de tiro forzado. Cinco bar es la raya que decide qué norma técnica sigues: por debajo una, por encima otra. Y veinticuatro con cuatro kilovatios es el límite del aparato de tiro natural que solo hace agua caliente para poder salir también por fachada. Si te quedas con estas tres cifras, ya llevas medio vídeo ganado.</a:t>
+            </a:r>
+          </a:p>
+        </p:txBody>
+      </p:sp>
+      <p:sp>
+        <p:nvSpPr>
+          <p:cNvPr id="4" name="Slide Number Placeholder 3"/>
+          <p:cNvSpPr>
+            <a:spLocks noGrp="1"/>
+          </p:cNvSpPr>
+          <p:nvPr>
+            <p:ph type="sldNum" idx="5" sz="quarter"/>
+          </p:nvPr>
+        </p:nvSpPr>
+        <p:spPr/>
+      </p:sp>
+    </p:spTree>
+  </p:cSld>
+  <p:clrMapOvr>
+    <a:masterClrMapping/>
+  </p:clrMapOvr>
+</p:notes>
+</file>
+
+<file path=ppt/notesSlides/notesSlide20.xml><?xml version="1.0" encoding="utf-8"?>
+<p:notes xmlns:a="http://schemas.openxmlformats.org/drawingml/2006/main" xmlns:p="http://schemas.openxmlformats.org/presentationml/2006/main" xmlns:r="http://schemas.openxmlformats.org/officeDocument/2006/relationships">
+  <p:cSld>
+    <p:spTree>
+      <p:nvGrpSpPr>
+        <p:cNvPr id="1" name=""/>
+        <p:cNvGrpSpPr/>
+        <p:nvPr/>
+      </p:nvGrpSpPr>
+      <p:grpSpPr>
+        <a:xfrm>
+          <a:off x="0" y="0"/>
+          <a:ext cx="0" cy="0"/>
+          <a:chOff x="0" y="0"/>
+          <a:chExt cx="0" cy="0"/>
+        </a:xfrm>
+      </p:grpSpPr>
+      <p:sp>
+        <p:nvSpPr>
+          <p:cNvPr id="2" name="Slide Image Placeholder 1"/>
+          <p:cNvSpPr>
+            <a:spLocks noGrp="1"/>
+          </p:cNvSpPr>
+          <p:nvPr>
+            <p:ph type="sldImg" idx="2"/>
+          </p:nvPr>
+        </p:nvSpPr>
+        <p:spPr/>
+      </p:sp>
+      <p:sp>
+        <p:nvSpPr>
+          <p:cNvPr id="3" name="Notes Placeholder 2"/>
+          <p:cNvSpPr>
+            <a:spLocks noGrp="1"/>
+          </p:cNvSpPr>
+          <p:nvPr>
+            <p:ph type="body" idx="3" sz="quarter"/>
+          </p:nvPr>
+        </p:nvSpPr>
+        <p:spPr/>
+        <p:txBody>
+          <a:bodyPr/>
+          <a:lstStyle/>
+          <a:p>
+            <a:r>
+              <a:t>N1: ¿Qué norma técnica sigo según la presión?</a:t>
+            </a:r>
+          </a:p>
+          <a:p>
+            <a:r>
+              <a:t>N2: Esta tabla resuelve una de las preguntas más repetidas de todo el Gas B. A la izquierda tienes la presión máxima de operación, la que en la normativa verás como eme o pe, y a la derecha la norma que te toca seguir. Primera fila: hasta cinco bar, la UNE sesenta mil seiscientos setenta, la de toda la vida para instalaciones receptoras normales. Segunda fila: por encima de cinco bar, la UNE sesenta mil seiscientos veinte, la de alta presión. Ejemplo de obra: una instalación doméstica que recibe gas a un bar va por la seiscientos setenta; como categoría be trabajarás casi siempre con esa. Memoriza el par y no falles la frontera de los cinco bar.</a:t>
+            </a:r>
+          </a:p>
+        </p:txBody>
+      </p:sp>
+      <p:sp>
+        <p:nvSpPr>
+          <p:cNvPr id="4" name="Slide Number Placeholder 3"/>
+          <p:cNvSpPr>
+            <a:spLocks noGrp="1"/>
+          </p:cNvSpPr>
+          <p:nvPr>
+            <p:ph type="sldNum" idx="5" sz="quarter"/>
+          </p:nvPr>
+        </p:nvSpPr>
+        <p:spPr/>
+      </p:sp>
+    </p:spTree>
+  </p:cSld>
+  <p:clrMapOvr>
+    <a:masterClrMapping/>
+  </p:clrMapOvr>
+</p:notes>
+</file>
+
+<file path=ppt/notesSlides/notesSlide21.xml><?xml version="1.0" encoding="utf-8"?>
+<p:notes xmlns:a="http://schemas.openxmlformats.org/drawingml/2006/main" xmlns:p="http://schemas.openxmlformats.org/presentationml/2006/main" xmlns:r="http://schemas.openxmlformats.org/officeDocument/2006/relationships">
+  <p:cSld>
+    <p:spTree>
+      <p:nvGrpSpPr>
+        <p:cNvPr id="1" name=""/>
+        <p:cNvGrpSpPr/>
+        <p:nvPr/>
+      </p:nvGrpSpPr>
+      <p:grpSpPr>
+        <a:xfrm>
+          <a:off x="0" y="0"/>
+          <a:ext cx="0" cy="0"/>
+          <a:chOff x="0" y="0"/>
+          <a:chExt cx="0" cy="0"/>
+        </a:xfrm>
+      </p:grpSpPr>
+      <p:sp>
+        <p:nvSpPr>
+          <p:cNvPr id="2" name="Slide Image Placeholder 1"/>
+          <p:cNvSpPr>
+            <a:spLocks noGrp="1"/>
+          </p:cNvSpPr>
+          <p:nvPr>
+            <p:ph type="sldImg" idx="2"/>
+          </p:nvPr>
+        </p:nvSpPr>
+        <p:spPr/>
+      </p:sp>
+      <p:sp>
+        <p:nvSpPr>
+          <p:cNvPr id="3" name="Notes Placeholder 2"/>
+          <p:cNvSpPr>
+            <a:spLocks noGrp="1"/>
+          </p:cNvSpPr>
+          <p:nvPr>
+            <p:ph type="body" idx="3" sz="quarter"/>
+          </p:nvPr>
+        </p:nvSpPr>
+        <p:spPr/>
+        <p:txBody>
+          <a:bodyPr/>
+          <a:lstStyle/>
+          <a:p>
+            <a:r>
+              <a:t>N1: Seis bar, por encima de la raya. ¿Qué norma toca?</a:t>
+            </a:r>
+          </a:p>
+          <a:p>
+            <a:r>
+              <a:t>N2: Acuérdate de la frontera de los cinco bar que acabamos de ver en la tabla. Dos de las opciones son normas que ni siquiera van de esto; céntrate en el par de la presión.</a:t>
+            </a:r>
+          </a:p>
+        </p:txBody>
+      </p:sp>
+      <p:sp>
+        <p:nvSpPr>
+          <p:cNvPr id="4" name="Slide Number Placeholder 3"/>
+          <p:cNvSpPr>
+            <a:spLocks noGrp="1"/>
+          </p:cNvSpPr>
+          <p:nvPr>
+            <p:ph type="sldNum" idx="5" sz="quarter"/>
+          </p:nvPr>
+        </p:nvSpPr>
+        <p:spPr/>
+      </p:sp>
+    </p:spTree>
+  </p:cSld>
+  <p:clrMapOvr>
+    <a:masterClrMapping/>
+  </p:clrMapOvr>
+</p:notes>
+</file>
+
+<file path=ppt/notesSlides/notesSlide22.xml><?xml version="1.0" encoding="utf-8"?>
+<p:notes xmlns:a="http://schemas.openxmlformats.org/drawingml/2006/main" xmlns:p="http://schemas.openxmlformats.org/presentationml/2006/main" xmlns:r="http://schemas.openxmlformats.org/officeDocument/2006/relationships">
+  <p:cSld>
+    <p:spTree>
+      <p:nvGrpSpPr>
+        <p:cNvPr id="1" name=""/>
+        <p:cNvGrpSpPr/>
+        <p:nvPr/>
+      </p:nvGrpSpPr>
+      <p:grpSpPr>
+        <a:xfrm>
+          <a:off x="0" y="0"/>
+          <a:ext cx="0" cy="0"/>
+          <a:chOff x="0" y="0"/>
+          <a:chExt cx="0" cy="0"/>
+        </a:xfrm>
+      </p:grpSpPr>
+      <p:sp>
+        <p:nvSpPr>
+          <p:cNvPr id="2" name="Slide Image Placeholder 1"/>
+          <p:cNvSpPr>
+            <a:spLocks noGrp="1"/>
+          </p:cNvSpPr>
+          <p:nvPr>
+            <p:ph type="sldImg" idx="2"/>
+          </p:nvPr>
+        </p:nvSpPr>
+        <p:spPr/>
+      </p:sp>
+      <p:sp>
+        <p:nvSpPr>
+          <p:cNvPr id="3" name="Notes Placeholder 2"/>
+          <p:cNvSpPr>
+            <a:spLocks noGrp="1"/>
+          </p:cNvSpPr>
+          <p:nvPr>
+            <p:ph type="body" idx="3" sz="quarter"/>
+          </p:nvPr>
+        </p:nvSpPr>
+        <p:spPr/>
+        <p:txBody>
+          <a:bodyPr/>
+          <a:lstStyle/>
+          <a:p>
+            <a:r>
+              <a:t>N1: ¿Por qué la seiscientos veinte?</a:t>
+            </a:r>
+          </a:p>
+          <a:p>
+            <a:r>
+              <a:t>N2: Porque seis bar es superior a cinco, y por encima de cinco bar manda la UNE sesenta mil seiscientos veinte, la de alta presión. La seiscientos setenta se habría quedado corta, es para hasta cinco bar. Las otras dos, la seiscientos uno de salas de máquinas y la trescientos diez de acometidas, son de otra cosa. Truco: pasas de cinco, subes de norma.</a:t>
+            </a:r>
+          </a:p>
+        </p:txBody>
+      </p:sp>
+      <p:sp>
+        <p:nvSpPr>
+          <p:cNvPr id="4" name="Slide Number Placeholder 3"/>
+          <p:cNvSpPr>
+            <a:spLocks noGrp="1"/>
+          </p:cNvSpPr>
+          <p:nvPr>
+            <p:ph type="sldNum" idx="5" sz="quarter"/>
+          </p:nvPr>
+        </p:nvSpPr>
+        <p:spPr/>
+      </p:sp>
+    </p:spTree>
+  </p:cSld>
+  <p:clrMapOvr>
+    <a:masterClrMapping/>
+  </p:clrMapOvr>
+</p:notes>
+</file>
+
+<file path=ppt/notesSlides/notesSlide23.xml><?xml version="1.0" encoding="utf-8"?>
+<p:notes xmlns:a="http://schemas.openxmlformats.org/drawingml/2006/main" xmlns:p="http://schemas.openxmlformats.org/presentationml/2006/main" xmlns:r="http://schemas.openxmlformats.org/officeDocument/2006/relationships">
+  <p:cSld>
+    <p:spTree>
+      <p:nvGrpSpPr>
+        <p:cNvPr id="1" name=""/>
+        <p:cNvGrpSpPr/>
+        <p:nvPr/>
+      </p:nvGrpSpPr>
+      <p:grpSpPr>
+        <a:xfrm>
+          <a:off x="0" y="0"/>
+          <a:ext cx="0" cy="0"/>
+          <a:chOff x="0" y="0"/>
+          <a:chExt cx="0" cy="0"/>
+        </a:xfrm>
+      </p:grpSpPr>
+      <p:sp>
+        <p:nvSpPr>
+          <p:cNvPr id="2" name="Slide Image Placeholder 1"/>
+          <p:cNvSpPr>
+            <a:spLocks noGrp="1"/>
+          </p:cNvSpPr>
+          <p:nvPr>
+            <p:ph type="sldImg" idx="2"/>
+          </p:nvPr>
+        </p:nvSpPr>
+        <p:spPr/>
+      </p:sp>
+      <p:sp>
+        <p:nvSpPr>
+          <p:cNvPr id="3" name="Notes Placeholder 2"/>
+          <p:cNvSpPr>
+            <a:spLocks noGrp="1"/>
+          </p:cNvSpPr>
+          <p:nvPr>
+            <p:ph type="body" idx="3" sz="quarter"/>
+          </p:nvPr>
+        </p:nvSpPr>
+        <p:spPr/>
+        <p:txBody>
+          <a:bodyPr/>
+          <a:lstStyle/>
+          <a:p>
+            <a:r>
+              <a:t>N1: ¿Qué es un aparato de circuito abierto conducido y por qué no puedo ponerlo donde quiera?</a:t>
+            </a:r>
+          </a:p>
+          <a:p>
+            <a:r>
+              <a:t>N2: Vamos con calma. Circuito abierto quiere decir que el aparato coge el aire para quemar de la propia habitación; conducido quiere decir que los humos sí salen por un conducto. O sea, respira del cuarto pero echa el humo fuera. Como respira del cuarto, el reglamento no quiere que lo pongas en cualquier sitio: sí en galerías, terrazas, recintos o locales exclusivos para estos aparatos, y en locales de uso restringido como lavaderos o garajes individuales. En la cocina se puede, pero con una condición importante: que el extractor mecánico de la cocina no le robe el tiro al aparato, porque si el extractor tira más fuerte, invierte los humos y mete monóxido en la casa. Y la excepción que se pregunta: si el aparato es solo para agua caliente sanitaria, un calentador de toda la vida, estas limitaciones no le aplican.</a:t>
+            </a:r>
+          </a:p>
+        </p:txBody>
+      </p:sp>
+      <p:sp>
+        <p:nvSpPr>
+          <p:cNvPr id="4" name="Slide Number Placeholder 3"/>
+          <p:cNvSpPr>
+            <a:spLocks noGrp="1"/>
+          </p:cNvSpPr>
+          <p:nvPr>
+            <p:ph type="sldNum" idx="5" sz="quarter"/>
+          </p:nvPr>
+        </p:nvSpPr>
+        <p:spPr/>
+      </p:sp>
+    </p:spTree>
+  </p:cSld>
+  <p:clrMapOvr>
+    <a:masterClrMapping/>
+  </p:clrMapOvr>
+</p:notes>
+</file>
+
+<file path=ppt/notesSlides/notesSlide24.xml><?xml version="1.0" encoding="utf-8"?>
+<p:notes xmlns:a="http://schemas.openxmlformats.org/drawingml/2006/main" xmlns:p="http://schemas.openxmlformats.org/presentationml/2006/main" xmlns:r="http://schemas.openxmlformats.org/officeDocument/2006/relationships">
+  <p:cSld>
+    <p:spTree>
+      <p:nvGrpSpPr>
+        <p:cNvPr id="1" name=""/>
+        <p:cNvGrpSpPr/>
+        <p:nvPr/>
+      </p:nvGrpSpPr>
+      <p:grpSpPr>
+        <a:xfrm>
+          <a:off x="0" y="0"/>
+          <a:ext cx="0" cy="0"/>
+          <a:chOff x="0" y="0"/>
+          <a:chExt cx="0" cy="0"/>
+        </a:xfrm>
+      </p:grpSpPr>
+      <p:sp>
+        <p:nvSpPr>
+          <p:cNvPr id="2" name="Slide Image Placeholder 1"/>
+          <p:cNvSpPr>
+            <a:spLocks noGrp="1"/>
+          </p:cNvSpPr>
+          <p:nvPr>
+            <p:ph type="sldImg" idx="2"/>
+          </p:nvPr>
+        </p:nvSpPr>
+        <p:spPr/>
+      </p:sp>
+      <p:sp>
+        <p:nvSpPr>
+          <p:cNvPr id="3" name="Notes Placeholder 2"/>
+          <p:cNvSpPr>
+            <a:spLocks noGrp="1"/>
+          </p:cNvSpPr>
+          <p:nvPr>
+            <p:ph type="body" idx="3" sz="quarter"/>
+          </p:nvPr>
+        </p:nvSpPr>
+        <p:spPr/>
+        <p:txBody>
+          <a:bodyPr/>
+          <a:lstStyle/>
+          <a:p>
+            <a:r>
+              <a:t>N1: ¿Y si la tubería va enterrada, cambia algo?</a:t>
+            </a:r>
+          </a:p>
+          <a:p>
+            <a:r>
+              <a:t>N2: Cambia bastante. Cuando la tubería va bajo tierra ya no valen las reglas de la tubería vista; se aplican las normas de acometidas, la UNE sesenta mil trescientos diez y la sesenta mil trescientos once. Truco corto: enterrado igual a trescientos diez y trescientos once. Y aquí un detalle práctico que cae en examen: antes de diseñar una acometida interior enterrada, tienes que preguntar al distribuidor de qué material es su red, porque tu tubería tiene que ser compatible con ella. No puedes unir bajo tierra cualquier material con cualquier otro, porque una unión mal casada se corroe y acaba en una fuga que no ves hasta que huele. Nunca improvises el material enterrado sin ese dato.</a:t>
+            </a:r>
+          </a:p>
+        </p:txBody>
+      </p:sp>
+      <p:sp>
+        <p:nvSpPr>
+          <p:cNvPr id="4" name="Slide Number Placeholder 3"/>
+          <p:cNvSpPr>
+            <a:spLocks noGrp="1"/>
+          </p:cNvSpPr>
+          <p:nvPr>
+            <p:ph type="sldNum" idx="5" sz="quarter"/>
+          </p:nvPr>
+        </p:nvSpPr>
+        <p:spPr/>
+      </p:sp>
+    </p:spTree>
+  </p:cSld>
+  <p:clrMapOvr>
+    <a:masterClrMapping/>
+  </p:clrMapOvr>
+</p:notes>
+</file>
+
+<file path=ppt/notesSlides/notesSlide25.xml><?xml version="1.0" encoding="utf-8"?>
+<p:notes xmlns:a="http://schemas.openxmlformats.org/drawingml/2006/main" xmlns:p="http://schemas.openxmlformats.org/presentationml/2006/main" xmlns:r="http://schemas.openxmlformats.org/officeDocument/2006/relationships">
+  <p:cSld>
+    <p:spTree>
+      <p:nvGrpSpPr>
+        <p:cNvPr id="1" name=""/>
+        <p:cNvGrpSpPr/>
+        <p:nvPr/>
+      </p:nvGrpSpPr>
+      <p:grpSpPr>
+        <a:xfrm>
+          <a:off x="0" y="0"/>
+          <a:ext cx="0" cy="0"/>
+          <a:chOff x="0" y="0"/>
+          <a:chExt cx="0" cy="0"/>
+        </a:xfrm>
+      </p:grpSpPr>
+      <p:sp>
+        <p:nvSpPr>
+          <p:cNvPr id="2" name="Slide Image Placeholder 1"/>
+          <p:cNvSpPr>
+            <a:spLocks noGrp="1"/>
+          </p:cNvSpPr>
+          <p:nvPr>
+            <p:ph type="sldImg" idx="2"/>
+          </p:nvPr>
+        </p:nvSpPr>
+        <p:spPr/>
+      </p:sp>
+      <p:sp>
+        <p:nvSpPr>
+          <p:cNvPr id="3" name="Notes Placeholder 2"/>
+          <p:cNvSpPr>
+            <a:spLocks noGrp="1"/>
+          </p:cNvSpPr>
+          <p:nvPr>
+            <p:ph type="body" idx="3" sz="quarter"/>
+          </p:nvPr>
+        </p:nvSpPr>
+        <p:spPr/>
+        <p:txBody>
+          <a:bodyPr/>
+          <a:lstStyle/>
+          <a:p>
+            <a:r>
+              <a:t>N1: Cerramos fuerte. ¿Qué me tengo que llevar de este vídeo?</a:t>
+            </a:r>
+          </a:p>
+          <a:p>
+            <a:r>
+              <a:t>N2: Reconstruyamos el hilo. Primero, la ITC-ICG cero siete es tu manual de la instalación receptora: manda en el diseño, la ejecución y la utilización, e incluye los locales y los aparatos, no solo los tubos. Segundo, los humos son seguridad: salen por cubierta, y solo por fachada en casos pequeños, estancos o tiro forzado hasta setenta kilovatios y tiro natural de solo agua caliente hasta veinticuatro con cuatro. Tercero, la presión elige la norma: hasta cinco bar la sesenta mil seiscientos setenta, por encima la seiscientos veinte. Y cuarto, lo enterrado va por las normas de acometidas y lo gordo, por encima de setenta, a sala de máquinas con la sesenta mil seiscientos uno.</a:t>
+            </a:r>
+          </a:p>
+          <a:p>
+            <a:r>
+              <a:t>N1: ¿Y cómo cae esto en el examen?</a:t>
+            </a:r>
+          </a:p>
+          <a:p>
+            <a:r>
+              <a:t>N2: Te lo preguntan cruzado, con las cifras: te dan una potencia y un tipo de aparato y quieren saber si puede salir por fachada; o te dan una presión y quieren la norma. En la obra decide cosas muy reales: si dimensionas mal una chimenea o sacas humos por donde no toca, te tumban la puesta en servicio y le creas un problema de monóxido al vecino. Hoy ya eres más gasista que ayer: sabes por dónde tienen que salir los humos y con qué norma se monta cada cosa. En el siguiente vídeo damos el salto a los papeles: cuándo hace falta proyecto, qué pruebas se hacen y cómo una instalación pasa de estar montada a tener gas. Te espero allí.</a:t>
             </a:r>
           </a:p>
         </p:txBody>
@@ -4810,7 +5418,7 @@
       </p:sp>
       <p:sp>
         <p:nvSpPr>
-          <p:cNvPr id="4" name="Rounded Rectangle 3"/>
+          <p:cNvPr id="4" name="Rectangle 3"/>
           <p:cNvSpPr/>
           <p:nvPr/>
         </p:nvSpPr>
@@ -4819,7 +5427,7 @@
             <a:off x="868680" y="2057400"/>
             <a:ext cx="1463040" cy="82296"/>
           </a:xfrm>
-          <a:prstGeom prst="roundRect">
+          <a:prstGeom prst="rect">
             <a:avLst/>
           </a:prstGeom>
           <a:solidFill>
@@ -4936,6 +5544,18 @@
   <p:clrMapOvr>
     <a:masterClrMapping/>
   </p:clrMapOvr>
+  <mc:AlternateContent xmlns:mc="http://schemas.openxmlformats.org/markup-compatibility/2006">
+    <mc:Choice xmlns:p14="http://schemas.microsoft.com/office/powerpoint/2010/main" Requires="p14">
+      <p:transition spd="med" p14:dur="700">
+        <p14:cube dir="l"/>
+      </p:transition>
+    </mc:Choice>
+    <mc:Fallback>
+      <p:transition spd="med">
+        <p:push dir="l"/>
+      </p:transition>
+    </mc:Fallback>
+  </mc:AlternateContent>
 </p:sld>
 </file>
 
@@ -5023,7 +5643,7 @@
                 </a:solidFill>
                 <a:latin typeface="Montserrat"/>
               </a:rPr>
-              <a:t>010 / 017</a:t>
+              <a:t>010 / 025</a:t>
             </a:r>
           </a:p>
         </p:txBody>
@@ -5064,84 +5684,16 @@
       </p:sp>
       <p:sp>
         <p:nvSpPr>
-          <p:cNvPr id="5" name="TextBox 4"/>
-          <p:cNvSpPr txBox="1"/>
-          <p:nvPr/>
-        </p:nvSpPr>
-        <p:spPr>
-          <a:xfrm>
-            <a:off x="822960" y="457200"/>
-            <a:ext cx="10058400" cy="365760"/>
-          </a:xfrm>
-          <a:prstGeom prst="rect">
-            <a:avLst/>
-          </a:prstGeom>
-          <a:noFill/>
-        </p:spPr>
-        <p:txBody>
-          <a:bodyPr wrap="square">
-            <a:spAutoFit/>
-          </a:bodyPr>
-          <a:lstStyle/>
-          <a:p>
-            <a:r>
-              <a:rPr sz="1300" b="1" i="0">
-                <a:solidFill>
-                  <a:srgbClr val="E8801A"/>
-                </a:solidFill>
-                <a:latin typeface="Montserrat"/>
-              </a:rPr>
-              <a:t>APARTADO 2 · TIPOS DE APARATO</a:t>
-            </a:r>
-          </a:p>
-        </p:txBody>
-      </p:sp>
-      <p:sp>
-        <p:nvSpPr>
-          <p:cNvPr id="6" name="TextBox 5"/>
-          <p:cNvSpPr txBox="1"/>
-          <p:nvPr/>
-        </p:nvSpPr>
-        <p:spPr>
-          <a:xfrm>
-            <a:off x="822960" y="868680"/>
-            <a:ext cx="10515600" cy="914400"/>
-          </a:xfrm>
-          <a:prstGeom prst="rect">
-            <a:avLst/>
-          </a:prstGeom>
-          <a:noFill/>
-        </p:spPr>
-        <p:txBody>
-          <a:bodyPr wrap="square">
-            <a:spAutoFit/>
-          </a:bodyPr>
-          <a:lstStyle/>
-          <a:p>
-            <a:r>
-              <a:rPr sz="2800" b="1" i="0">
-                <a:solidFill>
-                  <a:srgbClr val="1E2761"/>
-                </a:solidFill>
-                <a:latin typeface="Montserrat"/>
-              </a:rPr>
-              <a:t>Estanco, tiro forzado, tiro natural</a:t>
-            </a:r>
-          </a:p>
-        </p:txBody>
-      </p:sp>
-      <p:sp>
-        <p:nvSpPr>
-          <p:cNvPr id="7" name="Rounded Rectangle 6"/>
+          <p:cNvPr id="5" name="Rectangle 4"/>
           <p:cNvSpPr/>
           <p:nvPr/>
         </p:nvSpPr>
         <p:spPr>
           <a:xfrm>
-            <a:off x="868680" y="1627632"/>
-            <a:ext cx="2011680" cy="73152"/>
-          </a:xfrm>
-          <a:prstGeom prst="roundRect">
+            <a:off x="0" y="0"/>
+            <a:ext cx="12191695" cy="1143000"/>
+          </a:xfrm>
+          <a:prstGeom prst="rect">
             <a:avLst/>
           </a:prstGeom>
           <a:solidFill>
@@ -5176,14 +5728,14 @@
       </p:sp>
       <p:sp>
         <p:nvSpPr>
-          <p:cNvPr id="8" name="TextBox 7"/>
+          <p:cNvPr id="6" name="TextBox 5"/>
           <p:cNvSpPr txBox="1"/>
           <p:nvPr/>
         </p:nvSpPr>
         <p:spPr>
           <a:xfrm>
-            <a:off x="822960" y="1965960"/>
-            <a:ext cx="4983480" cy="4206240"/>
+            <a:off x="822960" y="274320"/>
+            <a:ext cx="10515600" cy="640080"/>
           </a:xfrm>
           <a:prstGeom prst="rect">
             <a:avLst/>
@@ -5196,92 +5748,62 @@
           </a:bodyPr>
           <a:lstStyle/>
           <a:p>
-            <a:pPr>
-              <a:spcAft>
-                <a:spcPts val="1100"/>
-              </a:spcAft>
-            </a:pPr>
-            <a:r>
-              <a:rPr sz="1600" b="1" i="0">
-                <a:solidFill>
-                  <a:srgbClr val="E8801A"/>
-                </a:solidFill>
-                <a:latin typeface="Montserrat"/>
-              </a:rPr>
-              <a:t>▸  </a:t>
-            </a:r>
-            <a:r>
-              <a:rPr sz="1600" b="0" i="0">
-                <a:solidFill>
-                  <a:srgbClr val="1B2330"/>
-                </a:solidFill>
-                <a:latin typeface="Montserrat"/>
-              </a:rPr>
-              <a:t>Estanco: aire de fuera, humos fuera</a:t>
-            </a:r>
-          </a:p>
-          <a:p>
-            <a:pPr>
-              <a:spcAft>
-                <a:spcPts val="1100"/>
-              </a:spcAft>
-            </a:pPr>
-            <a:r>
-              <a:rPr sz="1600" b="1" i="0">
-                <a:solidFill>
-                  <a:srgbClr val="E8801A"/>
-                </a:solidFill>
-                <a:latin typeface="Montserrat"/>
-              </a:rPr>
-              <a:t>▸  </a:t>
-            </a:r>
-            <a:r>
-              <a:rPr sz="1600" b="0" i="0">
-                <a:solidFill>
-                  <a:srgbClr val="1B2330"/>
-                </a:solidFill>
-                <a:latin typeface="Montserrat"/>
-              </a:rPr>
-              <a:t>Tiro forzado: un ventilador empuja</a:t>
-            </a:r>
-          </a:p>
-          <a:p>
-            <a:pPr>
-              <a:spcAft>
-                <a:spcPts val="1100"/>
-              </a:spcAft>
-            </a:pPr>
-            <a:r>
-              <a:rPr sz="1600" b="1" i="0">
-                <a:solidFill>
-                  <a:srgbClr val="E8801A"/>
-                </a:solidFill>
-                <a:latin typeface="Montserrat"/>
-              </a:rPr>
-              <a:t>▸  </a:t>
-            </a:r>
-            <a:r>
-              <a:rPr sz="1600" b="0" i="0">
-                <a:solidFill>
-                  <a:srgbClr val="1B2330"/>
-                </a:solidFill>
-                <a:latin typeface="Montserrat"/>
-              </a:rPr>
-              <a:t>Tiro natural: suben solos por calor</a:t>
-            </a:r>
-          </a:p>
-        </p:txBody>
-      </p:sp>
-      <p:sp>
-        <p:nvSpPr>
-          <p:cNvPr id="9" name="imgph" descr="IMGQ:sealed combustion gas boiler with concentric flue"/>
+            <a:r>
+              <a:rPr sz="2400" b="1" i="0">
+                <a:solidFill>
+                  <a:srgbClr val="FFFFFF"/>
+                </a:solidFill>
+                <a:latin typeface="Montserrat"/>
+              </a:rPr>
+              <a:t>⚡  PREGUNTA RÁPIDA</a:t>
+            </a:r>
+          </a:p>
+        </p:txBody>
+      </p:sp>
+      <p:sp>
+        <p:nvSpPr>
+          <p:cNvPr id="7" name="TextBox 6"/>
+          <p:cNvSpPr txBox="1"/>
+          <p:nvPr/>
+        </p:nvSpPr>
+        <p:spPr>
+          <a:xfrm>
+            <a:off x="822960" y="1508760"/>
+            <a:ext cx="10515600" cy="1371600"/>
+          </a:xfrm>
+          <a:prstGeom prst="rect">
+            <a:avLst/>
+          </a:prstGeom>
+          <a:noFill/>
+        </p:spPr>
+        <p:txBody>
+          <a:bodyPr wrap="square">
+            <a:spAutoFit/>
+          </a:bodyPr>
+          <a:lstStyle/>
+          <a:p>
+            <a:r>
+              <a:rPr sz="2400" b="1" i="0">
+                <a:solidFill>
+                  <a:srgbClr val="1E2761"/>
+                </a:solidFill>
+                <a:latin typeface="Montserrat"/>
+              </a:rPr>
+              <a:t>¿Hasta qué potencia puede un aparato estanco o de tiro forzado evacuar los humos a fachada?</a:t>
+            </a:r>
+          </a:p>
+        </p:txBody>
+      </p:sp>
+      <p:sp>
+        <p:nvSpPr>
+          <p:cNvPr id="8" name="Rounded Rectangle 7"/>
           <p:cNvSpPr/>
           <p:nvPr/>
         </p:nvSpPr>
         <p:spPr>
           <a:xfrm>
-            <a:off x="5806440" y="1051560"/>
-            <a:ext cx="5298947" cy="4629150"/>
+            <a:off x="822960" y="3291840"/>
+            <a:ext cx="4983480" cy="1143000"/>
           </a:xfrm>
           <a:prstGeom prst="roundRect">
             <a:avLst/>
@@ -5320,14 +5842,58 @@
       </p:sp>
       <p:sp>
         <p:nvSpPr>
+          <p:cNvPr id="9" name="Rectangle 8"/>
+          <p:cNvSpPr/>
+          <p:nvPr/>
+        </p:nvSpPr>
+        <p:spPr>
+          <a:xfrm>
+            <a:off x="822960" y="3291840"/>
+            <a:ext cx="640080" cy="1143000"/>
+          </a:xfrm>
+          <a:prstGeom prst="rect">
+            <a:avLst/>
+          </a:prstGeom>
+          <a:solidFill>
+            <a:srgbClr val="1E2761"/>
+          </a:solidFill>
+          <a:ln>
+            <a:noFill/>
+          </a:ln>
+          <a:effectLst/>
+        </p:spPr>
+        <p:style>
+          <a:lnRef idx="1">
+            <a:schemeClr val="accent1"/>
+          </a:lnRef>
+          <a:fillRef idx="3">
+            <a:schemeClr val="accent1"/>
+          </a:fillRef>
+          <a:effectRef idx="2">
+            <a:schemeClr val="accent1"/>
+          </a:effectRef>
+          <a:fontRef idx="minor">
+            <a:schemeClr val="lt1"/>
+          </a:fontRef>
+        </p:style>
+        <p:txBody>
+          <a:bodyPr rtlCol="0" anchor="ctr"/>
+          <a:lstStyle/>
+          <a:p>
+            <a:pPr algn="ctr"/>
+          </a:p>
+        </p:txBody>
+      </p:sp>
+      <p:sp>
+        <p:nvSpPr>
           <p:cNvPr id="10" name="TextBox 9"/>
           <p:cNvSpPr txBox="1"/>
           <p:nvPr/>
         </p:nvSpPr>
         <p:spPr>
           <a:xfrm>
-            <a:off x="6080760" y="2726055"/>
-            <a:ext cx="4750307" cy="1280160"/>
+            <a:off x="822960" y="3611880"/>
+            <a:ext cx="640080" cy="548640"/>
           </a:xfrm>
           <a:prstGeom prst="rect">
             <a:avLst/>
@@ -5342,25 +5908,524 @@
           <a:p>
             <a:pPr algn="ctr"/>
             <a:r>
-              <a:rPr sz="1400" b="1" i="0">
-                <a:solidFill>
-                  <a:srgbClr val="64748B"/>
-                </a:solidFill>
-                <a:latin typeface="Montserrat"/>
-              </a:rPr>
-              <a:t>IMAGEN REALISTA</a:t>
-            </a:r>
-          </a:p>
+              <a:rPr sz="2200" b="1" i="0">
+                <a:solidFill>
+                  <a:srgbClr val="FFFFFF"/>
+                </a:solidFill>
+                <a:latin typeface="Montserrat"/>
+              </a:rPr>
+              <a:t>A</a:t>
+            </a:r>
+          </a:p>
+        </p:txBody>
+      </p:sp>
+      <p:sp>
+        <p:nvSpPr>
+          <p:cNvPr id="11" name="TextBox 10"/>
+          <p:cNvSpPr txBox="1"/>
+          <p:nvPr/>
+        </p:nvSpPr>
+        <p:spPr>
+          <a:xfrm>
+            <a:off x="1600200" y="3474720"/>
+            <a:ext cx="4114800" cy="868680"/>
+          </a:xfrm>
+          <a:prstGeom prst="rect">
+            <a:avLst/>
+          </a:prstGeom>
+          <a:noFill/>
+        </p:spPr>
+        <p:txBody>
+          <a:bodyPr wrap="square">
+            <a:spAutoFit/>
+          </a:bodyPr>
+          <a:lstStyle/>
+          <a:p>
+            <a:r>
+              <a:rPr sz="1400" b="0" i="0">
+                <a:solidFill>
+                  <a:srgbClr val="1B2330"/>
+                </a:solidFill>
+                <a:latin typeface="Montserrat"/>
+              </a:rPr>
+              <a:t>24,4 kW</a:t>
+            </a:r>
+          </a:p>
+        </p:txBody>
+      </p:sp>
+      <p:sp>
+        <p:nvSpPr>
+          <p:cNvPr id="12" name="Rounded Rectangle 11"/>
+          <p:cNvSpPr/>
+          <p:nvPr/>
+        </p:nvSpPr>
+        <p:spPr>
+          <a:xfrm>
+            <a:off x="6355080" y="3291840"/>
+            <a:ext cx="4983480" cy="1143000"/>
+          </a:xfrm>
+          <a:prstGeom prst="roundRect">
+            <a:avLst/>
+          </a:prstGeom>
+          <a:solidFill>
+            <a:srgbClr val="F3F6FB"/>
+          </a:solidFill>
+          <a:ln w="12700">
+            <a:solidFill>
+              <a:srgbClr val="C7D2E6"/>
+            </a:solidFill>
+          </a:ln>
+          <a:effectLst/>
+        </p:spPr>
+        <p:style>
+          <a:lnRef idx="1">
+            <a:schemeClr val="accent1"/>
+          </a:lnRef>
+          <a:fillRef idx="3">
+            <a:schemeClr val="accent1"/>
+          </a:fillRef>
+          <a:effectRef idx="2">
+            <a:schemeClr val="accent1"/>
+          </a:effectRef>
+          <a:fontRef idx="minor">
+            <a:schemeClr val="lt1"/>
+          </a:fontRef>
+        </p:style>
+        <p:txBody>
+          <a:bodyPr rtlCol="0" anchor="ctr"/>
+          <a:lstStyle/>
           <a:p>
             <a:pPr algn="ctr"/>
-            <a:r>
-              <a:rPr sz="1100" b="0" i="1">
-                <a:solidFill>
-                  <a:srgbClr val="64748B"/>
-                </a:solidFill>
-                <a:latin typeface="Montserrat"/>
-              </a:rPr>
-              <a:t>sealed combustion gas boiler with concentric flue</a:t>
+          </a:p>
+        </p:txBody>
+      </p:sp>
+      <p:sp>
+        <p:nvSpPr>
+          <p:cNvPr id="13" name="Rectangle 12"/>
+          <p:cNvSpPr/>
+          <p:nvPr/>
+        </p:nvSpPr>
+        <p:spPr>
+          <a:xfrm>
+            <a:off x="6355080" y="3291840"/>
+            <a:ext cx="640080" cy="1143000"/>
+          </a:xfrm>
+          <a:prstGeom prst="rect">
+            <a:avLst/>
+          </a:prstGeom>
+          <a:solidFill>
+            <a:srgbClr val="1E2761"/>
+          </a:solidFill>
+          <a:ln>
+            <a:noFill/>
+          </a:ln>
+          <a:effectLst/>
+        </p:spPr>
+        <p:style>
+          <a:lnRef idx="1">
+            <a:schemeClr val="accent1"/>
+          </a:lnRef>
+          <a:fillRef idx="3">
+            <a:schemeClr val="accent1"/>
+          </a:fillRef>
+          <a:effectRef idx="2">
+            <a:schemeClr val="accent1"/>
+          </a:effectRef>
+          <a:fontRef idx="minor">
+            <a:schemeClr val="lt1"/>
+          </a:fontRef>
+        </p:style>
+        <p:txBody>
+          <a:bodyPr rtlCol="0" anchor="ctr"/>
+          <a:lstStyle/>
+          <a:p>
+            <a:pPr algn="ctr"/>
+          </a:p>
+        </p:txBody>
+      </p:sp>
+      <p:sp>
+        <p:nvSpPr>
+          <p:cNvPr id="14" name="TextBox 13"/>
+          <p:cNvSpPr txBox="1"/>
+          <p:nvPr/>
+        </p:nvSpPr>
+        <p:spPr>
+          <a:xfrm>
+            <a:off x="6355080" y="3611880"/>
+            <a:ext cx="640080" cy="548640"/>
+          </a:xfrm>
+          <a:prstGeom prst="rect">
+            <a:avLst/>
+          </a:prstGeom>
+          <a:noFill/>
+        </p:spPr>
+        <p:txBody>
+          <a:bodyPr wrap="square">
+            <a:spAutoFit/>
+          </a:bodyPr>
+          <a:lstStyle/>
+          <a:p>
+            <a:pPr algn="ctr"/>
+            <a:r>
+              <a:rPr sz="2200" b="1" i="0">
+                <a:solidFill>
+                  <a:srgbClr val="FFFFFF"/>
+                </a:solidFill>
+                <a:latin typeface="Montserrat"/>
+              </a:rPr>
+              <a:t>B</a:t>
+            </a:r>
+          </a:p>
+        </p:txBody>
+      </p:sp>
+      <p:sp>
+        <p:nvSpPr>
+          <p:cNvPr id="15" name="TextBox 14"/>
+          <p:cNvSpPr txBox="1"/>
+          <p:nvPr/>
+        </p:nvSpPr>
+        <p:spPr>
+          <a:xfrm>
+            <a:off x="7132320" y="3474720"/>
+            <a:ext cx="4114800" cy="868680"/>
+          </a:xfrm>
+          <a:prstGeom prst="rect">
+            <a:avLst/>
+          </a:prstGeom>
+          <a:noFill/>
+        </p:spPr>
+        <p:txBody>
+          <a:bodyPr wrap="square">
+            <a:spAutoFit/>
+          </a:bodyPr>
+          <a:lstStyle/>
+          <a:p>
+            <a:r>
+              <a:rPr sz="1400" b="0" i="0">
+                <a:solidFill>
+                  <a:srgbClr val="1B2330"/>
+                </a:solidFill>
+                <a:latin typeface="Montserrat"/>
+              </a:rPr>
+              <a:t>70 kW</a:t>
+            </a:r>
+          </a:p>
+        </p:txBody>
+      </p:sp>
+      <p:sp>
+        <p:nvSpPr>
+          <p:cNvPr id="16" name="Rounded Rectangle 15"/>
+          <p:cNvSpPr/>
+          <p:nvPr/>
+        </p:nvSpPr>
+        <p:spPr>
+          <a:xfrm>
+            <a:off x="822960" y="4617720"/>
+            <a:ext cx="4983480" cy="1143000"/>
+          </a:xfrm>
+          <a:prstGeom prst="roundRect">
+            <a:avLst/>
+          </a:prstGeom>
+          <a:solidFill>
+            <a:srgbClr val="F3F6FB"/>
+          </a:solidFill>
+          <a:ln w="12700">
+            <a:solidFill>
+              <a:srgbClr val="C7D2E6"/>
+            </a:solidFill>
+          </a:ln>
+          <a:effectLst/>
+        </p:spPr>
+        <p:style>
+          <a:lnRef idx="1">
+            <a:schemeClr val="accent1"/>
+          </a:lnRef>
+          <a:fillRef idx="3">
+            <a:schemeClr val="accent1"/>
+          </a:fillRef>
+          <a:effectRef idx="2">
+            <a:schemeClr val="accent1"/>
+          </a:effectRef>
+          <a:fontRef idx="minor">
+            <a:schemeClr val="lt1"/>
+          </a:fontRef>
+        </p:style>
+        <p:txBody>
+          <a:bodyPr rtlCol="0" anchor="ctr"/>
+          <a:lstStyle/>
+          <a:p>
+            <a:pPr algn="ctr"/>
+          </a:p>
+        </p:txBody>
+      </p:sp>
+      <p:sp>
+        <p:nvSpPr>
+          <p:cNvPr id="17" name="Rectangle 16"/>
+          <p:cNvSpPr/>
+          <p:nvPr/>
+        </p:nvSpPr>
+        <p:spPr>
+          <a:xfrm>
+            <a:off x="822960" y="4617720"/>
+            <a:ext cx="640080" cy="1143000"/>
+          </a:xfrm>
+          <a:prstGeom prst="rect">
+            <a:avLst/>
+          </a:prstGeom>
+          <a:solidFill>
+            <a:srgbClr val="1E2761"/>
+          </a:solidFill>
+          <a:ln>
+            <a:noFill/>
+          </a:ln>
+          <a:effectLst/>
+        </p:spPr>
+        <p:style>
+          <a:lnRef idx="1">
+            <a:schemeClr val="accent1"/>
+          </a:lnRef>
+          <a:fillRef idx="3">
+            <a:schemeClr val="accent1"/>
+          </a:fillRef>
+          <a:effectRef idx="2">
+            <a:schemeClr val="accent1"/>
+          </a:effectRef>
+          <a:fontRef idx="minor">
+            <a:schemeClr val="lt1"/>
+          </a:fontRef>
+        </p:style>
+        <p:txBody>
+          <a:bodyPr rtlCol="0" anchor="ctr"/>
+          <a:lstStyle/>
+          <a:p>
+            <a:pPr algn="ctr"/>
+          </a:p>
+        </p:txBody>
+      </p:sp>
+      <p:sp>
+        <p:nvSpPr>
+          <p:cNvPr id="18" name="TextBox 17"/>
+          <p:cNvSpPr txBox="1"/>
+          <p:nvPr/>
+        </p:nvSpPr>
+        <p:spPr>
+          <a:xfrm>
+            <a:off x="822960" y="4937760"/>
+            <a:ext cx="640080" cy="548640"/>
+          </a:xfrm>
+          <a:prstGeom prst="rect">
+            <a:avLst/>
+          </a:prstGeom>
+          <a:noFill/>
+        </p:spPr>
+        <p:txBody>
+          <a:bodyPr wrap="square">
+            <a:spAutoFit/>
+          </a:bodyPr>
+          <a:lstStyle/>
+          <a:p>
+            <a:pPr algn="ctr"/>
+            <a:r>
+              <a:rPr sz="2200" b="1" i="0">
+                <a:solidFill>
+                  <a:srgbClr val="FFFFFF"/>
+                </a:solidFill>
+                <a:latin typeface="Montserrat"/>
+              </a:rPr>
+              <a:t>C</a:t>
+            </a:r>
+          </a:p>
+        </p:txBody>
+      </p:sp>
+      <p:sp>
+        <p:nvSpPr>
+          <p:cNvPr id="19" name="TextBox 18"/>
+          <p:cNvSpPr txBox="1"/>
+          <p:nvPr/>
+        </p:nvSpPr>
+        <p:spPr>
+          <a:xfrm>
+            <a:off x="1600200" y="4800600"/>
+            <a:ext cx="4114800" cy="868680"/>
+          </a:xfrm>
+          <a:prstGeom prst="rect">
+            <a:avLst/>
+          </a:prstGeom>
+          <a:noFill/>
+        </p:spPr>
+        <p:txBody>
+          <a:bodyPr wrap="square">
+            <a:spAutoFit/>
+          </a:bodyPr>
+          <a:lstStyle/>
+          <a:p>
+            <a:r>
+              <a:rPr sz="1400" b="0" i="0">
+                <a:solidFill>
+                  <a:srgbClr val="1B2330"/>
+                </a:solidFill>
+                <a:latin typeface="Montserrat"/>
+              </a:rPr>
+              <a:t>2.000 kW</a:t>
+            </a:r>
+          </a:p>
+        </p:txBody>
+      </p:sp>
+      <p:sp>
+        <p:nvSpPr>
+          <p:cNvPr id="20" name="Rounded Rectangle 19"/>
+          <p:cNvSpPr/>
+          <p:nvPr/>
+        </p:nvSpPr>
+        <p:spPr>
+          <a:xfrm>
+            <a:off x="6355080" y="4617720"/>
+            <a:ext cx="4983480" cy="1143000"/>
+          </a:xfrm>
+          <a:prstGeom prst="roundRect">
+            <a:avLst/>
+          </a:prstGeom>
+          <a:solidFill>
+            <a:srgbClr val="F3F6FB"/>
+          </a:solidFill>
+          <a:ln w="12700">
+            <a:solidFill>
+              <a:srgbClr val="C7D2E6"/>
+            </a:solidFill>
+          </a:ln>
+          <a:effectLst/>
+        </p:spPr>
+        <p:style>
+          <a:lnRef idx="1">
+            <a:schemeClr val="accent1"/>
+          </a:lnRef>
+          <a:fillRef idx="3">
+            <a:schemeClr val="accent1"/>
+          </a:fillRef>
+          <a:effectRef idx="2">
+            <a:schemeClr val="accent1"/>
+          </a:effectRef>
+          <a:fontRef idx="minor">
+            <a:schemeClr val="lt1"/>
+          </a:fontRef>
+        </p:style>
+        <p:txBody>
+          <a:bodyPr rtlCol="0" anchor="ctr"/>
+          <a:lstStyle/>
+          <a:p>
+            <a:pPr algn="ctr"/>
+          </a:p>
+        </p:txBody>
+      </p:sp>
+      <p:sp>
+        <p:nvSpPr>
+          <p:cNvPr id="21" name="Rectangle 20"/>
+          <p:cNvSpPr/>
+          <p:nvPr/>
+        </p:nvSpPr>
+        <p:spPr>
+          <a:xfrm>
+            <a:off x="6355080" y="4617720"/>
+            <a:ext cx="640080" cy="1143000"/>
+          </a:xfrm>
+          <a:prstGeom prst="rect">
+            <a:avLst/>
+          </a:prstGeom>
+          <a:solidFill>
+            <a:srgbClr val="1E2761"/>
+          </a:solidFill>
+          <a:ln>
+            <a:noFill/>
+          </a:ln>
+          <a:effectLst/>
+        </p:spPr>
+        <p:style>
+          <a:lnRef idx="1">
+            <a:schemeClr val="accent1"/>
+          </a:lnRef>
+          <a:fillRef idx="3">
+            <a:schemeClr val="accent1"/>
+          </a:fillRef>
+          <a:effectRef idx="2">
+            <a:schemeClr val="accent1"/>
+          </a:effectRef>
+          <a:fontRef idx="minor">
+            <a:schemeClr val="lt1"/>
+          </a:fontRef>
+        </p:style>
+        <p:txBody>
+          <a:bodyPr rtlCol="0" anchor="ctr"/>
+          <a:lstStyle/>
+          <a:p>
+            <a:pPr algn="ctr"/>
+          </a:p>
+        </p:txBody>
+      </p:sp>
+      <p:sp>
+        <p:nvSpPr>
+          <p:cNvPr id="22" name="TextBox 21"/>
+          <p:cNvSpPr txBox="1"/>
+          <p:nvPr/>
+        </p:nvSpPr>
+        <p:spPr>
+          <a:xfrm>
+            <a:off x="6355080" y="4937760"/>
+            <a:ext cx="640080" cy="548640"/>
+          </a:xfrm>
+          <a:prstGeom prst="rect">
+            <a:avLst/>
+          </a:prstGeom>
+          <a:noFill/>
+        </p:spPr>
+        <p:txBody>
+          <a:bodyPr wrap="square">
+            <a:spAutoFit/>
+          </a:bodyPr>
+          <a:lstStyle/>
+          <a:p>
+            <a:pPr algn="ctr"/>
+            <a:r>
+              <a:rPr sz="2200" b="1" i="0">
+                <a:solidFill>
+                  <a:srgbClr val="FFFFFF"/>
+                </a:solidFill>
+                <a:latin typeface="Montserrat"/>
+              </a:rPr>
+              <a:t>D</a:t>
+            </a:r>
+          </a:p>
+        </p:txBody>
+      </p:sp>
+      <p:sp>
+        <p:nvSpPr>
+          <p:cNvPr id="23" name="TextBox 22"/>
+          <p:cNvSpPr txBox="1"/>
+          <p:nvPr/>
+        </p:nvSpPr>
+        <p:spPr>
+          <a:xfrm>
+            <a:off x="7132320" y="4800600"/>
+            <a:ext cx="4114800" cy="868680"/>
+          </a:xfrm>
+          <a:prstGeom prst="rect">
+            <a:avLst/>
+          </a:prstGeom>
+          <a:noFill/>
+        </p:spPr>
+        <p:txBody>
+          <a:bodyPr wrap="square">
+            <a:spAutoFit/>
+          </a:bodyPr>
+          <a:lstStyle/>
+          <a:p>
+            <a:r>
+              <a:rPr sz="1400" b="0" i="0">
+                <a:solidFill>
+                  <a:srgbClr val="1B2330"/>
+                </a:solidFill>
+                <a:latin typeface="Montserrat"/>
+              </a:rPr>
+              <a:t>5 kW</a:t>
             </a:r>
           </a:p>
         </p:txBody>
@@ -5370,6 +6435,18 @@
   <p:clrMapOvr>
     <a:masterClrMapping/>
   </p:clrMapOvr>
+  <mc:AlternateContent xmlns:mc="http://schemas.openxmlformats.org/markup-compatibility/2006">
+    <mc:Choice xmlns:p14="http://schemas.microsoft.com/office/powerpoint/2010/main" Requires="p14">
+      <p:transition spd="med" p14:dur="700">
+        <p14:cube dir="r"/>
+      </p:transition>
+    </mc:Choice>
+    <mc:Fallback>
+      <p:transition spd="med">
+        <p:push dir="r"/>
+      </p:transition>
+    </mc:Fallback>
+  </mc:AlternateContent>
 </p:sld>
 </file>
 
@@ -5457,7 +6534,7 @@
                 </a:solidFill>
                 <a:latin typeface="Montserrat"/>
               </a:rPr>
-              <a:t>011 / 017</a:t>
+              <a:t>011 / 025</a:t>
             </a:r>
           </a:p>
         </p:txBody>
@@ -5498,88 +6575,20 @@
       </p:sp>
       <p:sp>
         <p:nvSpPr>
-          <p:cNvPr id="5" name="TextBox 4"/>
-          <p:cNvSpPr txBox="1"/>
-          <p:nvPr/>
-        </p:nvSpPr>
-        <p:spPr>
-          <a:xfrm>
-            <a:off x="822960" y="457200"/>
-            <a:ext cx="10058400" cy="365760"/>
-          </a:xfrm>
-          <a:prstGeom prst="rect">
-            <a:avLst/>
-          </a:prstGeom>
-          <a:noFill/>
-        </p:spPr>
-        <p:txBody>
-          <a:bodyPr wrap="square">
-            <a:spAutoFit/>
-          </a:bodyPr>
-          <a:lstStyle/>
-          <a:p>
-            <a:r>
-              <a:rPr sz="1300" b="1" i="0">
-                <a:solidFill>
-                  <a:srgbClr val="E8801A"/>
-                </a:solidFill>
-                <a:latin typeface="Montserrat"/>
-              </a:rPr>
-              <a:t>APARTADO 2 · PATIOS DE VENTILACIÓN</a:t>
-            </a:r>
-          </a:p>
-        </p:txBody>
-      </p:sp>
-      <p:sp>
-        <p:nvSpPr>
-          <p:cNvPr id="6" name="TextBox 5"/>
-          <p:cNvSpPr txBox="1"/>
-          <p:nvPr/>
-        </p:nvSpPr>
-        <p:spPr>
-          <a:xfrm>
-            <a:off x="822960" y="868680"/>
-            <a:ext cx="10515600" cy="914400"/>
-          </a:xfrm>
-          <a:prstGeom prst="rect">
-            <a:avLst/>
-          </a:prstGeom>
-          <a:noFill/>
-        </p:spPr>
-        <p:txBody>
-          <a:bodyPr wrap="square">
-            <a:spAutoFit/>
-          </a:bodyPr>
-          <a:lstStyle/>
-          <a:p>
-            <a:r>
-              <a:rPr sz="2800" b="1" i="0">
-                <a:solidFill>
-                  <a:srgbClr val="1E2761"/>
-                </a:solidFill>
-                <a:latin typeface="Montserrat"/>
-              </a:rPr>
-              <a:t>Patios para aparatos conducidos</a:t>
-            </a:r>
-          </a:p>
-        </p:txBody>
-      </p:sp>
-      <p:sp>
-        <p:nvSpPr>
-          <p:cNvPr id="7" name="Rounded Rectangle 6"/>
+          <p:cNvPr id="5" name="Rectangle 4"/>
           <p:cNvSpPr/>
           <p:nvPr/>
         </p:nvSpPr>
         <p:spPr>
           <a:xfrm>
-            <a:off x="868680" y="1627632"/>
-            <a:ext cx="2011680" cy="73152"/>
-          </a:xfrm>
-          <a:prstGeom prst="roundRect">
+            <a:off x="0" y="0"/>
+            <a:ext cx="12191695" cy="1143000"/>
+          </a:xfrm>
+          <a:prstGeom prst="rect">
             <a:avLst/>
           </a:prstGeom>
           <a:solidFill>
-            <a:srgbClr val="E8801A"/>
+            <a:srgbClr val="1E8E4B"/>
           </a:solidFill>
           <a:ln>
             <a:noFill/>
@@ -5610,14 +6619,14 @@
       </p:sp>
       <p:sp>
         <p:nvSpPr>
-          <p:cNvPr id="8" name="TextBox 7"/>
+          <p:cNvPr id="6" name="TextBox 5"/>
           <p:cNvSpPr txBox="1"/>
           <p:nvPr/>
         </p:nvSpPr>
         <p:spPr>
           <a:xfrm>
-            <a:off x="822960" y="1965960"/>
-            <a:ext cx="4983480" cy="4206240"/>
+            <a:off x="822960" y="274320"/>
+            <a:ext cx="10515600" cy="640080"/>
           </a:xfrm>
           <a:prstGeom prst="rect">
             <a:avLst/>
@@ -5630,102 +6639,72 @@
           </a:bodyPr>
           <a:lstStyle/>
           <a:p>
-            <a:pPr>
-              <a:spcAft>
-                <a:spcPts val="1100"/>
-              </a:spcAft>
-            </a:pPr>
-            <a:r>
-              <a:rPr sz="1600" b="1" i="0">
-                <a:solidFill>
-                  <a:srgbClr val="E8801A"/>
-                </a:solidFill>
-                <a:latin typeface="Montserrat"/>
-              </a:rPr>
-              <a:t>▸  </a:t>
-            </a:r>
-            <a:r>
-              <a:rPr sz="1600" b="0" i="0">
-                <a:solidFill>
-                  <a:srgbClr val="1B2330"/>
-                </a:solidFill>
-                <a:latin typeface="Montserrat"/>
-              </a:rPr>
-              <a:t>Edificio existente: 0,5 × NT (mín. 4 m²)</a:t>
-            </a:r>
-          </a:p>
-          <a:p>
-            <a:pPr>
-              <a:spcAft>
-                <a:spcPts val="1100"/>
-              </a:spcAft>
-            </a:pPr>
-            <a:r>
-              <a:rPr sz="1600" b="1" i="0">
-                <a:solidFill>
-                  <a:srgbClr val="E8801A"/>
-                </a:solidFill>
-                <a:latin typeface="Montserrat"/>
-              </a:rPr>
-              <a:t>▸  </a:t>
-            </a:r>
-            <a:r>
-              <a:rPr sz="1600" b="0" i="0">
-                <a:solidFill>
-                  <a:srgbClr val="1B2330"/>
-                </a:solidFill>
-                <a:latin typeface="Montserrat"/>
-              </a:rPr>
-              <a:t>Obra nueva: 1 × NT (más de 6 m²)</a:t>
-            </a:r>
-          </a:p>
-          <a:p>
-            <a:pPr>
-              <a:spcAft>
-                <a:spcPts val="1100"/>
-              </a:spcAft>
-            </a:pPr>
-            <a:r>
-              <a:rPr sz="1600" b="1" i="0">
-                <a:solidFill>
-                  <a:srgbClr val="E8801A"/>
-                </a:solidFill>
-                <a:latin typeface="Montserrat"/>
-              </a:rPr>
-              <a:t>▸  </a:t>
-            </a:r>
-            <a:r>
-              <a:rPr sz="1600" b="0" i="0">
-                <a:solidFill>
-                  <a:srgbClr val="1B2330"/>
-                </a:solidFill>
-                <a:latin typeface="Montserrat"/>
-              </a:rPr>
-              <a:t>NT = locales que tiran al patio</a:t>
-            </a:r>
-          </a:p>
-        </p:txBody>
-      </p:sp>
-      <p:sp>
-        <p:nvSpPr>
-          <p:cNvPr id="9" name="imgph" descr="IMGQ:interior ventilation courtyard of apartment building"/>
+            <a:r>
+              <a:rPr sz="2400" b="1" i="0">
+                <a:solidFill>
+                  <a:srgbClr val="FFFFFF"/>
+                </a:solidFill>
+                <a:latin typeface="Montserrat"/>
+              </a:rPr>
+              <a:t>✔  RESPUESTA:  B</a:t>
+            </a:r>
+          </a:p>
+        </p:txBody>
+      </p:sp>
+      <p:sp>
+        <p:nvSpPr>
+          <p:cNvPr id="7" name="TextBox 6"/>
+          <p:cNvSpPr txBox="1"/>
+          <p:nvPr/>
+        </p:nvSpPr>
+        <p:spPr>
+          <a:xfrm>
+            <a:off x="822960" y="1417320"/>
+            <a:ext cx="10515600" cy="914400"/>
+          </a:xfrm>
+          <a:prstGeom prst="rect">
+            <a:avLst/>
+          </a:prstGeom>
+          <a:noFill/>
+        </p:spPr>
+        <p:txBody>
+          <a:bodyPr wrap="square">
+            <a:spAutoFit/>
+          </a:bodyPr>
+          <a:lstStyle/>
+          <a:p>
+            <a:r>
+              <a:rPr sz="1800" b="1" i="0">
+                <a:solidFill>
+                  <a:srgbClr val="64748B"/>
+                </a:solidFill>
+                <a:latin typeface="Montserrat"/>
+              </a:rPr>
+              <a:t>¿Hasta qué potencia puede un aparato estanco o de tiro forzado evacuar los humos a fachada?</a:t>
+            </a:r>
+          </a:p>
+        </p:txBody>
+      </p:sp>
+      <p:sp>
+        <p:nvSpPr>
+          <p:cNvPr id="8" name="Rounded Rectangle 7"/>
           <p:cNvSpPr/>
           <p:nvPr/>
         </p:nvSpPr>
         <p:spPr>
           <a:xfrm>
-            <a:off x="5806440" y="1051560"/>
-            <a:ext cx="5298947" cy="4629150"/>
+            <a:off x="822960" y="2514600"/>
+            <a:ext cx="10515600" cy="914400"/>
           </a:xfrm>
           <a:prstGeom prst="roundRect">
             <a:avLst/>
           </a:prstGeom>
           <a:solidFill>
-            <a:srgbClr val="F3F6FB"/>
+            <a:srgbClr val="E9F6EE"/>
           </a:solidFill>
           <a:ln w="12700">
             <a:solidFill>
-              <a:srgbClr val="C7D2E6"/>
+              <a:srgbClr val="1E8E4B"/>
             </a:solidFill>
           </a:ln>
           <a:effectLst/>
@@ -5754,14 +6733,14 @@
       </p:sp>
       <p:sp>
         <p:nvSpPr>
-          <p:cNvPr id="10" name="TextBox 9"/>
+          <p:cNvPr id="9" name="TextBox 8"/>
           <p:cNvSpPr txBox="1"/>
           <p:nvPr/>
         </p:nvSpPr>
         <p:spPr>
           <a:xfrm>
-            <a:off x="6080760" y="2726055"/>
-            <a:ext cx="4750307" cy="1280160"/>
+            <a:off x="1097280" y="2697480"/>
+            <a:ext cx="10058400" cy="640080"/>
           </a:xfrm>
           <a:prstGeom prst="rect">
             <a:avLst/>
@@ -5774,27 +6753,66 @@
           </a:bodyPr>
           <a:lstStyle/>
           <a:p>
-            <a:pPr algn="ctr"/>
-            <a:r>
-              <a:rPr sz="1400" b="1" i="0">
-                <a:solidFill>
-                  <a:srgbClr val="64748B"/>
-                </a:solidFill>
-                <a:latin typeface="Montserrat"/>
-              </a:rPr>
-              <a:t>IMAGEN REALISTA</a:t>
-            </a:r>
-          </a:p>
-          <a:p>
-            <a:pPr algn="ctr"/>
-            <a:r>
-              <a:rPr sz="1100" b="0" i="1">
-                <a:solidFill>
-                  <a:srgbClr val="64748B"/>
-                </a:solidFill>
-                <a:latin typeface="Montserrat"/>
-              </a:rPr>
-              <a:t>interior ventilation courtyard of apartment building</a:t>
+            <a:r>
+              <a:rPr sz="1800" b="1" i="0">
+                <a:solidFill>
+                  <a:srgbClr val="1E8E4B"/>
+                </a:solidFill>
+                <a:latin typeface="Montserrat"/>
+              </a:rPr>
+              <a:t>B.  </a:t>
+            </a:r>
+            <a:r>
+              <a:rPr sz="1800" b="1" i="0">
+                <a:solidFill>
+                  <a:srgbClr val="1E2761"/>
+                </a:solidFill>
+                <a:latin typeface="Montserrat"/>
+              </a:rPr>
+              <a:t>70 kW</a:t>
+            </a:r>
+          </a:p>
+        </p:txBody>
+      </p:sp>
+      <p:sp>
+        <p:nvSpPr>
+          <p:cNvPr id="10" name="TextBox 9"/>
+          <p:cNvSpPr txBox="1"/>
+          <p:nvPr/>
+        </p:nvSpPr>
+        <p:spPr>
+          <a:xfrm>
+            <a:off x="822960" y="3749039"/>
+            <a:ext cx="10515600" cy="2194560"/>
+          </a:xfrm>
+          <a:prstGeom prst="rect">
+            <a:avLst/>
+          </a:prstGeom>
+          <a:noFill/>
+        </p:spPr>
+        <p:txBody>
+          <a:bodyPr wrap="square">
+            <a:spAutoFit/>
+          </a:bodyPr>
+          <a:lstStyle/>
+          <a:p>
+            <a:r>
+              <a:rPr sz="1500" b="1" i="0">
+                <a:solidFill>
+                  <a:srgbClr val="E8801A"/>
+                </a:solidFill>
+                <a:latin typeface="Montserrat"/>
+              </a:rPr>
+              <a:t>Por qué:  </a:t>
+            </a:r>
+            <a:r>
+              <a:rPr sz="1500" b="0" i="0">
+                <a:solidFill>
+                  <a:srgbClr val="1B2330"/>
+                </a:solidFill>
+                <a:latin typeface="Montserrat"/>
+              </a:rPr>
+              <a:t>Los estancos y de tiro forzado, más seguros, pueden salir a fachada hasta setenta kilovatios; el tiro natural de solo agua caliente se queda en veinticuatro con cuatro.</a:t>
             </a:r>
           </a:p>
         </p:txBody>
@@ -5804,6 +6822,18 @@
   <p:clrMapOvr>
     <a:masterClrMapping/>
   </p:clrMapOvr>
+  <mc:AlternateContent xmlns:mc="http://schemas.openxmlformats.org/markup-compatibility/2006">
+    <mc:Choice xmlns:p14="http://schemas.microsoft.com/office/powerpoint/2010/main" Requires="p14">
+      <p:transition spd="med" p14:dur="700">
+        <p14:cube dir="l"/>
+      </p:transition>
+    </mc:Choice>
+    <mc:Fallback>
+      <p:transition spd="med">
+        <p:push dir="l"/>
+      </p:transition>
+    </mc:Fallback>
+  </mc:AlternateContent>
 </p:sld>
 </file>
 
@@ -5891,7 +6921,7 @@
                 </a:solidFill>
                 <a:latin typeface="Montserrat"/>
               </a:rPr>
-              <a:t>012 / 017</a:t>
+              <a:t>012 / 025</a:t>
             </a:r>
           </a:p>
         </p:txBody>
@@ -5959,7 +6989,7 @@
                 </a:solidFill>
                 <a:latin typeface="Montserrat"/>
               </a:rPr>
-              <a:t>APARTADO 2 · PATIOS DE VENTILACIÓN</a:t>
+              <a:t>APARTADO 2 · TIPOS DE APARATO</a:t>
             </a:r>
           </a:p>
         </p:txBody>
@@ -5993,14 +7023,14 @@
                 </a:solidFill>
                 <a:latin typeface="Montserrat"/>
               </a:rPr>
-              <a:t>Si el patio está techado</a:t>
-            </a:r>
-          </a:p>
-        </p:txBody>
-      </p:sp>
-      <p:sp>
-        <p:nvSpPr>
-          <p:cNvPr id="7" name="Rounded Rectangle 6"/>
+              <a:t>Estanco, tiro forzado, tiro natural</a:t>
+            </a:r>
+          </a:p>
+        </p:txBody>
+      </p:sp>
+      <p:sp>
+        <p:nvSpPr>
+          <p:cNvPr id="7" name="Rectangle 6"/>
           <p:cNvSpPr/>
           <p:nvPr/>
         </p:nvSpPr>
@@ -6009,7 +7039,7 @@
             <a:off x="868680" y="1627632"/>
             <a:ext cx="2011680" cy="73152"/>
           </a:xfrm>
-          <a:prstGeom prst="roundRect">
+          <a:prstGeom prst="rect">
             <a:avLst/>
           </a:prstGeom>
           <a:solidFill>
@@ -6051,7 +7081,7 @@
         <p:spPr>
           <a:xfrm>
             <a:off x="822960" y="1965960"/>
-            <a:ext cx="4983480" cy="4206240"/>
+            <a:ext cx="5029200" cy="4206240"/>
           </a:xfrm>
           <a:prstGeom prst="rect">
             <a:avLst/>
@@ -6085,7 +7115,7 @@
                 </a:solidFill>
                 <a:latin typeface="Montserrat"/>
               </a:rPr>
-              <a:t>Abertura permanente al exterior</a:t>
+              <a:t>Estanco: aire de fuera, humos fuera</a:t>
             </a:r>
           </a:p>
           <a:p>
@@ -6110,7 +7140,7 @@
                 </a:solidFill>
                 <a:latin typeface="Montserrat"/>
               </a:rPr>
-              <a:t>25 % de la sección en planta</a:t>
+              <a:t>Tiro forzado: un ventilador empuja</a:t>
             </a:r>
           </a:p>
           <a:p>
@@ -6135,21 +7165,21 @@
                 </a:solidFill>
                 <a:latin typeface="Montserrat"/>
               </a:rPr>
-              <a:t>Mínimo 4 m²</a:t>
-            </a:r>
-          </a:p>
-        </p:txBody>
-      </p:sp>
-      <p:sp>
-        <p:nvSpPr>
-          <p:cNvPr id="9" name="imgph" descr="IMGQ:covered courtyard with open ventilation grille at top"/>
+              <a:t>Tiro natural: suben solos por calor</a:t>
+            </a:r>
+          </a:p>
+        </p:txBody>
+      </p:sp>
+      <p:sp>
+        <p:nvSpPr>
+          <p:cNvPr id="9" name="imgph" descr="IMGQ:sealed combustion gas boiler with concentric flue"/>
           <p:cNvSpPr/>
           <p:nvPr/>
         </p:nvSpPr>
         <p:spPr>
           <a:xfrm>
-            <a:off x="5806440" y="1051560"/>
-            <a:ext cx="5298947" cy="4629150"/>
+            <a:off x="6080760" y="1965960"/>
+            <a:ext cx="5303520" cy="4572000"/>
           </a:xfrm>
           <a:prstGeom prst="roundRect">
             <a:avLst/>
@@ -6194,8 +7224,8 @@
         </p:nvSpPr>
         <p:spPr>
           <a:xfrm>
-            <a:off x="6080760" y="2726055"/>
-            <a:ext cx="4750307" cy="1280160"/>
+            <a:off x="6355080" y="3611880"/>
+            <a:ext cx="4754880" cy="1280160"/>
           </a:xfrm>
           <a:prstGeom prst="rect">
             <a:avLst/>
@@ -6216,7 +7246,7 @@
                 </a:solidFill>
                 <a:latin typeface="Montserrat"/>
               </a:rPr>
-              <a:t>IMAGEN REALISTA</a:t>
+              <a:t>IMAGEN</a:t>
             </a:r>
           </a:p>
           <a:p>
@@ -6228,7 +7258,7 @@
                 </a:solidFill>
                 <a:latin typeface="Montserrat"/>
               </a:rPr>
-              <a:t>covered courtyard with open ventilation grille at top</a:t>
+              <a:t>sealed combustion gas boiler with concentric flue</a:t>
             </a:r>
           </a:p>
         </p:txBody>
@@ -6238,6 +7268,18 @@
   <p:clrMapOvr>
     <a:masterClrMapping/>
   </p:clrMapOvr>
+  <mc:AlternateContent xmlns:mc="http://schemas.openxmlformats.org/markup-compatibility/2006">
+    <mc:Choice xmlns:p14="http://schemas.microsoft.com/office/powerpoint/2010/main" Requires="p14">
+      <p:transition spd="med" p14:dur="700">
+        <p14:cube dir="r"/>
+      </p:transition>
+    </mc:Choice>
+    <mc:Fallback>
+      <p:transition spd="med">
+        <p:push dir="r"/>
+      </p:transition>
+    </mc:Fallback>
+  </mc:AlternateContent>
 </p:sld>
 </file>
 
@@ -6325,7 +7367,7 @@
                 </a:solidFill>
                 <a:latin typeface="Montserrat"/>
               </a:rPr>
-              <a:t>013 / 017</a:t>
+              <a:t>013 / 025</a:t>
             </a:r>
           </a:p>
         </p:txBody>
@@ -6393,7 +7435,7 @@
                 </a:solidFill>
                 <a:latin typeface="Montserrat"/>
               </a:rPr>
-              <a:t>APARTADO 2 · GRANDES POTENCIAS</a:t>
+              <a:t>APARTADO 2 · PATIOS DE VENTILACIÓN</a:t>
             </a:r>
           </a:p>
         </p:txBody>
@@ -6427,14 +7469,14 @@
                 </a:solidFill>
                 <a:latin typeface="Montserrat"/>
               </a:rPr>
-              <a:t>Más de 70 kW: sala de máquinas</a:t>
-            </a:r>
-          </a:p>
-        </p:txBody>
-      </p:sp>
-      <p:sp>
-        <p:nvSpPr>
-          <p:cNvPr id="7" name="Rounded Rectangle 6"/>
+              <a:t>Patios para aparatos conducidos</a:t>
+            </a:r>
+          </a:p>
+        </p:txBody>
+      </p:sp>
+      <p:sp>
+        <p:nvSpPr>
+          <p:cNvPr id="7" name="Rectangle 6"/>
           <p:cNvSpPr/>
           <p:nvPr/>
         </p:nvSpPr>
@@ -6443,7 +7485,7 @@
             <a:off x="868680" y="1627632"/>
             <a:ext cx="2011680" cy="73152"/>
           </a:xfrm>
-          <a:prstGeom prst="roundRect">
+          <a:prstGeom prst="rect">
             <a:avLst/>
           </a:prstGeom>
           <a:solidFill>
@@ -6484,8 +7526,8 @@
         </p:nvSpPr>
         <p:spPr>
           <a:xfrm>
-            <a:off x="822960" y="1965960"/>
-            <a:ext cx="4983480" cy="4206240"/>
+            <a:off x="6355080" y="1965960"/>
+            <a:ext cx="5029200" cy="4206240"/>
           </a:xfrm>
           <a:prstGeom prst="rect">
             <a:avLst/>
@@ -6519,7 +7561,7 @@
                 </a:solidFill>
                 <a:latin typeface="Montserrat"/>
               </a:rPr>
-              <a:t>Calderas &gt; 70 kW → UNE 60601</a:t>
+              <a:t>Edificio existente: 0,5 × NT (mín. 4 m²)</a:t>
             </a:r>
           </a:p>
           <a:p>
@@ -6544,7 +7586,7 @@
                 </a:solidFill>
                 <a:latin typeface="Montserrat"/>
               </a:rPr>
-              <a:t>También absorción y cogeneración</a:t>
+              <a:t>Obra nueva: 1 × NT (más de 6 m²)</a:t>
             </a:r>
           </a:p>
           <a:p>
@@ -6569,21 +7611,21 @@
                 </a:solidFill>
                 <a:latin typeface="Montserrat"/>
               </a:rPr>
-              <a:t>Potencia conjunta: se suma</a:t>
-            </a:r>
-          </a:p>
-        </p:txBody>
-      </p:sp>
-      <p:sp>
-        <p:nvSpPr>
-          <p:cNvPr id="9" name="imgph" descr="IMGQ:industrial gas boiler room"/>
+              <a:t>NT = locales que tiran al patio</a:t>
+            </a:r>
+          </a:p>
+        </p:txBody>
+      </p:sp>
+      <p:sp>
+        <p:nvSpPr>
+          <p:cNvPr id="9" name="imgph" descr="IMGQ:interior ventilation courtyard of apartment building"/>
           <p:cNvSpPr/>
           <p:nvPr/>
         </p:nvSpPr>
         <p:spPr>
           <a:xfrm>
-            <a:off x="5806440" y="1051560"/>
-            <a:ext cx="5298947" cy="4629150"/>
+            <a:off x="822960" y="1965960"/>
+            <a:ext cx="5303520" cy="4572000"/>
           </a:xfrm>
           <a:prstGeom prst="roundRect">
             <a:avLst/>
@@ -6628,8 +7670,8 @@
         </p:nvSpPr>
         <p:spPr>
           <a:xfrm>
-            <a:off x="6080760" y="2726055"/>
-            <a:ext cx="4750307" cy="1280160"/>
+            <a:off x="1097280" y="3611880"/>
+            <a:ext cx="4754880" cy="1280160"/>
           </a:xfrm>
           <a:prstGeom prst="rect">
             <a:avLst/>
@@ -6650,7 +7692,7 @@
                 </a:solidFill>
                 <a:latin typeface="Montserrat"/>
               </a:rPr>
-              <a:t>IMAGEN REALISTA</a:t>
+              <a:t>IMAGEN</a:t>
             </a:r>
           </a:p>
           <a:p>
@@ -6662,7 +7704,7 @@
                 </a:solidFill>
                 <a:latin typeface="Montserrat"/>
               </a:rPr>
-              <a:t>industrial gas boiler room</a:t>
+              <a:t>interior ventilation courtyard of apartment building</a:t>
             </a:r>
           </a:p>
         </p:txBody>
@@ -6672,6 +7714,18 @@
   <p:clrMapOvr>
     <a:masterClrMapping/>
   </p:clrMapOvr>
+  <mc:AlternateContent xmlns:mc="http://schemas.openxmlformats.org/markup-compatibility/2006">
+    <mc:Choice xmlns:p14="http://schemas.microsoft.com/office/powerpoint/2010/main" Requires="p14">
+      <p:transition spd="med" p14:dur="700">
+        <p14:cube dir="l"/>
+      </p:transition>
+    </mc:Choice>
+    <mc:Fallback>
+      <p:transition spd="med">
+        <p:push dir="l"/>
+      </p:transition>
+    </mc:Fallback>
+  </mc:AlternateContent>
 </p:sld>
 </file>
 
@@ -6759,7 +7813,7 @@
                 </a:solidFill>
                 <a:latin typeface="Montserrat"/>
               </a:rPr>
-              <a:t>014 / 017</a:t>
+              <a:t>014 / 025</a:t>
             </a:r>
           </a:p>
         </p:txBody>
@@ -6806,7 +7860,7 @@
         </p:nvSpPr>
         <p:spPr>
           <a:xfrm>
-            <a:off x="822960" y="457200"/>
+            <a:off x="822960" y="411480"/>
             <a:ext cx="10058400" cy="365760"/>
           </a:xfrm>
           <a:prstGeom prst="rect">
@@ -6827,7 +7881,7 @@
                 </a:solidFill>
                 <a:latin typeface="Montserrat"/>
               </a:rPr>
-              <a:t>APARTADO 2 · NORMA SEGÚN PRESIÓN</a:t>
+              <a:t>APARTADO 2 · PATIOS DE VENTILACIÓN</a:t>
             </a:r>
           </a:p>
         </p:txBody>
@@ -6840,8 +7894,8 @@
         </p:nvSpPr>
         <p:spPr>
           <a:xfrm>
-            <a:off x="822960" y="868680"/>
-            <a:ext cx="10515600" cy="914400"/>
+            <a:off x="822960" y="777240"/>
+            <a:ext cx="10515600" cy="822960"/>
           </a:xfrm>
           <a:prstGeom prst="rect">
             <a:avLst/>
@@ -6855,29 +7909,29 @@
           <a:lstStyle/>
           <a:p>
             <a:r>
-              <a:rPr sz="2800" b="1" i="0">
+              <a:rPr sz="2600" b="1" i="0">
                 <a:solidFill>
                   <a:srgbClr val="1E2761"/>
                 </a:solidFill>
                 <a:latin typeface="Montserrat"/>
               </a:rPr>
-              <a:t>La frontera de los 5 bar</a:t>
-            </a:r>
-          </a:p>
-        </p:txBody>
-      </p:sp>
-      <p:sp>
-        <p:nvSpPr>
-          <p:cNvPr id="7" name="Rounded Rectangle 6"/>
+              <a:t>Superficie mínima del patio de ventilación</a:t>
+            </a:r>
+          </a:p>
+        </p:txBody>
+      </p:sp>
+      <p:sp>
+        <p:nvSpPr>
+          <p:cNvPr id="7" name="Rectangle 6"/>
           <p:cNvSpPr/>
           <p:nvPr/>
         </p:nvSpPr>
         <p:spPr>
           <a:xfrm>
-            <a:off x="868680" y="1627632"/>
+            <a:off x="868680" y="1481328"/>
             <a:ext cx="2011680" cy="73152"/>
           </a:xfrm>
-          <a:prstGeom prst="roundRect">
+          <a:prstGeom prst="rect">
             <a:avLst/>
           </a:prstGeom>
           <a:solidFill>
@@ -6910,114 +7964,247 @@
           </a:p>
         </p:txBody>
       </p:sp>
-      <p:sp>
-        <p:nvSpPr>
-          <p:cNvPr id="8" name="TextBox 7"/>
-          <p:cNvSpPr txBox="1"/>
-          <p:nvPr/>
-        </p:nvSpPr>
-        <p:spPr>
-          <a:xfrm>
-            <a:off x="822960" y="1965960"/>
-            <a:ext cx="4983480" cy="4206240"/>
-          </a:xfrm>
-          <a:prstGeom prst="rect">
-            <a:avLst/>
-          </a:prstGeom>
-          <a:noFill/>
-        </p:spPr>
-        <p:txBody>
-          <a:bodyPr wrap="square">
-            <a:spAutoFit/>
-          </a:bodyPr>
-          <a:lstStyle/>
-          <a:p>
-            <a:pPr>
-              <a:spcAft>
-                <a:spcPts val="1100"/>
-              </a:spcAft>
-            </a:pPr>
-            <a:r>
-              <a:rPr sz="1600" b="1" i="0">
-                <a:solidFill>
-                  <a:srgbClr val="E8801A"/>
-                </a:solidFill>
-                <a:latin typeface="Montserrat"/>
-              </a:rPr>
-              <a:t>▸  </a:t>
-            </a:r>
-            <a:r>
-              <a:rPr sz="1600" b="0" i="0">
-                <a:solidFill>
-                  <a:srgbClr val="1B2330"/>
-                </a:solidFill>
-                <a:latin typeface="Montserrat"/>
-              </a:rPr>
-              <a:t>Hasta 5 bar → UNE 60670</a:t>
-            </a:r>
-          </a:p>
-          <a:p>
-            <a:pPr>
-              <a:spcAft>
-                <a:spcPts val="1100"/>
-              </a:spcAft>
-            </a:pPr>
-            <a:r>
-              <a:rPr sz="1600" b="1" i="0">
-                <a:solidFill>
-                  <a:srgbClr val="E8801A"/>
-                </a:solidFill>
-                <a:latin typeface="Montserrat"/>
-              </a:rPr>
-              <a:t>▸  </a:t>
-            </a:r>
-            <a:r>
-              <a:rPr sz="1600" b="0" i="0">
-                <a:solidFill>
-                  <a:srgbClr val="1B2330"/>
-                </a:solidFill>
-                <a:latin typeface="Montserrat"/>
-              </a:rPr>
-              <a:t>Más de 5 bar → UNE 60620</a:t>
-            </a:r>
-          </a:p>
-          <a:p>
-            <a:pPr>
-              <a:spcAft>
-                <a:spcPts val="1100"/>
-              </a:spcAft>
-            </a:pPr>
-            <a:r>
-              <a:rPr sz="1600" b="1" i="0">
-                <a:solidFill>
-                  <a:srgbClr val="E8801A"/>
-                </a:solidFill>
-                <a:latin typeface="Montserrat"/>
-              </a:rPr>
-              <a:t>▸  </a:t>
-            </a:r>
-            <a:r>
-              <a:rPr sz="1600" b="0" i="0">
-                <a:solidFill>
-                  <a:srgbClr val="1B2330"/>
-                </a:solidFill>
-                <a:latin typeface="Montserrat"/>
-              </a:rPr>
-              <a:t>MOP: presión máxima de operación</a:t>
-            </a:r>
-          </a:p>
-        </p:txBody>
-      </p:sp>
-      <p:sp>
-        <p:nvSpPr>
-          <p:cNvPr id="9" name="imgph" descr="IMGQ:gas pressure regulator and gauge"/>
+      <p:graphicFrame>
+        <p:nvGraphicFramePr>
+          <p:cNvPr id="8" name="Table 7"/>
+          <p:cNvGraphicFramePr>
+            <a:graphicFrameLocks noGrp="1"/>
+          </p:cNvGraphicFramePr>
+          <p:nvPr/>
+        </p:nvGraphicFramePr>
+        <p:xfrm>
+          <a:off x="548640" y="1783080"/>
+          <a:ext cx="11091672" cy="4023360"/>
+        </p:xfrm>
+        <a:graphic>
+          <a:graphicData uri="http://schemas.openxmlformats.org/drawingml/2006/table">
+            <a:tbl>
+              <a:tblPr firstRow="1" bandRow="1">
+                <a:tableStyleId>{5C22544A-7EE6-4342-B048-85BDC9FD1C3A}</a:tableStyleId>
+              </a:tblPr>
+              <a:tblGrid>
+                <a:gridCol w="3697224"/>
+                <a:gridCol w="3697224"/>
+                <a:gridCol w="3697224"/>
+              </a:tblGrid>
+              <a:tr h="1341120">
+                <a:tc>
+                  <a:txBody>
+                    <a:bodyPr/>
+                    <a:lstStyle/>
+                    <a:p>
+                      <a:r>
+                        <a:rPr sz="1200" b="1" i="0">
+                          <a:solidFill>
+                            <a:srgbClr val="FFFFFF"/>
+                          </a:solidFill>
+                          <a:latin typeface="Montserrat"/>
+                        </a:rPr>
+                        <a:t>Situación</a:t>
+                      </a:r>
+                    </a:p>
+                  </a:txBody>
+                  <a:tcPr>
+                    <a:solidFill>
+                      <a:srgbClr val="1E2761"/>
+                    </a:solidFill>
+                  </a:tcPr>
+                </a:tc>
+                <a:tc>
+                  <a:txBody>
+                    <a:bodyPr/>
+                    <a:lstStyle/>
+                    <a:p>
+                      <a:r>
+                        <a:rPr sz="1200" b="1" i="0">
+                          <a:solidFill>
+                            <a:srgbClr val="FFFFFF"/>
+                          </a:solidFill>
+                          <a:latin typeface="Montserrat"/>
+                        </a:rPr>
+                        <a:t>Superficie mínima en planta</a:t>
+                      </a:r>
+                    </a:p>
+                  </a:txBody>
+                  <a:tcPr>
+                    <a:solidFill>
+                      <a:srgbClr val="1E2761"/>
+                    </a:solidFill>
+                  </a:tcPr>
+                </a:tc>
+                <a:tc>
+                  <a:txBody>
+                    <a:bodyPr/>
+                    <a:lstStyle/>
+                    <a:p>
+                      <a:r>
+                        <a:rPr sz="1200" b="1" i="0">
+                          <a:solidFill>
+                            <a:srgbClr val="FFFFFF"/>
+                          </a:solidFill>
+                          <a:latin typeface="Montserrat"/>
+                        </a:rPr>
+                        <a:t>Mínimo absoluto</a:t>
+                      </a:r>
+                    </a:p>
+                  </a:txBody>
+                  <a:tcPr>
+                    <a:solidFill>
+                      <a:srgbClr val="1E2761"/>
+                    </a:solidFill>
+                  </a:tcPr>
+                </a:tc>
+              </a:tr>
+              <a:tr h="1341120">
+                <a:tc>
+                  <a:txBody>
+                    <a:bodyPr/>
+                    <a:lstStyle/>
+                    <a:p>
+                      <a:r>
+                        <a:rPr sz="1200" b="0" i="0">
+                          <a:solidFill>
+                            <a:srgbClr val="1B2330"/>
+                          </a:solidFill>
+                          <a:latin typeface="Montserrat"/>
+                        </a:rPr>
+                        <a:t>Patio en edificio existente</a:t>
+                      </a:r>
+                    </a:p>
+                  </a:txBody>
+                  <a:tcPr>
+                    <a:solidFill>
+                      <a:srgbClr val="F6F8FC"/>
+                    </a:solidFill>
+                  </a:tcPr>
+                </a:tc>
+                <a:tc>
+                  <a:txBody>
+                    <a:bodyPr/>
+                    <a:lstStyle/>
+                    <a:p>
+                      <a:r>
+                        <a:rPr sz="1200" b="0" i="0">
+                          <a:solidFill>
+                            <a:srgbClr val="1B2330"/>
+                          </a:solidFill>
+                          <a:latin typeface="Montserrat"/>
+                        </a:rPr>
+                        <a:t>0,5 × NT</a:t>
+                      </a:r>
+                    </a:p>
+                  </a:txBody>
+                  <a:tcPr>
+                    <a:solidFill>
+                      <a:srgbClr val="F6F8FC"/>
+                    </a:solidFill>
+                  </a:tcPr>
+                </a:tc>
+                <a:tc>
+                  <a:txBody>
+                    <a:bodyPr/>
+                    <a:lstStyle/>
+                    <a:p>
+                      <a:r>
+                        <a:rPr sz="1200" b="0" i="0">
+                          <a:solidFill>
+                            <a:srgbClr val="1B2330"/>
+                          </a:solidFill>
+                          <a:latin typeface="Montserrat"/>
+                        </a:rPr>
+                        <a:t>4 m²</a:t>
+                      </a:r>
+                    </a:p>
+                  </a:txBody>
+                  <a:tcPr>
+                    <a:solidFill>
+                      <a:srgbClr val="F6F8FC"/>
+                    </a:solidFill>
+                  </a:tcPr>
+                </a:tc>
+              </a:tr>
+              <a:tr h="1341120">
+                <a:tc>
+                  <a:txBody>
+                    <a:bodyPr/>
+                    <a:lstStyle/>
+                    <a:p>
+                      <a:r>
+                        <a:rPr sz="1200" b="0" i="0">
+                          <a:solidFill>
+                            <a:srgbClr val="1B2330"/>
+                          </a:solidFill>
+                          <a:latin typeface="Montserrat"/>
+                        </a:rPr>
+                        <a:t>Patio en edificio de nueva edificación</a:t>
+                      </a:r>
+                    </a:p>
+                  </a:txBody>
+                  <a:tcPr>
+                    <a:solidFill>
+                      <a:srgbClr val="FFFFFF"/>
+                    </a:solidFill>
+                  </a:tcPr>
+                </a:tc>
+                <a:tc>
+                  <a:txBody>
+                    <a:bodyPr/>
+                    <a:lstStyle/>
+                    <a:p>
+                      <a:r>
+                        <a:rPr sz="1200" b="0" i="0">
+                          <a:solidFill>
+                            <a:srgbClr val="1B2330"/>
+                          </a:solidFill>
+                          <a:latin typeface="Montserrat"/>
+                        </a:rPr>
+                        <a:t>1 × NT</a:t>
+                      </a:r>
+                    </a:p>
+                  </a:txBody>
+                  <a:tcPr>
+                    <a:solidFill>
+                      <a:srgbClr val="FFFFFF"/>
+                    </a:solidFill>
+                  </a:tcPr>
+                </a:tc>
+                <a:tc>
+                  <a:txBody>
+                    <a:bodyPr/>
+                    <a:lstStyle/>
+                    <a:p>
+                      <a:r>
+                        <a:rPr sz="1200" b="0" i="0">
+                          <a:solidFill>
+                            <a:srgbClr val="1B2330"/>
+                          </a:solidFill>
+                          <a:latin typeface="Montserrat"/>
+                        </a:rPr>
+                        <a:t>mayor que 6 m²</a:t>
+                      </a:r>
+                    </a:p>
+                  </a:txBody>
+                  <a:tcPr>
+                    <a:solidFill>
+                      <a:srgbClr val="FFFFFF"/>
+                    </a:solidFill>
+                  </a:tcPr>
+                </a:tc>
+              </a:tr>
+            </a:tbl>
+          </a:graphicData>
+        </a:graphic>
+      </p:graphicFrame>
+      <p:sp>
+        <p:nvSpPr>
+          <p:cNvPr id="9" name="Rounded Rectangle 8"/>
           <p:cNvSpPr/>
           <p:nvPr/>
         </p:nvSpPr>
         <p:spPr>
           <a:xfrm>
-            <a:off x="5806440" y="1051560"/>
-            <a:ext cx="5298947" cy="4629150"/>
+            <a:off x="548640" y="5943600"/>
+            <a:ext cx="11091672" cy="384048"/>
           </a:xfrm>
           <a:prstGeom prst="roundRect">
             <a:avLst/>
@@ -7027,7 +8214,7 @@
           </a:solidFill>
           <a:ln w="12700">
             <a:solidFill>
-              <a:srgbClr val="C7D2E6"/>
+              <a:srgbClr val="D7DEEA"/>
             </a:solidFill>
           </a:ln>
           <a:effectLst/>
@@ -7062,8 +8249,8 @@
         </p:nvSpPr>
         <p:spPr>
           <a:xfrm>
-            <a:off x="6080760" y="2726055"/>
-            <a:ext cx="4750307" cy="1280160"/>
+            <a:off x="731520" y="5961888"/>
+            <a:ext cx="10789920" cy="365760"/>
           </a:xfrm>
           <a:prstGeom prst="rect">
             <a:avLst/>
@@ -7076,27 +8263,23 @@
           </a:bodyPr>
           <a:lstStyle/>
           <a:p>
-            <a:pPr algn="ctr"/>
-            <a:r>
-              <a:rPr sz="1400" b="1" i="0">
-                <a:solidFill>
-                  <a:srgbClr val="64748B"/>
-                </a:solidFill>
-                <a:latin typeface="Montserrat"/>
-              </a:rPr>
-              <a:t>IMAGEN REALISTA</a:t>
-            </a:r>
-          </a:p>
-          <a:p>
-            <a:pPr algn="ctr"/>
-            <a:r>
-              <a:rPr sz="1100" b="0" i="1">
-                <a:solidFill>
-                  <a:srgbClr val="64748B"/>
-                </a:solidFill>
-                <a:latin typeface="Montserrat"/>
-              </a:rPr>
-              <a:t>gas pressure regulator and gauge</a:t>
+            <a:r>
+              <a:rPr sz="1100" b="1" i="0">
+                <a:solidFill>
+                  <a:srgbClr val="E8801A"/>
+                </a:solidFill>
+                <a:latin typeface="Montserrat"/>
+              </a:rPr>
+              <a:t>Qué significa:  </a:t>
+            </a:r>
+            <a:r>
+              <a:rPr sz="1100" b="0" i="0">
+                <a:solidFill>
+                  <a:srgbClr val="1B2330"/>
+                </a:solidFill>
+                <a:latin typeface="Montserrat"/>
+              </a:rPr>
+              <a:t>NT es el número de locales que echan sus humos al patio: cuantos más, mayor debe ser.</a:t>
             </a:r>
           </a:p>
         </p:txBody>
@@ -7106,6 +8289,18 @@
   <p:clrMapOvr>
     <a:masterClrMapping/>
   </p:clrMapOvr>
+  <mc:AlternateContent xmlns:mc="http://schemas.openxmlformats.org/markup-compatibility/2006">
+    <mc:Choice xmlns:p14="http://schemas.microsoft.com/office/powerpoint/2010/main" Requires="p14">
+      <p:transition spd="med" p14:dur="700">
+        <p14:cube dir="r"/>
+      </p:transition>
+    </mc:Choice>
+    <mc:Fallback>
+      <p:transition spd="med">
+        <p:push dir="r"/>
+      </p:transition>
+    </mc:Fallback>
+  </mc:AlternateContent>
 </p:sld>
 </file>
 
@@ -7193,7 +8388,7 @@
                 </a:solidFill>
                 <a:latin typeface="Montserrat"/>
               </a:rPr>
-              <a:t>015 / 017</a:t>
+              <a:t>015 / 025</a:t>
             </a:r>
           </a:p>
         </p:txBody>
@@ -7261,7 +8456,7 @@
                 </a:solidFill>
                 <a:latin typeface="Montserrat"/>
               </a:rPr>
-              <a:t>APARTADO 2 · UBICACIÓN DE APARATOS</a:t>
+              <a:t>APARTADO 2 · PATIOS DE VENTILACIÓN</a:t>
             </a:r>
           </a:p>
         </p:txBody>
@@ -7295,14 +8490,14 @@
                 </a:solidFill>
                 <a:latin typeface="Montserrat"/>
               </a:rPr>
-              <a:t>Circuito abierto conducido: dónde</a:t>
-            </a:r>
-          </a:p>
-        </p:txBody>
-      </p:sp>
-      <p:sp>
-        <p:nvSpPr>
-          <p:cNvPr id="7" name="Rounded Rectangle 6"/>
+              <a:t>Si el patio está techado</a:t>
+            </a:r>
+          </a:p>
+        </p:txBody>
+      </p:sp>
+      <p:sp>
+        <p:nvSpPr>
+          <p:cNvPr id="7" name="Rectangle 6"/>
           <p:cNvSpPr/>
           <p:nvPr/>
         </p:nvSpPr>
@@ -7311,7 +8506,7 @@
             <a:off x="868680" y="1627632"/>
             <a:ext cx="2011680" cy="73152"/>
           </a:xfrm>
-          <a:prstGeom prst="roundRect">
+          <a:prstGeom prst="rect">
             <a:avLst/>
           </a:prstGeom>
           <a:solidFill>
@@ -7353,7 +8548,7 @@
         <p:spPr>
           <a:xfrm>
             <a:off x="822960" y="1965960"/>
-            <a:ext cx="4983480" cy="4206240"/>
+            <a:ext cx="5029200" cy="4206240"/>
           </a:xfrm>
           <a:prstGeom prst="rect">
             <a:avLst/>
@@ -7387,7 +8582,7 @@
                 </a:solidFill>
                 <a:latin typeface="Montserrat"/>
               </a:rPr>
-              <a:t>Galerías, terrazas, locales exclusivos</a:t>
+              <a:t>Abertura permanente al exterior</a:t>
             </a:r>
           </a:p>
           <a:p>
@@ -7412,7 +8607,7 @@
                 </a:solidFill>
                 <a:latin typeface="Montserrat"/>
               </a:rPr>
-              <a:t>Lavaderos, garajes individuales</a:t>
+              <a:t>25 % de la sección en planta</a:t>
             </a:r>
           </a:p>
           <a:p>
@@ -7437,46 +8632,21 @@
                 </a:solidFill>
                 <a:latin typeface="Montserrat"/>
               </a:rPr>
-              <a:t>En cocina: sin robar el tiro al extractor</a:t>
-            </a:r>
-          </a:p>
-          <a:p>
-            <a:pPr>
-              <a:spcAft>
-                <a:spcPts val="1100"/>
-              </a:spcAft>
-            </a:pPr>
-            <a:r>
-              <a:rPr sz="1600" b="1" i="0">
-                <a:solidFill>
-                  <a:srgbClr val="E8801A"/>
-                </a:solidFill>
-                <a:latin typeface="Montserrat"/>
-              </a:rPr>
-              <a:t>▸  </a:t>
-            </a:r>
-            <a:r>
-              <a:rPr sz="1600" b="0" i="0">
-                <a:solidFill>
-                  <a:srgbClr val="1B2330"/>
-                </a:solidFill>
-                <a:latin typeface="Montserrat"/>
-              </a:rPr>
-              <a:t>Solo ACS: sin estas limitaciones</a:t>
-            </a:r>
-          </a:p>
-        </p:txBody>
-      </p:sp>
-      <p:sp>
-        <p:nvSpPr>
-          <p:cNvPr id="9" name="imgph" descr="IMGQ:wall mounted gas water heater in laundry room"/>
+              <a:t>Mínimo 4 m²</a:t>
+            </a:r>
+          </a:p>
+        </p:txBody>
+      </p:sp>
+      <p:sp>
+        <p:nvSpPr>
+          <p:cNvPr id="9" name="imgph" descr="IMGQ:covered courtyard with open ventilation grille at top"/>
           <p:cNvSpPr/>
           <p:nvPr/>
         </p:nvSpPr>
         <p:spPr>
           <a:xfrm>
-            <a:off x="5806440" y="1051560"/>
-            <a:ext cx="5298947" cy="4629150"/>
+            <a:off x="6080760" y="1965960"/>
+            <a:ext cx="5303520" cy="4572000"/>
           </a:xfrm>
           <a:prstGeom prst="roundRect">
             <a:avLst/>
@@ -7521,8 +8691,8 @@
         </p:nvSpPr>
         <p:spPr>
           <a:xfrm>
-            <a:off x="6080760" y="2726055"/>
-            <a:ext cx="4750307" cy="1280160"/>
+            <a:off x="6355080" y="3611880"/>
+            <a:ext cx="4754880" cy="1280160"/>
           </a:xfrm>
           <a:prstGeom prst="rect">
             <a:avLst/>
@@ -7543,7 +8713,7 @@
                 </a:solidFill>
                 <a:latin typeface="Montserrat"/>
               </a:rPr>
-              <a:t>IMAGEN REALISTA</a:t>
+              <a:t>IMAGEN</a:t>
             </a:r>
           </a:p>
           <a:p>
@@ -7555,7 +8725,7 @@
                 </a:solidFill>
                 <a:latin typeface="Montserrat"/>
               </a:rPr>
-              <a:t>wall mounted gas water heater in laundry room</a:t>
+              <a:t>covered courtyard with open ventilation grille at top</a:t>
             </a:r>
           </a:p>
         </p:txBody>
@@ -7565,6 +8735,18 @@
   <p:clrMapOvr>
     <a:masterClrMapping/>
   </p:clrMapOvr>
+  <mc:AlternateContent xmlns:mc="http://schemas.openxmlformats.org/markup-compatibility/2006">
+    <mc:Choice xmlns:p14="http://schemas.microsoft.com/office/powerpoint/2010/main" Requires="p14">
+      <p:transition spd="med" p14:dur="700">
+        <p14:cube dir="l"/>
+      </p:transition>
+    </mc:Choice>
+    <mc:Fallback>
+      <p:transition spd="med">
+        <p:push dir="l"/>
+      </p:transition>
+    </mc:Fallback>
+  </mc:AlternateContent>
 </p:sld>
 </file>
 
@@ -7652,7 +8834,7 @@
                 </a:solidFill>
                 <a:latin typeface="Montserrat"/>
               </a:rPr>
-              <a:t>016 / 017</a:t>
+              <a:t>016 / 025</a:t>
             </a:r>
           </a:p>
         </p:txBody>
@@ -7720,7 +8902,7 @@
                 </a:solidFill>
                 <a:latin typeface="Montserrat"/>
               </a:rPr>
-              <a:t>APARTADO 2 · TRAMOS ENTERRADOS</a:t>
+              <a:t>APARTADO 2 · GRANDES POTENCIAS</a:t>
             </a:r>
           </a:p>
         </p:txBody>
@@ -7754,14 +8936,14 @@
                 </a:solidFill>
                 <a:latin typeface="Montserrat"/>
               </a:rPr>
-              <a:t>Tubería bajo tierra</a:t>
-            </a:r>
-          </a:p>
-        </p:txBody>
-      </p:sp>
-      <p:sp>
-        <p:nvSpPr>
-          <p:cNvPr id="7" name="Rounded Rectangle 6"/>
+              <a:t>Más de 70 kW: sala de máquinas</a:t>
+            </a:r>
+          </a:p>
+        </p:txBody>
+      </p:sp>
+      <p:sp>
+        <p:nvSpPr>
+          <p:cNvPr id="7" name="Rectangle 6"/>
           <p:cNvSpPr/>
           <p:nvPr/>
         </p:nvSpPr>
@@ -7770,7 +8952,7 @@
             <a:off x="868680" y="1627632"/>
             <a:ext cx="2011680" cy="73152"/>
           </a:xfrm>
-          <a:prstGeom prst="roundRect">
+          <a:prstGeom prst="rect">
             <a:avLst/>
           </a:prstGeom>
           <a:solidFill>
@@ -7811,8 +8993,8 @@
         </p:nvSpPr>
         <p:spPr>
           <a:xfrm>
-            <a:off x="822960" y="1965960"/>
-            <a:ext cx="4983480" cy="4206240"/>
+            <a:off x="6355080" y="1965960"/>
+            <a:ext cx="5029200" cy="4206240"/>
           </a:xfrm>
           <a:prstGeom prst="rect">
             <a:avLst/>
@@ -7846,7 +9028,7 @@
                 </a:solidFill>
                 <a:latin typeface="Montserrat"/>
               </a:rPr>
-              <a:t>Enterrado → UNE 60310 y 60311</a:t>
+              <a:t>Calderas &gt; 70 kW → UNE 60601</a:t>
             </a:r>
           </a:p>
           <a:p>
@@ -7871,7 +9053,7 @@
                 </a:solidFill>
                 <a:latin typeface="Montserrat"/>
               </a:rPr>
-              <a:t>Consulta el material al distribuidor</a:t>
+              <a:t>También absorción y cogeneración</a:t>
             </a:r>
           </a:p>
           <a:p>
@@ -7896,21 +9078,21 @@
                 </a:solidFill>
                 <a:latin typeface="Montserrat"/>
               </a:rPr>
-              <a:t>Debe ser compatible con la red</a:t>
-            </a:r>
-          </a:p>
-        </p:txBody>
-      </p:sp>
-      <p:sp>
-        <p:nvSpPr>
-          <p:cNvPr id="9" name="imgph" descr="IMGQ:buried yellow gas pipe in trench"/>
+              <a:t>Potencia conjunta: se suma</a:t>
+            </a:r>
+          </a:p>
+        </p:txBody>
+      </p:sp>
+      <p:sp>
+        <p:nvSpPr>
+          <p:cNvPr id="9" name="imgph" descr="IMGQ:industrial gas boiler room"/>
           <p:cNvSpPr/>
           <p:nvPr/>
         </p:nvSpPr>
         <p:spPr>
           <a:xfrm>
-            <a:off x="5806440" y="1051560"/>
-            <a:ext cx="5298947" cy="4629150"/>
+            <a:off x="822960" y="1965960"/>
+            <a:ext cx="5303520" cy="4572000"/>
           </a:xfrm>
           <a:prstGeom prst="roundRect">
             <a:avLst/>
@@ -7955,8 +9137,8 @@
         </p:nvSpPr>
         <p:spPr>
           <a:xfrm>
-            <a:off x="6080760" y="2726055"/>
-            <a:ext cx="4750307" cy="1280160"/>
+            <a:off x="1097280" y="3611880"/>
+            <a:ext cx="4754880" cy="1280160"/>
           </a:xfrm>
           <a:prstGeom prst="rect">
             <a:avLst/>
@@ -7977,7 +9159,7 @@
                 </a:solidFill>
                 <a:latin typeface="Montserrat"/>
               </a:rPr>
-              <a:t>IMAGEN REALISTA</a:t>
+              <a:t>IMAGEN</a:t>
             </a:r>
           </a:p>
           <a:p>
@@ -7989,7 +9171,7 @@
                 </a:solidFill>
                 <a:latin typeface="Montserrat"/>
               </a:rPr>
-              <a:t>buried yellow gas pipe in trench</a:t>
+              <a:t>industrial gas boiler room</a:t>
             </a:r>
           </a:p>
         </p:txBody>
@@ -7999,6 +9181,18 @@
   <p:clrMapOvr>
     <a:masterClrMapping/>
   </p:clrMapOvr>
+  <mc:AlternateContent xmlns:mc="http://schemas.openxmlformats.org/markup-compatibility/2006">
+    <mc:Choice xmlns:p14="http://schemas.microsoft.com/office/powerpoint/2010/main" Requires="p14">
+      <p:transition spd="med" p14:dur="700">
+        <p14:cube dir="r"/>
+      </p:transition>
+    </mc:Choice>
+    <mc:Fallback>
+      <p:transition spd="med">
+        <p:push dir="r"/>
+      </p:transition>
+    </mc:Fallback>
+  </mc:AlternateContent>
 </p:sld>
 </file>
 
@@ -8027,7 +9221,7 @@
             <a:avLst/>
           </a:prstGeom>
           <a:solidFill>
-            <a:srgbClr val="1E2761"/>
+            <a:srgbClr val="FFFFFF"/>
           </a:solidFill>
           <a:ln>
             <a:noFill/>
@@ -8064,8 +9258,8 @@
         </p:nvSpPr>
         <p:spPr>
           <a:xfrm>
-            <a:off x="822960" y="640080"/>
-            <a:ext cx="10515600" cy="457200"/>
+            <a:off x="10607040" y="320040"/>
+            <a:ext cx="1371600" cy="365760"/>
           </a:xfrm>
           <a:prstGeom prst="rect">
             <a:avLst/>
@@ -8078,30 +9272,65 @@
           </a:bodyPr>
           <a:lstStyle/>
           <a:p>
-            <a:r>
-              <a:rPr sz="1400" b="1" i="0">
-                <a:solidFill>
-                  <a:srgbClr val="F4A24C"/>
-                </a:solidFill>
-                <a:latin typeface="Montserrat"/>
-              </a:rPr>
-              <a:t>LO QUE YA DOMINAS</a:t>
-            </a:r>
-          </a:p>
-        </p:txBody>
-      </p:sp>
-      <p:sp>
-        <p:nvSpPr>
-          <p:cNvPr id="4" name="Rounded Rectangle 3"/>
+            <a:pPr algn="r"/>
+            <a:r>
+              <a:rPr sz="1000" b="1" i="0">
+                <a:solidFill>
+                  <a:srgbClr val="64748B"/>
+                </a:solidFill>
+                <a:latin typeface="Montserrat"/>
+              </a:rPr>
+              <a:t>017 / 025</a:t>
+            </a:r>
+          </a:p>
+        </p:txBody>
+      </p:sp>
+      <p:sp>
+        <p:nvSpPr>
+          <p:cNvPr id="4" name="TextBox 3"/>
+          <p:cNvSpPr txBox="1"/>
+          <p:nvPr/>
+        </p:nvSpPr>
+        <p:spPr>
+          <a:xfrm>
+            <a:off x="457200" y="6419088"/>
+            <a:ext cx="8229600" cy="365760"/>
+          </a:xfrm>
+          <a:prstGeom prst="rect">
+            <a:avLst/>
+          </a:prstGeom>
+          <a:noFill/>
+        </p:spPr>
+        <p:txBody>
+          <a:bodyPr wrap="square">
+            <a:spAutoFit/>
+          </a:bodyPr>
+          <a:lstStyle/>
+          <a:p>
+            <a:r>
+              <a:rPr sz="900" b="0" i="0">
+                <a:solidFill>
+                  <a:srgbClr val="64748B"/>
+                </a:solidFill>
+                <a:latin typeface="Montserrat"/>
+              </a:rPr>
+              <a:t>Curso Gas B · Tema 04 · ITC-ICG 07 · Diseño y ejecución</a:t>
+            </a:r>
+          </a:p>
+        </p:txBody>
+      </p:sp>
+      <p:sp>
+        <p:nvSpPr>
+          <p:cNvPr id="5" name="Rectangle 4"/>
           <p:cNvSpPr/>
           <p:nvPr/>
         </p:nvSpPr>
         <p:spPr>
           <a:xfrm>
-            <a:off x="868680" y="1051560"/>
-            <a:ext cx="1463040" cy="82296"/>
-          </a:xfrm>
-          <a:prstGeom prst="roundRect">
+            <a:off x="0" y="0"/>
+            <a:ext cx="12191695" cy="1143000"/>
+          </a:xfrm>
+          <a:prstGeom prst="rect">
             <a:avLst/>
           </a:prstGeom>
           <a:solidFill>
@@ -8136,14 +9365,14 @@
       </p:sp>
       <p:sp>
         <p:nvSpPr>
-          <p:cNvPr id="5" name="TextBox 4"/>
+          <p:cNvPr id="6" name="TextBox 5"/>
           <p:cNvSpPr txBox="1"/>
           <p:nvPr/>
         </p:nvSpPr>
         <p:spPr>
           <a:xfrm>
-            <a:off x="822960" y="1234440"/>
-            <a:ext cx="10515600" cy="1097280"/>
+            <a:off x="822960" y="274320"/>
+            <a:ext cx="10515600" cy="640080"/>
           </a:xfrm>
           <a:prstGeom prst="rect">
             <a:avLst/>
@@ -8157,27 +9386,27 @@
           <a:lstStyle/>
           <a:p>
             <a:r>
-              <a:rPr sz="3400" b="1" i="0">
+              <a:rPr sz="2400" b="1" i="0">
                 <a:solidFill>
                   <a:srgbClr val="FFFFFF"/>
                 </a:solidFill>
                 <a:latin typeface="Montserrat"/>
               </a:rPr>
-              <a:t>Ya sabes diseñar la salida de humos</a:t>
-            </a:r>
-          </a:p>
-        </p:txBody>
-      </p:sp>
-      <p:sp>
-        <p:nvSpPr>
-          <p:cNvPr id="6" name="TextBox 5"/>
+              <a:t>⚡  PREGUNTA RÁPIDA</a:t>
+            </a:r>
+          </a:p>
+        </p:txBody>
+      </p:sp>
+      <p:sp>
+        <p:nvSpPr>
+          <p:cNvPr id="7" name="TextBox 6"/>
           <p:cNvSpPr txBox="1"/>
           <p:nvPr/>
         </p:nvSpPr>
         <p:spPr>
           <a:xfrm>
-            <a:off x="822960" y="2606040"/>
-            <a:ext cx="10515600" cy="2743200"/>
+            <a:off x="822960" y="1508760"/>
+            <a:ext cx="10515600" cy="1371600"/>
           </a:xfrm>
           <a:prstGeom prst="rect">
             <a:avLst/>
@@ -8190,119 +9419,1264 @@
           </a:bodyPr>
           <a:lstStyle/>
           <a:p>
-            <a:pPr>
-              <a:spcAft>
-                <a:spcPts val="1200"/>
-              </a:spcAft>
-            </a:pPr>
-            <a:r>
-              <a:rPr sz="2000" b="1" i="0">
-                <a:solidFill>
-                  <a:srgbClr val="F4A24C"/>
-                </a:solidFill>
-                <a:latin typeface="Montserrat"/>
-              </a:rPr>
-              <a:t>✓  </a:t>
-            </a:r>
-            <a:r>
-              <a:rPr sz="1900" b="0" i="0">
+            <a:r>
+              <a:rPr sz="2400" b="1" i="0">
+                <a:solidFill>
+                  <a:srgbClr val="1E2761"/>
+                </a:solidFill>
+                <a:latin typeface="Montserrat"/>
+              </a:rPr>
+              <a:t>Tres equipos de gas de 30 kW trabajan juntos. ¿Qué exige la norma?</a:t>
+            </a:r>
+          </a:p>
+        </p:txBody>
+      </p:sp>
+      <p:sp>
+        <p:nvSpPr>
+          <p:cNvPr id="8" name="Rounded Rectangle 7"/>
+          <p:cNvSpPr/>
+          <p:nvPr/>
+        </p:nvSpPr>
+        <p:spPr>
+          <a:xfrm>
+            <a:off x="822960" y="3291840"/>
+            <a:ext cx="4983480" cy="1143000"/>
+          </a:xfrm>
+          <a:prstGeom prst="roundRect">
+            <a:avLst/>
+          </a:prstGeom>
+          <a:solidFill>
+            <a:srgbClr val="F3F6FB"/>
+          </a:solidFill>
+          <a:ln w="12700">
+            <a:solidFill>
+              <a:srgbClr val="C7D2E6"/>
+            </a:solidFill>
+          </a:ln>
+          <a:effectLst/>
+        </p:spPr>
+        <p:style>
+          <a:lnRef idx="1">
+            <a:schemeClr val="accent1"/>
+          </a:lnRef>
+          <a:fillRef idx="3">
+            <a:schemeClr val="accent1"/>
+          </a:fillRef>
+          <a:effectRef idx="2">
+            <a:schemeClr val="accent1"/>
+          </a:effectRef>
+          <a:fontRef idx="minor">
+            <a:schemeClr val="lt1"/>
+          </a:fontRef>
+        </p:style>
+        <p:txBody>
+          <a:bodyPr rtlCol="0" anchor="ctr"/>
+          <a:lstStyle/>
+          <a:p>
+            <a:pPr algn="ctr"/>
+          </a:p>
+        </p:txBody>
+      </p:sp>
+      <p:sp>
+        <p:nvSpPr>
+          <p:cNvPr id="9" name="Rectangle 8"/>
+          <p:cNvSpPr/>
+          <p:nvPr/>
+        </p:nvSpPr>
+        <p:spPr>
+          <a:xfrm>
+            <a:off x="822960" y="3291840"/>
+            <a:ext cx="640080" cy="1143000"/>
+          </a:xfrm>
+          <a:prstGeom prst="rect">
+            <a:avLst/>
+          </a:prstGeom>
+          <a:solidFill>
+            <a:srgbClr val="1E2761"/>
+          </a:solidFill>
+          <a:ln>
+            <a:noFill/>
+          </a:ln>
+          <a:effectLst/>
+        </p:spPr>
+        <p:style>
+          <a:lnRef idx="1">
+            <a:schemeClr val="accent1"/>
+          </a:lnRef>
+          <a:fillRef idx="3">
+            <a:schemeClr val="accent1"/>
+          </a:fillRef>
+          <a:effectRef idx="2">
+            <a:schemeClr val="accent1"/>
+          </a:effectRef>
+          <a:fontRef idx="minor">
+            <a:schemeClr val="lt1"/>
+          </a:fontRef>
+        </p:style>
+        <p:txBody>
+          <a:bodyPr rtlCol="0" anchor="ctr"/>
+          <a:lstStyle/>
+          <a:p>
+            <a:pPr algn="ctr"/>
+          </a:p>
+        </p:txBody>
+      </p:sp>
+      <p:sp>
+        <p:nvSpPr>
+          <p:cNvPr id="10" name="TextBox 9"/>
+          <p:cNvSpPr txBox="1"/>
+          <p:nvPr/>
+        </p:nvSpPr>
+        <p:spPr>
+          <a:xfrm>
+            <a:off x="822960" y="3611880"/>
+            <a:ext cx="640080" cy="548640"/>
+          </a:xfrm>
+          <a:prstGeom prst="rect">
+            <a:avLst/>
+          </a:prstGeom>
+          <a:noFill/>
+        </p:spPr>
+        <p:txBody>
+          <a:bodyPr wrap="square">
+            <a:spAutoFit/>
+          </a:bodyPr>
+          <a:lstStyle/>
+          <a:p>
+            <a:pPr algn="ctr"/>
+            <a:r>
+              <a:rPr sz="2200" b="1" i="0">
                 <a:solidFill>
                   <a:srgbClr val="FFFFFF"/>
                 </a:solidFill>
                 <a:latin typeface="Montserrat"/>
               </a:rPr>
-              <a:t>ITC-ICG 07 manda: diseño, ejecución y uso</a:t>
-            </a:r>
-          </a:p>
-          <a:p>
-            <a:pPr>
-              <a:spcAft>
-                <a:spcPts val="1200"/>
-              </a:spcAft>
-            </a:pPr>
-            <a:r>
-              <a:rPr sz="2000" b="1" i="0">
-                <a:solidFill>
-                  <a:srgbClr val="F4A24C"/>
-                </a:solidFill>
-                <a:latin typeface="Montserrat"/>
-              </a:rPr>
-              <a:t>✓  </a:t>
-            </a:r>
-            <a:r>
-              <a:rPr sz="1900" b="0" i="0">
+              <a:t>A</a:t>
+            </a:r>
+          </a:p>
+        </p:txBody>
+      </p:sp>
+      <p:sp>
+        <p:nvSpPr>
+          <p:cNvPr id="11" name="TextBox 10"/>
+          <p:cNvSpPr txBox="1"/>
+          <p:nvPr/>
+        </p:nvSpPr>
+        <p:spPr>
+          <a:xfrm>
+            <a:off x="1600200" y="3474720"/>
+            <a:ext cx="4114800" cy="868680"/>
+          </a:xfrm>
+          <a:prstGeom prst="rect">
+            <a:avLst/>
+          </a:prstGeom>
+          <a:noFill/>
+        </p:spPr>
+        <p:txBody>
+          <a:bodyPr wrap="square">
+            <a:spAutoFit/>
+          </a:bodyPr>
+          <a:lstStyle/>
+          <a:p>
+            <a:r>
+              <a:rPr sz="1400" b="0" i="0">
+                <a:solidFill>
+                  <a:srgbClr val="1B2330"/>
+                </a:solidFill>
+                <a:latin typeface="Montserrat"/>
+              </a:rPr>
+              <a:t>Nada especial, cada uno baja de 70 kW</a:t>
+            </a:r>
+          </a:p>
+        </p:txBody>
+      </p:sp>
+      <p:sp>
+        <p:nvSpPr>
+          <p:cNvPr id="12" name="Rounded Rectangle 11"/>
+          <p:cNvSpPr/>
+          <p:nvPr/>
+        </p:nvSpPr>
+        <p:spPr>
+          <a:xfrm>
+            <a:off x="6355080" y="3291840"/>
+            <a:ext cx="4983480" cy="1143000"/>
+          </a:xfrm>
+          <a:prstGeom prst="roundRect">
+            <a:avLst/>
+          </a:prstGeom>
+          <a:solidFill>
+            <a:srgbClr val="F3F6FB"/>
+          </a:solidFill>
+          <a:ln w="12700">
+            <a:solidFill>
+              <a:srgbClr val="C7D2E6"/>
+            </a:solidFill>
+          </a:ln>
+          <a:effectLst/>
+        </p:spPr>
+        <p:style>
+          <a:lnRef idx="1">
+            <a:schemeClr val="accent1"/>
+          </a:lnRef>
+          <a:fillRef idx="3">
+            <a:schemeClr val="accent1"/>
+          </a:fillRef>
+          <a:effectRef idx="2">
+            <a:schemeClr val="accent1"/>
+          </a:effectRef>
+          <a:fontRef idx="minor">
+            <a:schemeClr val="lt1"/>
+          </a:fontRef>
+        </p:style>
+        <p:txBody>
+          <a:bodyPr rtlCol="0" anchor="ctr"/>
+          <a:lstStyle/>
+          <a:p>
+            <a:pPr algn="ctr"/>
+          </a:p>
+        </p:txBody>
+      </p:sp>
+      <p:sp>
+        <p:nvSpPr>
+          <p:cNvPr id="13" name="Rectangle 12"/>
+          <p:cNvSpPr/>
+          <p:nvPr/>
+        </p:nvSpPr>
+        <p:spPr>
+          <a:xfrm>
+            <a:off x="6355080" y="3291840"/>
+            <a:ext cx="640080" cy="1143000"/>
+          </a:xfrm>
+          <a:prstGeom prst="rect">
+            <a:avLst/>
+          </a:prstGeom>
+          <a:solidFill>
+            <a:srgbClr val="1E2761"/>
+          </a:solidFill>
+          <a:ln>
+            <a:noFill/>
+          </a:ln>
+          <a:effectLst/>
+        </p:spPr>
+        <p:style>
+          <a:lnRef idx="1">
+            <a:schemeClr val="accent1"/>
+          </a:lnRef>
+          <a:fillRef idx="3">
+            <a:schemeClr val="accent1"/>
+          </a:fillRef>
+          <a:effectRef idx="2">
+            <a:schemeClr val="accent1"/>
+          </a:effectRef>
+          <a:fontRef idx="minor">
+            <a:schemeClr val="lt1"/>
+          </a:fontRef>
+        </p:style>
+        <p:txBody>
+          <a:bodyPr rtlCol="0" anchor="ctr"/>
+          <a:lstStyle/>
+          <a:p>
+            <a:pPr algn="ctr"/>
+          </a:p>
+        </p:txBody>
+      </p:sp>
+      <p:sp>
+        <p:nvSpPr>
+          <p:cNvPr id="14" name="TextBox 13"/>
+          <p:cNvSpPr txBox="1"/>
+          <p:nvPr/>
+        </p:nvSpPr>
+        <p:spPr>
+          <a:xfrm>
+            <a:off x="6355080" y="3611880"/>
+            <a:ext cx="640080" cy="548640"/>
+          </a:xfrm>
+          <a:prstGeom prst="rect">
+            <a:avLst/>
+          </a:prstGeom>
+          <a:noFill/>
+        </p:spPr>
+        <p:txBody>
+          <a:bodyPr wrap="square">
+            <a:spAutoFit/>
+          </a:bodyPr>
+          <a:lstStyle/>
+          <a:p>
+            <a:pPr algn="ctr"/>
+            <a:r>
+              <a:rPr sz="2200" b="1" i="0">
                 <a:solidFill>
                   <a:srgbClr val="FFFFFF"/>
                 </a:solidFill>
                 <a:latin typeface="Montserrat"/>
               </a:rPr>
-              <a:t>Humos por cubierta; fachada solo ≤ 70 y 24,4 kW</a:t>
-            </a:r>
-          </a:p>
-          <a:p>
-            <a:pPr>
-              <a:spcAft>
-                <a:spcPts val="1200"/>
-              </a:spcAft>
-            </a:pPr>
-            <a:r>
-              <a:rPr sz="2000" b="1" i="0">
-                <a:solidFill>
-                  <a:srgbClr val="F4A24C"/>
-                </a:solidFill>
-                <a:latin typeface="Montserrat"/>
-              </a:rPr>
-              <a:t>✓  </a:t>
-            </a:r>
-            <a:r>
-              <a:rPr sz="1900" b="0" i="0">
+              <a:t>B</a:t>
+            </a:r>
+          </a:p>
+        </p:txBody>
+      </p:sp>
+      <p:sp>
+        <p:nvSpPr>
+          <p:cNvPr id="15" name="TextBox 14"/>
+          <p:cNvSpPr txBox="1"/>
+          <p:nvPr/>
+        </p:nvSpPr>
+        <p:spPr>
+          <a:xfrm>
+            <a:off x="7132320" y="3474720"/>
+            <a:ext cx="4114800" cy="868680"/>
+          </a:xfrm>
+          <a:prstGeom prst="rect">
+            <a:avLst/>
+          </a:prstGeom>
+          <a:noFill/>
+        </p:spPr>
+        <p:txBody>
+          <a:bodyPr wrap="square">
+            <a:spAutoFit/>
+          </a:bodyPr>
+          <a:lstStyle/>
+          <a:p>
+            <a:r>
+              <a:rPr sz="1400" b="0" i="0">
+                <a:solidFill>
+                  <a:srgbClr val="1B2330"/>
+                </a:solidFill>
+                <a:latin typeface="Montserrat"/>
+              </a:rPr>
+              <a:t>Sala de máquinas conforme a UNE 60601</a:t>
+            </a:r>
+          </a:p>
+        </p:txBody>
+      </p:sp>
+      <p:sp>
+        <p:nvSpPr>
+          <p:cNvPr id="16" name="Rounded Rectangle 15"/>
+          <p:cNvSpPr/>
+          <p:nvPr/>
+        </p:nvSpPr>
+        <p:spPr>
+          <a:xfrm>
+            <a:off x="822960" y="4617720"/>
+            <a:ext cx="4983480" cy="1143000"/>
+          </a:xfrm>
+          <a:prstGeom prst="roundRect">
+            <a:avLst/>
+          </a:prstGeom>
+          <a:solidFill>
+            <a:srgbClr val="F3F6FB"/>
+          </a:solidFill>
+          <a:ln w="12700">
+            <a:solidFill>
+              <a:srgbClr val="C7D2E6"/>
+            </a:solidFill>
+          </a:ln>
+          <a:effectLst/>
+        </p:spPr>
+        <p:style>
+          <a:lnRef idx="1">
+            <a:schemeClr val="accent1"/>
+          </a:lnRef>
+          <a:fillRef idx="3">
+            <a:schemeClr val="accent1"/>
+          </a:fillRef>
+          <a:effectRef idx="2">
+            <a:schemeClr val="accent1"/>
+          </a:effectRef>
+          <a:fontRef idx="minor">
+            <a:schemeClr val="lt1"/>
+          </a:fontRef>
+        </p:style>
+        <p:txBody>
+          <a:bodyPr rtlCol="0" anchor="ctr"/>
+          <a:lstStyle/>
+          <a:p>
+            <a:pPr algn="ctr"/>
+          </a:p>
+        </p:txBody>
+      </p:sp>
+      <p:sp>
+        <p:nvSpPr>
+          <p:cNvPr id="17" name="Rectangle 16"/>
+          <p:cNvSpPr/>
+          <p:nvPr/>
+        </p:nvSpPr>
+        <p:spPr>
+          <a:xfrm>
+            <a:off x="822960" y="4617720"/>
+            <a:ext cx="640080" cy="1143000"/>
+          </a:xfrm>
+          <a:prstGeom prst="rect">
+            <a:avLst/>
+          </a:prstGeom>
+          <a:solidFill>
+            <a:srgbClr val="1E2761"/>
+          </a:solidFill>
+          <a:ln>
+            <a:noFill/>
+          </a:ln>
+          <a:effectLst/>
+        </p:spPr>
+        <p:style>
+          <a:lnRef idx="1">
+            <a:schemeClr val="accent1"/>
+          </a:lnRef>
+          <a:fillRef idx="3">
+            <a:schemeClr val="accent1"/>
+          </a:fillRef>
+          <a:effectRef idx="2">
+            <a:schemeClr val="accent1"/>
+          </a:effectRef>
+          <a:fontRef idx="minor">
+            <a:schemeClr val="lt1"/>
+          </a:fontRef>
+        </p:style>
+        <p:txBody>
+          <a:bodyPr rtlCol="0" anchor="ctr"/>
+          <a:lstStyle/>
+          <a:p>
+            <a:pPr algn="ctr"/>
+          </a:p>
+        </p:txBody>
+      </p:sp>
+      <p:sp>
+        <p:nvSpPr>
+          <p:cNvPr id="18" name="TextBox 17"/>
+          <p:cNvSpPr txBox="1"/>
+          <p:nvPr/>
+        </p:nvSpPr>
+        <p:spPr>
+          <a:xfrm>
+            <a:off x="822960" y="4937760"/>
+            <a:ext cx="640080" cy="548640"/>
+          </a:xfrm>
+          <a:prstGeom prst="rect">
+            <a:avLst/>
+          </a:prstGeom>
+          <a:noFill/>
+        </p:spPr>
+        <p:txBody>
+          <a:bodyPr wrap="square">
+            <a:spAutoFit/>
+          </a:bodyPr>
+          <a:lstStyle/>
+          <a:p>
+            <a:pPr algn="ctr"/>
+            <a:r>
+              <a:rPr sz="2200" b="1" i="0">
                 <a:solidFill>
                   <a:srgbClr val="FFFFFF"/>
                 </a:solidFill>
                 <a:latin typeface="Montserrat"/>
               </a:rPr>
-              <a:t>La presión decide la norma: 5 bar, la raya</a:t>
-            </a:r>
-          </a:p>
-          <a:p>
-            <a:pPr>
-              <a:spcAft>
-                <a:spcPts val="1200"/>
-              </a:spcAft>
-            </a:pPr>
-            <a:r>
-              <a:rPr sz="2000" b="1" i="0">
-                <a:solidFill>
-                  <a:srgbClr val="F4A24C"/>
-                </a:solidFill>
-                <a:latin typeface="Montserrat"/>
-              </a:rPr>
-              <a:t>✓  </a:t>
-            </a:r>
-            <a:r>
-              <a:rPr sz="1900" b="0" i="0">
+              <a:t>C</a:t>
+            </a:r>
+          </a:p>
+        </p:txBody>
+      </p:sp>
+      <p:sp>
+        <p:nvSpPr>
+          <p:cNvPr id="19" name="TextBox 18"/>
+          <p:cNvSpPr txBox="1"/>
+          <p:nvPr/>
+        </p:nvSpPr>
+        <p:spPr>
+          <a:xfrm>
+            <a:off x="1600200" y="4800600"/>
+            <a:ext cx="4114800" cy="868680"/>
+          </a:xfrm>
+          <a:prstGeom prst="rect">
+            <a:avLst/>
+          </a:prstGeom>
+          <a:noFill/>
+        </p:spPr>
+        <p:txBody>
+          <a:bodyPr wrap="square">
+            <a:spAutoFit/>
+          </a:bodyPr>
+          <a:lstStyle/>
+          <a:p>
+            <a:r>
+              <a:rPr sz="1400" b="0" i="0">
+                <a:solidFill>
+                  <a:srgbClr val="1B2330"/>
+                </a:solidFill>
+                <a:latin typeface="Montserrat"/>
+              </a:rPr>
+              <a:t>Salida obligatoria a fachada</a:t>
+            </a:r>
+          </a:p>
+        </p:txBody>
+      </p:sp>
+      <p:sp>
+        <p:nvSpPr>
+          <p:cNvPr id="20" name="Rounded Rectangle 19"/>
+          <p:cNvSpPr/>
+          <p:nvPr/>
+        </p:nvSpPr>
+        <p:spPr>
+          <a:xfrm>
+            <a:off x="6355080" y="4617720"/>
+            <a:ext cx="4983480" cy="1143000"/>
+          </a:xfrm>
+          <a:prstGeom prst="roundRect">
+            <a:avLst/>
+          </a:prstGeom>
+          <a:solidFill>
+            <a:srgbClr val="F3F6FB"/>
+          </a:solidFill>
+          <a:ln w="12700">
+            <a:solidFill>
+              <a:srgbClr val="C7D2E6"/>
+            </a:solidFill>
+          </a:ln>
+          <a:effectLst/>
+        </p:spPr>
+        <p:style>
+          <a:lnRef idx="1">
+            <a:schemeClr val="accent1"/>
+          </a:lnRef>
+          <a:fillRef idx="3">
+            <a:schemeClr val="accent1"/>
+          </a:fillRef>
+          <a:effectRef idx="2">
+            <a:schemeClr val="accent1"/>
+          </a:effectRef>
+          <a:fontRef idx="minor">
+            <a:schemeClr val="lt1"/>
+          </a:fontRef>
+        </p:style>
+        <p:txBody>
+          <a:bodyPr rtlCol="0" anchor="ctr"/>
+          <a:lstStyle/>
+          <a:p>
+            <a:pPr algn="ctr"/>
+          </a:p>
+        </p:txBody>
+      </p:sp>
+      <p:sp>
+        <p:nvSpPr>
+          <p:cNvPr id="21" name="Rectangle 20"/>
+          <p:cNvSpPr/>
+          <p:nvPr/>
+        </p:nvSpPr>
+        <p:spPr>
+          <a:xfrm>
+            <a:off x="6355080" y="4617720"/>
+            <a:ext cx="640080" cy="1143000"/>
+          </a:xfrm>
+          <a:prstGeom prst="rect">
+            <a:avLst/>
+          </a:prstGeom>
+          <a:solidFill>
+            <a:srgbClr val="1E2761"/>
+          </a:solidFill>
+          <a:ln>
+            <a:noFill/>
+          </a:ln>
+          <a:effectLst/>
+        </p:spPr>
+        <p:style>
+          <a:lnRef idx="1">
+            <a:schemeClr val="accent1"/>
+          </a:lnRef>
+          <a:fillRef idx="3">
+            <a:schemeClr val="accent1"/>
+          </a:fillRef>
+          <a:effectRef idx="2">
+            <a:schemeClr val="accent1"/>
+          </a:effectRef>
+          <a:fontRef idx="minor">
+            <a:schemeClr val="lt1"/>
+          </a:fontRef>
+        </p:style>
+        <p:txBody>
+          <a:bodyPr rtlCol="0" anchor="ctr"/>
+          <a:lstStyle/>
+          <a:p>
+            <a:pPr algn="ctr"/>
+          </a:p>
+        </p:txBody>
+      </p:sp>
+      <p:sp>
+        <p:nvSpPr>
+          <p:cNvPr id="22" name="TextBox 21"/>
+          <p:cNvSpPr txBox="1"/>
+          <p:nvPr/>
+        </p:nvSpPr>
+        <p:spPr>
+          <a:xfrm>
+            <a:off x="6355080" y="4937760"/>
+            <a:ext cx="640080" cy="548640"/>
+          </a:xfrm>
+          <a:prstGeom prst="rect">
+            <a:avLst/>
+          </a:prstGeom>
+          <a:noFill/>
+        </p:spPr>
+        <p:txBody>
+          <a:bodyPr wrap="square">
+            <a:spAutoFit/>
+          </a:bodyPr>
+          <a:lstStyle/>
+          <a:p>
+            <a:pPr algn="ctr"/>
+            <a:r>
+              <a:rPr sz="2200" b="1" i="0">
                 <a:solidFill>
                   <a:srgbClr val="FFFFFF"/>
                 </a:solidFill>
                 <a:latin typeface="Montserrat"/>
               </a:rPr>
-              <a:t>Enterrado y grandes potencias, reglas propias</a:t>
-            </a:r>
-          </a:p>
-        </p:txBody>
-      </p:sp>
-      <p:sp>
-        <p:nvSpPr>
-          <p:cNvPr id="7" name="Rounded Rectangle 6"/>
+              <a:t>D</a:t>
+            </a:r>
+          </a:p>
+        </p:txBody>
+      </p:sp>
+      <p:sp>
+        <p:nvSpPr>
+          <p:cNvPr id="23" name="TextBox 22"/>
+          <p:cNvSpPr txBox="1"/>
+          <p:nvPr/>
+        </p:nvSpPr>
+        <p:spPr>
+          <a:xfrm>
+            <a:off x="7132320" y="4800600"/>
+            <a:ext cx="4114800" cy="868680"/>
+          </a:xfrm>
+          <a:prstGeom prst="rect">
+            <a:avLst/>
+          </a:prstGeom>
+          <a:noFill/>
+        </p:spPr>
+        <p:txBody>
+          <a:bodyPr wrap="square">
+            <a:spAutoFit/>
+          </a:bodyPr>
+          <a:lstStyle/>
+          <a:p>
+            <a:r>
+              <a:rPr sz="1400" b="0" i="0">
+                <a:solidFill>
+                  <a:srgbClr val="1B2330"/>
+                </a:solidFill>
+                <a:latin typeface="Montserrat"/>
+              </a:rPr>
+              <a:t>Proyecto según UNE 60620</a:t>
+            </a:r>
+          </a:p>
+        </p:txBody>
+      </p:sp>
+    </p:spTree>
+  </p:cSld>
+  <p:clrMapOvr>
+    <a:masterClrMapping/>
+  </p:clrMapOvr>
+  <mc:AlternateContent xmlns:mc="http://schemas.openxmlformats.org/markup-compatibility/2006">
+    <mc:Choice xmlns:p14="http://schemas.microsoft.com/office/powerpoint/2010/main" Requires="p14">
+      <p:transition spd="med" p14:dur="700">
+        <p14:cube dir="l"/>
+      </p:transition>
+    </mc:Choice>
+    <mc:Fallback>
+      <p:transition spd="med">
+        <p:push dir="l"/>
+      </p:transition>
+    </mc:Fallback>
+  </mc:AlternateContent>
+</p:sld>
+</file>
+
+<file path=ppt/slides/slide18.xml><?xml version="1.0" encoding="utf-8"?>
+<p:sld xmlns:a="http://schemas.openxmlformats.org/drawingml/2006/main" xmlns:p="http://schemas.openxmlformats.org/presentationml/2006/main" xmlns:r="http://schemas.openxmlformats.org/officeDocument/2006/relationships">
+  <p:cSld>
+    <p:spTree>
+      <p:nvGrpSpPr>
+        <p:cNvPr id="1" name=""/>
+        <p:cNvGrpSpPr/>
+        <p:nvPr/>
+      </p:nvGrpSpPr>
+      <p:grpSpPr/>
+      <p:sp>
+        <p:nvSpPr>
+          <p:cNvPr id="2" name="Rectangle 1"/>
           <p:cNvSpPr/>
           <p:nvPr/>
         </p:nvSpPr>
         <p:spPr>
           <a:xfrm>
-            <a:off x="822960" y="5532120"/>
-            <a:ext cx="10515600" cy="822960"/>
+            <a:off x="0" y="0"/>
+            <a:ext cx="12191695" cy="6858000"/>
+          </a:xfrm>
+          <a:prstGeom prst="rect">
+            <a:avLst/>
+          </a:prstGeom>
+          <a:solidFill>
+            <a:srgbClr val="FFFFFF"/>
+          </a:solidFill>
+          <a:ln>
+            <a:noFill/>
+          </a:ln>
+          <a:effectLst/>
+        </p:spPr>
+        <p:style>
+          <a:lnRef idx="1">
+            <a:schemeClr val="accent1"/>
+          </a:lnRef>
+          <a:fillRef idx="3">
+            <a:schemeClr val="accent1"/>
+          </a:fillRef>
+          <a:effectRef idx="2">
+            <a:schemeClr val="accent1"/>
+          </a:effectRef>
+          <a:fontRef idx="minor">
+            <a:schemeClr val="lt1"/>
+          </a:fontRef>
+        </p:style>
+        <p:txBody>
+          <a:bodyPr rtlCol="0" anchor="ctr"/>
+          <a:lstStyle/>
+          <a:p>
+            <a:pPr algn="ctr"/>
+          </a:p>
+        </p:txBody>
+      </p:sp>
+      <p:sp>
+        <p:nvSpPr>
+          <p:cNvPr id="3" name="TextBox 2"/>
+          <p:cNvSpPr txBox="1"/>
+          <p:nvPr/>
+        </p:nvSpPr>
+        <p:spPr>
+          <a:xfrm>
+            <a:off x="10607040" y="320040"/>
+            <a:ext cx="1371600" cy="365760"/>
+          </a:xfrm>
+          <a:prstGeom prst="rect">
+            <a:avLst/>
+          </a:prstGeom>
+          <a:noFill/>
+        </p:spPr>
+        <p:txBody>
+          <a:bodyPr wrap="square">
+            <a:spAutoFit/>
+          </a:bodyPr>
+          <a:lstStyle/>
+          <a:p>
+            <a:pPr algn="r"/>
+            <a:r>
+              <a:rPr sz="1000" b="1" i="0">
+                <a:solidFill>
+                  <a:srgbClr val="64748B"/>
+                </a:solidFill>
+                <a:latin typeface="Montserrat"/>
+              </a:rPr>
+              <a:t>018 / 025</a:t>
+            </a:r>
+          </a:p>
+        </p:txBody>
+      </p:sp>
+      <p:sp>
+        <p:nvSpPr>
+          <p:cNvPr id="4" name="TextBox 3"/>
+          <p:cNvSpPr txBox="1"/>
+          <p:nvPr/>
+        </p:nvSpPr>
+        <p:spPr>
+          <a:xfrm>
+            <a:off x="457200" y="6419088"/>
+            <a:ext cx="8229600" cy="365760"/>
+          </a:xfrm>
+          <a:prstGeom prst="rect">
+            <a:avLst/>
+          </a:prstGeom>
+          <a:noFill/>
+        </p:spPr>
+        <p:txBody>
+          <a:bodyPr wrap="square">
+            <a:spAutoFit/>
+          </a:bodyPr>
+          <a:lstStyle/>
+          <a:p>
+            <a:r>
+              <a:rPr sz="900" b="0" i="0">
+                <a:solidFill>
+                  <a:srgbClr val="64748B"/>
+                </a:solidFill>
+                <a:latin typeface="Montserrat"/>
+              </a:rPr>
+              <a:t>Curso Gas B · Tema 04 · ITC-ICG 07 · Diseño y ejecución</a:t>
+            </a:r>
+          </a:p>
+        </p:txBody>
+      </p:sp>
+      <p:sp>
+        <p:nvSpPr>
+          <p:cNvPr id="5" name="Rectangle 4"/>
+          <p:cNvSpPr/>
+          <p:nvPr/>
+        </p:nvSpPr>
+        <p:spPr>
+          <a:xfrm>
+            <a:off x="0" y="0"/>
+            <a:ext cx="12191695" cy="1143000"/>
+          </a:xfrm>
+          <a:prstGeom prst="rect">
+            <a:avLst/>
+          </a:prstGeom>
+          <a:solidFill>
+            <a:srgbClr val="1E8E4B"/>
+          </a:solidFill>
+          <a:ln>
+            <a:noFill/>
+          </a:ln>
+          <a:effectLst/>
+        </p:spPr>
+        <p:style>
+          <a:lnRef idx="1">
+            <a:schemeClr val="accent1"/>
+          </a:lnRef>
+          <a:fillRef idx="3">
+            <a:schemeClr val="accent1"/>
+          </a:fillRef>
+          <a:effectRef idx="2">
+            <a:schemeClr val="accent1"/>
+          </a:effectRef>
+          <a:fontRef idx="minor">
+            <a:schemeClr val="lt1"/>
+          </a:fontRef>
+        </p:style>
+        <p:txBody>
+          <a:bodyPr rtlCol="0" anchor="ctr"/>
+          <a:lstStyle/>
+          <a:p>
+            <a:pPr algn="ctr"/>
+          </a:p>
+        </p:txBody>
+      </p:sp>
+      <p:sp>
+        <p:nvSpPr>
+          <p:cNvPr id="6" name="TextBox 5"/>
+          <p:cNvSpPr txBox="1"/>
+          <p:nvPr/>
+        </p:nvSpPr>
+        <p:spPr>
+          <a:xfrm>
+            <a:off x="822960" y="274320"/>
+            <a:ext cx="10515600" cy="640080"/>
+          </a:xfrm>
+          <a:prstGeom prst="rect">
+            <a:avLst/>
+          </a:prstGeom>
+          <a:noFill/>
+        </p:spPr>
+        <p:txBody>
+          <a:bodyPr wrap="square">
+            <a:spAutoFit/>
+          </a:bodyPr>
+          <a:lstStyle/>
+          <a:p>
+            <a:r>
+              <a:rPr sz="2400" b="1" i="0">
+                <a:solidFill>
+                  <a:srgbClr val="FFFFFF"/>
+                </a:solidFill>
+                <a:latin typeface="Montserrat"/>
+              </a:rPr>
+              <a:t>✔  RESPUESTA:  B</a:t>
+            </a:r>
+          </a:p>
+        </p:txBody>
+      </p:sp>
+      <p:sp>
+        <p:nvSpPr>
+          <p:cNvPr id="7" name="TextBox 6"/>
+          <p:cNvSpPr txBox="1"/>
+          <p:nvPr/>
+        </p:nvSpPr>
+        <p:spPr>
+          <a:xfrm>
+            <a:off x="822960" y="1417320"/>
+            <a:ext cx="10515600" cy="914400"/>
+          </a:xfrm>
+          <a:prstGeom prst="rect">
+            <a:avLst/>
+          </a:prstGeom>
+          <a:noFill/>
+        </p:spPr>
+        <p:txBody>
+          <a:bodyPr wrap="square">
+            <a:spAutoFit/>
+          </a:bodyPr>
+          <a:lstStyle/>
+          <a:p>
+            <a:r>
+              <a:rPr sz="1800" b="1" i="0">
+                <a:solidFill>
+                  <a:srgbClr val="64748B"/>
+                </a:solidFill>
+                <a:latin typeface="Montserrat"/>
+              </a:rPr>
+              <a:t>Tres equipos de gas de 30 kW trabajan juntos. ¿Qué exige la norma?</a:t>
+            </a:r>
+          </a:p>
+        </p:txBody>
+      </p:sp>
+      <p:sp>
+        <p:nvSpPr>
+          <p:cNvPr id="8" name="Rounded Rectangle 7"/>
+          <p:cNvSpPr/>
+          <p:nvPr/>
+        </p:nvSpPr>
+        <p:spPr>
+          <a:xfrm>
+            <a:off x="822960" y="2514600"/>
+            <a:ext cx="10515600" cy="914400"/>
           </a:xfrm>
           <a:prstGeom prst="roundRect">
+            <a:avLst/>
+          </a:prstGeom>
+          <a:solidFill>
+            <a:srgbClr val="E9F6EE"/>
+          </a:solidFill>
+          <a:ln w="12700">
+            <a:solidFill>
+              <a:srgbClr val="1E8E4B"/>
+            </a:solidFill>
+          </a:ln>
+          <a:effectLst/>
+        </p:spPr>
+        <p:style>
+          <a:lnRef idx="1">
+            <a:schemeClr val="accent1"/>
+          </a:lnRef>
+          <a:fillRef idx="3">
+            <a:schemeClr val="accent1"/>
+          </a:fillRef>
+          <a:effectRef idx="2">
+            <a:schemeClr val="accent1"/>
+          </a:effectRef>
+          <a:fontRef idx="minor">
+            <a:schemeClr val="lt1"/>
+          </a:fontRef>
+        </p:style>
+        <p:txBody>
+          <a:bodyPr rtlCol="0" anchor="ctr"/>
+          <a:lstStyle/>
+          <a:p>
+            <a:pPr algn="ctr"/>
+          </a:p>
+        </p:txBody>
+      </p:sp>
+      <p:sp>
+        <p:nvSpPr>
+          <p:cNvPr id="9" name="TextBox 8"/>
+          <p:cNvSpPr txBox="1"/>
+          <p:nvPr/>
+        </p:nvSpPr>
+        <p:spPr>
+          <a:xfrm>
+            <a:off x="1097280" y="2697480"/>
+            <a:ext cx="10058400" cy="640080"/>
+          </a:xfrm>
+          <a:prstGeom prst="rect">
+            <a:avLst/>
+          </a:prstGeom>
+          <a:noFill/>
+        </p:spPr>
+        <p:txBody>
+          <a:bodyPr wrap="square">
+            <a:spAutoFit/>
+          </a:bodyPr>
+          <a:lstStyle/>
+          <a:p>
+            <a:r>
+              <a:rPr sz="1800" b="1" i="0">
+                <a:solidFill>
+                  <a:srgbClr val="1E8E4B"/>
+                </a:solidFill>
+                <a:latin typeface="Montserrat"/>
+              </a:rPr>
+              <a:t>B.  </a:t>
+            </a:r>
+            <a:r>
+              <a:rPr sz="1800" b="1" i="0">
+                <a:solidFill>
+                  <a:srgbClr val="1E2761"/>
+                </a:solidFill>
+                <a:latin typeface="Montserrat"/>
+              </a:rPr>
+              <a:t>Sala de máquinas conforme a UNE 60601</a:t>
+            </a:r>
+          </a:p>
+        </p:txBody>
+      </p:sp>
+      <p:sp>
+        <p:nvSpPr>
+          <p:cNvPr id="10" name="TextBox 9"/>
+          <p:cNvSpPr txBox="1"/>
+          <p:nvPr/>
+        </p:nvSpPr>
+        <p:spPr>
+          <a:xfrm>
+            <a:off x="822960" y="3749039"/>
+            <a:ext cx="10515600" cy="2194560"/>
+          </a:xfrm>
+          <a:prstGeom prst="rect">
+            <a:avLst/>
+          </a:prstGeom>
+          <a:noFill/>
+        </p:spPr>
+        <p:txBody>
+          <a:bodyPr wrap="square">
+            <a:spAutoFit/>
+          </a:bodyPr>
+          <a:lstStyle/>
+          <a:p>
+            <a:r>
+              <a:rPr sz="1500" b="1" i="0">
+                <a:solidFill>
+                  <a:srgbClr val="E8801A"/>
+                </a:solidFill>
+                <a:latin typeface="Montserrat"/>
+              </a:rPr>
+              <a:t>Por qué:  </a:t>
+            </a:r>
+            <a:r>
+              <a:rPr sz="1500" b="0" i="0">
+                <a:solidFill>
+                  <a:srgbClr val="1B2330"/>
+                </a:solidFill>
+                <a:latin typeface="Montserrat"/>
+              </a:rPr>
+              <a:t>La potencia se suma: tres por treinta son noventa kilovatios, se pasa de setenta y toca sala de máquinas con UNE 60601.</a:t>
+            </a:r>
+          </a:p>
+        </p:txBody>
+      </p:sp>
+    </p:spTree>
+  </p:cSld>
+  <p:clrMapOvr>
+    <a:masterClrMapping/>
+  </p:clrMapOvr>
+  <mc:AlternateContent xmlns:mc="http://schemas.openxmlformats.org/markup-compatibility/2006">
+    <mc:Choice xmlns:p14="http://schemas.microsoft.com/office/powerpoint/2010/main" Requires="p14">
+      <p:transition spd="med" p14:dur="700">
+        <p14:cube dir="r"/>
+      </p:transition>
+    </mc:Choice>
+    <mc:Fallback>
+      <p:transition spd="med">
+        <p:push dir="r"/>
+      </p:transition>
+    </mc:Fallback>
+  </mc:AlternateContent>
+</p:sld>
+</file>
+
+<file path=ppt/slides/slide19.xml><?xml version="1.0" encoding="utf-8"?>
+<p:sld xmlns:a="http://schemas.openxmlformats.org/drawingml/2006/main" xmlns:p="http://schemas.openxmlformats.org/presentationml/2006/main" xmlns:r="http://schemas.openxmlformats.org/officeDocument/2006/relationships">
+  <p:cSld>
+    <p:spTree>
+      <p:nvGrpSpPr>
+        <p:cNvPr id="1" name=""/>
+        <p:cNvGrpSpPr/>
+        <p:nvPr/>
+      </p:nvGrpSpPr>
+      <p:grpSpPr/>
+      <p:sp>
+        <p:nvSpPr>
+          <p:cNvPr id="2" name="Rectangle 1"/>
+          <p:cNvSpPr/>
+          <p:nvPr/>
+        </p:nvSpPr>
+        <p:spPr>
+          <a:xfrm>
+            <a:off x="0" y="0"/>
+            <a:ext cx="12191695" cy="6858000"/>
+          </a:xfrm>
+          <a:prstGeom prst="rect">
+            <a:avLst/>
+          </a:prstGeom>
+          <a:solidFill>
+            <a:srgbClr val="FFFFFF"/>
+          </a:solidFill>
+          <a:ln>
+            <a:noFill/>
+          </a:ln>
+          <a:effectLst/>
+        </p:spPr>
+        <p:style>
+          <a:lnRef idx="1">
+            <a:schemeClr val="accent1"/>
+          </a:lnRef>
+          <a:fillRef idx="3">
+            <a:schemeClr val="accent1"/>
+          </a:fillRef>
+          <a:effectRef idx="2">
+            <a:schemeClr val="accent1"/>
+          </a:effectRef>
+          <a:fontRef idx="minor">
+            <a:schemeClr val="lt1"/>
+          </a:fontRef>
+        </p:style>
+        <p:txBody>
+          <a:bodyPr rtlCol="0" anchor="ctr"/>
+          <a:lstStyle/>
+          <a:p>
+            <a:pPr algn="ctr"/>
+          </a:p>
+        </p:txBody>
+      </p:sp>
+      <p:sp>
+        <p:nvSpPr>
+          <p:cNvPr id="3" name="TextBox 2"/>
+          <p:cNvSpPr txBox="1"/>
+          <p:nvPr/>
+        </p:nvSpPr>
+        <p:spPr>
+          <a:xfrm>
+            <a:off x="10607040" y="320040"/>
+            <a:ext cx="1371600" cy="365760"/>
+          </a:xfrm>
+          <a:prstGeom prst="rect">
+            <a:avLst/>
+          </a:prstGeom>
+          <a:noFill/>
+        </p:spPr>
+        <p:txBody>
+          <a:bodyPr wrap="square">
+            <a:spAutoFit/>
+          </a:bodyPr>
+          <a:lstStyle/>
+          <a:p>
+            <a:pPr algn="r"/>
+            <a:r>
+              <a:rPr sz="1000" b="1" i="0">
+                <a:solidFill>
+                  <a:srgbClr val="64748B"/>
+                </a:solidFill>
+                <a:latin typeface="Montserrat"/>
+              </a:rPr>
+              <a:t>019 / 025</a:t>
+            </a:r>
+          </a:p>
+        </p:txBody>
+      </p:sp>
+      <p:sp>
+        <p:nvSpPr>
+          <p:cNvPr id="4" name="TextBox 3"/>
+          <p:cNvSpPr txBox="1"/>
+          <p:nvPr/>
+        </p:nvSpPr>
+        <p:spPr>
+          <a:xfrm>
+            <a:off x="457200" y="6419088"/>
+            <a:ext cx="8229600" cy="365760"/>
+          </a:xfrm>
+          <a:prstGeom prst="rect">
+            <a:avLst/>
+          </a:prstGeom>
+          <a:noFill/>
+        </p:spPr>
+        <p:txBody>
+          <a:bodyPr wrap="square">
+            <a:spAutoFit/>
+          </a:bodyPr>
+          <a:lstStyle/>
+          <a:p>
+            <a:r>
+              <a:rPr sz="900" b="0" i="0">
+                <a:solidFill>
+                  <a:srgbClr val="64748B"/>
+                </a:solidFill>
+                <a:latin typeface="Montserrat"/>
+              </a:rPr>
+              <a:t>Curso Gas B · Tema 04 · ITC-ICG 07 · Diseño y ejecución</a:t>
+            </a:r>
+          </a:p>
+        </p:txBody>
+      </p:sp>
+      <p:sp>
+        <p:nvSpPr>
+          <p:cNvPr id="5" name="TextBox 4"/>
+          <p:cNvSpPr txBox="1"/>
+          <p:nvPr/>
+        </p:nvSpPr>
+        <p:spPr>
+          <a:xfrm>
+            <a:off x="822960" y="457200"/>
+            <a:ext cx="10058400" cy="365760"/>
+          </a:xfrm>
+          <a:prstGeom prst="rect">
+            <a:avLst/>
+          </a:prstGeom>
+          <a:noFill/>
+        </p:spPr>
+        <p:txBody>
+          <a:bodyPr wrap="square">
+            <a:spAutoFit/>
+          </a:bodyPr>
+          <a:lstStyle/>
+          <a:p>
+            <a:r>
+              <a:rPr sz="1300" b="1" i="0">
+                <a:solidFill>
+                  <a:srgbClr val="E8801A"/>
+                </a:solidFill>
+                <a:latin typeface="Montserrat"/>
+              </a:rPr>
+              <a:t>APARTADO 2 · NORMA SEGÚN PRESIÓN</a:t>
+            </a:r>
+          </a:p>
+        </p:txBody>
+      </p:sp>
+      <p:sp>
+        <p:nvSpPr>
+          <p:cNvPr id="6" name="TextBox 5"/>
+          <p:cNvSpPr txBox="1"/>
+          <p:nvPr/>
+        </p:nvSpPr>
+        <p:spPr>
+          <a:xfrm>
+            <a:off x="822960" y="868680"/>
+            <a:ext cx="10515600" cy="914400"/>
+          </a:xfrm>
+          <a:prstGeom prst="rect">
+            <a:avLst/>
+          </a:prstGeom>
+          <a:noFill/>
+        </p:spPr>
+        <p:txBody>
+          <a:bodyPr wrap="square">
+            <a:spAutoFit/>
+          </a:bodyPr>
+          <a:lstStyle/>
+          <a:p>
+            <a:r>
+              <a:rPr sz="2800" b="1" i="0">
+                <a:solidFill>
+                  <a:srgbClr val="1E2761"/>
+                </a:solidFill>
+                <a:latin typeface="Montserrat"/>
+              </a:rPr>
+              <a:t>La frontera de los 5 bar</a:t>
+            </a:r>
+          </a:p>
+        </p:txBody>
+      </p:sp>
+      <p:sp>
+        <p:nvSpPr>
+          <p:cNvPr id="7" name="Rectangle 6"/>
+          <p:cNvSpPr/>
+          <p:nvPr/>
+        </p:nvSpPr>
+        <p:spPr>
+          <a:xfrm>
+            <a:off x="868680" y="1627632"/>
+            <a:ext cx="2011680" cy="73152"/>
+          </a:xfrm>
+          <a:prstGeom prst="rect">
             <a:avLst/>
           </a:prstGeom>
           <a:solidFill>
@@ -8343,8 +10717,8 @@
         </p:nvSpPr>
         <p:spPr>
           <a:xfrm>
-            <a:off x="1051560" y="5623560"/>
-            <a:ext cx="10058400" cy="640080"/>
+            <a:off x="822960" y="1965960"/>
+            <a:ext cx="5029200" cy="4206240"/>
           </a:xfrm>
           <a:prstGeom prst="rect">
             <a:avLst/>
@@ -8357,14 +10731,171 @@
           </a:bodyPr>
           <a:lstStyle/>
           <a:p>
-            <a:r>
-              <a:rPr sz="1500" b="1" i="1">
-                <a:solidFill>
-                  <a:srgbClr val="1E2761"/>
-                </a:solidFill>
-                <a:latin typeface="Montserrat"/>
-              </a:rPr>
-              <a:t>Con esto ya colocas cada norma en su sitio. Vamos a por los papeles y la puesta en servicio.</a:t>
+            <a:pPr>
+              <a:spcAft>
+                <a:spcPts val="1100"/>
+              </a:spcAft>
+            </a:pPr>
+            <a:r>
+              <a:rPr sz="1600" b="1" i="0">
+                <a:solidFill>
+                  <a:srgbClr val="E8801A"/>
+                </a:solidFill>
+                <a:latin typeface="Montserrat"/>
+              </a:rPr>
+              <a:t>▸  </a:t>
+            </a:r>
+            <a:r>
+              <a:rPr sz="1600" b="0" i="0">
+                <a:solidFill>
+                  <a:srgbClr val="1B2330"/>
+                </a:solidFill>
+                <a:latin typeface="Montserrat"/>
+              </a:rPr>
+              <a:t>Hasta 5 bar → UNE 60670</a:t>
+            </a:r>
+          </a:p>
+          <a:p>
+            <a:pPr>
+              <a:spcAft>
+                <a:spcPts val="1100"/>
+              </a:spcAft>
+            </a:pPr>
+            <a:r>
+              <a:rPr sz="1600" b="1" i="0">
+                <a:solidFill>
+                  <a:srgbClr val="E8801A"/>
+                </a:solidFill>
+                <a:latin typeface="Montserrat"/>
+              </a:rPr>
+              <a:t>▸  </a:t>
+            </a:r>
+            <a:r>
+              <a:rPr sz="1600" b="0" i="0">
+                <a:solidFill>
+                  <a:srgbClr val="1B2330"/>
+                </a:solidFill>
+                <a:latin typeface="Montserrat"/>
+              </a:rPr>
+              <a:t>Más de 5 bar → UNE 60620</a:t>
+            </a:r>
+          </a:p>
+          <a:p>
+            <a:pPr>
+              <a:spcAft>
+                <a:spcPts val="1100"/>
+              </a:spcAft>
+            </a:pPr>
+            <a:r>
+              <a:rPr sz="1600" b="1" i="0">
+                <a:solidFill>
+                  <a:srgbClr val="E8801A"/>
+                </a:solidFill>
+                <a:latin typeface="Montserrat"/>
+              </a:rPr>
+              <a:t>▸  </a:t>
+            </a:r>
+            <a:r>
+              <a:rPr sz="1600" b="0" i="0">
+                <a:solidFill>
+                  <a:srgbClr val="1B2330"/>
+                </a:solidFill>
+                <a:latin typeface="Montserrat"/>
+              </a:rPr>
+              <a:t>MOP: presión máxima de operación</a:t>
+            </a:r>
+          </a:p>
+        </p:txBody>
+      </p:sp>
+      <p:sp>
+        <p:nvSpPr>
+          <p:cNvPr id="9" name="imgph" descr="IMGQ:gas pressure regulator and gauge"/>
+          <p:cNvSpPr/>
+          <p:nvPr/>
+        </p:nvSpPr>
+        <p:spPr>
+          <a:xfrm>
+            <a:off x="6080760" y="1965960"/>
+            <a:ext cx="5303520" cy="4572000"/>
+          </a:xfrm>
+          <a:prstGeom prst="roundRect">
+            <a:avLst/>
+          </a:prstGeom>
+          <a:solidFill>
+            <a:srgbClr val="F3F6FB"/>
+          </a:solidFill>
+          <a:ln w="12700">
+            <a:solidFill>
+              <a:srgbClr val="C7D2E6"/>
+            </a:solidFill>
+          </a:ln>
+          <a:effectLst/>
+        </p:spPr>
+        <p:style>
+          <a:lnRef idx="1">
+            <a:schemeClr val="accent1"/>
+          </a:lnRef>
+          <a:fillRef idx="3">
+            <a:schemeClr val="accent1"/>
+          </a:fillRef>
+          <a:effectRef idx="2">
+            <a:schemeClr val="accent1"/>
+          </a:effectRef>
+          <a:fontRef idx="minor">
+            <a:schemeClr val="lt1"/>
+          </a:fontRef>
+        </p:style>
+        <p:txBody>
+          <a:bodyPr rtlCol="0" anchor="ctr"/>
+          <a:lstStyle/>
+          <a:p>
+            <a:pPr algn="ctr"/>
+          </a:p>
+        </p:txBody>
+      </p:sp>
+      <p:sp>
+        <p:nvSpPr>
+          <p:cNvPr id="10" name="TextBox 9"/>
+          <p:cNvSpPr txBox="1"/>
+          <p:nvPr/>
+        </p:nvSpPr>
+        <p:spPr>
+          <a:xfrm>
+            <a:off x="6355080" y="3611880"/>
+            <a:ext cx="4754880" cy="1280160"/>
+          </a:xfrm>
+          <a:prstGeom prst="rect">
+            <a:avLst/>
+          </a:prstGeom>
+          <a:noFill/>
+        </p:spPr>
+        <p:txBody>
+          <a:bodyPr wrap="square">
+            <a:spAutoFit/>
+          </a:bodyPr>
+          <a:lstStyle/>
+          <a:p>
+            <a:pPr algn="ctr"/>
+            <a:r>
+              <a:rPr sz="1400" b="1" i="0">
+                <a:solidFill>
+                  <a:srgbClr val="64748B"/>
+                </a:solidFill>
+                <a:latin typeface="Montserrat"/>
+              </a:rPr>
+              <a:t>IMAGEN</a:t>
+            </a:r>
+          </a:p>
+          <a:p>
+            <a:pPr algn="ctr"/>
+            <a:r>
+              <a:rPr sz="1100" b="0" i="1">
+                <a:solidFill>
+                  <a:srgbClr val="64748B"/>
+                </a:solidFill>
+                <a:latin typeface="Montserrat"/>
+              </a:rPr>
+              <a:t>gas pressure regulator and gauge</a:t>
             </a:r>
           </a:p>
         </p:txBody>
@@ -8374,6 +10905,18 @@
   <p:clrMapOvr>
     <a:masterClrMapping/>
   </p:clrMapOvr>
+  <mc:AlternateContent xmlns:mc="http://schemas.openxmlformats.org/markup-compatibility/2006">
+    <mc:Choice xmlns:p14="http://schemas.microsoft.com/office/powerpoint/2010/main" Requires="p14">
+      <p:transition spd="med" p14:dur="700">
+        <p14:cube dir="l"/>
+      </p:transition>
+    </mc:Choice>
+    <mc:Fallback>
+      <p:transition spd="med">
+        <p:push dir="l"/>
+      </p:transition>
+    </mc:Fallback>
+  </mc:AlternateContent>
 </p:sld>
 </file>
 
@@ -8461,7 +11004,7 @@
                 </a:solidFill>
                 <a:latin typeface="Montserrat"/>
               </a:rPr>
-              <a:t>002 / 017</a:t>
+              <a:t>002 / 025</a:t>
             </a:r>
           </a:p>
         </p:txBody>
@@ -8536,7 +11079,7 @@
       </p:sp>
       <p:sp>
         <p:nvSpPr>
-          <p:cNvPr id="6" name="Rounded Rectangle 5"/>
+          <p:cNvPr id="6" name="Rectangle 5"/>
           <p:cNvSpPr/>
           <p:nvPr/>
         </p:nvSpPr>
@@ -8545,7 +11088,7 @@
             <a:off x="868680" y="1234440"/>
             <a:ext cx="1463040" cy="73152"/>
           </a:xfrm>
-          <a:prstGeom prst="roundRect">
+          <a:prstGeom prst="rect">
             <a:avLst/>
           </a:prstGeom>
           <a:solidFill>
@@ -8626,14 +11169,58 @@
       </p:sp>
       <p:sp>
         <p:nvSpPr>
-          <p:cNvPr id="8" name="TextBox 7"/>
+          <p:cNvPr id="8" name="Rectangle 7"/>
+          <p:cNvSpPr/>
+          <p:nvPr/>
+        </p:nvSpPr>
+        <p:spPr>
+          <a:xfrm>
+            <a:off x="822960" y="2011680"/>
+            <a:ext cx="3017520" cy="128016"/>
+          </a:xfrm>
+          <a:prstGeom prst="rect">
+            <a:avLst/>
+          </a:prstGeom>
+          <a:solidFill>
+            <a:srgbClr val="E8801A"/>
+          </a:solidFill>
+          <a:ln>
+            <a:noFill/>
+          </a:ln>
+          <a:effectLst/>
+        </p:spPr>
+        <p:style>
+          <a:lnRef idx="1">
+            <a:schemeClr val="accent1"/>
+          </a:lnRef>
+          <a:fillRef idx="3">
+            <a:schemeClr val="accent1"/>
+          </a:fillRef>
+          <a:effectRef idx="2">
+            <a:schemeClr val="accent1"/>
+          </a:effectRef>
+          <a:fontRef idx="minor">
+            <a:schemeClr val="lt1"/>
+          </a:fontRef>
+        </p:style>
+        <p:txBody>
+          <a:bodyPr rtlCol="0" anchor="ctr"/>
+          <a:lstStyle/>
+          <a:p>
+            <a:pPr algn="ctr"/>
+          </a:p>
+        </p:txBody>
+      </p:sp>
+      <p:sp>
+        <p:nvSpPr>
+          <p:cNvPr id="9" name="TextBox 8"/>
           <p:cNvSpPr txBox="1"/>
           <p:nvPr/>
         </p:nvSpPr>
         <p:spPr>
           <a:xfrm>
-            <a:off x="822960" y="2331720"/>
-            <a:ext cx="3017520" cy="1463040"/>
+            <a:off x="822960" y="2377440"/>
+            <a:ext cx="3017520" cy="1371600"/>
           </a:xfrm>
           <a:prstGeom prst="rect">
             <a:avLst/>
@@ -8648,7 +11235,7 @@
           <a:p>
             <a:pPr algn="ctr"/>
             <a:r>
-              <a:rPr sz="6000" b="1" i="0">
+              <a:rPr sz="5800" b="1" i="0">
                 <a:solidFill>
                   <a:srgbClr val="1E2761"/>
                 </a:solidFill>
@@ -8661,13 +11248,13 @@
       </p:sp>
       <p:sp>
         <p:nvSpPr>
-          <p:cNvPr id="9" name="TextBox 8"/>
+          <p:cNvPr id="10" name="TextBox 9"/>
           <p:cNvSpPr txBox="1"/>
           <p:nvPr/>
         </p:nvSpPr>
         <p:spPr>
           <a:xfrm>
-            <a:off x="1051560" y="3611880"/>
+            <a:off x="1051560" y="3657600"/>
             <a:ext cx="2560320" cy="1005840"/>
           </a:xfrm>
           <a:prstGeom prst="rect">
@@ -8696,7 +11283,7 @@
       </p:sp>
       <p:sp>
         <p:nvSpPr>
-          <p:cNvPr id="10" name="Rounded Rectangle 9"/>
+          <p:cNvPr id="11" name="Rounded Rectangle 10"/>
           <p:cNvSpPr/>
           <p:nvPr/>
         </p:nvSpPr>
@@ -8742,14 +11329,58 @@
       </p:sp>
       <p:sp>
         <p:nvSpPr>
-          <p:cNvPr id="11" name="TextBox 10"/>
+          <p:cNvPr id="12" name="Rectangle 11"/>
+          <p:cNvSpPr/>
+          <p:nvPr/>
+        </p:nvSpPr>
+        <p:spPr>
+          <a:xfrm>
+            <a:off x="4617720" y="2011680"/>
+            <a:ext cx="3017520" cy="128016"/>
+          </a:xfrm>
+          <a:prstGeom prst="rect">
+            <a:avLst/>
+          </a:prstGeom>
+          <a:solidFill>
+            <a:srgbClr val="E8801A"/>
+          </a:solidFill>
+          <a:ln>
+            <a:noFill/>
+          </a:ln>
+          <a:effectLst/>
+        </p:spPr>
+        <p:style>
+          <a:lnRef idx="1">
+            <a:schemeClr val="accent1"/>
+          </a:lnRef>
+          <a:fillRef idx="3">
+            <a:schemeClr val="accent1"/>
+          </a:fillRef>
+          <a:effectRef idx="2">
+            <a:schemeClr val="accent1"/>
+          </a:effectRef>
+          <a:fontRef idx="minor">
+            <a:schemeClr val="lt1"/>
+          </a:fontRef>
+        </p:style>
+        <p:txBody>
+          <a:bodyPr rtlCol="0" anchor="ctr"/>
+          <a:lstStyle/>
+          <a:p>
+            <a:pPr algn="ctr"/>
+          </a:p>
+        </p:txBody>
+      </p:sp>
+      <p:sp>
+        <p:nvSpPr>
+          <p:cNvPr id="13" name="TextBox 12"/>
           <p:cNvSpPr txBox="1"/>
           <p:nvPr/>
         </p:nvSpPr>
         <p:spPr>
           <a:xfrm>
-            <a:off x="4617720" y="2331720"/>
-            <a:ext cx="3017520" cy="1463040"/>
+            <a:off x="4617720" y="2377440"/>
+            <a:ext cx="3017520" cy="1371600"/>
           </a:xfrm>
           <a:prstGeom prst="rect">
             <a:avLst/>
@@ -8764,7 +11395,7 @@
           <a:p>
             <a:pPr algn="ctr"/>
             <a:r>
-              <a:rPr sz="6000" b="1" i="0">
+              <a:rPr sz="5800" b="1" i="0">
                 <a:solidFill>
                   <a:srgbClr val="1E2761"/>
                 </a:solidFill>
@@ -8777,13 +11408,13 @@
       </p:sp>
       <p:sp>
         <p:nvSpPr>
-          <p:cNvPr id="12" name="TextBox 11"/>
+          <p:cNvPr id="14" name="TextBox 13"/>
           <p:cNvSpPr txBox="1"/>
           <p:nvPr/>
         </p:nvSpPr>
         <p:spPr>
           <a:xfrm>
-            <a:off x="4846320" y="3611880"/>
+            <a:off x="4846320" y="3657600"/>
             <a:ext cx="2560320" cy="1005840"/>
           </a:xfrm>
           <a:prstGeom prst="rect">
@@ -8812,7 +11443,7 @@
       </p:sp>
       <p:sp>
         <p:nvSpPr>
-          <p:cNvPr id="13" name="Rounded Rectangle 12"/>
+          <p:cNvPr id="15" name="Rounded Rectangle 14"/>
           <p:cNvSpPr/>
           <p:nvPr/>
         </p:nvSpPr>
@@ -8858,14 +11489,58 @@
       </p:sp>
       <p:sp>
         <p:nvSpPr>
-          <p:cNvPr id="14" name="TextBox 13"/>
+          <p:cNvPr id="16" name="Rectangle 15"/>
+          <p:cNvSpPr/>
+          <p:nvPr/>
+        </p:nvSpPr>
+        <p:spPr>
+          <a:xfrm>
+            <a:off x="8412480" y="2011680"/>
+            <a:ext cx="3017520" cy="128016"/>
+          </a:xfrm>
+          <a:prstGeom prst="rect">
+            <a:avLst/>
+          </a:prstGeom>
+          <a:solidFill>
+            <a:srgbClr val="E8801A"/>
+          </a:solidFill>
+          <a:ln>
+            <a:noFill/>
+          </a:ln>
+          <a:effectLst/>
+        </p:spPr>
+        <p:style>
+          <a:lnRef idx="1">
+            <a:schemeClr val="accent1"/>
+          </a:lnRef>
+          <a:fillRef idx="3">
+            <a:schemeClr val="accent1"/>
+          </a:fillRef>
+          <a:effectRef idx="2">
+            <a:schemeClr val="accent1"/>
+          </a:effectRef>
+          <a:fontRef idx="minor">
+            <a:schemeClr val="lt1"/>
+          </a:fontRef>
+        </p:style>
+        <p:txBody>
+          <a:bodyPr rtlCol="0" anchor="ctr"/>
+          <a:lstStyle/>
+          <a:p>
+            <a:pPr algn="ctr"/>
+          </a:p>
+        </p:txBody>
+      </p:sp>
+      <p:sp>
+        <p:nvSpPr>
+          <p:cNvPr id="17" name="TextBox 16"/>
           <p:cNvSpPr txBox="1"/>
           <p:nvPr/>
         </p:nvSpPr>
         <p:spPr>
           <a:xfrm>
-            <a:off x="8412480" y="2331720"/>
-            <a:ext cx="3017520" cy="1463040"/>
+            <a:off x="8412480" y="2377440"/>
+            <a:ext cx="3017520" cy="1371600"/>
           </a:xfrm>
           <a:prstGeom prst="rect">
             <a:avLst/>
@@ -8880,7 +11555,7 @@
           <a:p>
             <a:pPr algn="ctr"/>
             <a:r>
-              <a:rPr sz="6000" b="1" i="0">
+              <a:rPr sz="5800" b="1" i="0">
                 <a:solidFill>
                   <a:srgbClr val="1E2761"/>
                 </a:solidFill>
@@ -8893,13 +11568,13 @@
       </p:sp>
       <p:sp>
         <p:nvSpPr>
-          <p:cNvPr id="15" name="TextBox 14"/>
+          <p:cNvPr id="18" name="TextBox 17"/>
           <p:cNvSpPr txBox="1"/>
           <p:nvPr/>
         </p:nvSpPr>
         <p:spPr>
           <a:xfrm>
-            <a:off x="8641080" y="3611880"/>
+            <a:off x="8641080" y="3657600"/>
             <a:ext cx="2560320" cy="1005840"/>
           </a:xfrm>
           <a:prstGeom prst="rect">
@@ -8931,6 +11606,3108 @@
   <p:clrMapOvr>
     <a:masterClrMapping/>
   </p:clrMapOvr>
+  <mc:AlternateContent xmlns:mc="http://schemas.openxmlformats.org/markup-compatibility/2006">
+    <mc:Choice xmlns:p14="http://schemas.microsoft.com/office/powerpoint/2010/main" Requires="p14">
+      <p:transition spd="med" p14:dur="700">
+        <p14:cube dir="r"/>
+      </p:transition>
+    </mc:Choice>
+    <mc:Fallback>
+      <p:transition spd="med">
+        <p:push dir="r"/>
+      </p:transition>
+    </mc:Fallback>
+  </mc:AlternateContent>
+</p:sld>
+</file>
+
+<file path=ppt/slides/slide20.xml><?xml version="1.0" encoding="utf-8"?>
+<p:sld xmlns:a="http://schemas.openxmlformats.org/drawingml/2006/main" xmlns:p="http://schemas.openxmlformats.org/presentationml/2006/main" xmlns:r="http://schemas.openxmlformats.org/officeDocument/2006/relationships">
+  <p:cSld>
+    <p:spTree>
+      <p:nvGrpSpPr>
+        <p:cNvPr id="1" name=""/>
+        <p:cNvGrpSpPr/>
+        <p:nvPr/>
+      </p:nvGrpSpPr>
+      <p:grpSpPr/>
+      <p:sp>
+        <p:nvSpPr>
+          <p:cNvPr id="2" name="Rectangle 1"/>
+          <p:cNvSpPr/>
+          <p:nvPr/>
+        </p:nvSpPr>
+        <p:spPr>
+          <a:xfrm>
+            <a:off x="0" y="0"/>
+            <a:ext cx="12191695" cy="6858000"/>
+          </a:xfrm>
+          <a:prstGeom prst="rect">
+            <a:avLst/>
+          </a:prstGeom>
+          <a:solidFill>
+            <a:srgbClr val="FFFFFF"/>
+          </a:solidFill>
+          <a:ln>
+            <a:noFill/>
+          </a:ln>
+          <a:effectLst/>
+        </p:spPr>
+        <p:style>
+          <a:lnRef idx="1">
+            <a:schemeClr val="accent1"/>
+          </a:lnRef>
+          <a:fillRef idx="3">
+            <a:schemeClr val="accent1"/>
+          </a:fillRef>
+          <a:effectRef idx="2">
+            <a:schemeClr val="accent1"/>
+          </a:effectRef>
+          <a:fontRef idx="minor">
+            <a:schemeClr val="lt1"/>
+          </a:fontRef>
+        </p:style>
+        <p:txBody>
+          <a:bodyPr rtlCol="0" anchor="ctr"/>
+          <a:lstStyle/>
+          <a:p>
+            <a:pPr algn="ctr"/>
+          </a:p>
+        </p:txBody>
+      </p:sp>
+      <p:sp>
+        <p:nvSpPr>
+          <p:cNvPr id="3" name="TextBox 2"/>
+          <p:cNvSpPr txBox="1"/>
+          <p:nvPr/>
+        </p:nvSpPr>
+        <p:spPr>
+          <a:xfrm>
+            <a:off x="10607040" y="320040"/>
+            <a:ext cx="1371600" cy="365760"/>
+          </a:xfrm>
+          <a:prstGeom prst="rect">
+            <a:avLst/>
+          </a:prstGeom>
+          <a:noFill/>
+        </p:spPr>
+        <p:txBody>
+          <a:bodyPr wrap="square">
+            <a:spAutoFit/>
+          </a:bodyPr>
+          <a:lstStyle/>
+          <a:p>
+            <a:pPr algn="r"/>
+            <a:r>
+              <a:rPr sz="1000" b="1" i="0">
+                <a:solidFill>
+                  <a:srgbClr val="64748B"/>
+                </a:solidFill>
+                <a:latin typeface="Montserrat"/>
+              </a:rPr>
+              <a:t>020 / 025</a:t>
+            </a:r>
+          </a:p>
+        </p:txBody>
+      </p:sp>
+      <p:sp>
+        <p:nvSpPr>
+          <p:cNvPr id="4" name="TextBox 3"/>
+          <p:cNvSpPr txBox="1"/>
+          <p:nvPr/>
+        </p:nvSpPr>
+        <p:spPr>
+          <a:xfrm>
+            <a:off x="457200" y="6419088"/>
+            <a:ext cx="8229600" cy="365760"/>
+          </a:xfrm>
+          <a:prstGeom prst="rect">
+            <a:avLst/>
+          </a:prstGeom>
+          <a:noFill/>
+        </p:spPr>
+        <p:txBody>
+          <a:bodyPr wrap="square">
+            <a:spAutoFit/>
+          </a:bodyPr>
+          <a:lstStyle/>
+          <a:p>
+            <a:r>
+              <a:rPr sz="900" b="0" i="0">
+                <a:solidFill>
+                  <a:srgbClr val="64748B"/>
+                </a:solidFill>
+                <a:latin typeface="Montserrat"/>
+              </a:rPr>
+              <a:t>Curso Gas B · Tema 04 · ITC-ICG 07 · Diseño y ejecución</a:t>
+            </a:r>
+          </a:p>
+        </p:txBody>
+      </p:sp>
+      <p:sp>
+        <p:nvSpPr>
+          <p:cNvPr id="5" name="TextBox 4"/>
+          <p:cNvSpPr txBox="1"/>
+          <p:nvPr/>
+        </p:nvSpPr>
+        <p:spPr>
+          <a:xfrm>
+            <a:off x="822960" y="411480"/>
+            <a:ext cx="10058400" cy="365760"/>
+          </a:xfrm>
+          <a:prstGeom prst="rect">
+            <a:avLst/>
+          </a:prstGeom>
+          <a:noFill/>
+        </p:spPr>
+        <p:txBody>
+          <a:bodyPr wrap="square">
+            <a:spAutoFit/>
+          </a:bodyPr>
+          <a:lstStyle/>
+          <a:p>
+            <a:r>
+              <a:rPr sz="1300" b="1" i="0">
+                <a:solidFill>
+                  <a:srgbClr val="E8801A"/>
+                </a:solidFill>
+                <a:latin typeface="Montserrat"/>
+              </a:rPr>
+              <a:t>APARTADO 2 · NORMA SEGÚN PRESIÓN</a:t>
+            </a:r>
+          </a:p>
+        </p:txBody>
+      </p:sp>
+      <p:sp>
+        <p:nvSpPr>
+          <p:cNvPr id="6" name="TextBox 5"/>
+          <p:cNvSpPr txBox="1"/>
+          <p:nvPr/>
+        </p:nvSpPr>
+        <p:spPr>
+          <a:xfrm>
+            <a:off x="822960" y="777240"/>
+            <a:ext cx="10515600" cy="822960"/>
+          </a:xfrm>
+          <a:prstGeom prst="rect">
+            <a:avLst/>
+          </a:prstGeom>
+          <a:noFill/>
+        </p:spPr>
+        <p:txBody>
+          <a:bodyPr wrap="square">
+            <a:spAutoFit/>
+          </a:bodyPr>
+          <a:lstStyle/>
+          <a:p>
+            <a:r>
+              <a:rPr sz="2600" b="1" i="0">
+                <a:solidFill>
+                  <a:srgbClr val="1E2761"/>
+                </a:solidFill>
+                <a:latin typeface="Montserrat"/>
+              </a:rPr>
+              <a:t>Norma UNE según la presión máxima de operación</a:t>
+            </a:r>
+          </a:p>
+        </p:txBody>
+      </p:sp>
+      <p:sp>
+        <p:nvSpPr>
+          <p:cNvPr id="7" name="Rectangle 6"/>
+          <p:cNvSpPr/>
+          <p:nvPr/>
+        </p:nvSpPr>
+        <p:spPr>
+          <a:xfrm>
+            <a:off x="868680" y="1481328"/>
+            <a:ext cx="2011680" cy="73152"/>
+          </a:xfrm>
+          <a:prstGeom prst="rect">
+            <a:avLst/>
+          </a:prstGeom>
+          <a:solidFill>
+            <a:srgbClr val="E8801A"/>
+          </a:solidFill>
+          <a:ln>
+            <a:noFill/>
+          </a:ln>
+          <a:effectLst/>
+        </p:spPr>
+        <p:style>
+          <a:lnRef idx="1">
+            <a:schemeClr val="accent1"/>
+          </a:lnRef>
+          <a:fillRef idx="3">
+            <a:schemeClr val="accent1"/>
+          </a:fillRef>
+          <a:effectRef idx="2">
+            <a:schemeClr val="accent1"/>
+          </a:effectRef>
+          <a:fontRef idx="minor">
+            <a:schemeClr val="lt1"/>
+          </a:fontRef>
+        </p:style>
+        <p:txBody>
+          <a:bodyPr rtlCol="0" anchor="ctr"/>
+          <a:lstStyle/>
+          <a:p>
+            <a:pPr algn="ctr"/>
+          </a:p>
+        </p:txBody>
+      </p:sp>
+      <p:graphicFrame>
+        <p:nvGraphicFramePr>
+          <p:cNvPr id="8" name="Table 7"/>
+          <p:cNvGraphicFramePr>
+            <a:graphicFrameLocks noGrp="1"/>
+          </p:cNvGraphicFramePr>
+          <p:nvPr/>
+        </p:nvGraphicFramePr>
+        <p:xfrm>
+          <a:off x="548640" y="1783080"/>
+          <a:ext cx="11091672" cy="4023360"/>
+        </p:xfrm>
+        <a:graphic>
+          <a:graphicData uri="http://schemas.openxmlformats.org/drawingml/2006/table">
+            <a:tbl>
+              <a:tblPr firstRow="1" bandRow="1">
+                <a:tableStyleId>{5C22544A-7EE6-4342-B048-85BDC9FD1C3A}</a:tableStyleId>
+              </a:tblPr>
+              <a:tblGrid>
+                <a:gridCol w="5545836"/>
+                <a:gridCol w="5545836"/>
+              </a:tblGrid>
+              <a:tr h="1341120">
+                <a:tc>
+                  <a:txBody>
+                    <a:bodyPr/>
+                    <a:lstStyle/>
+                    <a:p>
+                      <a:r>
+                        <a:rPr sz="1200" b="1" i="0">
+                          <a:solidFill>
+                            <a:srgbClr val="FFFFFF"/>
+                          </a:solidFill>
+                          <a:latin typeface="Montserrat"/>
+                        </a:rPr>
+                        <a:t>Presión máxima de operación (MOP)</a:t>
+                      </a:r>
+                    </a:p>
+                  </a:txBody>
+                  <a:tcPr>
+                    <a:solidFill>
+                      <a:srgbClr val="1E2761"/>
+                    </a:solidFill>
+                  </a:tcPr>
+                </a:tc>
+                <a:tc>
+                  <a:txBody>
+                    <a:bodyPr/>
+                    <a:lstStyle/>
+                    <a:p>
+                      <a:r>
+                        <a:rPr sz="1200" b="1" i="0">
+                          <a:solidFill>
+                            <a:srgbClr val="FFFFFF"/>
+                          </a:solidFill>
+                          <a:latin typeface="Montserrat"/>
+                        </a:rPr>
+                        <a:t>Norma que aplica</a:t>
+                      </a:r>
+                    </a:p>
+                  </a:txBody>
+                  <a:tcPr>
+                    <a:solidFill>
+                      <a:srgbClr val="1E2761"/>
+                    </a:solidFill>
+                  </a:tcPr>
+                </a:tc>
+              </a:tr>
+              <a:tr h="1341120">
+                <a:tc>
+                  <a:txBody>
+                    <a:bodyPr/>
+                    <a:lstStyle/>
+                    <a:p>
+                      <a:r>
+                        <a:rPr sz="1200" b="0" i="0">
+                          <a:solidFill>
+                            <a:srgbClr val="1B2330"/>
+                          </a:solidFill>
+                          <a:latin typeface="Montserrat"/>
+                        </a:rPr>
+                        <a:t>Hasta 5 bar</a:t>
+                      </a:r>
+                    </a:p>
+                  </a:txBody>
+                  <a:tcPr>
+                    <a:solidFill>
+                      <a:srgbClr val="F6F8FC"/>
+                    </a:solidFill>
+                  </a:tcPr>
+                </a:tc>
+                <a:tc>
+                  <a:txBody>
+                    <a:bodyPr/>
+                    <a:lstStyle/>
+                    <a:p>
+                      <a:r>
+                        <a:rPr sz="1200" b="0" i="0">
+                          <a:solidFill>
+                            <a:srgbClr val="1B2330"/>
+                          </a:solidFill>
+                          <a:latin typeface="Montserrat"/>
+                        </a:rPr>
+                        <a:t>UNE 60670</a:t>
+                      </a:r>
+                    </a:p>
+                  </a:txBody>
+                  <a:tcPr>
+                    <a:solidFill>
+                      <a:srgbClr val="F6F8FC"/>
+                    </a:solidFill>
+                  </a:tcPr>
+                </a:tc>
+              </a:tr>
+              <a:tr h="1341120">
+                <a:tc>
+                  <a:txBody>
+                    <a:bodyPr/>
+                    <a:lstStyle/>
+                    <a:p>
+                      <a:r>
+                        <a:rPr sz="1200" b="0" i="0">
+                          <a:solidFill>
+                            <a:srgbClr val="1B2330"/>
+                          </a:solidFill>
+                          <a:latin typeface="Montserrat"/>
+                        </a:rPr>
+                        <a:t>Superior a 5 bar</a:t>
+                      </a:r>
+                    </a:p>
+                  </a:txBody>
+                  <a:tcPr>
+                    <a:solidFill>
+                      <a:srgbClr val="FFFFFF"/>
+                    </a:solidFill>
+                  </a:tcPr>
+                </a:tc>
+                <a:tc>
+                  <a:txBody>
+                    <a:bodyPr/>
+                    <a:lstStyle/>
+                    <a:p>
+                      <a:r>
+                        <a:rPr sz="1200" b="0" i="0">
+                          <a:solidFill>
+                            <a:srgbClr val="1B2330"/>
+                          </a:solidFill>
+                          <a:latin typeface="Montserrat"/>
+                        </a:rPr>
+                        <a:t>UNE 60620</a:t>
+                      </a:r>
+                    </a:p>
+                  </a:txBody>
+                  <a:tcPr>
+                    <a:solidFill>
+                      <a:srgbClr val="FFFFFF"/>
+                    </a:solidFill>
+                  </a:tcPr>
+                </a:tc>
+              </a:tr>
+            </a:tbl>
+          </a:graphicData>
+        </a:graphic>
+      </p:graphicFrame>
+      <p:sp>
+        <p:nvSpPr>
+          <p:cNvPr id="9" name="Rounded Rectangle 8"/>
+          <p:cNvSpPr/>
+          <p:nvPr/>
+        </p:nvSpPr>
+        <p:spPr>
+          <a:xfrm>
+            <a:off x="548640" y="5943600"/>
+            <a:ext cx="11091672" cy="384048"/>
+          </a:xfrm>
+          <a:prstGeom prst="roundRect">
+            <a:avLst/>
+          </a:prstGeom>
+          <a:solidFill>
+            <a:srgbClr val="F3F6FB"/>
+          </a:solidFill>
+          <a:ln w="12700">
+            <a:solidFill>
+              <a:srgbClr val="D7DEEA"/>
+            </a:solidFill>
+          </a:ln>
+          <a:effectLst/>
+        </p:spPr>
+        <p:style>
+          <a:lnRef idx="1">
+            <a:schemeClr val="accent1"/>
+          </a:lnRef>
+          <a:fillRef idx="3">
+            <a:schemeClr val="accent1"/>
+          </a:fillRef>
+          <a:effectRef idx="2">
+            <a:schemeClr val="accent1"/>
+          </a:effectRef>
+          <a:fontRef idx="minor">
+            <a:schemeClr val="lt1"/>
+          </a:fontRef>
+        </p:style>
+        <p:txBody>
+          <a:bodyPr rtlCol="0" anchor="ctr"/>
+          <a:lstStyle/>
+          <a:p>
+            <a:pPr algn="ctr"/>
+          </a:p>
+        </p:txBody>
+      </p:sp>
+      <p:sp>
+        <p:nvSpPr>
+          <p:cNvPr id="10" name="TextBox 9"/>
+          <p:cNvSpPr txBox="1"/>
+          <p:nvPr/>
+        </p:nvSpPr>
+        <p:spPr>
+          <a:xfrm>
+            <a:off x="731520" y="5961888"/>
+            <a:ext cx="10789920" cy="365760"/>
+          </a:xfrm>
+          <a:prstGeom prst="rect">
+            <a:avLst/>
+          </a:prstGeom>
+          <a:noFill/>
+        </p:spPr>
+        <p:txBody>
+          <a:bodyPr wrap="square">
+            <a:spAutoFit/>
+          </a:bodyPr>
+          <a:lstStyle/>
+          <a:p>
+            <a:r>
+              <a:rPr sz="1100" b="1" i="0">
+                <a:solidFill>
+                  <a:srgbClr val="E8801A"/>
+                </a:solidFill>
+                <a:latin typeface="Montserrat"/>
+              </a:rPr>
+              <a:t>Qué significa:  </a:t>
+            </a:r>
+            <a:r>
+              <a:rPr sz="1100" b="0" i="0">
+                <a:solidFill>
+                  <a:srgbClr val="1B2330"/>
+                </a:solidFill>
+                <a:latin typeface="Montserrat"/>
+              </a:rPr>
+              <a:t>La MOP es la presión más alta a la que la instalación trabaja de forma continua y normal.</a:t>
+            </a:r>
+          </a:p>
+        </p:txBody>
+      </p:sp>
+    </p:spTree>
+  </p:cSld>
+  <p:clrMapOvr>
+    <a:masterClrMapping/>
+  </p:clrMapOvr>
+  <mc:AlternateContent xmlns:mc="http://schemas.openxmlformats.org/markup-compatibility/2006">
+    <mc:Choice xmlns:p14="http://schemas.microsoft.com/office/powerpoint/2010/main" Requires="p14">
+      <p:transition spd="med" p14:dur="700">
+        <p14:cube dir="r"/>
+      </p:transition>
+    </mc:Choice>
+    <mc:Fallback>
+      <p:transition spd="med">
+        <p:push dir="r"/>
+      </p:transition>
+    </mc:Fallback>
+  </mc:AlternateContent>
+</p:sld>
+</file>
+
+<file path=ppt/slides/slide21.xml><?xml version="1.0" encoding="utf-8"?>
+<p:sld xmlns:a="http://schemas.openxmlformats.org/drawingml/2006/main" xmlns:p="http://schemas.openxmlformats.org/presentationml/2006/main" xmlns:r="http://schemas.openxmlformats.org/officeDocument/2006/relationships">
+  <p:cSld>
+    <p:spTree>
+      <p:nvGrpSpPr>
+        <p:cNvPr id="1" name=""/>
+        <p:cNvGrpSpPr/>
+        <p:nvPr/>
+      </p:nvGrpSpPr>
+      <p:grpSpPr/>
+      <p:sp>
+        <p:nvSpPr>
+          <p:cNvPr id="2" name="Rectangle 1"/>
+          <p:cNvSpPr/>
+          <p:nvPr/>
+        </p:nvSpPr>
+        <p:spPr>
+          <a:xfrm>
+            <a:off x="0" y="0"/>
+            <a:ext cx="12191695" cy="6858000"/>
+          </a:xfrm>
+          <a:prstGeom prst="rect">
+            <a:avLst/>
+          </a:prstGeom>
+          <a:solidFill>
+            <a:srgbClr val="FFFFFF"/>
+          </a:solidFill>
+          <a:ln>
+            <a:noFill/>
+          </a:ln>
+          <a:effectLst/>
+        </p:spPr>
+        <p:style>
+          <a:lnRef idx="1">
+            <a:schemeClr val="accent1"/>
+          </a:lnRef>
+          <a:fillRef idx="3">
+            <a:schemeClr val="accent1"/>
+          </a:fillRef>
+          <a:effectRef idx="2">
+            <a:schemeClr val="accent1"/>
+          </a:effectRef>
+          <a:fontRef idx="minor">
+            <a:schemeClr val="lt1"/>
+          </a:fontRef>
+        </p:style>
+        <p:txBody>
+          <a:bodyPr rtlCol="0" anchor="ctr"/>
+          <a:lstStyle/>
+          <a:p>
+            <a:pPr algn="ctr"/>
+          </a:p>
+        </p:txBody>
+      </p:sp>
+      <p:sp>
+        <p:nvSpPr>
+          <p:cNvPr id="3" name="TextBox 2"/>
+          <p:cNvSpPr txBox="1"/>
+          <p:nvPr/>
+        </p:nvSpPr>
+        <p:spPr>
+          <a:xfrm>
+            <a:off x="10607040" y="320040"/>
+            <a:ext cx="1371600" cy="365760"/>
+          </a:xfrm>
+          <a:prstGeom prst="rect">
+            <a:avLst/>
+          </a:prstGeom>
+          <a:noFill/>
+        </p:spPr>
+        <p:txBody>
+          <a:bodyPr wrap="square">
+            <a:spAutoFit/>
+          </a:bodyPr>
+          <a:lstStyle/>
+          <a:p>
+            <a:pPr algn="r"/>
+            <a:r>
+              <a:rPr sz="1000" b="1" i="0">
+                <a:solidFill>
+                  <a:srgbClr val="64748B"/>
+                </a:solidFill>
+                <a:latin typeface="Montserrat"/>
+              </a:rPr>
+              <a:t>021 / 025</a:t>
+            </a:r>
+          </a:p>
+        </p:txBody>
+      </p:sp>
+      <p:sp>
+        <p:nvSpPr>
+          <p:cNvPr id="4" name="TextBox 3"/>
+          <p:cNvSpPr txBox="1"/>
+          <p:nvPr/>
+        </p:nvSpPr>
+        <p:spPr>
+          <a:xfrm>
+            <a:off x="457200" y="6419088"/>
+            <a:ext cx="8229600" cy="365760"/>
+          </a:xfrm>
+          <a:prstGeom prst="rect">
+            <a:avLst/>
+          </a:prstGeom>
+          <a:noFill/>
+        </p:spPr>
+        <p:txBody>
+          <a:bodyPr wrap="square">
+            <a:spAutoFit/>
+          </a:bodyPr>
+          <a:lstStyle/>
+          <a:p>
+            <a:r>
+              <a:rPr sz="900" b="0" i="0">
+                <a:solidFill>
+                  <a:srgbClr val="64748B"/>
+                </a:solidFill>
+                <a:latin typeface="Montserrat"/>
+              </a:rPr>
+              <a:t>Curso Gas B · Tema 04 · ITC-ICG 07 · Diseño y ejecución</a:t>
+            </a:r>
+          </a:p>
+        </p:txBody>
+      </p:sp>
+      <p:sp>
+        <p:nvSpPr>
+          <p:cNvPr id="5" name="Rectangle 4"/>
+          <p:cNvSpPr/>
+          <p:nvPr/>
+        </p:nvSpPr>
+        <p:spPr>
+          <a:xfrm>
+            <a:off x="0" y="0"/>
+            <a:ext cx="12191695" cy="1143000"/>
+          </a:xfrm>
+          <a:prstGeom prst="rect">
+            <a:avLst/>
+          </a:prstGeom>
+          <a:solidFill>
+            <a:srgbClr val="E8801A"/>
+          </a:solidFill>
+          <a:ln>
+            <a:noFill/>
+          </a:ln>
+          <a:effectLst/>
+        </p:spPr>
+        <p:style>
+          <a:lnRef idx="1">
+            <a:schemeClr val="accent1"/>
+          </a:lnRef>
+          <a:fillRef idx="3">
+            <a:schemeClr val="accent1"/>
+          </a:fillRef>
+          <a:effectRef idx="2">
+            <a:schemeClr val="accent1"/>
+          </a:effectRef>
+          <a:fontRef idx="minor">
+            <a:schemeClr val="lt1"/>
+          </a:fontRef>
+        </p:style>
+        <p:txBody>
+          <a:bodyPr rtlCol="0" anchor="ctr"/>
+          <a:lstStyle/>
+          <a:p>
+            <a:pPr algn="ctr"/>
+          </a:p>
+        </p:txBody>
+      </p:sp>
+      <p:sp>
+        <p:nvSpPr>
+          <p:cNvPr id="6" name="TextBox 5"/>
+          <p:cNvSpPr txBox="1"/>
+          <p:nvPr/>
+        </p:nvSpPr>
+        <p:spPr>
+          <a:xfrm>
+            <a:off x="822960" y="274320"/>
+            <a:ext cx="10515600" cy="640080"/>
+          </a:xfrm>
+          <a:prstGeom prst="rect">
+            <a:avLst/>
+          </a:prstGeom>
+          <a:noFill/>
+        </p:spPr>
+        <p:txBody>
+          <a:bodyPr wrap="square">
+            <a:spAutoFit/>
+          </a:bodyPr>
+          <a:lstStyle/>
+          <a:p>
+            <a:r>
+              <a:rPr sz="2400" b="1" i="0">
+                <a:solidFill>
+                  <a:srgbClr val="FFFFFF"/>
+                </a:solidFill>
+                <a:latin typeface="Montserrat"/>
+              </a:rPr>
+              <a:t>⚡  PREGUNTA RÁPIDA</a:t>
+            </a:r>
+          </a:p>
+        </p:txBody>
+      </p:sp>
+      <p:sp>
+        <p:nvSpPr>
+          <p:cNvPr id="7" name="TextBox 6"/>
+          <p:cNvSpPr txBox="1"/>
+          <p:nvPr/>
+        </p:nvSpPr>
+        <p:spPr>
+          <a:xfrm>
+            <a:off x="822960" y="1508760"/>
+            <a:ext cx="10515600" cy="1371600"/>
+          </a:xfrm>
+          <a:prstGeom prst="rect">
+            <a:avLst/>
+          </a:prstGeom>
+          <a:noFill/>
+        </p:spPr>
+        <p:txBody>
+          <a:bodyPr wrap="square">
+            <a:spAutoFit/>
+          </a:bodyPr>
+          <a:lstStyle/>
+          <a:p>
+            <a:r>
+              <a:rPr sz="2400" b="1" i="0">
+                <a:solidFill>
+                  <a:srgbClr val="1E2761"/>
+                </a:solidFill>
+                <a:latin typeface="Montserrat"/>
+              </a:rPr>
+              <a:t>Una instalación receptora trabaja a 6 bar. ¿Qué norma UNE le corresponde?</a:t>
+            </a:r>
+          </a:p>
+        </p:txBody>
+      </p:sp>
+      <p:sp>
+        <p:nvSpPr>
+          <p:cNvPr id="8" name="Rounded Rectangle 7"/>
+          <p:cNvSpPr/>
+          <p:nvPr/>
+        </p:nvSpPr>
+        <p:spPr>
+          <a:xfrm>
+            <a:off x="822960" y="3291840"/>
+            <a:ext cx="4983480" cy="1143000"/>
+          </a:xfrm>
+          <a:prstGeom prst="roundRect">
+            <a:avLst/>
+          </a:prstGeom>
+          <a:solidFill>
+            <a:srgbClr val="F3F6FB"/>
+          </a:solidFill>
+          <a:ln w="12700">
+            <a:solidFill>
+              <a:srgbClr val="C7D2E6"/>
+            </a:solidFill>
+          </a:ln>
+          <a:effectLst/>
+        </p:spPr>
+        <p:style>
+          <a:lnRef idx="1">
+            <a:schemeClr val="accent1"/>
+          </a:lnRef>
+          <a:fillRef idx="3">
+            <a:schemeClr val="accent1"/>
+          </a:fillRef>
+          <a:effectRef idx="2">
+            <a:schemeClr val="accent1"/>
+          </a:effectRef>
+          <a:fontRef idx="minor">
+            <a:schemeClr val="lt1"/>
+          </a:fontRef>
+        </p:style>
+        <p:txBody>
+          <a:bodyPr rtlCol="0" anchor="ctr"/>
+          <a:lstStyle/>
+          <a:p>
+            <a:pPr algn="ctr"/>
+          </a:p>
+        </p:txBody>
+      </p:sp>
+      <p:sp>
+        <p:nvSpPr>
+          <p:cNvPr id="9" name="Rectangle 8"/>
+          <p:cNvSpPr/>
+          <p:nvPr/>
+        </p:nvSpPr>
+        <p:spPr>
+          <a:xfrm>
+            <a:off x="822960" y="3291840"/>
+            <a:ext cx="640080" cy="1143000"/>
+          </a:xfrm>
+          <a:prstGeom prst="rect">
+            <a:avLst/>
+          </a:prstGeom>
+          <a:solidFill>
+            <a:srgbClr val="1E2761"/>
+          </a:solidFill>
+          <a:ln>
+            <a:noFill/>
+          </a:ln>
+          <a:effectLst/>
+        </p:spPr>
+        <p:style>
+          <a:lnRef idx="1">
+            <a:schemeClr val="accent1"/>
+          </a:lnRef>
+          <a:fillRef idx="3">
+            <a:schemeClr val="accent1"/>
+          </a:fillRef>
+          <a:effectRef idx="2">
+            <a:schemeClr val="accent1"/>
+          </a:effectRef>
+          <a:fontRef idx="minor">
+            <a:schemeClr val="lt1"/>
+          </a:fontRef>
+        </p:style>
+        <p:txBody>
+          <a:bodyPr rtlCol="0" anchor="ctr"/>
+          <a:lstStyle/>
+          <a:p>
+            <a:pPr algn="ctr"/>
+          </a:p>
+        </p:txBody>
+      </p:sp>
+      <p:sp>
+        <p:nvSpPr>
+          <p:cNvPr id="10" name="TextBox 9"/>
+          <p:cNvSpPr txBox="1"/>
+          <p:nvPr/>
+        </p:nvSpPr>
+        <p:spPr>
+          <a:xfrm>
+            <a:off x="822960" y="3611880"/>
+            <a:ext cx="640080" cy="548640"/>
+          </a:xfrm>
+          <a:prstGeom prst="rect">
+            <a:avLst/>
+          </a:prstGeom>
+          <a:noFill/>
+        </p:spPr>
+        <p:txBody>
+          <a:bodyPr wrap="square">
+            <a:spAutoFit/>
+          </a:bodyPr>
+          <a:lstStyle/>
+          <a:p>
+            <a:pPr algn="ctr"/>
+            <a:r>
+              <a:rPr sz="2200" b="1" i="0">
+                <a:solidFill>
+                  <a:srgbClr val="FFFFFF"/>
+                </a:solidFill>
+                <a:latin typeface="Montserrat"/>
+              </a:rPr>
+              <a:t>A</a:t>
+            </a:r>
+          </a:p>
+        </p:txBody>
+      </p:sp>
+      <p:sp>
+        <p:nvSpPr>
+          <p:cNvPr id="11" name="TextBox 10"/>
+          <p:cNvSpPr txBox="1"/>
+          <p:nvPr/>
+        </p:nvSpPr>
+        <p:spPr>
+          <a:xfrm>
+            <a:off x="1600200" y="3474720"/>
+            <a:ext cx="4114800" cy="868680"/>
+          </a:xfrm>
+          <a:prstGeom prst="rect">
+            <a:avLst/>
+          </a:prstGeom>
+          <a:noFill/>
+        </p:spPr>
+        <p:txBody>
+          <a:bodyPr wrap="square">
+            <a:spAutoFit/>
+          </a:bodyPr>
+          <a:lstStyle/>
+          <a:p>
+            <a:r>
+              <a:rPr sz="1400" b="0" i="0">
+                <a:solidFill>
+                  <a:srgbClr val="1B2330"/>
+                </a:solidFill>
+                <a:latin typeface="Montserrat"/>
+              </a:rPr>
+              <a:t>UNE 60670</a:t>
+            </a:r>
+          </a:p>
+        </p:txBody>
+      </p:sp>
+      <p:sp>
+        <p:nvSpPr>
+          <p:cNvPr id="12" name="Rounded Rectangle 11"/>
+          <p:cNvSpPr/>
+          <p:nvPr/>
+        </p:nvSpPr>
+        <p:spPr>
+          <a:xfrm>
+            <a:off x="6355080" y="3291840"/>
+            <a:ext cx="4983480" cy="1143000"/>
+          </a:xfrm>
+          <a:prstGeom prst="roundRect">
+            <a:avLst/>
+          </a:prstGeom>
+          <a:solidFill>
+            <a:srgbClr val="F3F6FB"/>
+          </a:solidFill>
+          <a:ln w="12700">
+            <a:solidFill>
+              <a:srgbClr val="C7D2E6"/>
+            </a:solidFill>
+          </a:ln>
+          <a:effectLst/>
+        </p:spPr>
+        <p:style>
+          <a:lnRef idx="1">
+            <a:schemeClr val="accent1"/>
+          </a:lnRef>
+          <a:fillRef idx="3">
+            <a:schemeClr val="accent1"/>
+          </a:fillRef>
+          <a:effectRef idx="2">
+            <a:schemeClr val="accent1"/>
+          </a:effectRef>
+          <a:fontRef idx="minor">
+            <a:schemeClr val="lt1"/>
+          </a:fontRef>
+        </p:style>
+        <p:txBody>
+          <a:bodyPr rtlCol="0" anchor="ctr"/>
+          <a:lstStyle/>
+          <a:p>
+            <a:pPr algn="ctr"/>
+          </a:p>
+        </p:txBody>
+      </p:sp>
+      <p:sp>
+        <p:nvSpPr>
+          <p:cNvPr id="13" name="Rectangle 12"/>
+          <p:cNvSpPr/>
+          <p:nvPr/>
+        </p:nvSpPr>
+        <p:spPr>
+          <a:xfrm>
+            <a:off x="6355080" y="3291840"/>
+            <a:ext cx="640080" cy="1143000"/>
+          </a:xfrm>
+          <a:prstGeom prst="rect">
+            <a:avLst/>
+          </a:prstGeom>
+          <a:solidFill>
+            <a:srgbClr val="1E2761"/>
+          </a:solidFill>
+          <a:ln>
+            <a:noFill/>
+          </a:ln>
+          <a:effectLst/>
+        </p:spPr>
+        <p:style>
+          <a:lnRef idx="1">
+            <a:schemeClr val="accent1"/>
+          </a:lnRef>
+          <a:fillRef idx="3">
+            <a:schemeClr val="accent1"/>
+          </a:fillRef>
+          <a:effectRef idx="2">
+            <a:schemeClr val="accent1"/>
+          </a:effectRef>
+          <a:fontRef idx="minor">
+            <a:schemeClr val="lt1"/>
+          </a:fontRef>
+        </p:style>
+        <p:txBody>
+          <a:bodyPr rtlCol="0" anchor="ctr"/>
+          <a:lstStyle/>
+          <a:p>
+            <a:pPr algn="ctr"/>
+          </a:p>
+        </p:txBody>
+      </p:sp>
+      <p:sp>
+        <p:nvSpPr>
+          <p:cNvPr id="14" name="TextBox 13"/>
+          <p:cNvSpPr txBox="1"/>
+          <p:nvPr/>
+        </p:nvSpPr>
+        <p:spPr>
+          <a:xfrm>
+            <a:off x="6355080" y="3611880"/>
+            <a:ext cx="640080" cy="548640"/>
+          </a:xfrm>
+          <a:prstGeom prst="rect">
+            <a:avLst/>
+          </a:prstGeom>
+          <a:noFill/>
+        </p:spPr>
+        <p:txBody>
+          <a:bodyPr wrap="square">
+            <a:spAutoFit/>
+          </a:bodyPr>
+          <a:lstStyle/>
+          <a:p>
+            <a:pPr algn="ctr"/>
+            <a:r>
+              <a:rPr sz="2200" b="1" i="0">
+                <a:solidFill>
+                  <a:srgbClr val="FFFFFF"/>
+                </a:solidFill>
+                <a:latin typeface="Montserrat"/>
+              </a:rPr>
+              <a:t>B</a:t>
+            </a:r>
+          </a:p>
+        </p:txBody>
+      </p:sp>
+      <p:sp>
+        <p:nvSpPr>
+          <p:cNvPr id="15" name="TextBox 14"/>
+          <p:cNvSpPr txBox="1"/>
+          <p:nvPr/>
+        </p:nvSpPr>
+        <p:spPr>
+          <a:xfrm>
+            <a:off x="7132320" y="3474720"/>
+            <a:ext cx="4114800" cy="868680"/>
+          </a:xfrm>
+          <a:prstGeom prst="rect">
+            <a:avLst/>
+          </a:prstGeom>
+          <a:noFill/>
+        </p:spPr>
+        <p:txBody>
+          <a:bodyPr wrap="square">
+            <a:spAutoFit/>
+          </a:bodyPr>
+          <a:lstStyle/>
+          <a:p>
+            <a:r>
+              <a:rPr sz="1400" b="0" i="0">
+                <a:solidFill>
+                  <a:srgbClr val="1B2330"/>
+                </a:solidFill>
+                <a:latin typeface="Montserrat"/>
+              </a:rPr>
+              <a:t>UNE 60601</a:t>
+            </a:r>
+          </a:p>
+        </p:txBody>
+      </p:sp>
+      <p:sp>
+        <p:nvSpPr>
+          <p:cNvPr id="16" name="Rounded Rectangle 15"/>
+          <p:cNvSpPr/>
+          <p:nvPr/>
+        </p:nvSpPr>
+        <p:spPr>
+          <a:xfrm>
+            <a:off x="822960" y="4617720"/>
+            <a:ext cx="4983480" cy="1143000"/>
+          </a:xfrm>
+          <a:prstGeom prst="roundRect">
+            <a:avLst/>
+          </a:prstGeom>
+          <a:solidFill>
+            <a:srgbClr val="F3F6FB"/>
+          </a:solidFill>
+          <a:ln w="12700">
+            <a:solidFill>
+              <a:srgbClr val="C7D2E6"/>
+            </a:solidFill>
+          </a:ln>
+          <a:effectLst/>
+        </p:spPr>
+        <p:style>
+          <a:lnRef idx="1">
+            <a:schemeClr val="accent1"/>
+          </a:lnRef>
+          <a:fillRef idx="3">
+            <a:schemeClr val="accent1"/>
+          </a:fillRef>
+          <a:effectRef idx="2">
+            <a:schemeClr val="accent1"/>
+          </a:effectRef>
+          <a:fontRef idx="minor">
+            <a:schemeClr val="lt1"/>
+          </a:fontRef>
+        </p:style>
+        <p:txBody>
+          <a:bodyPr rtlCol="0" anchor="ctr"/>
+          <a:lstStyle/>
+          <a:p>
+            <a:pPr algn="ctr"/>
+          </a:p>
+        </p:txBody>
+      </p:sp>
+      <p:sp>
+        <p:nvSpPr>
+          <p:cNvPr id="17" name="Rectangle 16"/>
+          <p:cNvSpPr/>
+          <p:nvPr/>
+        </p:nvSpPr>
+        <p:spPr>
+          <a:xfrm>
+            <a:off x="822960" y="4617720"/>
+            <a:ext cx="640080" cy="1143000"/>
+          </a:xfrm>
+          <a:prstGeom prst="rect">
+            <a:avLst/>
+          </a:prstGeom>
+          <a:solidFill>
+            <a:srgbClr val="1E2761"/>
+          </a:solidFill>
+          <a:ln>
+            <a:noFill/>
+          </a:ln>
+          <a:effectLst/>
+        </p:spPr>
+        <p:style>
+          <a:lnRef idx="1">
+            <a:schemeClr val="accent1"/>
+          </a:lnRef>
+          <a:fillRef idx="3">
+            <a:schemeClr val="accent1"/>
+          </a:fillRef>
+          <a:effectRef idx="2">
+            <a:schemeClr val="accent1"/>
+          </a:effectRef>
+          <a:fontRef idx="minor">
+            <a:schemeClr val="lt1"/>
+          </a:fontRef>
+        </p:style>
+        <p:txBody>
+          <a:bodyPr rtlCol="0" anchor="ctr"/>
+          <a:lstStyle/>
+          <a:p>
+            <a:pPr algn="ctr"/>
+          </a:p>
+        </p:txBody>
+      </p:sp>
+      <p:sp>
+        <p:nvSpPr>
+          <p:cNvPr id="18" name="TextBox 17"/>
+          <p:cNvSpPr txBox="1"/>
+          <p:nvPr/>
+        </p:nvSpPr>
+        <p:spPr>
+          <a:xfrm>
+            <a:off x="822960" y="4937760"/>
+            <a:ext cx="640080" cy="548640"/>
+          </a:xfrm>
+          <a:prstGeom prst="rect">
+            <a:avLst/>
+          </a:prstGeom>
+          <a:noFill/>
+        </p:spPr>
+        <p:txBody>
+          <a:bodyPr wrap="square">
+            <a:spAutoFit/>
+          </a:bodyPr>
+          <a:lstStyle/>
+          <a:p>
+            <a:pPr algn="ctr"/>
+            <a:r>
+              <a:rPr sz="2200" b="1" i="0">
+                <a:solidFill>
+                  <a:srgbClr val="FFFFFF"/>
+                </a:solidFill>
+                <a:latin typeface="Montserrat"/>
+              </a:rPr>
+              <a:t>C</a:t>
+            </a:r>
+          </a:p>
+        </p:txBody>
+      </p:sp>
+      <p:sp>
+        <p:nvSpPr>
+          <p:cNvPr id="19" name="TextBox 18"/>
+          <p:cNvSpPr txBox="1"/>
+          <p:nvPr/>
+        </p:nvSpPr>
+        <p:spPr>
+          <a:xfrm>
+            <a:off x="1600200" y="4800600"/>
+            <a:ext cx="4114800" cy="868680"/>
+          </a:xfrm>
+          <a:prstGeom prst="rect">
+            <a:avLst/>
+          </a:prstGeom>
+          <a:noFill/>
+        </p:spPr>
+        <p:txBody>
+          <a:bodyPr wrap="square">
+            <a:spAutoFit/>
+          </a:bodyPr>
+          <a:lstStyle/>
+          <a:p>
+            <a:r>
+              <a:rPr sz="1400" b="0" i="0">
+                <a:solidFill>
+                  <a:srgbClr val="1B2330"/>
+                </a:solidFill>
+                <a:latin typeface="Montserrat"/>
+              </a:rPr>
+              <a:t>UNE 60620</a:t>
+            </a:r>
+          </a:p>
+        </p:txBody>
+      </p:sp>
+      <p:sp>
+        <p:nvSpPr>
+          <p:cNvPr id="20" name="Rounded Rectangle 19"/>
+          <p:cNvSpPr/>
+          <p:nvPr/>
+        </p:nvSpPr>
+        <p:spPr>
+          <a:xfrm>
+            <a:off x="6355080" y="4617720"/>
+            <a:ext cx="4983480" cy="1143000"/>
+          </a:xfrm>
+          <a:prstGeom prst="roundRect">
+            <a:avLst/>
+          </a:prstGeom>
+          <a:solidFill>
+            <a:srgbClr val="F3F6FB"/>
+          </a:solidFill>
+          <a:ln w="12700">
+            <a:solidFill>
+              <a:srgbClr val="C7D2E6"/>
+            </a:solidFill>
+          </a:ln>
+          <a:effectLst/>
+        </p:spPr>
+        <p:style>
+          <a:lnRef idx="1">
+            <a:schemeClr val="accent1"/>
+          </a:lnRef>
+          <a:fillRef idx="3">
+            <a:schemeClr val="accent1"/>
+          </a:fillRef>
+          <a:effectRef idx="2">
+            <a:schemeClr val="accent1"/>
+          </a:effectRef>
+          <a:fontRef idx="minor">
+            <a:schemeClr val="lt1"/>
+          </a:fontRef>
+        </p:style>
+        <p:txBody>
+          <a:bodyPr rtlCol="0" anchor="ctr"/>
+          <a:lstStyle/>
+          <a:p>
+            <a:pPr algn="ctr"/>
+          </a:p>
+        </p:txBody>
+      </p:sp>
+      <p:sp>
+        <p:nvSpPr>
+          <p:cNvPr id="21" name="Rectangle 20"/>
+          <p:cNvSpPr/>
+          <p:nvPr/>
+        </p:nvSpPr>
+        <p:spPr>
+          <a:xfrm>
+            <a:off x="6355080" y="4617720"/>
+            <a:ext cx="640080" cy="1143000"/>
+          </a:xfrm>
+          <a:prstGeom prst="rect">
+            <a:avLst/>
+          </a:prstGeom>
+          <a:solidFill>
+            <a:srgbClr val="1E2761"/>
+          </a:solidFill>
+          <a:ln>
+            <a:noFill/>
+          </a:ln>
+          <a:effectLst/>
+        </p:spPr>
+        <p:style>
+          <a:lnRef idx="1">
+            <a:schemeClr val="accent1"/>
+          </a:lnRef>
+          <a:fillRef idx="3">
+            <a:schemeClr val="accent1"/>
+          </a:fillRef>
+          <a:effectRef idx="2">
+            <a:schemeClr val="accent1"/>
+          </a:effectRef>
+          <a:fontRef idx="minor">
+            <a:schemeClr val="lt1"/>
+          </a:fontRef>
+        </p:style>
+        <p:txBody>
+          <a:bodyPr rtlCol="0" anchor="ctr"/>
+          <a:lstStyle/>
+          <a:p>
+            <a:pPr algn="ctr"/>
+          </a:p>
+        </p:txBody>
+      </p:sp>
+      <p:sp>
+        <p:nvSpPr>
+          <p:cNvPr id="22" name="TextBox 21"/>
+          <p:cNvSpPr txBox="1"/>
+          <p:nvPr/>
+        </p:nvSpPr>
+        <p:spPr>
+          <a:xfrm>
+            <a:off x="6355080" y="4937760"/>
+            <a:ext cx="640080" cy="548640"/>
+          </a:xfrm>
+          <a:prstGeom prst="rect">
+            <a:avLst/>
+          </a:prstGeom>
+          <a:noFill/>
+        </p:spPr>
+        <p:txBody>
+          <a:bodyPr wrap="square">
+            <a:spAutoFit/>
+          </a:bodyPr>
+          <a:lstStyle/>
+          <a:p>
+            <a:pPr algn="ctr"/>
+            <a:r>
+              <a:rPr sz="2200" b="1" i="0">
+                <a:solidFill>
+                  <a:srgbClr val="FFFFFF"/>
+                </a:solidFill>
+                <a:latin typeface="Montserrat"/>
+              </a:rPr>
+              <a:t>D</a:t>
+            </a:r>
+          </a:p>
+        </p:txBody>
+      </p:sp>
+      <p:sp>
+        <p:nvSpPr>
+          <p:cNvPr id="23" name="TextBox 22"/>
+          <p:cNvSpPr txBox="1"/>
+          <p:nvPr/>
+        </p:nvSpPr>
+        <p:spPr>
+          <a:xfrm>
+            <a:off x="7132320" y="4800600"/>
+            <a:ext cx="4114800" cy="868680"/>
+          </a:xfrm>
+          <a:prstGeom prst="rect">
+            <a:avLst/>
+          </a:prstGeom>
+          <a:noFill/>
+        </p:spPr>
+        <p:txBody>
+          <a:bodyPr wrap="square">
+            <a:spAutoFit/>
+          </a:bodyPr>
+          <a:lstStyle/>
+          <a:p>
+            <a:r>
+              <a:rPr sz="1400" b="0" i="0">
+                <a:solidFill>
+                  <a:srgbClr val="1B2330"/>
+                </a:solidFill>
+                <a:latin typeface="Montserrat"/>
+              </a:rPr>
+              <a:t>UNE 60310</a:t>
+            </a:r>
+          </a:p>
+        </p:txBody>
+      </p:sp>
+    </p:spTree>
+  </p:cSld>
+  <p:clrMapOvr>
+    <a:masterClrMapping/>
+  </p:clrMapOvr>
+  <mc:AlternateContent xmlns:mc="http://schemas.openxmlformats.org/markup-compatibility/2006">
+    <mc:Choice xmlns:p14="http://schemas.microsoft.com/office/powerpoint/2010/main" Requires="p14">
+      <p:transition spd="med" p14:dur="700">
+        <p14:cube dir="l"/>
+      </p:transition>
+    </mc:Choice>
+    <mc:Fallback>
+      <p:transition spd="med">
+        <p:push dir="l"/>
+      </p:transition>
+    </mc:Fallback>
+  </mc:AlternateContent>
+</p:sld>
+</file>
+
+<file path=ppt/slides/slide22.xml><?xml version="1.0" encoding="utf-8"?>
+<p:sld xmlns:a="http://schemas.openxmlformats.org/drawingml/2006/main" xmlns:p="http://schemas.openxmlformats.org/presentationml/2006/main" xmlns:r="http://schemas.openxmlformats.org/officeDocument/2006/relationships">
+  <p:cSld>
+    <p:spTree>
+      <p:nvGrpSpPr>
+        <p:cNvPr id="1" name=""/>
+        <p:cNvGrpSpPr/>
+        <p:nvPr/>
+      </p:nvGrpSpPr>
+      <p:grpSpPr/>
+      <p:sp>
+        <p:nvSpPr>
+          <p:cNvPr id="2" name="Rectangle 1"/>
+          <p:cNvSpPr/>
+          <p:nvPr/>
+        </p:nvSpPr>
+        <p:spPr>
+          <a:xfrm>
+            <a:off x="0" y="0"/>
+            <a:ext cx="12191695" cy="6858000"/>
+          </a:xfrm>
+          <a:prstGeom prst="rect">
+            <a:avLst/>
+          </a:prstGeom>
+          <a:solidFill>
+            <a:srgbClr val="FFFFFF"/>
+          </a:solidFill>
+          <a:ln>
+            <a:noFill/>
+          </a:ln>
+          <a:effectLst/>
+        </p:spPr>
+        <p:style>
+          <a:lnRef idx="1">
+            <a:schemeClr val="accent1"/>
+          </a:lnRef>
+          <a:fillRef idx="3">
+            <a:schemeClr val="accent1"/>
+          </a:fillRef>
+          <a:effectRef idx="2">
+            <a:schemeClr val="accent1"/>
+          </a:effectRef>
+          <a:fontRef idx="minor">
+            <a:schemeClr val="lt1"/>
+          </a:fontRef>
+        </p:style>
+        <p:txBody>
+          <a:bodyPr rtlCol="0" anchor="ctr"/>
+          <a:lstStyle/>
+          <a:p>
+            <a:pPr algn="ctr"/>
+          </a:p>
+        </p:txBody>
+      </p:sp>
+      <p:sp>
+        <p:nvSpPr>
+          <p:cNvPr id="3" name="TextBox 2"/>
+          <p:cNvSpPr txBox="1"/>
+          <p:nvPr/>
+        </p:nvSpPr>
+        <p:spPr>
+          <a:xfrm>
+            <a:off x="10607040" y="320040"/>
+            <a:ext cx="1371600" cy="365760"/>
+          </a:xfrm>
+          <a:prstGeom prst="rect">
+            <a:avLst/>
+          </a:prstGeom>
+          <a:noFill/>
+        </p:spPr>
+        <p:txBody>
+          <a:bodyPr wrap="square">
+            <a:spAutoFit/>
+          </a:bodyPr>
+          <a:lstStyle/>
+          <a:p>
+            <a:pPr algn="r"/>
+            <a:r>
+              <a:rPr sz="1000" b="1" i="0">
+                <a:solidFill>
+                  <a:srgbClr val="64748B"/>
+                </a:solidFill>
+                <a:latin typeface="Montserrat"/>
+              </a:rPr>
+              <a:t>022 / 025</a:t>
+            </a:r>
+          </a:p>
+        </p:txBody>
+      </p:sp>
+      <p:sp>
+        <p:nvSpPr>
+          <p:cNvPr id="4" name="TextBox 3"/>
+          <p:cNvSpPr txBox="1"/>
+          <p:nvPr/>
+        </p:nvSpPr>
+        <p:spPr>
+          <a:xfrm>
+            <a:off x="457200" y="6419088"/>
+            <a:ext cx="8229600" cy="365760"/>
+          </a:xfrm>
+          <a:prstGeom prst="rect">
+            <a:avLst/>
+          </a:prstGeom>
+          <a:noFill/>
+        </p:spPr>
+        <p:txBody>
+          <a:bodyPr wrap="square">
+            <a:spAutoFit/>
+          </a:bodyPr>
+          <a:lstStyle/>
+          <a:p>
+            <a:r>
+              <a:rPr sz="900" b="0" i="0">
+                <a:solidFill>
+                  <a:srgbClr val="64748B"/>
+                </a:solidFill>
+                <a:latin typeface="Montserrat"/>
+              </a:rPr>
+              <a:t>Curso Gas B · Tema 04 · ITC-ICG 07 · Diseño y ejecución</a:t>
+            </a:r>
+          </a:p>
+        </p:txBody>
+      </p:sp>
+      <p:sp>
+        <p:nvSpPr>
+          <p:cNvPr id="5" name="Rectangle 4"/>
+          <p:cNvSpPr/>
+          <p:nvPr/>
+        </p:nvSpPr>
+        <p:spPr>
+          <a:xfrm>
+            <a:off x="0" y="0"/>
+            <a:ext cx="12191695" cy="1143000"/>
+          </a:xfrm>
+          <a:prstGeom prst="rect">
+            <a:avLst/>
+          </a:prstGeom>
+          <a:solidFill>
+            <a:srgbClr val="1E8E4B"/>
+          </a:solidFill>
+          <a:ln>
+            <a:noFill/>
+          </a:ln>
+          <a:effectLst/>
+        </p:spPr>
+        <p:style>
+          <a:lnRef idx="1">
+            <a:schemeClr val="accent1"/>
+          </a:lnRef>
+          <a:fillRef idx="3">
+            <a:schemeClr val="accent1"/>
+          </a:fillRef>
+          <a:effectRef idx="2">
+            <a:schemeClr val="accent1"/>
+          </a:effectRef>
+          <a:fontRef idx="minor">
+            <a:schemeClr val="lt1"/>
+          </a:fontRef>
+        </p:style>
+        <p:txBody>
+          <a:bodyPr rtlCol="0" anchor="ctr"/>
+          <a:lstStyle/>
+          <a:p>
+            <a:pPr algn="ctr"/>
+          </a:p>
+        </p:txBody>
+      </p:sp>
+      <p:sp>
+        <p:nvSpPr>
+          <p:cNvPr id="6" name="TextBox 5"/>
+          <p:cNvSpPr txBox="1"/>
+          <p:nvPr/>
+        </p:nvSpPr>
+        <p:spPr>
+          <a:xfrm>
+            <a:off x="822960" y="274320"/>
+            <a:ext cx="10515600" cy="640080"/>
+          </a:xfrm>
+          <a:prstGeom prst="rect">
+            <a:avLst/>
+          </a:prstGeom>
+          <a:noFill/>
+        </p:spPr>
+        <p:txBody>
+          <a:bodyPr wrap="square">
+            <a:spAutoFit/>
+          </a:bodyPr>
+          <a:lstStyle/>
+          <a:p>
+            <a:r>
+              <a:rPr sz="2400" b="1" i="0">
+                <a:solidFill>
+                  <a:srgbClr val="FFFFFF"/>
+                </a:solidFill>
+                <a:latin typeface="Montserrat"/>
+              </a:rPr>
+              <a:t>✔  RESPUESTA:  C</a:t>
+            </a:r>
+          </a:p>
+        </p:txBody>
+      </p:sp>
+      <p:sp>
+        <p:nvSpPr>
+          <p:cNvPr id="7" name="TextBox 6"/>
+          <p:cNvSpPr txBox="1"/>
+          <p:nvPr/>
+        </p:nvSpPr>
+        <p:spPr>
+          <a:xfrm>
+            <a:off x="822960" y="1417320"/>
+            <a:ext cx="10515600" cy="914400"/>
+          </a:xfrm>
+          <a:prstGeom prst="rect">
+            <a:avLst/>
+          </a:prstGeom>
+          <a:noFill/>
+        </p:spPr>
+        <p:txBody>
+          <a:bodyPr wrap="square">
+            <a:spAutoFit/>
+          </a:bodyPr>
+          <a:lstStyle/>
+          <a:p>
+            <a:r>
+              <a:rPr sz="1800" b="1" i="0">
+                <a:solidFill>
+                  <a:srgbClr val="64748B"/>
+                </a:solidFill>
+                <a:latin typeface="Montserrat"/>
+              </a:rPr>
+              <a:t>Una instalación receptora trabaja a 6 bar. ¿Qué norma UNE le corresponde?</a:t>
+            </a:r>
+          </a:p>
+        </p:txBody>
+      </p:sp>
+      <p:sp>
+        <p:nvSpPr>
+          <p:cNvPr id="8" name="Rounded Rectangle 7"/>
+          <p:cNvSpPr/>
+          <p:nvPr/>
+        </p:nvSpPr>
+        <p:spPr>
+          <a:xfrm>
+            <a:off x="822960" y="2514600"/>
+            <a:ext cx="10515600" cy="914400"/>
+          </a:xfrm>
+          <a:prstGeom prst="roundRect">
+            <a:avLst/>
+          </a:prstGeom>
+          <a:solidFill>
+            <a:srgbClr val="E9F6EE"/>
+          </a:solidFill>
+          <a:ln w="12700">
+            <a:solidFill>
+              <a:srgbClr val="1E8E4B"/>
+            </a:solidFill>
+          </a:ln>
+          <a:effectLst/>
+        </p:spPr>
+        <p:style>
+          <a:lnRef idx="1">
+            <a:schemeClr val="accent1"/>
+          </a:lnRef>
+          <a:fillRef idx="3">
+            <a:schemeClr val="accent1"/>
+          </a:fillRef>
+          <a:effectRef idx="2">
+            <a:schemeClr val="accent1"/>
+          </a:effectRef>
+          <a:fontRef idx="minor">
+            <a:schemeClr val="lt1"/>
+          </a:fontRef>
+        </p:style>
+        <p:txBody>
+          <a:bodyPr rtlCol="0" anchor="ctr"/>
+          <a:lstStyle/>
+          <a:p>
+            <a:pPr algn="ctr"/>
+          </a:p>
+        </p:txBody>
+      </p:sp>
+      <p:sp>
+        <p:nvSpPr>
+          <p:cNvPr id="9" name="TextBox 8"/>
+          <p:cNvSpPr txBox="1"/>
+          <p:nvPr/>
+        </p:nvSpPr>
+        <p:spPr>
+          <a:xfrm>
+            <a:off x="1097280" y="2697480"/>
+            <a:ext cx="10058400" cy="640080"/>
+          </a:xfrm>
+          <a:prstGeom prst="rect">
+            <a:avLst/>
+          </a:prstGeom>
+          <a:noFill/>
+        </p:spPr>
+        <p:txBody>
+          <a:bodyPr wrap="square">
+            <a:spAutoFit/>
+          </a:bodyPr>
+          <a:lstStyle/>
+          <a:p>
+            <a:r>
+              <a:rPr sz="1800" b="1" i="0">
+                <a:solidFill>
+                  <a:srgbClr val="1E8E4B"/>
+                </a:solidFill>
+                <a:latin typeface="Montserrat"/>
+              </a:rPr>
+              <a:t>C.  </a:t>
+            </a:r>
+            <a:r>
+              <a:rPr sz="1800" b="1" i="0">
+                <a:solidFill>
+                  <a:srgbClr val="1E2761"/>
+                </a:solidFill>
+                <a:latin typeface="Montserrat"/>
+              </a:rPr>
+              <a:t>UNE 60620</a:t>
+            </a:r>
+          </a:p>
+        </p:txBody>
+      </p:sp>
+      <p:sp>
+        <p:nvSpPr>
+          <p:cNvPr id="10" name="TextBox 9"/>
+          <p:cNvSpPr txBox="1"/>
+          <p:nvPr/>
+        </p:nvSpPr>
+        <p:spPr>
+          <a:xfrm>
+            <a:off x="822960" y="3749039"/>
+            <a:ext cx="10515600" cy="2194560"/>
+          </a:xfrm>
+          <a:prstGeom prst="rect">
+            <a:avLst/>
+          </a:prstGeom>
+          <a:noFill/>
+        </p:spPr>
+        <p:txBody>
+          <a:bodyPr wrap="square">
+            <a:spAutoFit/>
+          </a:bodyPr>
+          <a:lstStyle/>
+          <a:p>
+            <a:r>
+              <a:rPr sz="1500" b="1" i="0">
+                <a:solidFill>
+                  <a:srgbClr val="E8801A"/>
+                </a:solidFill>
+                <a:latin typeface="Montserrat"/>
+              </a:rPr>
+              <a:t>Por qué:  </a:t>
+            </a:r>
+            <a:r>
+              <a:rPr sz="1500" b="0" i="0">
+                <a:solidFill>
+                  <a:srgbClr val="1B2330"/>
+                </a:solidFill>
+                <a:latin typeface="Montserrat"/>
+              </a:rPr>
+              <a:t>Por encima de cinco bar manda la UNE 60620, la de alta presión; hasta cinco bar sería la 60670.</a:t>
+            </a:r>
+          </a:p>
+        </p:txBody>
+      </p:sp>
+    </p:spTree>
+  </p:cSld>
+  <p:clrMapOvr>
+    <a:masterClrMapping/>
+  </p:clrMapOvr>
+  <mc:AlternateContent xmlns:mc="http://schemas.openxmlformats.org/markup-compatibility/2006">
+    <mc:Choice xmlns:p14="http://schemas.microsoft.com/office/powerpoint/2010/main" Requires="p14">
+      <p:transition spd="med" p14:dur="700">
+        <p14:cube dir="r"/>
+      </p:transition>
+    </mc:Choice>
+    <mc:Fallback>
+      <p:transition spd="med">
+        <p:push dir="r"/>
+      </p:transition>
+    </mc:Fallback>
+  </mc:AlternateContent>
+</p:sld>
+</file>
+
+<file path=ppt/slides/slide23.xml><?xml version="1.0" encoding="utf-8"?>
+<p:sld xmlns:a="http://schemas.openxmlformats.org/drawingml/2006/main" xmlns:p="http://schemas.openxmlformats.org/presentationml/2006/main" xmlns:r="http://schemas.openxmlformats.org/officeDocument/2006/relationships">
+  <p:cSld>
+    <p:spTree>
+      <p:nvGrpSpPr>
+        <p:cNvPr id="1" name=""/>
+        <p:cNvGrpSpPr/>
+        <p:nvPr/>
+      </p:nvGrpSpPr>
+      <p:grpSpPr/>
+      <p:sp>
+        <p:nvSpPr>
+          <p:cNvPr id="2" name="Rectangle 1"/>
+          <p:cNvSpPr/>
+          <p:nvPr/>
+        </p:nvSpPr>
+        <p:spPr>
+          <a:xfrm>
+            <a:off x="0" y="0"/>
+            <a:ext cx="12191695" cy="6858000"/>
+          </a:xfrm>
+          <a:prstGeom prst="rect">
+            <a:avLst/>
+          </a:prstGeom>
+          <a:solidFill>
+            <a:srgbClr val="FFFFFF"/>
+          </a:solidFill>
+          <a:ln>
+            <a:noFill/>
+          </a:ln>
+          <a:effectLst/>
+        </p:spPr>
+        <p:style>
+          <a:lnRef idx="1">
+            <a:schemeClr val="accent1"/>
+          </a:lnRef>
+          <a:fillRef idx="3">
+            <a:schemeClr val="accent1"/>
+          </a:fillRef>
+          <a:effectRef idx="2">
+            <a:schemeClr val="accent1"/>
+          </a:effectRef>
+          <a:fontRef idx="minor">
+            <a:schemeClr val="lt1"/>
+          </a:fontRef>
+        </p:style>
+        <p:txBody>
+          <a:bodyPr rtlCol="0" anchor="ctr"/>
+          <a:lstStyle/>
+          <a:p>
+            <a:pPr algn="ctr"/>
+          </a:p>
+        </p:txBody>
+      </p:sp>
+      <p:sp>
+        <p:nvSpPr>
+          <p:cNvPr id="3" name="TextBox 2"/>
+          <p:cNvSpPr txBox="1"/>
+          <p:nvPr/>
+        </p:nvSpPr>
+        <p:spPr>
+          <a:xfrm>
+            <a:off x="10607040" y="320040"/>
+            <a:ext cx="1371600" cy="365760"/>
+          </a:xfrm>
+          <a:prstGeom prst="rect">
+            <a:avLst/>
+          </a:prstGeom>
+          <a:noFill/>
+        </p:spPr>
+        <p:txBody>
+          <a:bodyPr wrap="square">
+            <a:spAutoFit/>
+          </a:bodyPr>
+          <a:lstStyle/>
+          <a:p>
+            <a:pPr algn="r"/>
+            <a:r>
+              <a:rPr sz="1000" b="1" i="0">
+                <a:solidFill>
+                  <a:srgbClr val="64748B"/>
+                </a:solidFill>
+                <a:latin typeface="Montserrat"/>
+              </a:rPr>
+              <a:t>023 / 025</a:t>
+            </a:r>
+          </a:p>
+        </p:txBody>
+      </p:sp>
+      <p:sp>
+        <p:nvSpPr>
+          <p:cNvPr id="4" name="TextBox 3"/>
+          <p:cNvSpPr txBox="1"/>
+          <p:nvPr/>
+        </p:nvSpPr>
+        <p:spPr>
+          <a:xfrm>
+            <a:off x="457200" y="6419088"/>
+            <a:ext cx="8229600" cy="365760"/>
+          </a:xfrm>
+          <a:prstGeom prst="rect">
+            <a:avLst/>
+          </a:prstGeom>
+          <a:noFill/>
+        </p:spPr>
+        <p:txBody>
+          <a:bodyPr wrap="square">
+            <a:spAutoFit/>
+          </a:bodyPr>
+          <a:lstStyle/>
+          <a:p>
+            <a:r>
+              <a:rPr sz="900" b="0" i="0">
+                <a:solidFill>
+                  <a:srgbClr val="64748B"/>
+                </a:solidFill>
+                <a:latin typeface="Montserrat"/>
+              </a:rPr>
+              <a:t>Curso Gas B · Tema 04 · ITC-ICG 07 · Diseño y ejecución</a:t>
+            </a:r>
+          </a:p>
+        </p:txBody>
+      </p:sp>
+      <p:sp>
+        <p:nvSpPr>
+          <p:cNvPr id="5" name="TextBox 4"/>
+          <p:cNvSpPr txBox="1"/>
+          <p:nvPr/>
+        </p:nvSpPr>
+        <p:spPr>
+          <a:xfrm>
+            <a:off x="822960" y="457200"/>
+            <a:ext cx="10058400" cy="365760"/>
+          </a:xfrm>
+          <a:prstGeom prst="rect">
+            <a:avLst/>
+          </a:prstGeom>
+          <a:noFill/>
+        </p:spPr>
+        <p:txBody>
+          <a:bodyPr wrap="square">
+            <a:spAutoFit/>
+          </a:bodyPr>
+          <a:lstStyle/>
+          <a:p>
+            <a:r>
+              <a:rPr sz="1300" b="1" i="0">
+                <a:solidFill>
+                  <a:srgbClr val="E8801A"/>
+                </a:solidFill>
+                <a:latin typeface="Montserrat"/>
+              </a:rPr>
+              <a:t>APARTADO 2 · UBICACIÓN DE APARATOS</a:t>
+            </a:r>
+          </a:p>
+        </p:txBody>
+      </p:sp>
+      <p:sp>
+        <p:nvSpPr>
+          <p:cNvPr id="6" name="TextBox 5"/>
+          <p:cNvSpPr txBox="1"/>
+          <p:nvPr/>
+        </p:nvSpPr>
+        <p:spPr>
+          <a:xfrm>
+            <a:off x="822960" y="868680"/>
+            <a:ext cx="10515600" cy="914400"/>
+          </a:xfrm>
+          <a:prstGeom prst="rect">
+            <a:avLst/>
+          </a:prstGeom>
+          <a:noFill/>
+        </p:spPr>
+        <p:txBody>
+          <a:bodyPr wrap="square">
+            <a:spAutoFit/>
+          </a:bodyPr>
+          <a:lstStyle/>
+          <a:p>
+            <a:r>
+              <a:rPr sz="2800" b="1" i="0">
+                <a:solidFill>
+                  <a:srgbClr val="1E2761"/>
+                </a:solidFill>
+                <a:latin typeface="Montserrat"/>
+              </a:rPr>
+              <a:t>Circuito abierto conducido: dónde</a:t>
+            </a:r>
+          </a:p>
+        </p:txBody>
+      </p:sp>
+      <p:sp>
+        <p:nvSpPr>
+          <p:cNvPr id="7" name="Rectangle 6"/>
+          <p:cNvSpPr/>
+          <p:nvPr/>
+        </p:nvSpPr>
+        <p:spPr>
+          <a:xfrm>
+            <a:off x="868680" y="1627632"/>
+            <a:ext cx="2011680" cy="73152"/>
+          </a:xfrm>
+          <a:prstGeom prst="rect">
+            <a:avLst/>
+          </a:prstGeom>
+          <a:solidFill>
+            <a:srgbClr val="E8801A"/>
+          </a:solidFill>
+          <a:ln>
+            <a:noFill/>
+          </a:ln>
+          <a:effectLst/>
+        </p:spPr>
+        <p:style>
+          <a:lnRef idx="1">
+            <a:schemeClr val="accent1"/>
+          </a:lnRef>
+          <a:fillRef idx="3">
+            <a:schemeClr val="accent1"/>
+          </a:fillRef>
+          <a:effectRef idx="2">
+            <a:schemeClr val="accent1"/>
+          </a:effectRef>
+          <a:fontRef idx="minor">
+            <a:schemeClr val="lt1"/>
+          </a:fontRef>
+        </p:style>
+        <p:txBody>
+          <a:bodyPr rtlCol="0" anchor="ctr"/>
+          <a:lstStyle/>
+          <a:p>
+            <a:pPr algn="ctr"/>
+          </a:p>
+        </p:txBody>
+      </p:sp>
+      <p:sp>
+        <p:nvSpPr>
+          <p:cNvPr id="8" name="TextBox 7"/>
+          <p:cNvSpPr txBox="1"/>
+          <p:nvPr/>
+        </p:nvSpPr>
+        <p:spPr>
+          <a:xfrm>
+            <a:off x="6355080" y="1965960"/>
+            <a:ext cx="5029200" cy="4206240"/>
+          </a:xfrm>
+          <a:prstGeom prst="rect">
+            <a:avLst/>
+          </a:prstGeom>
+          <a:noFill/>
+        </p:spPr>
+        <p:txBody>
+          <a:bodyPr wrap="square">
+            <a:spAutoFit/>
+          </a:bodyPr>
+          <a:lstStyle/>
+          <a:p>
+            <a:pPr>
+              <a:spcAft>
+                <a:spcPts val="1100"/>
+              </a:spcAft>
+            </a:pPr>
+            <a:r>
+              <a:rPr sz="1600" b="1" i="0">
+                <a:solidFill>
+                  <a:srgbClr val="E8801A"/>
+                </a:solidFill>
+                <a:latin typeface="Montserrat"/>
+              </a:rPr>
+              <a:t>▸  </a:t>
+            </a:r>
+            <a:r>
+              <a:rPr sz="1600" b="0" i="0">
+                <a:solidFill>
+                  <a:srgbClr val="1B2330"/>
+                </a:solidFill>
+                <a:latin typeface="Montserrat"/>
+              </a:rPr>
+              <a:t>Galerías, terrazas, locales exclusivos</a:t>
+            </a:r>
+          </a:p>
+          <a:p>
+            <a:pPr>
+              <a:spcAft>
+                <a:spcPts val="1100"/>
+              </a:spcAft>
+            </a:pPr>
+            <a:r>
+              <a:rPr sz="1600" b="1" i="0">
+                <a:solidFill>
+                  <a:srgbClr val="E8801A"/>
+                </a:solidFill>
+                <a:latin typeface="Montserrat"/>
+              </a:rPr>
+              <a:t>▸  </a:t>
+            </a:r>
+            <a:r>
+              <a:rPr sz="1600" b="0" i="0">
+                <a:solidFill>
+                  <a:srgbClr val="1B2330"/>
+                </a:solidFill>
+                <a:latin typeface="Montserrat"/>
+              </a:rPr>
+              <a:t>Lavaderos, garajes individuales</a:t>
+            </a:r>
+          </a:p>
+          <a:p>
+            <a:pPr>
+              <a:spcAft>
+                <a:spcPts val="1100"/>
+              </a:spcAft>
+            </a:pPr>
+            <a:r>
+              <a:rPr sz="1600" b="1" i="0">
+                <a:solidFill>
+                  <a:srgbClr val="E8801A"/>
+                </a:solidFill>
+                <a:latin typeface="Montserrat"/>
+              </a:rPr>
+              <a:t>▸  </a:t>
+            </a:r>
+            <a:r>
+              <a:rPr sz="1600" b="0" i="0">
+                <a:solidFill>
+                  <a:srgbClr val="1B2330"/>
+                </a:solidFill>
+                <a:latin typeface="Montserrat"/>
+              </a:rPr>
+              <a:t>En cocina: sin robar el tiro al extractor</a:t>
+            </a:r>
+          </a:p>
+          <a:p>
+            <a:pPr>
+              <a:spcAft>
+                <a:spcPts val="1100"/>
+              </a:spcAft>
+            </a:pPr>
+            <a:r>
+              <a:rPr sz="1600" b="1" i="0">
+                <a:solidFill>
+                  <a:srgbClr val="E8801A"/>
+                </a:solidFill>
+                <a:latin typeface="Montserrat"/>
+              </a:rPr>
+              <a:t>▸  </a:t>
+            </a:r>
+            <a:r>
+              <a:rPr sz="1600" b="0" i="0">
+                <a:solidFill>
+                  <a:srgbClr val="1B2330"/>
+                </a:solidFill>
+                <a:latin typeface="Montserrat"/>
+              </a:rPr>
+              <a:t>Solo ACS: sin estas limitaciones</a:t>
+            </a:r>
+          </a:p>
+        </p:txBody>
+      </p:sp>
+      <p:sp>
+        <p:nvSpPr>
+          <p:cNvPr id="9" name="imgph" descr="IMGQ:wall mounted gas water heater in laundry room"/>
+          <p:cNvSpPr/>
+          <p:nvPr/>
+        </p:nvSpPr>
+        <p:spPr>
+          <a:xfrm>
+            <a:off x="822960" y="1965960"/>
+            <a:ext cx="5303520" cy="4572000"/>
+          </a:xfrm>
+          <a:prstGeom prst="roundRect">
+            <a:avLst/>
+          </a:prstGeom>
+          <a:solidFill>
+            <a:srgbClr val="F3F6FB"/>
+          </a:solidFill>
+          <a:ln w="12700">
+            <a:solidFill>
+              <a:srgbClr val="C7D2E6"/>
+            </a:solidFill>
+          </a:ln>
+          <a:effectLst/>
+        </p:spPr>
+        <p:style>
+          <a:lnRef idx="1">
+            <a:schemeClr val="accent1"/>
+          </a:lnRef>
+          <a:fillRef idx="3">
+            <a:schemeClr val="accent1"/>
+          </a:fillRef>
+          <a:effectRef idx="2">
+            <a:schemeClr val="accent1"/>
+          </a:effectRef>
+          <a:fontRef idx="minor">
+            <a:schemeClr val="lt1"/>
+          </a:fontRef>
+        </p:style>
+        <p:txBody>
+          <a:bodyPr rtlCol="0" anchor="ctr"/>
+          <a:lstStyle/>
+          <a:p>
+            <a:pPr algn="ctr"/>
+          </a:p>
+        </p:txBody>
+      </p:sp>
+      <p:sp>
+        <p:nvSpPr>
+          <p:cNvPr id="10" name="TextBox 9"/>
+          <p:cNvSpPr txBox="1"/>
+          <p:nvPr/>
+        </p:nvSpPr>
+        <p:spPr>
+          <a:xfrm>
+            <a:off x="1097280" y="3611880"/>
+            <a:ext cx="4754880" cy="1280160"/>
+          </a:xfrm>
+          <a:prstGeom prst="rect">
+            <a:avLst/>
+          </a:prstGeom>
+          <a:noFill/>
+        </p:spPr>
+        <p:txBody>
+          <a:bodyPr wrap="square">
+            <a:spAutoFit/>
+          </a:bodyPr>
+          <a:lstStyle/>
+          <a:p>
+            <a:pPr algn="ctr"/>
+            <a:r>
+              <a:rPr sz="1400" b="1" i="0">
+                <a:solidFill>
+                  <a:srgbClr val="64748B"/>
+                </a:solidFill>
+                <a:latin typeface="Montserrat"/>
+              </a:rPr>
+              <a:t>IMAGEN</a:t>
+            </a:r>
+          </a:p>
+          <a:p>
+            <a:pPr algn="ctr"/>
+            <a:r>
+              <a:rPr sz="1100" b="0" i="1">
+                <a:solidFill>
+                  <a:srgbClr val="64748B"/>
+                </a:solidFill>
+                <a:latin typeface="Montserrat"/>
+              </a:rPr>
+              <a:t>wall mounted gas water heater in laundry room</a:t>
+            </a:r>
+          </a:p>
+        </p:txBody>
+      </p:sp>
+    </p:spTree>
+  </p:cSld>
+  <p:clrMapOvr>
+    <a:masterClrMapping/>
+  </p:clrMapOvr>
+  <mc:AlternateContent xmlns:mc="http://schemas.openxmlformats.org/markup-compatibility/2006">
+    <mc:Choice xmlns:p14="http://schemas.microsoft.com/office/powerpoint/2010/main" Requires="p14">
+      <p:transition spd="med" p14:dur="700">
+        <p14:cube dir="l"/>
+      </p:transition>
+    </mc:Choice>
+    <mc:Fallback>
+      <p:transition spd="med">
+        <p:push dir="l"/>
+      </p:transition>
+    </mc:Fallback>
+  </mc:AlternateContent>
+</p:sld>
+</file>
+
+<file path=ppt/slides/slide24.xml><?xml version="1.0" encoding="utf-8"?>
+<p:sld xmlns:a="http://schemas.openxmlformats.org/drawingml/2006/main" xmlns:p="http://schemas.openxmlformats.org/presentationml/2006/main" xmlns:r="http://schemas.openxmlformats.org/officeDocument/2006/relationships">
+  <p:cSld>
+    <p:spTree>
+      <p:nvGrpSpPr>
+        <p:cNvPr id="1" name=""/>
+        <p:cNvGrpSpPr/>
+        <p:nvPr/>
+      </p:nvGrpSpPr>
+      <p:grpSpPr/>
+      <p:sp>
+        <p:nvSpPr>
+          <p:cNvPr id="2" name="Rectangle 1"/>
+          <p:cNvSpPr/>
+          <p:nvPr/>
+        </p:nvSpPr>
+        <p:spPr>
+          <a:xfrm>
+            <a:off x="0" y="0"/>
+            <a:ext cx="12191695" cy="6858000"/>
+          </a:xfrm>
+          <a:prstGeom prst="rect">
+            <a:avLst/>
+          </a:prstGeom>
+          <a:solidFill>
+            <a:srgbClr val="FFFFFF"/>
+          </a:solidFill>
+          <a:ln>
+            <a:noFill/>
+          </a:ln>
+          <a:effectLst/>
+        </p:spPr>
+        <p:style>
+          <a:lnRef idx="1">
+            <a:schemeClr val="accent1"/>
+          </a:lnRef>
+          <a:fillRef idx="3">
+            <a:schemeClr val="accent1"/>
+          </a:fillRef>
+          <a:effectRef idx="2">
+            <a:schemeClr val="accent1"/>
+          </a:effectRef>
+          <a:fontRef idx="minor">
+            <a:schemeClr val="lt1"/>
+          </a:fontRef>
+        </p:style>
+        <p:txBody>
+          <a:bodyPr rtlCol="0" anchor="ctr"/>
+          <a:lstStyle/>
+          <a:p>
+            <a:pPr algn="ctr"/>
+          </a:p>
+        </p:txBody>
+      </p:sp>
+      <p:sp>
+        <p:nvSpPr>
+          <p:cNvPr id="3" name="TextBox 2"/>
+          <p:cNvSpPr txBox="1"/>
+          <p:nvPr/>
+        </p:nvSpPr>
+        <p:spPr>
+          <a:xfrm>
+            <a:off x="10607040" y="320040"/>
+            <a:ext cx="1371600" cy="365760"/>
+          </a:xfrm>
+          <a:prstGeom prst="rect">
+            <a:avLst/>
+          </a:prstGeom>
+          <a:noFill/>
+        </p:spPr>
+        <p:txBody>
+          <a:bodyPr wrap="square">
+            <a:spAutoFit/>
+          </a:bodyPr>
+          <a:lstStyle/>
+          <a:p>
+            <a:pPr algn="r"/>
+            <a:r>
+              <a:rPr sz="1000" b="1" i="0">
+                <a:solidFill>
+                  <a:srgbClr val="64748B"/>
+                </a:solidFill>
+                <a:latin typeface="Montserrat"/>
+              </a:rPr>
+              <a:t>024 / 025</a:t>
+            </a:r>
+          </a:p>
+        </p:txBody>
+      </p:sp>
+      <p:sp>
+        <p:nvSpPr>
+          <p:cNvPr id="4" name="TextBox 3"/>
+          <p:cNvSpPr txBox="1"/>
+          <p:nvPr/>
+        </p:nvSpPr>
+        <p:spPr>
+          <a:xfrm>
+            <a:off x="457200" y="6419088"/>
+            <a:ext cx="8229600" cy="365760"/>
+          </a:xfrm>
+          <a:prstGeom prst="rect">
+            <a:avLst/>
+          </a:prstGeom>
+          <a:noFill/>
+        </p:spPr>
+        <p:txBody>
+          <a:bodyPr wrap="square">
+            <a:spAutoFit/>
+          </a:bodyPr>
+          <a:lstStyle/>
+          <a:p>
+            <a:r>
+              <a:rPr sz="900" b="0" i="0">
+                <a:solidFill>
+                  <a:srgbClr val="64748B"/>
+                </a:solidFill>
+                <a:latin typeface="Montserrat"/>
+              </a:rPr>
+              <a:t>Curso Gas B · Tema 04 · ITC-ICG 07 · Diseño y ejecución</a:t>
+            </a:r>
+          </a:p>
+        </p:txBody>
+      </p:sp>
+      <p:sp>
+        <p:nvSpPr>
+          <p:cNvPr id="5" name="TextBox 4"/>
+          <p:cNvSpPr txBox="1"/>
+          <p:nvPr/>
+        </p:nvSpPr>
+        <p:spPr>
+          <a:xfrm>
+            <a:off x="822960" y="457200"/>
+            <a:ext cx="10058400" cy="365760"/>
+          </a:xfrm>
+          <a:prstGeom prst="rect">
+            <a:avLst/>
+          </a:prstGeom>
+          <a:noFill/>
+        </p:spPr>
+        <p:txBody>
+          <a:bodyPr wrap="square">
+            <a:spAutoFit/>
+          </a:bodyPr>
+          <a:lstStyle/>
+          <a:p>
+            <a:r>
+              <a:rPr sz="1300" b="1" i="0">
+                <a:solidFill>
+                  <a:srgbClr val="E8801A"/>
+                </a:solidFill>
+                <a:latin typeface="Montserrat"/>
+              </a:rPr>
+              <a:t>APARTADO 2 · TRAMOS ENTERRADOS</a:t>
+            </a:r>
+          </a:p>
+        </p:txBody>
+      </p:sp>
+      <p:sp>
+        <p:nvSpPr>
+          <p:cNvPr id="6" name="TextBox 5"/>
+          <p:cNvSpPr txBox="1"/>
+          <p:nvPr/>
+        </p:nvSpPr>
+        <p:spPr>
+          <a:xfrm>
+            <a:off x="822960" y="868680"/>
+            <a:ext cx="10515600" cy="914400"/>
+          </a:xfrm>
+          <a:prstGeom prst="rect">
+            <a:avLst/>
+          </a:prstGeom>
+          <a:noFill/>
+        </p:spPr>
+        <p:txBody>
+          <a:bodyPr wrap="square">
+            <a:spAutoFit/>
+          </a:bodyPr>
+          <a:lstStyle/>
+          <a:p>
+            <a:r>
+              <a:rPr sz="2800" b="1" i="0">
+                <a:solidFill>
+                  <a:srgbClr val="1E2761"/>
+                </a:solidFill>
+                <a:latin typeface="Montserrat"/>
+              </a:rPr>
+              <a:t>Tubería bajo tierra</a:t>
+            </a:r>
+          </a:p>
+        </p:txBody>
+      </p:sp>
+      <p:sp>
+        <p:nvSpPr>
+          <p:cNvPr id="7" name="Rectangle 6"/>
+          <p:cNvSpPr/>
+          <p:nvPr/>
+        </p:nvSpPr>
+        <p:spPr>
+          <a:xfrm>
+            <a:off x="868680" y="1627632"/>
+            <a:ext cx="2011680" cy="73152"/>
+          </a:xfrm>
+          <a:prstGeom prst="rect">
+            <a:avLst/>
+          </a:prstGeom>
+          <a:solidFill>
+            <a:srgbClr val="E8801A"/>
+          </a:solidFill>
+          <a:ln>
+            <a:noFill/>
+          </a:ln>
+          <a:effectLst/>
+        </p:spPr>
+        <p:style>
+          <a:lnRef idx="1">
+            <a:schemeClr val="accent1"/>
+          </a:lnRef>
+          <a:fillRef idx="3">
+            <a:schemeClr val="accent1"/>
+          </a:fillRef>
+          <a:effectRef idx="2">
+            <a:schemeClr val="accent1"/>
+          </a:effectRef>
+          <a:fontRef idx="minor">
+            <a:schemeClr val="lt1"/>
+          </a:fontRef>
+        </p:style>
+        <p:txBody>
+          <a:bodyPr rtlCol="0" anchor="ctr"/>
+          <a:lstStyle/>
+          <a:p>
+            <a:pPr algn="ctr"/>
+          </a:p>
+        </p:txBody>
+      </p:sp>
+      <p:sp>
+        <p:nvSpPr>
+          <p:cNvPr id="8" name="TextBox 7"/>
+          <p:cNvSpPr txBox="1"/>
+          <p:nvPr/>
+        </p:nvSpPr>
+        <p:spPr>
+          <a:xfrm>
+            <a:off x="822960" y="1965960"/>
+            <a:ext cx="5029200" cy="4206240"/>
+          </a:xfrm>
+          <a:prstGeom prst="rect">
+            <a:avLst/>
+          </a:prstGeom>
+          <a:noFill/>
+        </p:spPr>
+        <p:txBody>
+          <a:bodyPr wrap="square">
+            <a:spAutoFit/>
+          </a:bodyPr>
+          <a:lstStyle/>
+          <a:p>
+            <a:pPr>
+              <a:spcAft>
+                <a:spcPts val="1100"/>
+              </a:spcAft>
+            </a:pPr>
+            <a:r>
+              <a:rPr sz="1600" b="1" i="0">
+                <a:solidFill>
+                  <a:srgbClr val="E8801A"/>
+                </a:solidFill>
+                <a:latin typeface="Montserrat"/>
+              </a:rPr>
+              <a:t>▸  </a:t>
+            </a:r>
+            <a:r>
+              <a:rPr sz="1600" b="0" i="0">
+                <a:solidFill>
+                  <a:srgbClr val="1B2330"/>
+                </a:solidFill>
+                <a:latin typeface="Montserrat"/>
+              </a:rPr>
+              <a:t>Enterrado → UNE 60310 y 60311</a:t>
+            </a:r>
+          </a:p>
+          <a:p>
+            <a:pPr>
+              <a:spcAft>
+                <a:spcPts val="1100"/>
+              </a:spcAft>
+            </a:pPr>
+            <a:r>
+              <a:rPr sz="1600" b="1" i="0">
+                <a:solidFill>
+                  <a:srgbClr val="E8801A"/>
+                </a:solidFill>
+                <a:latin typeface="Montserrat"/>
+              </a:rPr>
+              <a:t>▸  </a:t>
+            </a:r>
+            <a:r>
+              <a:rPr sz="1600" b="0" i="0">
+                <a:solidFill>
+                  <a:srgbClr val="1B2330"/>
+                </a:solidFill>
+                <a:latin typeface="Montserrat"/>
+              </a:rPr>
+              <a:t>Consulta el material al distribuidor</a:t>
+            </a:r>
+          </a:p>
+          <a:p>
+            <a:pPr>
+              <a:spcAft>
+                <a:spcPts val="1100"/>
+              </a:spcAft>
+            </a:pPr>
+            <a:r>
+              <a:rPr sz="1600" b="1" i="0">
+                <a:solidFill>
+                  <a:srgbClr val="E8801A"/>
+                </a:solidFill>
+                <a:latin typeface="Montserrat"/>
+              </a:rPr>
+              <a:t>▸  </a:t>
+            </a:r>
+            <a:r>
+              <a:rPr sz="1600" b="0" i="0">
+                <a:solidFill>
+                  <a:srgbClr val="1B2330"/>
+                </a:solidFill>
+                <a:latin typeface="Montserrat"/>
+              </a:rPr>
+              <a:t>Debe ser compatible con la red</a:t>
+            </a:r>
+          </a:p>
+        </p:txBody>
+      </p:sp>
+      <p:sp>
+        <p:nvSpPr>
+          <p:cNvPr id="9" name="imgph" descr="IMGQ:buried yellow gas pipe in trench"/>
+          <p:cNvSpPr/>
+          <p:nvPr/>
+        </p:nvSpPr>
+        <p:spPr>
+          <a:xfrm>
+            <a:off x="6080760" y="1965960"/>
+            <a:ext cx="5303520" cy="4572000"/>
+          </a:xfrm>
+          <a:prstGeom prst="roundRect">
+            <a:avLst/>
+          </a:prstGeom>
+          <a:solidFill>
+            <a:srgbClr val="F3F6FB"/>
+          </a:solidFill>
+          <a:ln w="12700">
+            <a:solidFill>
+              <a:srgbClr val="C7D2E6"/>
+            </a:solidFill>
+          </a:ln>
+          <a:effectLst/>
+        </p:spPr>
+        <p:style>
+          <a:lnRef idx="1">
+            <a:schemeClr val="accent1"/>
+          </a:lnRef>
+          <a:fillRef idx="3">
+            <a:schemeClr val="accent1"/>
+          </a:fillRef>
+          <a:effectRef idx="2">
+            <a:schemeClr val="accent1"/>
+          </a:effectRef>
+          <a:fontRef idx="minor">
+            <a:schemeClr val="lt1"/>
+          </a:fontRef>
+        </p:style>
+        <p:txBody>
+          <a:bodyPr rtlCol="0" anchor="ctr"/>
+          <a:lstStyle/>
+          <a:p>
+            <a:pPr algn="ctr"/>
+          </a:p>
+        </p:txBody>
+      </p:sp>
+      <p:sp>
+        <p:nvSpPr>
+          <p:cNvPr id="10" name="TextBox 9"/>
+          <p:cNvSpPr txBox="1"/>
+          <p:nvPr/>
+        </p:nvSpPr>
+        <p:spPr>
+          <a:xfrm>
+            <a:off x="6355080" y="3611880"/>
+            <a:ext cx="4754880" cy="1280160"/>
+          </a:xfrm>
+          <a:prstGeom prst="rect">
+            <a:avLst/>
+          </a:prstGeom>
+          <a:noFill/>
+        </p:spPr>
+        <p:txBody>
+          <a:bodyPr wrap="square">
+            <a:spAutoFit/>
+          </a:bodyPr>
+          <a:lstStyle/>
+          <a:p>
+            <a:pPr algn="ctr"/>
+            <a:r>
+              <a:rPr sz="1400" b="1" i="0">
+                <a:solidFill>
+                  <a:srgbClr val="64748B"/>
+                </a:solidFill>
+                <a:latin typeface="Montserrat"/>
+              </a:rPr>
+              <a:t>IMAGEN</a:t>
+            </a:r>
+          </a:p>
+          <a:p>
+            <a:pPr algn="ctr"/>
+            <a:r>
+              <a:rPr sz="1100" b="0" i="1">
+                <a:solidFill>
+                  <a:srgbClr val="64748B"/>
+                </a:solidFill>
+                <a:latin typeface="Montserrat"/>
+              </a:rPr>
+              <a:t>buried yellow gas pipe in trench</a:t>
+            </a:r>
+          </a:p>
+        </p:txBody>
+      </p:sp>
+    </p:spTree>
+  </p:cSld>
+  <p:clrMapOvr>
+    <a:masterClrMapping/>
+  </p:clrMapOvr>
+  <mc:AlternateContent xmlns:mc="http://schemas.openxmlformats.org/markup-compatibility/2006">
+    <mc:Choice xmlns:p14="http://schemas.microsoft.com/office/powerpoint/2010/main" Requires="p14">
+      <p:transition spd="med" p14:dur="700">
+        <p14:cube dir="r"/>
+      </p:transition>
+    </mc:Choice>
+    <mc:Fallback>
+      <p:transition spd="med">
+        <p:push dir="r"/>
+      </p:transition>
+    </mc:Fallback>
+  </mc:AlternateContent>
+</p:sld>
+</file>
+
+<file path=ppt/slides/slide25.xml><?xml version="1.0" encoding="utf-8"?>
+<p:sld xmlns:a="http://schemas.openxmlformats.org/drawingml/2006/main" xmlns:p="http://schemas.openxmlformats.org/presentationml/2006/main" xmlns:r="http://schemas.openxmlformats.org/officeDocument/2006/relationships">
+  <p:cSld>
+    <p:spTree>
+      <p:nvGrpSpPr>
+        <p:cNvPr id="1" name=""/>
+        <p:cNvGrpSpPr/>
+        <p:nvPr/>
+      </p:nvGrpSpPr>
+      <p:grpSpPr/>
+      <p:sp>
+        <p:nvSpPr>
+          <p:cNvPr id="2" name="Rectangle 1"/>
+          <p:cNvSpPr/>
+          <p:nvPr/>
+        </p:nvSpPr>
+        <p:spPr>
+          <a:xfrm>
+            <a:off x="0" y="0"/>
+            <a:ext cx="12191695" cy="6858000"/>
+          </a:xfrm>
+          <a:prstGeom prst="rect">
+            <a:avLst/>
+          </a:prstGeom>
+          <a:solidFill>
+            <a:srgbClr val="1E2761"/>
+          </a:solidFill>
+          <a:ln>
+            <a:noFill/>
+          </a:ln>
+          <a:effectLst/>
+        </p:spPr>
+        <p:style>
+          <a:lnRef idx="1">
+            <a:schemeClr val="accent1"/>
+          </a:lnRef>
+          <a:fillRef idx="3">
+            <a:schemeClr val="accent1"/>
+          </a:fillRef>
+          <a:effectRef idx="2">
+            <a:schemeClr val="accent1"/>
+          </a:effectRef>
+          <a:fontRef idx="minor">
+            <a:schemeClr val="lt1"/>
+          </a:fontRef>
+        </p:style>
+        <p:txBody>
+          <a:bodyPr rtlCol="0" anchor="ctr"/>
+          <a:lstStyle/>
+          <a:p>
+            <a:pPr algn="ctr"/>
+          </a:p>
+        </p:txBody>
+      </p:sp>
+      <p:sp>
+        <p:nvSpPr>
+          <p:cNvPr id="3" name="TextBox 2"/>
+          <p:cNvSpPr txBox="1"/>
+          <p:nvPr/>
+        </p:nvSpPr>
+        <p:spPr>
+          <a:xfrm>
+            <a:off x="822960" y="640080"/>
+            <a:ext cx="10515600" cy="457200"/>
+          </a:xfrm>
+          <a:prstGeom prst="rect">
+            <a:avLst/>
+          </a:prstGeom>
+          <a:noFill/>
+        </p:spPr>
+        <p:txBody>
+          <a:bodyPr wrap="square">
+            <a:spAutoFit/>
+          </a:bodyPr>
+          <a:lstStyle/>
+          <a:p>
+            <a:r>
+              <a:rPr sz="1400" b="1" i="0">
+                <a:solidFill>
+                  <a:srgbClr val="F4A24C"/>
+                </a:solidFill>
+                <a:latin typeface="Montserrat"/>
+              </a:rPr>
+              <a:t>LO QUE YA DOMINAS</a:t>
+            </a:r>
+          </a:p>
+        </p:txBody>
+      </p:sp>
+      <p:sp>
+        <p:nvSpPr>
+          <p:cNvPr id="4" name="Rectangle 3"/>
+          <p:cNvSpPr/>
+          <p:nvPr/>
+        </p:nvSpPr>
+        <p:spPr>
+          <a:xfrm>
+            <a:off x="868680" y="1051560"/>
+            <a:ext cx="1463040" cy="82296"/>
+          </a:xfrm>
+          <a:prstGeom prst="rect">
+            <a:avLst/>
+          </a:prstGeom>
+          <a:solidFill>
+            <a:srgbClr val="E8801A"/>
+          </a:solidFill>
+          <a:ln>
+            <a:noFill/>
+          </a:ln>
+          <a:effectLst/>
+        </p:spPr>
+        <p:style>
+          <a:lnRef idx="1">
+            <a:schemeClr val="accent1"/>
+          </a:lnRef>
+          <a:fillRef idx="3">
+            <a:schemeClr val="accent1"/>
+          </a:fillRef>
+          <a:effectRef idx="2">
+            <a:schemeClr val="accent1"/>
+          </a:effectRef>
+          <a:fontRef idx="minor">
+            <a:schemeClr val="lt1"/>
+          </a:fontRef>
+        </p:style>
+        <p:txBody>
+          <a:bodyPr rtlCol="0" anchor="ctr"/>
+          <a:lstStyle/>
+          <a:p>
+            <a:pPr algn="ctr"/>
+          </a:p>
+        </p:txBody>
+      </p:sp>
+      <p:sp>
+        <p:nvSpPr>
+          <p:cNvPr id="5" name="TextBox 4"/>
+          <p:cNvSpPr txBox="1"/>
+          <p:nvPr/>
+        </p:nvSpPr>
+        <p:spPr>
+          <a:xfrm>
+            <a:off x="822960" y="1234440"/>
+            <a:ext cx="10515600" cy="1097280"/>
+          </a:xfrm>
+          <a:prstGeom prst="rect">
+            <a:avLst/>
+          </a:prstGeom>
+          <a:noFill/>
+        </p:spPr>
+        <p:txBody>
+          <a:bodyPr wrap="square">
+            <a:spAutoFit/>
+          </a:bodyPr>
+          <a:lstStyle/>
+          <a:p>
+            <a:r>
+              <a:rPr sz="3400" b="1" i="0">
+                <a:solidFill>
+                  <a:srgbClr val="FFFFFF"/>
+                </a:solidFill>
+                <a:latin typeface="Montserrat"/>
+              </a:rPr>
+              <a:t>Ya sabes diseñar la salida de humos</a:t>
+            </a:r>
+          </a:p>
+        </p:txBody>
+      </p:sp>
+      <p:sp>
+        <p:nvSpPr>
+          <p:cNvPr id="6" name="TextBox 5"/>
+          <p:cNvSpPr txBox="1"/>
+          <p:nvPr/>
+        </p:nvSpPr>
+        <p:spPr>
+          <a:xfrm>
+            <a:off x="822960" y="2606040"/>
+            <a:ext cx="10515600" cy="2743200"/>
+          </a:xfrm>
+          <a:prstGeom prst="rect">
+            <a:avLst/>
+          </a:prstGeom>
+          <a:noFill/>
+        </p:spPr>
+        <p:txBody>
+          <a:bodyPr wrap="square">
+            <a:spAutoFit/>
+          </a:bodyPr>
+          <a:lstStyle/>
+          <a:p>
+            <a:pPr>
+              <a:spcAft>
+                <a:spcPts val="1200"/>
+              </a:spcAft>
+            </a:pPr>
+            <a:r>
+              <a:rPr sz="2000" b="1" i="0">
+                <a:solidFill>
+                  <a:srgbClr val="F4A24C"/>
+                </a:solidFill>
+                <a:latin typeface="Montserrat"/>
+              </a:rPr>
+              <a:t>✓  </a:t>
+            </a:r>
+            <a:r>
+              <a:rPr sz="1900" b="0" i="0">
+                <a:solidFill>
+                  <a:srgbClr val="FFFFFF"/>
+                </a:solidFill>
+                <a:latin typeface="Montserrat"/>
+              </a:rPr>
+              <a:t>ITC-ICG 07 manda: diseño, ejecución y uso</a:t>
+            </a:r>
+          </a:p>
+          <a:p>
+            <a:pPr>
+              <a:spcAft>
+                <a:spcPts val="1200"/>
+              </a:spcAft>
+            </a:pPr>
+            <a:r>
+              <a:rPr sz="2000" b="1" i="0">
+                <a:solidFill>
+                  <a:srgbClr val="F4A24C"/>
+                </a:solidFill>
+                <a:latin typeface="Montserrat"/>
+              </a:rPr>
+              <a:t>✓  </a:t>
+            </a:r>
+            <a:r>
+              <a:rPr sz="1900" b="0" i="0">
+                <a:solidFill>
+                  <a:srgbClr val="FFFFFF"/>
+                </a:solidFill>
+                <a:latin typeface="Montserrat"/>
+              </a:rPr>
+              <a:t>Humos por cubierta; fachada solo ≤ 70 y 24,4 kW</a:t>
+            </a:r>
+          </a:p>
+          <a:p>
+            <a:pPr>
+              <a:spcAft>
+                <a:spcPts val="1200"/>
+              </a:spcAft>
+            </a:pPr>
+            <a:r>
+              <a:rPr sz="2000" b="1" i="0">
+                <a:solidFill>
+                  <a:srgbClr val="F4A24C"/>
+                </a:solidFill>
+                <a:latin typeface="Montserrat"/>
+              </a:rPr>
+              <a:t>✓  </a:t>
+            </a:r>
+            <a:r>
+              <a:rPr sz="1900" b="0" i="0">
+                <a:solidFill>
+                  <a:srgbClr val="FFFFFF"/>
+                </a:solidFill>
+                <a:latin typeface="Montserrat"/>
+              </a:rPr>
+              <a:t>La presión decide la norma: 5 bar, la raya</a:t>
+            </a:r>
+          </a:p>
+          <a:p>
+            <a:pPr>
+              <a:spcAft>
+                <a:spcPts val="1200"/>
+              </a:spcAft>
+            </a:pPr>
+            <a:r>
+              <a:rPr sz="2000" b="1" i="0">
+                <a:solidFill>
+                  <a:srgbClr val="F4A24C"/>
+                </a:solidFill>
+                <a:latin typeface="Montserrat"/>
+              </a:rPr>
+              <a:t>✓  </a:t>
+            </a:r>
+            <a:r>
+              <a:rPr sz="1900" b="0" i="0">
+                <a:solidFill>
+                  <a:srgbClr val="FFFFFF"/>
+                </a:solidFill>
+                <a:latin typeface="Montserrat"/>
+              </a:rPr>
+              <a:t>Enterrado y grandes potencias, reglas propias</a:t>
+            </a:r>
+          </a:p>
+        </p:txBody>
+      </p:sp>
+      <p:sp>
+        <p:nvSpPr>
+          <p:cNvPr id="7" name="Rounded Rectangle 6"/>
+          <p:cNvSpPr/>
+          <p:nvPr/>
+        </p:nvSpPr>
+        <p:spPr>
+          <a:xfrm>
+            <a:off x="822960" y="5532120"/>
+            <a:ext cx="10515600" cy="822960"/>
+          </a:xfrm>
+          <a:prstGeom prst="roundRect">
+            <a:avLst/>
+          </a:prstGeom>
+          <a:solidFill>
+            <a:srgbClr val="E8801A"/>
+          </a:solidFill>
+          <a:ln>
+            <a:noFill/>
+          </a:ln>
+          <a:effectLst/>
+        </p:spPr>
+        <p:style>
+          <a:lnRef idx="1">
+            <a:schemeClr val="accent1"/>
+          </a:lnRef>
+          <a:fillRef idx="3">
+            <a:schemeClr val="accent1"/>
+          </a:fillRef>
+          <a:effectRef idx="2">
+            <a:schemeClr val="accent1"/>
+          </a:effectRef>
+          <a:fontRef idx="minor">
+            <a:schemeClr val="lt1"/>
+          </a:fontRef>
+        </p:style>
+        <p:txBody>
+          <a:bodyPr rtlCol="0" anchor="ctr"/>
+          <a:lstStyle/>
+          <a:p>
+            <a:pPr algn="ctr"/>
+          </a:p>
+        </p:txBody>
+      </p:sp>
+      <p:sp>
+        <p:nvSpPr>
+          <p:cNvPr id="8" name="TextBox 7"/>
+          <p:cNvSpPr txBox="1"/>
+          <p:nvPr/>
+        </p:nvSpPr>
+        <p:spPr>
+          <a:xfrm>
+            <a:off x="1051560" y="5623560"/>
+            <a:ext cx="10058400" cy="640080"/>
+          </a:xfrm>
+          <a:prstGeom prst="rect">
+            <a:avLst/>
+          </a:prstGeom>
+          <a:noFill/>
+        </p:spPr>
+        <p:txBody>
+          <a:bodyPr wrap="square">
+            <a:spAutoFit/>
+          </a:bodyPr>
+          <a:lstStyle/>
+          <a:p>
+            <a:r>
+              <a:rPr sz="1500" b="1" i="1">
+                <a:solidFill>
+                  <a:srgbClr val="1E2761"/>
+                </a:solidFill>
+                <a:latin typeface="Montserrat"/>
+              </a:rPr>
+              <a:t>Con esto ya colocas cada norma en su sitio. Vamos a por los papeles y la puesta en servicio.</a:t>
+            </a:r>
+          </a:p>
+        </p:txBody>
+      </p:sp>
+    </p:spTree>
+  </p:cSld>
+  <p:clrMapOvr>
+    <a:masterClrMapping/>
+  </p:clrMapOvr>
+  <mc:AlternateContent xmlns:mc="http://schemas.openxmlformats.org/markup-compatibility/2006">
+    <mc:Choice xmlns:p14="http://schemas.microsoft.com/office/powerpoint/2010/main" Requires="p14">
+      <p:transition spd="med" p14:dur="700">
+        <p14:cube dir="l"/>
+      </p:transition>
+    </mc:Choice>
+    <mc:Fallback>
+      <p:transition spd="med">
+        <p:push dir="l"/>
+      </p:transition>
+    </mc:Fallback>
+  </mc:AlternateContent>
 </p:sld>
 </file>
 
@@ -9018,7 +14795,7 @@
                 </a:solidFill>
                 <a:latin typeface="Montserrat"/>
               </a:rPr>
-              <a:t>003 / 017</a:t>
+              <a:t>003 / 025</a:t>
             </a:r>
           </a:p>
         </p:txBody>
@@ -9127,7 +14904,7 @@
       </p:sp>
       <p:sp>
         <p:nvSpPr>
-          <p:cNvPr id="7" name="Rounded Rectangle 6"/>
+          <p:cNvPr id="7" name="Rectangle 6"/>
           <p:cNvSpPr/>
           <p:nvPr/>
         </p:nvSpPr>
@@ -9136,7 +14913,7 @@
             <a:off x="868680" y="1673352"/>
             <a:ext cx="2011680" cy="73152"/>
           </a:xfrm>
-          <a:prstGeom prst="roundRect">
+          <a:prstGeom prst="rect">
             <a:avLst/>
           </a:prstGeom>
           <a:solidFill>
@@ -9247,6 +15024,18 @@
   <p:clrMapOvr>
     <a:masterClrMapping/>
   </p:clrMapOvr>
+  <mc:AlternateContent xmlns:mc="http://schemas.openxmlformats.org/markup-compatibility/2006">
+    <mc:Choice xmlns:p14="http://schemas.microsoft.com/office/powerpoint/2010/main" Requires="p14">
+      <p:transition spd="med" p14:dur="700">
+        <p14:cube dir="l"/>
+      </p:transition>
+    </mc:Choice>
+    <mc:Fallback>
+      <p:transition spd="med">
+        <p:push dir="l"/>
+      </p:transition>
+    </mc:Fallback>
+  </mc:AlternateContent>
 </p:sld>
 </file>
 
@@ -9334,7 +15123,7 @@
                 </a:solidFill>
                 <a:latin typeface="Montserrat"/>
               </a:rPr>
-              <a:t>004 / 017</a:t>
+              <a:t>004 / 025</a:t>
             </a:r>
           </a:p>
         </p:txBody>
@@ -9443,7 +15232,7 @@
       </p:sp>
       <p:sp>
         <p:nvSpPr>
-          <p:cNvPr id="7" name="Rounded Rectangle 6"/>
+          <p:cNvPr id="7" name="Rectangle 6"/>
           <p:cNvSpPr/>
           <p:nvPr/>
         </p:nvSpPr>
@@ -9452,7 +15241,7 @@
             <a:off x="868680" y="1627632"/>
             <a:ext cx="2011680" cy="73152"/>
           </a:xfrm>
-          <a:prstGeom prst="roundRect">
+          <a:prstGeom prst="rect">
             <a:avLst/>
           </a:prstGeom>
           <a:solidFill>
@@ -9494,7 +15283,7 @@
         <p:spPr>
           <a:xfrm>
             <a:off x="822960" y="1965960"/>
-            <a:ext cx="4983480" cy="4206240"/>
+            <a:ext cx="5029200" cy="4206240"/>
           </a:xfrm>
           <a:prstGeom prst="rect">
             <a:avLst/>
@@ -9616,8 +15405,8 @@
         </p:nvSpPr>
         <p:spPr>
           <a:xfrm>
-            <a:off x="5806440" y="1051560"/>
-            <a:ext cx="5298947" cy="4629150"/>
+            <a:off x="6080760" y="1965960"/>
+            <a:ext cx="5303520" cy="4572000"/>
           </a:xfrm>
           <a:prstGeom prst="roundRect">
             <a:avLst/>
@@ -9662,8 +15451,8 @@
         </p:nvSpPr>
         <p:spPr>
           <a:xfrm>
-            <a:off x="6080760" y="2726055"/>
-            <a:ext cx="4750307" cy="1280160"/>
+            <a:off x="6355080" y="3611880"/>
+            <a:ext cx="4754880" cy="1280160"/>
           </a:xfrm>
           <a:prstGeom prst="rect">
             <a:avLst/>
@@ -9684,7 +15473,7 @@
                 </a:solidFill>
                 <a:latin typeface="Montserrat"/>
               </a:rPr>
-              <a:t>IMAGEN REALISTA</a:t>
+              <a:t>IMAGEN</a:t>
             </a:r>
           </a:p>
           <a:p>
@@ -9706,6 +15495,18 @@
   <p:clrMapOvr>
     <a:masterClrMapping/>
   </p:clrMapOvr>
+  <mc:AlternateContent xmlns:mc="http://schemas.openxmlformats.org/markup-compatibility/2006">
+    <mc:Choice xmlns:p14="http://schemas.microsoft.com/office/powerpoint/2010/main" Requires="p14">
+      <p:transition spd="med" p14:dur="700">
+        <p14:cube dir="r"/>
+      </p:transition>
+    </mc:Choice>
+    <mc:Fallback>
+      <p:transition spd="med">
+        <p:push dir="r"/>
+      </p:transition>
+    </mc:Fallback>
+  </mc:AlternateContent>
 </p:sld>
 </file>
 
@@ -9793,7 +15594,7 @@
                 </a:solidFill>
                 <a:latin typeface="Montserrat"/>
               </a:rPr>
-              <a:t>005 / 017</a:t>
+              <a:t>005 / 025</a:t>
             </a:r>
           </a:p>
         </p:txBody>
@@ -9902,7 +15703,7 @@
       </p:sp>
       <p:sp>
         <p:nvSpPr>
-          <p:cNvPr id="7" name="Rounded Rectangle 6"/>
+          <p:cNvPr id="7" name="Rectangle 6"/>
           <p:cNvSpPr/>
           <p:nvPr/>
         </p:nvSpPr>
@@ -9911,7 +15712,7 @@
             <a:off x="868680" y="1627632"/>
             <a:ext cx="2011680" cy="73152"/>
           </a:xfrm>
-          <a:prstGeom prst="roundRect">
+          <a:prstGeom prst="rect">
             <a:avLst/>
           </a:prstGeom>
           <a:solidFill>
@@ -9952,8 +15753,8 @@
         </p:nvSpPr>
         <p:spPr>
           <a:xfrm>
-            <a:off x="822960" y="1965960"/>
-            <a:ext cx="4983480" cy="4206240"/>
+            <a:off x="6355080" y="1965960"/>
+            <a:ext cx="5029200" cy="4206240"/>
           </a:xfrm>
           <a:prstGeom prst="rect">
             <a:avLst/>
@@ -10075,8 +15876,8 @@
         </p:nvSpPr>
         <p:spPr>
           <a:xfrm>
-            <a:off x="5806440" y="1051560"/>
-            <a:ext cx="5298947" cy="4629150"/>
+            <a:off x="822960" y="1965960"/>
+            <a:ext cx="5303520" cy="4572000"/>
           </a:xfrm>
           <a:prstGeom prst="roundRect">
             <a:avLst/>
@@ -10121,8 +15922,8 @@
         </p:nvSpPr>
         <p:spPr>
           <a:xfrm>
-            <a:off x="6080760" y="2726055"/>
-            <a:ext cx="4750307" cy="1280160"/>
+            <a:off x="1097280" y="3611880"/>
+            <a:ext cx="4754880" cy="1280160"/>
           </a:xfrm>
           <a:prstGeom prst="rect">
             <a:avLst/>
@@ -10143,7 +15944,7 @@
                 </a:solidFill>
                 <a:latin typeface="Montserrat"/>
               </a:rPr>
-              <a:t>IMAGEN REALISTA</a:t>
+              <a:t>IMAGEN</a:t>
             </a:r>
           </a:p>
           <a:p>
@@ -10165,6 +15966,18 @@
   <p:clrMapOvr>
     <a:masterClrMapping/>
   </p:clrMapOvr>
+  <mc:AlternateContent xmlns:mc="http://schemas.openxmlformats.org/markup-compatibility/2006">
+    <mc:Choice xmlns:p14="http://schemas.microsoft.com/office/powerpoint/2010/main" Requires="p14">
+      <p:transition spd="med" p14:dur="700">
+        <p14:cube dir="l"/>
+      </p:transition>
+    </mc:Choice>
+    <mc:Fallback>
+      <p:transition spd="med">
+        <p:push dir="l"/>
+      </p:transition>
+    </mc:Fallback>
+  </mc:AlternateContent>
 </p:sld>
 </file>
 
@@ -10252,7 +16065,7 @@
                 </a:solidFill>
                 <a:latin typeface="Montserrat"/>
               </a:rPr>
-              <a:t>006 / 017</a:t>
+              <a:t>006 / 025</a:t>
             </a:r>
           </a:p>
         </p:txBody>
@@ -10361,7 +16174,7 @@
       </p:sp>
       <p:sp>
         <p:nvSpPr>
-          <p:cNvPr id="7" name="Rounded Rectangle 6"/>
+          <p:cNvPr id="7" name="Rectangle 6"/>
           <p:cNvSpPr/>
           <p:nvPr/>
         </p:nvSpPr>
@@ -10370,7 +16183,7 @@
             <a:off x="868680" y="1627632"/>
             <a:ext cx="2011680" cy="73152"/>
           </a:xfrm>
-          <a:prstGeom prst="roundRect">
+          <a:prstGeom prst="rect">
             <a:avLst/>
           </a:prstGeom>
           <a:solidFill>
@@ -10412,7 +16225,7 @@
         <p:spPr>
           <a:xfrm>
             <a:off x="822960" y="1965960"/>
-            <a:ext cx="4983480" cy="4206240"/>
+            <a:ext cx="5029200" cy="4206240"/>
           </a:xfrm>
           <a:prstGeom prst="rect">
             <a:avLst/>
@@ -10509,8 +16322,8 @@
         </p:nvSpPr>
         <p:spPr>
           <a:xfrm>
-            <a:off x="5806440" y="1051560"/>
-            <a:ext cx="5298947" cy="4629150"/>
+            <a:off x="6080760" y="1965960"/>
+            <a:ext cx="5303520" cy="4572000"/>
           </a:xfrm>
           <a:prstGeom prst="roundRect">
             <a:avLst/>
@@ -10555,8 +16368,8 @@
         </p:nvSpPr>
         <p:spPr>
           <a:xfrm>
-            <a:off x="6080760" y="2726055"/>
-            <a:ext cx="4750307" cy="1280160"/>
+            <a:off x="6355080" y="3611880"/>
+            <a:ext cx="4754880" cy="1280160"/>
           </a:xfrm>
           <a:prstGeom prst="rect">
             <a:avLst/>
@@ -10577,7 +16390,7 @@
                 </a:solidFill>
                 <a:latin typeface="Montserrat"/>
               </a:rPr>
-              <a:t>IMAGEN REALISTA</a:t>
+              <a:t>IMAGEN</a:t>
             </a:r>
           </a:p>
           <a:p>
@@ -10599,6 +16412,18 @@
   <p:clrMapOvr>
     <a:masterClrMapping/>
   </p:clrMapOvr>
+  <mc:AlternateContent xmlns:mc="http://schemas.openxmlformats.org/markup-compatibility/2006">
+    <mc:Choice xmlns:p14="http://schemas.microsoft.com/office/powerpoint/2010/main" Requires="p14">
+      <p:transition spd="med" p14:dur="700">
+        <p14:cube dir="r"/>
+      </p:transition>
+    </mc:Choice>
+    <mc:Fallback>
+      <p:transition spd="med">
+        <p:push dir="r"/>
+      </p:transition>
+    </mc:Fallback>
+  </mc:AlternateContent>
 </p:sld>
 </file>
 
@@ -10686,7 +16511,7 @@
                 </a:solidFill>
                 <a:latin typeface="Montserrat"/>
               </a:rPr>
-              <a:t>007 / 017</a:t>
+              <a:t>007 / 025</a:t>
             </a:r>
           </a:p>
         </p:txBody>
@@ -10795,7 +16620,7 @@
       </p:sp>
       <p:sp>
         <p:nvSpPr>
-          <p:cNvPr id="7" name="Rounded Rectangle 6"/>
+          <p:cNvPr id="7" name="Rectangle 6"/>
           <p:cNvSpPr/>
           <p:nvPr/>
         </p:nvSpPr>
@@ -10804,7 +16629,7 @@
             <a:off x="868680" y="1627632"/>
             <a:ext cx="2011680" cy="73152"/>
           </a:xfrm>
-          <a:prstGeom prst="roundRect">
+          <a:prstGeom prst="rect">
             <a:avLst/>
           </a:prstGeom>
           <a:solidFill>
@@ -10845,8 +16670,8 @@
         </p:nvSpPr>
         <p:spPr>
           <a:xfrm>
-            <a:off x="822960" y="1965960"/>
-            <a:ext cx="4983480" cy="4206240"/>
+            <a:off x="6355080" y="1965960"/>
+            <a:ext cx="5029200" cy="4206240"/>
           </a:xfrm>
           <a:prstGeom prst="rect">
             <a:avLst/>
@@ -10943,8 +16768,8 @@
         </p:nvSpPr>
         <p:spPr>
           <a:xfrm>
-            <a:off x="5806440" y="1051560"/>
-            <a:ext cx="5298947" cy="4629150"/>
+            <a:off x="822960" y="1965960"/>
+            <a:ext cx="5303520" cy="4572000"/>
           </a:xfrm>
           <a:prstGeom prst="roundRect">
             <a:avLst/>
@@ -10989,8 +16814,8 @@
         </p:nvSpPr>
         <p:spPr>
           <a:xfrm>
-            <a:off x="6080760" y="2726055"/>
-            <a:ext cx="4750307" cy="1280160"/>
+            <a:off x="1097280" y="3611880"/>
+            <a:ext cx="4754880" cy="1280160"/>
           </a:xfrm>
           <a:prstGeom prst="rect">
             <a:avLst/>
@@ -11011,7 +16836,7 @@
                 </a:solidFill>
                 <a:latin typeface="Montserrat"/>
               </a:rPr>
-              <a:t>IMAGEN REALISTA</a:t>
+              <a:t>IMAGEN</a:t>
             </a:r>
           </a:p>
           <a:p>
@@ -11033,6 +16858,18 @@
   <p:clrMapOvr>
     <a:masterClrMapping/>
   </p:clrMapOvr>
+  <mc:AlternateContent xmlns:mc="http://schemas.openxmlformats.org/markup-compatibility/2006">
+    <mc:Choice xmlns:p14="http://schemas.microsoft.com/office/powerpoint/2010/main" Requires="p14">
+      <p:transition spd="med" p14:dur="700">
+        <p14:cube dir="l"/>
+      </p:transition>
+    </mc:Choice>
+    <mc:Fallback>
+      <p:transition spd="med">
+        <p:push dir="l"/>
+      </p:transition>
+    </mc:Fallback>
+  </mc:AlternateContent>
 </p:sld>
 </file>
 
@@ -11120,7 +16957,7 @@
                 </a:solidFill>
                 <a:latin typeface="Montserrat"/>
               </a:rPr>
-              <a:t>008 / 017</a:t>
+              <a:t>008 / 025</a:t>
             </a:r>
           </a:p>
         </p:txBody>
@@ -11229,7 +17066,7 @@
       </p:sp>
       <p:sp>
         <p:nvSpPr>
-          <p:cNvPr id="7" name="Rounded Rectangle 6"/>
+          <p:cNvPr id="7" name="Rectangle 6"/>
           <p:cNvSpPr/>
           <p:nvPr/>
         </p:nvSpPr>
@@ -11238,7 +17075,7 @@
             <a:off x="868680" y="1627632"/>
             <a:ext cx="2011680" cy="73152"/>
           </a:xfrm>
-          <a:prstGeom prst="roundRect">
+          <a:prstGeom prst="rect">
             <a:avLst/>
           </a:prstGeom>
           <a:solidFill>
@@ -11280,7 +17117,7 @@
         <p:spPr>
           <a:xfrm>
             <a:off x="822960" y="1965960"/>
-            <a:ext cx="4983480" cy="4206240"/>
+            <a:ext cx="5029200" cy="4206240"/>
           </a:xfrm>
           <a:prstGeom prst="rect">
             <a:avLst/>
@@ -11377,8 +17214,8 @@
         </p:nvSpPr>
         <p:spPr>
           <a:xfrm>
-            <a:off x="5806440" y="1051560"/>
-            <a:ext cx="5298947" cy="4629150"/>
+            <a:off x="6080760" y="1965960"/>
+            <a:ext cx="5303520" cy="4572000"/>
           </a:xfrm>
           <a:prstGeom prst="roundRect">
             <a:avLst/>
@@ -11423,8 +17260,8 @@
         </p:nvSpPr>
         <p:spPr>
           <a:xfrm>
-            <a:off x="6080760" y="2726055"/>
-            <a:ext cx="4750307" cy="1280160"/>
+            <a:off x="6355080" y="3611880"/>
+            <a:ext cx="4754880" cy="1280160"/>
           </a:xfrm>
           <a:prstGeom prst="rect">
             <a:avLst/>
@@ -11445,7 +17282,7 @@
                 </a:solidFill>
                 <a:latin typeface="Montserrat"/>
               </a:rPr>
-              <a:t>IMAGEN REALISTA</a:t>
+              <a:t>IMAGEN</a:t>
             </a:r>
           </a:p>
           <a:p>
@@ -11467,6 +17304,18 @@
   <p:clrMapOvr>
     <a:masterClrMapping/>
   </p:clrMapOvr>
+  <mc:AlternateContent xmlns:mc="http://schemas.openxmlformats.org/markup-compatibility/2006">
+    <mc:Choice xmlns:p14="http://schemas.microsoft.com/office/powerpoint/2010/main" Requires="p14">
+      <p:transition spd="med" p14:dur="700">
+        <p14:cube dir="r"/>
+      </p:transition>
+    </mc:Choice>
+    <mc:Fallback>
+      <p:transition spd="med">
+        <p:push dir="r"/>
+      </p:transition>
+    </mc:Fallback>
+  </mc:AlternateContent>
 </p:sld>
 </file>
 
@@ -11554,7 +17403,7 @@
                 </a:solidFill>
                 <a:latin typeface="Montserrat"/>
               </a:rPr>
-              <a:t>009 / 017</a:t>
+              <a:t>009 / 025</a:t>
             </a:r>
           </a:p>
         </p:txBody>
@@ -11663,7 +17512,7 @@
       </p:sp>
       <p:sp>
         <p:nvSpPr>
-          <p:cNvPr id="7" name="Rounded Rectangle 6"/>
+          <p:cNvPr id="7" name="Rectangle 6"/>
           <p:cNvSpPr/>
           <p:nvPr/>
         </p:nvSpPr>
@@ -11672,7 +17521,7 @@
             <a:off x="868680" y="1627632"/>
             <a:ext cx="2011680" cy="73152"/>
           </a:xfrm>
-          <a:prstGeom prst="roundRect">
+          <a:prstGeom prst="rect">
             <a:avLst/>
           </a:prstGeom>
           <a:solidFill>
@@ -11713,8 +17562,8 @@
         </p:nvSpPr>
         <p:spPr>
           <a:xfrm>
-            <a:off x="822960" y="1965960"/>
-            <a:ext cx="4983480" cy="4206240"/>
+            <a:off x="6355080" y="1965960"/>
+            <a:ext cx="5029200" cy="4206240"/>
           </a:xfrm>
           <a:prstGeom prst="rect">
             <a:avLst/>
@@ -11811,8 +17660,8 @@
         </p:nvSpPr>
         <p:spPr>
           <a:xfrm>
-            <a:off x="5806440" y="1051560"/>
-            <a:ext cx="5298947" cy="4629150"/>
+            <a:off x="822960" y="1965960"/>
+            <a:ext cx="5303520" cy="4572000"/>
           </a:xfrm>
           <a:prstGeom prst="roundRect">
             <a:avLst/>
@@ -11857,8 +17706,8 @@
         </p:nvSpPr>
         <p:spPr>
           <a:xfrm>
-            <a:off x="6080760" y="2726055"/>
-            <a:ext cx="4750307" cy="1280160"/>
+            <a:off x="1097280" y="3611880"/>
+            <a:ext cx="4754880" cy="1280160"/>
           </a:xfrm>
           <a:prstGeom prst="rect">
             <a:avLst/>
@@ -11879,7 +17728,7 @@
                 </a:solidFill>
                 <a:latin typeface="Montserrat"/>
               </a:rPr>
-              <a:t>IMAGEN REALISTA</a:t>
+              <a:t>IMAGEN</a:t>
             </a:r>
           </a:p>
           <a:p>
@@ -11901,6 +17750,18 @@
   <p:clrMapOvr>
     <a:masterClrMapping/>
   </p:clrMapOvr>
+  <mc:AlternateContent xmlns:mc="http://schemas.openxmlformats.org/markup-compatibility/2006">
+    <mc:Choice xmlns:p14="http://schemas.microsoft.com/office/powerpoint/2010/main" Requires="p14">
+      <p:transition spd="med" p14:dur="700">
+        <p14:cube dir="l"/>
+      </p:transition>
+    </mc:Choice>
+    <mc:Fallback>
+      <p:transition spd="med">
+        <p:push dir="l"/>
+      </p:transition>
+    </mc:Fallback>
+  </mc:AlternateContent>
 </p:sld>
 </file>
 

--- a/Curso Gas B/04 - ITC-ICG 07 - Instalaciones receptoras de combustibles gaseosos/04 - ITC-ICG 07 - Instalaciones receptoras de combustibles gaseosos - Vídeo 1.pptx
+++ b/Curso Gas B/04 - ITC-ICG 07 - Instalaciones receptoras de combustibles gaseosos/04 - ITC-ICG 07 - Instalaciones receptoras de combustibles gaseosos - Vídeo 1.pptx
@@ -601,12 +601,12 @@
           <a:lstStyle/>
           <a:p>
             <a:r>
-              <a:t>N1: Aquí va una de las cifras estrella del vídeo. Un aparato estanco o de tiro forzado quiere sacar los humos por la pared en lugar de por el tejado. ¿Hasta qué potencia se lo permiten?</a:t>
-            </a:r>
-          </a:p>
-          <a:p>
-            <a:r>
-              <a:t>N2: Piensa que el estanco y el de tiro forzado son los que mejor controlan sus humos, así que el reglamento les da más margen que al tiro natural. Una de las opciones es la del tiro natural, no la mezcles.</a:t>
+              <a:t>N1: Vamos con una de las cifras estrella del vídeo. Escucha bien la pregunta: ¿hasta qué potencia puede un aparato estanco o de tiro forzado evacuar los humos a fachada? Y estas son las cuatro opciones. Opción A, veinticuatro con cuatro kilovatios. Opción B, setenta kilovatios. Opción C, dos mil kilovatios. Opción D, cinco kilovatios. Párate un momento y piénsalo antes de que te demos la solución.</a:t>
+            </a:r>
+          </a:p>
+          <a:p>
+            <a:r>
+              <a:t>N2: Una pista: el estanco y el de tiro forzado son los que mejor controlan sus humos, así que el reglamento les da más margen que al tiro natural. Una de esas cifras es justo la del tiro natural de solo agua caliente; no la mezcles.</a:t>
             </a:r>
           </a:p>
         </p:txBody>
@@ -676,12 +676,17 @@
           <a:lstStyle/>
           <a:p>
             <a:r>
-              <a:t>N1: ¿Por qué setenta y no otra?</a:t>
-            </a:r>
-          </a:p>
-          <a:p>
-            <a:r>
-              <a:t>N2: Porque la salida directa a fachada se reserva a aparatos estancos o de tiro forzado de potencia igual o menor de setenta kilovatios. La cifra de veinticuatro con cuatro es la trampa: esa es solo para el tiro natural que hace únicamente agua caliente. El truco para no fallar: más control sobre los humos, más potencia permitida; setenta para los seguros, veinticuatro con cuatro para el primitivo.</a:t>
+              <a:t>N1: ¿Ya lo tienes? Venga, lo resolvemos.</a:t>
+            </a:r>
+          </a:p>
+          <a:p>
+            <a:r>
+              <a:t>N2: La respuesta correcta es la opción B: setenta kilovatios. La salida directa a fachada se reserva a los aparatos estancos o de tiro forzado de potencia igual o menor de setenta kilovatios, porque son los que mejor controlan por dónde echan los humos. La opción A, veinticuatro con cuatro, es la trampa: esa cifra es solo para el tiro natural que hace únicamente agua caliente. Y las de dos mil y cinco kilovatios no pintan nada aquí. El truco para no fallar: más control sobre los humos, más potencia permitida; setenta para los seguros, veinticuatro con cuatro para el primitivo.</a:t>
+            </a:r>
+          </a:p>
+          <a:p>
+            <a:r>
+              <a:t>N1: Setenta para estanco y tiro forzado. Grabado.</a:t>
             </a:r>
           </a:p>
         </p:txBody>
@@ -1126,12 +1131,12 @@
           <a:lstStyle/>
           <a:p>
             <a:r>
-              <a:t>N1: Tres equipos de treinta kilovatios cada uno, funcionando a la vez. ¿Hay que hacer algo especial?</a:t>
-            </a:r>
-          </a:p>
-          <a:p>
-            <a:r>
-              <a:t>N2: La palabra clave es conjunta. Fíjate en si las potencias se miran por separado o se suman. Ahí está el truco de la pregunta.</a:t>
+              <a:t>N1: Atento a este caso práctico. La pregunta dice: tres equipos de gas de treinta kilovatios trabajan juntos, ¿qué exige la norma? Escucha las cuatro opciones. Opción A, nada especial, porque cada uno baja de setenta kilovatios. Opción B, sala de máquinas conforme a la UNE sesenta mil seiscientos uno. Opción C, salida obligatoria a fachada. Opción D, proyecto según la UNE sesenta mil seiscientos veinte. Tómate un segundo y decide.</a:t>
+            </a:r>
+          </a:p>
+          <a:p>
+            <a:r>
+              <a:t>N2: La palabra clave es una que ya salió: conjunta. Pregúntate si las potencias se miran por separado o se suman. Ahí está todo el truco.</a:t>
             </a:r>
           </a:p>
         </p:txBody>
@@ -1201,12 +1206,17 @@
           <a:lstStyle/>
           <a:p>
             <a:r>
-              <a:t>N1: ¿Por qué sala de máquinas?</a:t>
-            </a:r>
-          </a:p>
-          <a:p>
-            <a:r>
-              <a:t>N2: Porque la potencia útil nominal es conjunta, o sea que se suma: treinta más treinta más treinta son noventa kilovatios. Al pasar de setenta, deja de ser cosa doméstica y exige sala de máquinas con la UNE sesenta mil seiscientos uno. La trampa era mirar cada equipo por separado y ver treinta; pero si trabajan juntos, mandan los noventa.</a:t>
+              <a:t>N1: ¿Ya lo has pensado?</a:t>
+            </a:r>
+          </a:p>
+          <a:p>
+            <a:r>
+              <a:t>N2: La respuesta correcta es la opción B: sala de máquinas conforme a la UNE sesenta mil seiscientos uno. La potencia útil nominal es conjunta, o sea que se suma: treinta más treinta más treinta son noventa kilovatios. Al pasar de setenta, deja de ser cosa doméstica y exige sala de máquinas con la sesenta mil seiscientos uno. La opción A es la trampa: miraba cada equipo por separado y veía treinta; pero si trabajan juntos, mandan los noventa. Truco: sesenta mil seiscientos uno, salas de calderas.</a:t>
+            </a:r>
+          </a:p>
+          <a:p>
+            <a:r>
+              <a:t>N1: Se suman las potencias. Nunca por separado.</a:t>
             </a:r>
           </a:p>
         </p:txBody>
@@ -1501,12 +1511,12 @@
           <a:lstStyle/>
           <a:p>
             <a:r>
-              <a:t>N1: Seis bar, por encima de la raya. ¿Qué norma toca?</a:t>
-            </a:r>
-          </a:p>
-          <a:p>
-            <a:r>
-              <a:t>N2: Acuérdate de la frontera de los cinco bar que acabamos de ver en la tabla. Dos de las opciones son normas que ni siquiera van de esto; céntrate en el par de la presión.</a:t>
+              <a:t>N1: Una de presiones. La pregunta: una instalación receptora trabaja a seis bar, ¿qué norma UNE le corresponde? Y las opciones. Opción A, la UNE sesenta mil seiscientos setenta. Opción B, la UNE sesenta mil seiscientos uno. Opción C, la UNE sesenta mil seiscientos veinte. Opción D, la UNE sesenta mil trescientos diez. Piénsalo antes de la solución.</a:t>
+            </a:r>
+          </a:p>
+          <a:p>
+            <a:r>
+              <a:t>N2: Acuérdate de la frontera de los cinco bar que acabamos de ver en la tabla. Y fíjate: dos de esas opciones ni siquiera van de esto; céntrate en el par de la presión.</a:t>
             </a:r>
           </a:p>
         </p:txBody>
@@ -1576,12 +1586,17 @@
           <a:lstStyle/>
           <a:p>
             <a:r>
-              <a:t>N1: ¿Por qué la seiscientos veinte?</a:t>
-            </a:r>
-          </a:p>
-          <a:p>
-            <a:r>
-              <a:t>N2: Porque seis bar es superior a cinco, y por encima de cinco bar manda la UNE sesenta mil seiscientos veinte, la de alta presión. La seiscientos setenta se habría quedado corta, es para hasta cinco bar. Las otras dos, la seiscientos uno de salas de máquinas y la trescientos diez de acometidas, son de otra cosa. Truco: pasas de cinco, subes de norma.</a:t>
+              <a:t>N1: Venga, la resolvemos.</a:t>
+            </a:r>
+          </a:p>
+          <a:p>
+            <a:r>
+              <a:t>N2: La respuesta correcta es la opción C: la UNE sesenta mil seiscientos veinte. Seis bar es superior a cinco, y por encima de cinco bar manda la seiscientos veinte, la de alta presión. La opción A, la seiscientos setenta, se habría quedado corta, porque esa es para hasta cinco bar. Y las otras dos son de otra cosa: la seiscientos uno es de salas de máquinas y la trescientos diez de acometidas. Truco: pasas de cinco, subes de norma.</a:t>
+            </a:r>
+          </a:p>
+          <a:p>
+            <a:r>
+              <a:t>N1: Más de cinco bar, seiscientos veinte.</a:t>
             </a:r>
           </a:p>
         </p:txBody>
